--- a/문서/논문_포스터ver.pptx
+++ b/문서/논문_포스터ver.pptx
@@ -4,8 +4,11 @@
   <p:sldMasterIdLst>
     <p:sldMasterId id="2147483660" r:id="rId1"/>
   </p:sldMasterIdLst>
+  <p:notesMasterIdLst>
+    <p:notesMasterId r:id="rId3"/>
+  </p:notesMasterIdLst>
   <p:sldIdLst>
-    <p:sldId id="256" r:id="rId2"/>
+    <p:sldId id="257" r:id="rId2"/>
   </p:sldIdLst>
   <p:sldSz cx="32399288" cy="43200638"/>
   <p:notesSz cx="6858000" cy="9144000"/>
@@ -104,7 +107,1353 @@
       </a:defRPr>
     </a:lvl9pPr>
   </p:defaultTextStyle>
+  <p:extLst>
+    <p:ext uri="{EFAFB233-063F-42B5-8137-9DF3F51BA10A}">
+      <p15:sldGuideLst xmlns:p15="http://schemas.microsoft.com/office/powerpoint/2012/main"/>
+    </p:ext>
+  </p:extLst>
 </p:presentation>
+</file>
+
+<file path=ppt/charts/chart1.xml><?xml version="1.0" encoding="utf-8"?>
+<c:chartSpace xmlns:c="http://schemas.openxmlformats.org/drawingml/2006/chart" xmlns:a="http://schemas.openxmlformats.org/drawingml/2006/main" xmlns:r="http://schemas.openxmlformats.org/officeDocument/2006/relationships" xmlns:c16r2="http://schemas.microsoft.com/office/drawing/2015/06/chart">
+  <c:date1904 val="0"/>
+  <c:lang val="ko-KR"/>
+  <c:roundedCorners val="0"/>
+  <mc:AlternateContent xmlns:mc="http://schemas.openxmlformats.org/markup-compatibility/2006">
+    <mc:Choice xmlns:c14="http://schemas.microsoft.com/office/drawing/2007/8/2/chart" Requires="c14">
+      <c14:style val="102"/>
+    </mc:Choice>
+    <mc:Fallback>
+      <c:style val="2"/>
+    </mc:Fallback>
+  </mc:AlternateContent>
+  <c:chart>
+    <c:title>
+      <c:tx>
+        <c:rich>
+          <a:bodyPr rot="0" spcFirstLastPara="1" vertOverflow="ellipsis" vert="horz" wrap="square" anchor="ctr" anchorCtr="1"/>
+          <a:lstStyle/>
+          <a:p>
+            <a:pPr>
+              <a:defRPr sz="2400" b="1" i="0" u="none" strike="noStrike" kern="1200" cap="all" spc="150" baseline="0">
+                <a:solidFill>
+                  <a:schemeClr val="tx1">
+                    <a:lumMod val="50000"/>
+                    <a:lumOff val="50000"/>
+                  </a:schemeClr>
+                </a:solidFill>
+                <a:latin typeface="+mn-lt"/>
+                <a:ea typeface="+mn-ea"/>
+                <a:cs typeface="+mn-cs"/>
+              </a:defRPr>
+            </a:pPr>
+            <a:r>
+              <a:rPr lang="ko-KR" sz="2400" dirty="0"/>
+              <a:t>구현 시간 비교</a:t>
+            </a:r>
+            <a:r>
+              <a:rPr lang="en-US" altLang="ko-KR" sz="2400" dirty="0"/>
+              <a:t> (Day)</a:t>
+            </a:r>
+            <a:endParaRPr lang="en-US" sz="2400" dirty="0"/>
+          </a:p>
+        </c:rich>
+      </c:tx>
+      <c:overlay val="0"/>
+      <c:spPr>
+        <a:noFill/>
+        <a:ln>
+          <a:noFill/>
+        </a:ln>
+        <a:effectLst/>
+      </c:spPr>
+      <c:txPr>
+        <a:bodyPr rot="0" spcFirstLastPara="1" vertOverflow="ellipsis" vert="horz" wrap="square" anchor="ctr" anchorCtr="1"/>
+        <a:lstStyle/>
+        <a:p>
+          <a:pPr>
+            <a:defRPr sz="2400" b="1" i="0" u="none" strike="noStrike" kern="1200" cap="all" spc="150" baseline="0">
+              <a:solidFill>
+                <a:schemeClr val="tx1">
+                  <a:lumMod val="50000"/>
+                  <a:lumOff val="50000"/>
+                </a:schemeClr>
+              </a:solidFill>
+              <a:latin typeface="+mn-lt"/>
+              <a:ea typeface="+mn-ea"/>
+              <a:cs typeface="+mn-cs"/>
+            </a:defRPr>
+          </a:pPr>
+          <a:endParaRPr lang="ko-KR"/>
+        </a:p>
+      </c:txPr>
+    </c:title>
+    <c:autoTitleDeleted val="0"/>
+    <c:plotArea>
+      <c:layout/>
+      <c:barChart>
+        <c:barDir val="bar"/>
+        <c:grouping val="clustered"/>
+        <c:varyColors val="0"/>
+        <c:ser>
+          <c:idx val="0"/>
+          <c:order val="0"/>
+          <c:tx>
+            <c:strRef>
+              <c:f>Sheet1!$B$1</c:f>
+              <c:strCache>
+                <c:ptCount val="1"/>
+                <c:pt idx="0">
+                  <c:v>Day</c:v>
+                </c:pt>
+              </c:strCache>
+            </c:strRef>
+          </c:tx>
+          <c:spPr>
+            <a:solidFill>
+              <a:srgbClr val="00B0F0"/>
+            </a:solidFill>
+            <a:ln>
+              <a:noFill/>
+            </a:ln>
+            <a:effectLst>
+              <a:innerShdw blurRad="114300">
+                <a:schemeClr val="accent1"/>
+              </a:innerShdw>
+            </a:effectLst>
+          </c:spPr>
+          <c:invertIfNegative val="0"/>
+          <c:dPt>
+            <c:idx val="0"/>
+            <c:invertIfNegative val="0"/>
+            <c:bubble3D val="0"/>
+            <c:spPr>
+              <a:solidFill>
+                <a:srgbClr val="0070C0"/>
+              </a:solidFill>
+              <a:ln>
+                <a:noFill/>
+              </a:ln>
+              <a:effectLst>
+                <a:innerShdw blurRad="114300">
+                  <a:schemeClr val="accent1"/>
+                </a:innerShdw>
+              </a:effectLst>
+            </c:spPr>
+            <c:extLst>
+              <c:ext xmlns:c16="http://schemas.microsoft.com/office/drawing/2014/chart" uri="{C3380CC4-5D6E-409C-BE32-E72D297353CC}">
+                <c16:uniqueId val="{00000004-1D97-460B-A0E3-E340AF71FC52}"/>
+              </c:ext>
+            </c:extLst>
+          </c:dPt>
+          <c:cat>
+            <c:strRef>
+              <c:f>Sheet1!$A$2:$A$3</c:f>
+              <c:strCache>
+                <c:ptCount val="2"/>
+                <c:pt idx="0">
+                  <c:v>기존</c:v>
+                </c:pt>
+                <c:pt idx="1">
+                  <c:v>LLM</c:v>
+                </c:pt>
+              </c:strCache>
+            </c:strRef>
+          </c:cat>
+          <c:val>
+            <c:numRef>
+              <c:f>Sheet1!$B$2:$B$3</c:f>
+              <c:numCache>
+                <c:formatCode>General</c:formatCode>
+                <c:ptCount val="2"/>
+                <c:pt idx="0">
+                  <c:v>10</c:v>
+                </c:pt>
+                <c:pt idx="1">
+                  <c:v>3</c:v>
+                </c:pt>
+              </c:numCache>
+            </c:numRef>
+          </c:val>
+          <c:extLst>
+            <c:ext xmlns:c16="http://schemas.microsoft.com/office/drawing/2014/chart" uri="{C3380CC4-5D6E-409C-BE32-E72D297353CC}">
+              <c16:uniqueId val="{00000000-1D97-460B-A0E3-E340AF71FC52}"/>
+            </c:ext>
+          </c:extLst>
+        </c:ser>
+        <c:dLbls>
+          <c:showLegendKey val="0"/>
+          <c:showVal val="0"/>
+          <c:showCatName val="0"/>
+          <c:showSerName val="0"/>
+          <c:showPercent val="0"/>
+          <c:showBubbleSize val="0"/>
+        </c:dLbls>
+        <c:gapWidth val="227"/>
+        <c:overlap val="-48"/>
+        <c:axId val="317151440"/>
+        <c:axId val="317149520"/>
+      </c:barChart>
+      <c:catAx>
+        <c:axId val="317151440"/>
+        <c:scaling>
+          <c:orientation val="minMax"/>
+        </c:scaling>
+        <c:delete val="0"/>
+        <c:axPos val="l"/>
+        <c:numFmt formatCode="General" sourceLinked="1"/>
+        <c:majorTickMark val="none"/>
+        <c:minorTickMark val="none"/>
+        <c:tickLblPos val="nextTo"/>
+        <c:spPr>
+          <a:noFill/>
+          <a:ln w="19050" cap="flat" cmpd="sng" algn="ctr">
+            <a:solidFill>
+              <a:schemeClr val="tx1">
+                <a:lumMod val="25000"/>
+                <a:lumOff val="75000"/>
+              </a:schemeClr>
+            </a:solidFill>
+            <a:round/>
+          </a:ln>
+          <a:effectLst/>
+        </c:spPr>
+        <c:txPr>
+          <a:bodyPr rot="-60000000" spcFirstLastPara="1" vertOverflow="ellipsis" vert="horz" wrap="square" anchor="ctr" anchorCtr="1"/>
+          <a:lstStyle/>
+          <a:p>
+            <a:pPr>
+              <a:defRPr sz="2800" b="0" i="0" u="none" strike="noStrike" kern="1200" baseline="0">
+                <a:solidFill>
+                  <a:schemeClr val="tx1">
+                    <a:lumMod val="65000"/>
+                    <a:lumOff val="35000"/>
+                  </a:schemeClr>
+                </a:solidFill>
+                <a:latin typeface="+mn-lt"/>
+                <a:ea typeface="+mn-ea"/>
+                <a:cs typeface="+mn-cs"/>
+              </a:defRPr>
+            </a:pPr>
+            <a:endParaRPr lang="ko-KR"/>
+          </a:p>
+        </c:txPr>
+        <c:crossAx val="317149520"/>
+        <c:crosses val="autoZero"/>
+        <c:auto val="1"/>
+        <c:lblAlgn val="ctr"/>
+        <c:lblOffset val="100"/>
+        <c:noMultiLvlLbl val="0"/>
+      </c:catAx>
+      <c:valAx>
+        <c:axId val="317149520"/>
+        <c:scaling>
+          <c:orientation val="minMax"/>
+          <c:max val="10"/>
+        </c:scaling>
+        <c:delete val="0"/>
+        <c:axPos val="b"/>
+        <c:numFmt formatCode="General" sourceLinked="1"/>
+        <c:majorTickMark val="none"/>
+        <c:minorTickMark val="none"/>
+        <c:tickLblPos val="nextTo"/>
+        <c:spPr>
+          <a:noFill/>
+          <a:ln>
+            <a:noFill/>
+          </a:ln>
+          <a:effectLst/>
+        </c:spPr>
+        <c:txPr>
+          <a:bodyPr rot="-60000000" spcFirstLastPara="1" vertOverflow="ellipsis" vert="horz" wrap="square" anchor="ctr" anchorCtr="1"/>
+          <a:lstStyle/>
+          <a:p>
+            <a:pPr>
+              <a:defRPr sz="2400" b="0" i="0" u="none" strike="noStrike" kern="1200" baseline="0">
+                <a:solidFill>
+                  <a:schemeClr val="tx1">
+                    <a:lumMod val="65000"/>
+                    <a:lumOff val="35000"/>
+                  </a:schemeClr>
+                </a:solidFill>
+                <a:latin typeface="+mn-lt"/>
+                <a:ea typeface="+mn-ea"/>
+                <a:cs typeface="+mn-cs"/>
+              </a:defRPr>
+            </a:pPr>
+            <a:endParaRPr lang="ko-KR"/>
+          </a:p>
+        </c:txPr>
+        <c:crossAx val="317151440"/>
+        <c:crosses val="autoZero"/>
+        <c:crossBetween val="between"/>
+      </c:valAx>
+      <c:spPr>
+        <a:solidFill>
+          <a:schemeClr val="bg1"/>
+        </a:solidFill>
+        <a:ln>
+          <a:noFill/>
+        </a:ln>
+        <a:effectLst/>
+      </c:spPr>
+    </c:plotArea>
+    <c:legend>
+      <c:legendPos val="t"/>
+      <c:overlay val="0"/>
+      <c:spPr>
+        <a:noFill/>
+        <a:ln>
+          <a:noFill/>
+        </a:ln>
+        <a:effectLst/>
+      </c:spPr>
+      <c:txPr>
+        <a:bodyPr rot="0" spcFirstLastPara="1" vertOverflow="ellipsis" vert="horz" wrap="square" anchor="ctr" anchorCtr="1"/>
+        <a:lstStyle/>
+        <a:p>
+          <a:pPr>
+            <a:defRPr sz="2400" b="0" i="0" u="none" strike="noStrike" kern="1200" baseline="0">
+              <a:solidFill>
+                <a:schemeClr val="tx1">
+                  <a:lumMod val="65000"/>
+                  <a:lumOff val="35000"/>
+                </a:schemeClr>
+              </a:solidFill>
+              <a:latin typeface="+mn-lt"/>
+              <a:ea typeface="+mn-ea"/>
+              <a:cs typeface="+mn-cs"/>
+            </a:defRPr>
+          </a:pPr>
+          <a:endParaRPr lang="ko-KR"/>
+        </a:p>
+      </c:txPr>
+    </c:legend>
+    <c:plotVisOnly val="1"/>
+    <c:dispBlanksAs val="gap"/>
+    <c:showDLblsOverMax val="0"/>
+    <c:extLst>
+      <c:ext xmlns:c16r3="http://schemas.microsoft.com/office/drawing/2017/03/chart" uri="{56B9EC1D-385E-4148-901F-78D8002777C0}">
+        <c16r3:dataDisplayOptions16>
+          <c16r3:dispNaAsBlank val="1"/>
+        </c16r3:dataDisplayOptions16>
+      </c:ext>
+    </c:extLst>
+  </c:chart>
+  <c:spPr>
+    <a:noFill/>
+    <a:ln>
+      <a:noFill/>
+    </a:ln>
+    <a:effectLst/>
+  </c:spPr>
+  <c:txPr>
+    <a:bodyPr/>
+    <a:lstStyle/>
+    <a:p>
+      <a:pPr>
+        <a:defRPr/>
+      </a:pPr>
+      <a:endParaRPr lang="ko-KR"/>
+    </a:p>
+  </c:txPr>
+  <c:externalData r:id="rId3">
+    <c:autoUpdate val="0"/>
+  </c:externalData>
+</c:chartSpace>
+</file>
+
+<file path=ppt/charts/colors1.xml><?xml version="1.0" encoding="utf-8"?>
+<cs:colorStyle xmlns:cs="http://schemas.microsoft.com/office/drawing/2012/chartStyle" xmlns:a="http://schemas.openxmlformats.org/drawingml/2006/main" meth="cycle" id="10">
+  <a:schemeClr val="accent1"/>
+  <a:schemeClr val="accent2"/>
+  <a:schemeClr val="accent3"/>
+  <a:schemeClr val="accent4"/>
+  <a:schemeClr val="accent5"/>
+  <a:schemeClr val="accent6"/>
+  <cs:variation/>
+  <cs:variation>
+    <a:lumMod val="60000"/>
+  </cs:variation>
+  <cs:variation>
+    <a:lumMod val="80000"/>
+    <a:lumOff val="20000"/>
+  </cs:variation>
+  <cs:variation>
+    <a:lumMod val="80000"/>
+  </cs:variation>
+  <cs:variation>
+    <a:lumMod val="60000"/>
+    <a:lumOff val="40000"/>
+  </cs:variation>
+  <cs:variation>
+    <a:lumMod val="50000"/>
+  </cs:variation>
+  <cs:variation>
+    <a:lumMod val="70000"/>
+    <a:lumOff val="30000"/>
+  </cs:variation>
+  <cs:variation>
+    <a:lumMod val="70000"/>
+  </cs:variation>
+  <cs:variation>
+    <a:lumMod val="50000"/>
+    <a:lumOff val="50000"/>
+  </cs:variation>
+</cs:colorStyle>
+</file>
+
+<file path=ppt/charts/style1.xml><?xml version="1.0" encoding="utf-8"?>
+<cs:chartStyle xmlns:cs="http://schemas.microsoft.com/office/drawing/2012/chartStyle" xmlns:a="http://schemas.openxmlformats.org/drawingml/2006/main" id="217">
+  <cs:axisTitle>
+    <cs:lnRef idx="0"/>
+    <cs:fillRef idx="0"/>
+    <cs:effectRef idx="0"/>
+    <cs:fontRef idx="minor">
+      <a:schemeClr val="tx1">
+        <a:lumMod val="65000"/>
+        <a:lumOff val="35000"/>
+      </a:schemeClr>
+    </cs:fontRef>
+    <cs:defRPr sz="1197" b="1" kern="1200"/>
+  </cs:axisTitle>
+  <cs:categoryAxis>
+    <cs:lnRef idx="0"/>
+    <cs:fillRef idx="0"/>
+    <cs:effectRef idx="0"/>
+    <cs:fontRef idx="minor">
+      <a:schemeClr val="tx1">
+        <a:lumMod val="65000"/>
+        <a:lumOff val="35000"/>
+      </a:schemeClr>
+    </cs:fontRef>
+    <cs:spPr>
+      <a:ln w="19050" cap="flat" cmpd="sng" algn="ctr">
+        <a:solidFill>
+          <a:schemeClr val="tx1">
+            <a:lumMod val="25000"/>
+            <a:lumOff val="75000"/>
+          </a:schemeClr>
+        </a:solidFill>
+        <a:round/>
+      </a:ln>
+    </cs:spPr>
+    <cs:defRPr sz="1197" kern="1200"/>
+  </cs:categoryAxis>
+  <cs:chartArea mods="allowNoFillOverride allowNoLineOverride">
+    <cs:lnRef idx="0"/>
+    <cs:fillRef idx="0"/>
+    <cs:effectRef idx="0"/>
+    <cs:fontRef idx="minor">
+      <a:schemeClr val="dk1"/>
+    </cs:fontRef>
+    <cs:spPr>
+      <a:solidFill>
+        <a:schemeClr val="bg1"/>
+      </a:solidFill>
+      <a:ln w="9525" cap="flat" cmpd="sng" algn="ctr">
+        <a:solidFill>
+          <a:schemeClr val="tx1">
+            <a:lumMod val="15000"/>
+            <a:lumOff val="85000"/>
+          </a:schemeClr>
+        </a:solidFill>
+        <a:round/>
+      </a:ln>
+    </cs:spPr>
+    <cs:defRPr sz="1197" kern="1200"/>
+  </cs:chartArea>
+  <cs:dataLabel>
+    <cs:lnRef idx="0"/>
+    <cs:fillRef idx="0"/>
+    <cs:effectRef idx="0"/>
+    <cs:fontRef idx="minor">
+      <a:schemeClr val="tx1">
+        <a:lumMod val="75000"/>
+        <a:lumOff val="25000"/>
+      </a:schemeClr>
+    </cs:fontRef>
+    <cs:defRPr sz="1197" kern="1200"/>
+  </cs:dataLabel>
+  <cs:dataLabelCallout>
+    <cs:lnRef idx="0"/>
+    <cs:fillRef idx="0"/>
+    <cs:effectRef idx="0"/>
+    <cs:fontRef idx="minor">
+      <a:schemeClr val="dk1">
+        <a:lumMod val="65000"/>
+        <a:lumOff val="35000"/>
+      </a:schemeClr>
+    </cs:fontRef>
+    <cs:spPr>
+      <a:solidFill>
+        <a:schemeClr val="lt1"/>
+      </a:solidFill>
+      <a:ln>
+        <a:solidFill>
+          <a:schemeClr val="dk1">
+            <a:lumMod val="25000"/>
+            <a:lumOff val="75000"/>
+          </a:schemeClr>
+        </a:solidFill>
+      </a:ln>
+    </cs:spPr>
+    <cs:defRPr sz="1197" kern="1200"/>
+    <cs:bodyPr rot="0" spcFirstLastPara="1" vertOverflow="clip" horzOverflow="clip" vert="horz" wrap="square" lIns="36576" tIns="18288" rIns="36576" bIns="18288" anchor="ctr" anchorCtr="1">
+      <a:spAutoFit/>
+    </cs:bodyPr>
+  </cs:dataLabelCallout>
+  <cs:dataPoint>
+    <cs:lnRef idx="0"/>
+    <cs:fillRef idx="0">
+      <cs:styleClr val="auto"/>
+    </cs:fillRef>
+    <cs:effectRef idx="0">
+      <cs:styleClr val="auto"/>
+    </cs:effectRef>
+    <cs:fontRef idx="minor">
+      <a:schemeClr val="dk1"/>
+    </cs:fontRef>
+    <cs:spPr>
+      <a:pattFill prst="narVert">
+        <a:fgClr>
+          <a:schemeClr val="phClr"/>
+        </a:fgClr>
+        <a:bgClr>
+          <a:schemeClr val="phClr">
+            <a:lumMod val="20000"/>
+            <a:lumOff val="80000"/>
+          </a:schemeClr>
+        </a:bgClr>
+      </a:pattFill>
+      <a:effectLst>
+        <a:innerShdw blurRad="114300">
+          <a:schemeClr val="phClr"/>
+        </a:innerShdw>
+      </a:effectLst>
+    </cs:spPr>
+  </cs:dataPoint>
+  <cs:dataPoint3D>
+    <cs:lnRef idx="0"/>
+    <cs:fillRef idx="0">
+      <cs:styleClr val="auto"/>
+    </cs:fillRef>
+    <cs:effectRef idx="0"/>
+    <cs:fontRef idx="minor">
+      <a:schemeClr val="dk1"/>
+    </cs:fontRef>
+    <cs:spPr>
+      <a:pattFill prst="narVert">
+        <a:fgClr>
+          <a:schemeClr val="phClr"/>
+        </a:fgClr>
+        <a:bgClr>
+          <a:schemeClr val="phClr">
+            <a:lumMod val="20000"/>
+            <a:lumOff val="80000"/>
+          </a:schemeClr>
+        </a:bgClr>
+      </a:pattFill>
+      <a:effectLst>
+        <a:innerShdw blurRad="114300">
+          <a:schemeClr val="phClr"/>
+        </a:innerShdw>
+      </a:effectLst>
+    </cs:spPr>
+  </cs:dataPoint3D>
+  <cs:dataPointLine>
+    <cs:lnRef idx="0">
+      <cs:styleClr val="auto"/>
+    </cs:lnRef>
+    <cs:fillRef idx="0"/>
+    <cs:effectRef idx="0"/>
+    <cs:fontRef idx="minor">
+      <a:schemeClr val="dk1"/>
+    </cs:fontRef>
+    <cs:spPr>
+      <a:ln w="28575" cap="rnd">
+        <a:solidFill>
+          <a:schemeClr val="phClr"/>
+        </a:solidFill>
+        <a:round/>
+      </a:ln>
+    </cs:spPr>
+  </cs:dataPointLine>
+  <cs:dataPointMarker>
+    <cs:lnRef idx="0"/>
+    <cs:fillRef idx="0">
+      <cs:styleClr val="auto"/>
+    </cs:fillRef>
+    <cs:effectRef idx="0"/>
+    <cs:fontRef idx="minor">
+      <a:schemeClr val="dk1"/>
+    </cs:fontRef>
+    <cs:spPr>
+      <a:solidFill>
+        <a:schemeClr val="phClr"/>
+      </a:solidFill>
+    </cs:spPr>
+  </cs:dataPointMarker>
+  <cs:dataPointMarkerLayout symbol="circle" size="6"/>
+  <cs:dataPointWireframe>
+    <cs:lnRef idx="0">
+      <cs:styleClr val="auto"/>
+    </cs:lnRef>
+    <cs:fillRef idx="0"/>
+    <cs:effectRef idx="0"/>
+    <cs:fontRef idx="minor">
+      <a:schemeClr val="dk1"/>
+    </cs:fontRef>
+    <cs:spPr>
+      <a:ln w="9525" cap="rnd">
+        <a:solidFill>
+          <a:schemeClr val="phClr"/>
+        </a:solidFill>
+        <a:round/>
+      </a:ln>
+    </cs:spPr>
+  </cs:dataPointWireframe>
+  <cs:dataTable>
+    <cs:lnRef idx="0"/>
+    <cs:fillRef idx="0"/>
+    <cs:effectRef idx="0"/>
+    <cs:fontRef idx="minor">
+      <a:schemeClr val="tx1">
+        <a:lumMod val="65000"/>
+        <a:lumOff val="35000"/>
+      </a:schemeClr>
+    </cs:fontRef>
+    <cs:spPr>
+      <a:ln w="9525">
+        <a:solidFill>
+          <a:schemeClr val="tx1">
+            <a:lumMod val="15000"/>
+            <a:lumOff val="85000"/>
+          </a:schemeClr>
+        </a:solidFill>
+      </a:ln>
+    </cs:spPr>
+    <cs:defRPr sz="1197" kern="1200"/>
+  </cs:dataTable>
+  <cs:downBar>
+    <cs:lnRef idx="0"/>
+    <cs:fillRef idx="0"/>
+    <cs:effectRef idx="0"/>
+    <cs:fontRef idx="minor">
+      <a:schemeClr val="dk1"/>
+    </cs:fontRef>
+    <cs:spPr>
+      <a:solidFill>
+        <a:schemeClr val="dk1">
+          <a:lumMod val="75000"/>
+          <a:lumOff val="25000"/>
+        </a:schemeClr>
+      </a:solidFill>
+      <a:ln w="9525">
+        <a:solidFill>
+          <a:schemeClr val="tx1">
+            <a:lumMod val="50000"/>
+            <a:lumOff val="50000"/>
+          </a:schemeClr>
+        </a:solidFill>
+      </a:ln>
+    </cs:spPr>
+  </cs:downBar>
+  <cs:dropLine>
+    <cs:lnRef idx="0"/>
+    <cs:fillRef idx="0"/>
+    <cs:effectRef idx="0"/>
+    <cs:fontRef idx="minor">
+      <a:schemeClr val="dk1"/>
+    </cs:fontRef>
+    <cs:spPr>
+      <a:ln w="9525">
+        <a:solidFill>
+          <a:schemeClr val="tx1">
+            <a:lumMod val="35000"/>
+            <a:lumOff val="65000"/>
+          </a:schemeClr>
+        </a:solidFill>
+        <a:round/>
+      </a:ln>
+    </cs:spPr>
+  </cs:dropLine>
+  <cs:errorBar>
+    <cs:lnRef idx="0"/>
+    <cs:fillRef idx="0"/>
+    <cs:effectRef idx="0"/>
+    <cs:fontRef idx="minor">
+      <a:schemeClr val="dk1"/>
+    </cs:fontRef>
+    <cs:spPr>
+      <a:ln w="9525">
+        <a:solidFill>
+          <a:schemeClr val="tx1">
+            <a:lumMod val="50000"/>
+            <a:lumOff val="50000"/>
+          </a:schemeClr>
+        </a:solidFill>
+        <a:round/>
+      </a:ln>
+    </cs:spPr>
+  </cs:errorBar>
+  <cs:floor>
+    <cs:lnRef idx="0"/>
+    <cs:fillRef idx="0"/>
+    <cs:effectRef idx="0"/>
+    <cs:fontRef idx="minor">
+      <a:schemeClr val="dk1"/>
+    </cs:fontRef>
+  </cs:floor>
+  <cs:gridlineMajor>
+    <cs:lnRef idx="0"/>
+    <cs:fillRef idx="0"/>
+    <cs:effectRef idx="0"/>
+    <cs:fontRef idx="minor">
+      <a:schemeClr val="dk1"/>
+    </cs:fontRef>
+    <cs:spPr>
+      <a:ln>
+        <a:solidFill>
+          <a:schemeClr val="tx1">
+            <a:lumMod val="15000"/>
+            <a:lumOff val="85000"/>
+          </a:schemeClr>
+        </a:solidFill>
+      </a:ln>
+    </cs:spPr>
+  </cs:gridlineMajor>
+  <cs:gridlineMinor>
+    <cs:lnRef idx="0"/>
+    <cs:fillRef idx="0"/>
+    <cs:effectRef idx="0"/>
+    <cs:fontRef idx="minor">
+      <a:schemeClr val="dk1"/>
+    </cs:fontRef>
+    <cs:spPr>
+      <a:ln>
+        <a:solidFill>
+          <a:schemeClr val="tx1">
+            <a:lumMod val="5000"/>
+            <a:lumOff val="95000"/>
+          </a:schemeClr>
+        </a:solidFill>
+      </a:ln>
+    </cs:spPr>
+  </cs:gridlineMinor>
+  <cs:hiLoLine>
+    <cs:lnRef idx="0"/>
+    <cs:fillRef idx="0"/>
+    <cs:effectRef idx="0"/>
+    <cs:fontRef idx="minor">
+      <a:schemeClr val="dk1"/>
+    </cs:fontRef>
+    <cs:spPr>
+      <a:ln w="9525">
+        <a:solidFill>
+          <a:schemeClr val="tx1">
+            <a:lumMod val="35000"/>
+            <a:lumOff val="65000"/>
+          </a:schemeClr>
+        </a:solidFill>
+        <a:round/>
+      </a:ln>
+    </cs:spPr>
+  </cs:hiLoLine>
+  <cs:leaderLine>
+    <cs:lnRef idx="0"/>
+    <cs:fillRef idx="0"/>
+    <cs:effectRef idx="0"/>
+    <cs:fontRef idx="minor">
+      <a:schemeClr val="dk1"/>
+    </cs:fontRef>
+    <cs:spPr>
+      <a:ln w="9525">
+        <a:solidFill>
+          <a:schemeClr val="tx1">
+            <a:lumMod val="35000"/>
+            <a:lumOff val="65000"/>
+          </a:schemeClr>
+        </a:solidFill>
+      </a:ln>
+    </cs:spPr>
+  </cs:leaderLine>
+  <cs:legend>
+    <cs:lnRef idx="0"/>
+    <cs:fillRef idx="0"/>
+    <cs:effectRef idx="0"/>
+    <cs:fontRef idx="minor">
+      <a:schemeClr val="tx1">
+        <a:lumMod val="65000"/>
+        <a:lumOff val="35000"/>
+      </a:schemeClr>
+    </cs:fontRef>
+    <cs:defRPr sz="1197" kern="1200"/>
+  </cs:legend>
+  <cs:plotArea mods="allowNoFillOverride allowNoLineOverride">
+    <cs:lnRef idx="0"/>
+    <cs:fillRef idx="0"/>
+    <cs:effectRef idx="0"/>
+    <cs:fontRef idx="minor">
+      <a:schemeClr val="dk1"/>
+    </cs:fontRef>
+  </cs:plotArea>
+  <cs:plotArea3D mods="allowNoFillOverride allowNoLineOverride">
+    <cs:lnRef idx="0"/>
+    <cs:fillRef idx="0"/>
+    <cs:effectRef idx="0"/>
+    <cs:fontRef idx="minor">
+      <a:schemeClr val="dk1"/>
+    </cs:fontRef>
+  </cs:plotArea3D>
+  <cs:seriesAxis>
+    <cs:lnRef idx="0"/>
+    <cs:fillRef idx="0"/>
+    <cs:effectRef idx="0"/>
+    <cs:fontRef idx="minor">
+      <a:schemeClr val="tx1">
+        <a:lumMod val="65000"/>
+        <a:lumOff val="35000"/>
+      </a:schemeClr>
+    </cs:fontRef>
+    <cs:defRPr sz="1197" kern="1200"/>
+  </cs:seriesAxis>
+  <cs:seriesLine>
+    <cs:lnRef idx="0"/>
+    <cs:fillRef idx="0"/>
+    <cs:effectRef idx="0"/>
+    <cs:fontRef idx="minor">
+      <a:schemeClr val="dk1"/>
+    </cs:fontRef>
+    <cs:spPr>
+      <a:ln w="9525">
+        <a:solidFill>
+          <a:schemeClr val="tx1">
+            <a:lumMod val="35000"/>
+            <a:lumOff val="65000"/>
+          </a:schemeClr>
+        </a:solidFill>
+        <a:round/>
+      </a:ln>
+    </cs:spPr>
+  </cs:seriesLine>
+  <cs:title>
+    <cs:lnRef idx="0"/>
+    <cs:fillRef idx="0"/>
+    <cs:effectRef idx="0"/>
+    <cs:fontRef idx="minor">
+      <a:schemeClr val="tx1">
+        <a:lumMod val="50000"/>
+        <a:lumOff val="50000"/>
+      </a:schemeClr>
+    </cs:fontRef>
+    <cs:defRPr sz="2200" b="1" kern="1200" cap="all" spc="150" baseline="0"/>
+  </cs:title>
+  <cs:trendline>
+    <cs:lnRef idx="0">
+      <cs:styleClr val="auto"/>
+    </cs:lnRef>
+    <cs:fillRef idx="0"/>
+    <cs:effectRef idx="0"/>
+    <cs:fontRef idx="minor">
+      <a:schemeClr val="dk1"/>
+    </cs:fontRef>
+    <cs:spPr>
+      <a:ln w="19050" cap="rnd">
+        <a:solidFill>
+          <a:schemeClr val="phClr"/>
+        </a:solidFill>
+      </a:ln>
+    </cs:spPr>
+  </cs:trendline>
+  <cs:trendlineLabel>
+    <cs:lnRef idx="0"/>
+    <cs:fillRef idx="0"/>
+    <cs:effectRef idx="0"/>
+    <cs:fontRef idx="minor">
+      <a:schemeClr val="tx1">
+        <a:lumMod val="65000"/>
+        <a:lumOff val="35000"/>
+      </a:schemeClr>
+    </cs:fontRef>
+    <cs:defRPr sz="1197" kern="1200"/>
+  </cs:trendlineLabel>
+  <cs:upBar>
+    <cs:lnRef idx="0"/>
+    <cs:fillRef idx="0"/>
+    <cs:effectRef idx="0"/>
+    <cs:fontRef idx="minor">
+      <a:schemeClr val="dk1"/>
+    </cs:fontRef>
+    <cs:spPr>
+      <a:solidFill>
+        <a:schemeClr val="lt1"/>
+      </a:solidFill>
+      <a:ln w="9525">
+        <a:solidFill>
+          <a:schemeClr val="tx1">
+            <a:lumMod val="50000"/>
+            <a:lumOff val="50000"/>
+          </a:schemeClr>
+        </a:solidFill>
+      </a:ln>
+    </cs:spPr>
+  </cs:upBar>
+  <cs:valueAxis>
+    <cs:lnRef idx="0"/>
+    <cs:fillRef idx="0"/>
+    <cs:effectRef idx="0"/>
+    <cs:fontRef idx="minor">
+      <a:schemeClr val="tx1">
+        <a:lumMod val="65000"/>
+        <a:lumOff val="35000"/>
+      </a:schemeClr>
+    </cs:fontRef>
+    <cs:defRPr sz="1197" kern="1200"/>
+  </cs:valueAxis>
+  <cs:wall>
+    <cs:lnRef idx="0"/>
+    <cs:fillRef idx="0"/>
+    <cs:effectRef idx="0"/>
+    <cs:fontRef idx="minor">
+      <a:schemeClr val="dk1"/>
+    </cs:fontRef>
+  </cs:wall>
+</cs:chartStyle>
+</file>
+
+<file path=ppt/notesMasters/notesMaster1.xml><?xml version="1.0" encoding="utf-8"?>
+<p:notesMaster xmlns:a="http://schemas.openxmlformats.org/drawingml/2006/main" xmlns:r="http://schemas.openxmlformats.org/officeDocument/2006/relationships" xmlns:p="http://schemas.openxmlformats.org/presentationml/2006/main">
+  <p:cSld>
+    <p:bg>
+      <p:bgRef idx="1001">
+        <a:schemeClr val="bg1"/>
+      </p:bgRef>
+    </p:bg>
+    <p:spTree>
+      <p:nvGrpSpPr>
+        <p:cNvPr id="1" name=""/>
+        <p:cNvGrpSpPr/>
+        <p:nvPr/>
+      </p:nvGrpSpPr>
+      <p:grpSpPr>
+        <a:xfrm>
+          <a:off x="0" y="0"/>
+          <a:ext cx="0" cy="0"/>
+          <a:chOff x="0" y="0"/>
+          <a:chExt cx="0" cy="0"/>
+        </a:xfrm>
+      </p:grpSpPr>
+      <p:sp>
+        <p:nvSpPr>
+          <p:cNvPr id="2" name="머리글 개체 틀 1"/>
+          <p:cNvSpPr>
+            <a:spLocks noGrp="1"/>
+          </p:cNvSpPr>
+          <p:nvPr>
+            <p:ph type="hdr" sz="quarter"/>
+          </p:nvPr>
+        </p:nvSpPr>
+        <p:spPr>
+          <a:xfrm>
+            <a:off x="0" y="0"/>
+            <a:ext cx="2971800" cy="458788"/>
+          </a:xfrm>
+          <a:prstGeom prst="rect">
+            <a:avLst/>
+          </a:prstGeom>
+        </p:spPr>
+        <p:txBody>
+          <a:bodyPr vert="horz" lIns="91440" tIns="45720" rIns="91440" bIns="45720" rtlCol="0"/>
+          <a:lstStyle>
+            <a:lvl1pPr algn="l">
+              <a:defRPr sz="1200"/>
+            </a:lvl1pPr>
+          </a:lstStyle>
+          <a:p>
+            <a:endParaRPr lang="ko-KR" altLang="en-US"/>
+          </a:p>
+        </p:txBody>
+      </p:sp>
+      <p:sp>
+        <p:nvSpPr>
+          <p:cNvPr id="3" name="날짜 개체 틀 2"/>
+          <p:cNvSpPr>
+            <a:spLocks noGrp="1"/>
+          </p:cNvSpPr>
+          <p:nvPr>
+            <p:ph type="dt" idx="1"/>
+          </p:nvPr>
+        </p:nvSpPr>
+        <p:spPr>
+          <a:xfrm>
+            <a:off x="3884613" y="0"/>
+            <a:ext cx="2971800" cy="458788"/>
+          </a:xfrm>
+          <a:prstGeom prst="rect">
+            <a:avLst/>
+          </a:prstGeom>
+        </p:spPr>
+        <p:txBody>
+          <a:bodyPr vert="horz" lIns="91440" tIns="45720" rIns="91440" bIns="45720" rtlCol="0"/>
+          <a:lstStyle>
+            <a:lvl1pPr algn="r">
+              <a:defRPr sz="1200"/>
+            </a:lvl1pPr>
+          </a:lstStyle>
+          <a:p>
+            <a:fld id="{894CFD26-807D-482F-9269-487A733D5587}" type="datetimeFigureOut">
+              <a:rPr lang="ko-KR" altLang="en-US" smtClean="0"/>
+              <a:t>2026-05-27</a:t>
+            </a:fld>
+            <a:endParaRPr lang="ko-KR" altLang="en-US"/>
+          </a:p>
+        </p:txBody>
+      </p:sp>
+      <p:sp>
+        <p:nvSpPr>
+          <p:cNvPr id="4" name="슬라이드 이미지 개체 틀 3"/>
+          <p:cNvSpPr>
+            <a:spLocks noGrp="1" noRot="1" noChangeAspect="1"/>
+          </p:cNvSpPr>
+          <p:nvPr>
+            <p:ph type="sldImg" idx="2"/>
+          </p:nvPr>
+        </p:nvSpPr>
+        <p:spPr>
+          <a:xfrm>
+            <a:off x="2271713" y="1143000"/>
+            <a:ext cx="2314575" cy="3086100"/>
+          </a:xfrm>
+          <a:prstGeom prst="rect">
+            <a:avLst/>
+          </a:prstGeom>
+          <a:noFill/>
+          <a:ln w="12700">
+            <a:solidFill>
+              <a:prstClr val="black"/>
+            </a:solidFill>
+          </a:ln>
+        </p:spPr>
+        <p:txBody>
+          <a:bodyPr vert="horz" lIns="91440" tIns="45720" rIns="91440" bIns="45720" rtlCol="0" anchor="ctr"/>
+          <a:lstStyle/>
+          <a:p>
+            <a:endParaRPr lang="ko-KR" altLang="en-US"/>
+          </a:p>
+        </p:txBody>
+      </p:sp>
+      <p:sp>
+        <p:nvSpPr>
+          <p:cNvPr id="5" name="슬라이드 노트 개체 틀 4"/>
+          <p:cNvSpPr>
+            <a:spLocks noGrp="1"/>
+          </p:cNvSpPr>
+          <p:nvPr>
+            <p:ph type="body" sz="quarter" idx="3"/>
+          </p:nvPr>
+        </p:nvSpPr>
+        <p:spPr>
+          <a:xfrm>
+            <a:off x="685800" y="4400550"/>
+            <a:ext cx="5486400" cy="3600450"/>
+          </a:xfrm>
+          <a:prstGeom prst="rect">
+            <a:avLst/>
+          </a:prstGeom>
+        </p:spPr>
+        <p:txBody>
+          <a:bodyPr vert="horz" lIns="91440" tIns="45720" rIns="91440" bIns="45720" rtlCol="0"/>
+          <a:lstStyle/>
+          <a:p>
+            <a:pPr lvl="0"/>
+            <a:r>
+              <a:rPr lang="ko-KR" altLang="en-US"/>
+              <a:t>마스터 텍스트 스타일을 편집하려면 클릭</a:t>
+            </a:r>
+          </a:p>
+          <a:p>
+            <a:pPr lvl="1"/>
+            <a:r>
+              <a:rPr lang="ko-KR" altLang="en-US"/>
+              <a:t>두 번째 수준</a:t>
+            </a:r>
+          </a:p>
+          <a:p>
+            <a:pPr lvl="2"/>
+            <a:r>
+              <a:rPr lang="ko-KR" altLang="en-US"/>
+              <a:t>세 번째 수준</a:t>
+            </a:r>
+          </a:p>
+          <a:p>
+            <a:pPr lvl="3"/>
+            <a:r>
+              <a:rPr lang="ko-KR" altLang="en-US"/>
+              <a:t>네 번째 수준</a:t>
+            </a:r>
+          </a:p>
+          <a:p>
+            <a:pPr lvl="4"/>
+            <a:r>
+              <a:rPr lang="ko-KR" altLang="en-US"/>
+              <a:t>다섯 번째 수준</a:t>
+            </a:r>
+          </a:p>
+        </p:txBody>
+      </p:sp>
+      <p:sp>
+        <p:nvSpPr>
+          <p:cNvPr id="6" name="바닥글 개체 틀 5"/>
+          <p:cNvSpPr>
+            <a:spLocks noGrp="1"/>
+          </p:cNvSpPr>
+          <p:nvPr>
+            <p:ph type="ftr" sz="quarter" idx="4"/>
+          </p:nvPr>
+        </p:nvSpPr>
+        <p:spPr>
+          <a:xfrm>
+            <a:off x="0" y="8685213"/>
+            <a:ext cx="2971800" cy="458787"/>
+          </a:xfrm>
+          <a:prstGeom prst="rect">
+            <a:avLst/>
+          </a:prstGeom>
+        </p:spPr>
+        <p:txBody>
+          <a:bodyPr vert="horz" lIns="91440" tIns="45720" rIns="91440" bIns="45720" rtlCol="0" anchor="b"/>
+          <a:lstStyle>
+            <a:lvl1pPr algn="l">
+              <a:defRPr sz="1200"/>
+            </a:lvl1pPr>
+          </a:lstStyle>
+          <a:p>
+            <a:endParaRPr lang="ko-KR" altLang="en-US"/>
+          </a:p>
+        </p:txBody>
+      </p:sp>
+      <p:sp>
+        <p:nvSpPr>
+          <p:cNvPr id="7" name="슬라이드 번호 개체 틀 6"/>
+          <p:cNvSpPr>
+            <a:spLocks noGrp="1"/>
+          </p:cNvSpPr>
+          <p:nvPr>
+            <p:ph type="sldNum" sz="quarter" idx="5"/>
+          </p:nvPr>
+        </p:nvSpPr>
+        <p:spPr>
+          <a:xfrm>
+            <a:off x="3884613" y="8685213"/>
+            <a:ext cx="2971800" cy="458787"/>
+          </a:xfrm>
+          <a:prstGeom prst="rect">
+            <a:avLst/>
+          </a:prstGeom>
+        </p:spPr>
+        <p:txBody>
+          <a:bodyPr vert="horz" lIns="91440" tIns="45720" rIns="91440" bIns="45720" rtlCol="0" anchor="b"/>
+          <a:lstStyle>
+            <a:lvl1pPr algn="r">
+              <a:defRPr sz="1200"/>
+            </a:lvl1pPr>
+          </a:lstStyle>
+          <a:p>
+            <a:fld id="{996AB749-0598-49AA-8249-049EB7E95B75}" type="slidenum">
+              <a:rPr lang="ko-KR" altLang="en-US" smtClean="0"/>
+              <a:t>‹#›</a:t>
+            </a:fld>
+            <a:endParaRPr lang="ko-KR" altLang="en-US"/>
+          </a:p>
+        </p:txBody>
+      </p:sp>
+    </p:spTree>
+    <p:extLst>
+      <p:ext uri="{BB962C8B-B14F-4D97-AF65-F5344CB8AC3E}">
+        <p14:creationId xmlns:p14="http://schemas.microsoft.com/office/powerpoint/2010/main" val="3395194631"/>
+      </p:ext>
+    </p:extLst>
+  </p:cSld>
+  <p:clrMap bg1="lt1" tx1="dk1" bg2="lt2" tx2="dk2" accent1="accent1" accent2="accent2" accent3="accent3" accent4="accent4" accent5="accent5" accent6="accent6" hlink="hlink" folHlink="folHlink"/>
+  <p:notesStyle>
+    <a:lvl1pPr marL="0" algn="l" defTabSz="914400" rtl="0" eaLnBrk="1" latinLnBrk="1" hangingPunct="1">
+      <a:defRPr sz="1200" kern="1200">
+        <a:solidFill>
+          <a:schemeClr val="tx1"/>
+        </a:solidFill>
+        <a:latin typeface="+mn-lt"/>
+        <a:ea typeface="+mn-ea"/>
+        <a:cs typeface="+mn-cs"/>
+      </a:defRPr>
+    </a:lvl1pPr>
+    <a:lvl2pPr marL="457200" algn="l" defTabSz="914400" rtl="0" eaLnBrk="1" latinLnBrk="1" hangingPunct="1">
+      <a:defRPr sz="1200" kern="1200">
+        <a:solidFill>
+          <a:schemeClr val="tx1"/>
+        </a:solidFill>
+        <a:latin typeface="+mn-lt"/>
+        <a:ea typeface="+mn-ea"/>
+        <a:cs typeface="+mn-cs"/>
+      </a:defRPr>
+    </a:lvl2pPr>
+    <a:lvl3pPr marL="914400" algn="l" defTabSz="914400" rtl="0" eaLnBrk="1" latinLnBrk="1" hangingPunct="1">
+      <a:defRPr sz="1200" kern="1200">
+        <a:solidFill>
+          <a:schemeClr val="tx1"/>
+        </a:solidFill>
+        <a:latin typeface="+mn-lt"/>
+        <a:ea typeface="+mn-ea"/>
+        <a:cs typeface="+mn-cs"/>
+      </a:defRPr>
+    </a:lvl3pPr>
+    <a:lvl4pPr marL="1371600" algn="l" defTabSz="914400" rtl="0" eaLnBrk="1" latinLnBrk="1" hangingPunct="1">
+      <a:defRPr sz="1200" kern="1200">
+        <a:solidFill>
+          <a:schemeClr val="tx1"/>
+        </a:solidFill>
+        <a:latin typeface="+mn-lt"/>
+        <a:ea typeface="+mn-ea"/>
+        <a:cs typeface="+mn-cs"/>
+      </a:defRPr>
+    </a:lvl4pPr>
+    <a:lvl5pPr marL="1828800" algn="l" defTabSz="914400" rtl="0" eaLnBrk="1" latinLnBrk="1" hangingPunct="1">
+      <a:defRPr sz="1200" kern="1200">
+        <a:solidFill>
+          <a:schemeClr val="tx1"/>
+        </a:solidFill>
+        <a:latin typeface="+mn-lt"/>
+        <a:ea typeface="+mn-ea"/>
+        <a:cs typeface="+mn-cs"/>
+      </a:defRPr>
+    </a:lvl5pPr>
+    <a:lvl6pPr marL="2286000" algn="l" defTabSz="914400" rtl="0" eaLnBrk="1" latinLnBrk="1" hangingPunct="1">
+      <a:defRPr sz="1200" kern="1200">
+        <a:solidFill>
+          <a:schemeClr val="tx1"/>
+        </a:solidFill>
+        <a:latin typeface="+mn-lt"/>
+        <a:ea typeface="+mn-ea"/>
+        <a:cs typeface="+mn-cs"/>
+      </a:defRPr>
+    </a:lvl6pPr>
+    <a:lvl7pPr marL="2743200" algn="l" defTabSz="914400" rtl="0" eaLnBrk="1" latinLnBrk="1" hangingPunct="1">
+      <a:defRPr sz="1200" kern="1200">
+        <a:solidFill>
+          <a:schemeClr val="tx1"/>
+        </a:solidFill>
+        <a:latin typeface="+mn-lt"/>
+        <a:ea typeface="+mn-ea"/>
+        <a:cs typeface="+mn-cs"/>
+      </a:defRPr>
+    </a:lvl7pPr>
+    <a:lvl8pPr marL="3200400" algn="l" defTabSz="914400" rtl="0" eaLnBrk="1" latinLnBrk="1" hangingPunct="1">
+      <a:defRPr sz="1200" kern="1200">
+        <a:solidFill>
+          <a:schemeClr val="tx1"/>
+        </a:solidFill>
+        <a:latin typeface="+mn-lt"/>
+        <a:ea typeface="+mn-ea"/>
+        <a:cs typeface="+mn-cs"/>
+      </a:defRPr>
+    </a:lvl8pPr>
+    <a:lvl9pPr marL="3657600" algn="l" defTabSz="914400" rtl="0" eaLnBrk="1" latinLnBrk="1" hangingPunct="1">
+      <a:defRPr sz="1200" kern="1200">
+        <a:solidFill>
+          <a:schemeClr val="tx1"/>
+        </a:solidFill>
+        <a:latin typeface="+mn-lt"/>
+        <a:ea typeface="+mn-ea"/>
+        <a:cs typeface="+mn-cs"/>
+      </a:defRPr>
+    </a:lvl9pPr>
+  </p:notesStyle>
+</p:notesMaster>
+</file>
+
+<file path=ppt/notesSlides/notesSlide1.xml><?xml version="1.0" encoding="utf-8"?>
+<p:notes xmlns:a="http://schemas.openxmlformats.org/drawingml/2006/main" xmlns:r="http://schemas.openxmlformats.org/officeDocument/2006/relationships" xmlns:p="http://schemas.openxmlformats.org/presentationml/2006/main">
+  <p:cSld>
+    <p:spTree>
+      <p:nvGrpSpPr>
+        <p:cNvPr id="1" name=""/>
+        <p:cNvGrpSpPr/>
+        <p:nvPr/>
+      </p:nvGrpSpPr>
+      <p:grpSpPr>
+        <a:xfrm>
+          <a:off x="0" y="0"/>
+          <a:ext cx="0" cy="0"/>
+          <a:chOff x="0" y="0"/>
+          <a:chExt cx="0" cy="0"/>
+        </a:xfrm>
+      </p:grpSpPr>
+      <p:sp>
+        <p:nvSpPr>
+          <p:cNvPr id="2" name="슬라이드 이미지 개체 틀 1"/>
+          <p:cNvSpPr>
+            <a:spLocks noGrp="1" noRot="1" noChangeAspect="1"/>
+          </p:cNvSpPr>
+          <p:nvPr>
+            <p:ph type="sldImg"/>
+          </p:nvPr>
+        </p:nvSpPr>
+        <p:spPr/>
+      </p:sp>
+      <p:sp>
+        <p:nvSpPr>
+          <p:cNvPr id="3" name="슬라이드 노트 개체 틀 2"/>
+          <p:cNvSpPr>
+            <a:spLocks noGrp="1"/>
+          </p:cNvSpPr>
+          <p:nvPr>
+            <p:ph type="body" idx="1"/>
+          </p:nvPr>
+        </p:nvSpPr>
+        <p:spPr/>
+        <p:txBody>
+          <a:bodyPr/>
+          <a:lstStyle/>
+          <a:p>
+            <a:endParaRPr lang="ko-KR" altLang="en-US" dirty="0"/>
+          </a:p>
+        </p:txBody>
+      </p:sp>
+      <p:sp>
+        <p:nvSpPr>
+          <p:cNvPr id="4" name="슬라이드 번호 개체 틀 3"/>
+          <p:cNvSpPr>
+            <a:spLocks noGrp="1"/>
+          </p:cNvSpPr>
+          <p:nvPr>
+            <p:ph type="sldNum" sz="quarter" idx="5"/>
+          </p:nvPr>
+        </p:nvSpPr>
+        <p:spPr/>
+        <p:txBody>
+          <a:bodyPr/>
+          <a:lstStyle/>
+          <a:p>
+            <a:fld id="{996AB749-0598-49AA-8249-049EB7E95B75}" type="slidenum">
+              <a:rPr lang="ko-KR" altLang="en-US" smtClean="0"/>
+              <a:t>1</a:t>
+            </a:fld>
+            <a:endParaRPr lang="ko-KR" altLang="en-US"/>
+          </a:p>
+        </p:txBody>
+      </p:sp>
+    </p:spTree>
+    <p:extLst>
+      <p:ext uri="{BB962C8B-B14F-4D97-AF65-F5344CB8AC3E}">
+        <p14:creationId xmlns:p14="http://schemas.microsoft.com/office/powerpoint/2010/main" val="537575707"/>
+      </p:ext>
+    </p:extLst>
+  </p:cSld>
+  <p:clrMapOvr>
+    <a:masterClrMapping/>
+  </p:clrMapOvr>
+</p:notes>
 </file>
 
 <file path=ppt/slideLayouts/slideLayout1.xml><?xml version="1.0" encoding="utf-8"?>
@@ -2971,7 +4320,7 @@
           <p:cNvPr id="4" name="직사각형 3">
             <a:extLst>
               <a:ext uri="{FF2B5EF4-FFF2-40B4-BE49-F238E27FC236}">
-                <a16:creationId xmlns:a16="http://schemas.microsoft.com/office/drawing/2014/main" id="{289DA5E7-D1F2-4AFB-4F53-A3F2818131A1}"/>
+                <a16:creationId xmlns:a16="http://schemas.microsoft.com/office/drawing/2014/main" id="{0685CAC4-B077-5042-F3A0-B4DF855FEF28}"/>
               </a:ext>
             </a:extLst>
           </p:cNvPr>
@@ -2980,8 +4329,8 @@
         </p:nvSpPr>
         <p:spPr>
           <a:xfrm>
-            <a:off x="0" y="0"/>
-            <a:ext cx="14891657" cy="15283543"/>
+            <a:off x="0" y="1"/>
+            <a:ext cx="32399288" cy="7200899"/>
           </a:xfrm>
           <a:prstGeom prst="rect">
             <a:avLst/>
@@ -3017,10 +4366,10 @@
       </p:sp>
       <p:pic>
         <p:nvPicPr>
-          <p:cNvPr id="9" name="그림 8">
+          <p:cNvPr id="5" name="그림 4">
             <a:extLst>
               <a:ext uri="{FF2B5EF4-FFF2-40B4-BE49-F238E27FC236}">
-                <a16:creationId xmlns:a16="http://schemas.microsoft.com/office/drawing/2014/main" id="{75DF88CF-F746-297C-7A7A-2586276CC397}"/>
+                <a16:creationId xmlns:a16="http://schemas.microsoft.com/office/drawing/2014/main" id="{F34C8758-FAFC-F37E-7CFC-B5765217A73C}"/>
               </a:ext>
             </a:extLst>
           </p:cNvPr>
@@ -3030,7 +4379,7 @@
           <p:nvPr/>
         </p:nvPicPr>
         <p:blipFill>
-          <a:blip r:embed="rId2">
+          <a:blip r:embed="rId3">
             <a:extLst>
               <a:ext uri="{28A0092B-C50C-407E-A947-70E740481C1C}">
                 <a14:useLocalDpi xmlns:a14="http://schemas.microsoft.com/office/drawing/2010/main" val="0"/>
@@ -3043,8 +4392,8 @@
         </p:blipFill>
         <p:spPr>
           <a:xfrm>
-            <a:off x="6204857" y="6562789"/>
-            <a:ext cx="7968339" cy="7968339"/>
+            <a:off x="25198388" y="286515"/>
+            <a:ext cx="6627869" cy="6627869"/>
           </a:xfrm>
           <a:prstGeom prst="rect">
             <a:avLst/>
@@ -3053,10 +4402,334 @@
       </p:pic>
       <p:sp>
         <p:nvSpPr>
-          <p:cNvPr id="5" name="직사각형 4">
+          <p:cNvPr id="6" name="TextBox 5">
             <a:extLst>
               <a:ext uri="{FF2B5EF4-FFF2-40B4-BE49-F238E27FC236}">
-                <a16:creationId xmlns:a16="http://schemas.microsoft.com/office/drawing/2014/main" id="{8B605969-D860-678B-08F8-F4F3356C9AE8}"/>
+                <a16:creationId xmlns:a16="http://schemas.microsoft.com/office/drawing/2014/main" id="{5F39DB8D-6DAC-8893-4F17-A435296A90A1}"/>
+              </a:ext>
+            </a:extLst>
+          </p:cNvPr>
+          <p:cNvSpPr txBox="1"/>
+          <p:nvPr/>
+        </p:nvSpPr>
+        <p:spPr>
+          <a:xfrm>
+            <a:off x="1146061" y="1349380"/>
+            <a:ext cx="30107166" cy="2492990"/>
+          </a:xfrm>
+          <a:prstGeom prst="rect">
+            <a:avLst/>
+          </a:prstGeom>
+          <a:noFill/>
+        </p:spPr>
+        <p:txBody>
+          <a:bodyPr wrap="square" rtlCol="0">
+            <a:spAutoFit/>
+          </a:bodyPr>
+          <a:lstStyle/>
+          <a:p>
+            <a:r>
+              <a:rPr lang="ko-KR" altLang="en-US" sz="7200" b="1" dirty="0" err="1">
+                <a:solidFill>
+                  <a:schemeClr val="bg1"/>
+                </a:solidFill>
+                <a:effectLst>
+                  <a:outerShdw blurRad="38100" dist="38100" dir="2700000" algn="tl">
+                    <a:srgbClr val="000000">
+                      <a:alpha val="43137"/>
+                    </a:srgbClr>
+                  </a:outerShdw>
+                </a:effectLst>
+                <a:latin typeface="+mj-ea"/>
+                <a:ea typeface="+mj-ea"/>
+              </a:rPr>
+              <a:t>언리얼</a:t>
+            </a:r>
+            <a:r>
+              <a:rPr lang="ko-KR" altLang="en-US" sz="7200" b="1" dirty="0">
+                <a:solidFill>
+                  <a:schemeClr val="bg1"/>
+                </a:solidFill>
+                <a:effectLst>
+                  <a:outerShdw blurRad="38100" dist="38100" dir="2700000" algn="tl">
+                    <a:srgbClr val="000000">
+                      <a:alpha val="43137"/>
+                    </a:srgbClr>
+                  </a:outerShdw>
+                </a:effectLst>
+                <a:latin typeface="+mj-ea"/>
+                <a:ea typeface="+mj-ea"/>
+              </a:rPr>
+              <a:t> 엔진 </a:t>
+            </a:r>
+            <a:r>
+              <a:rPr lang="en-US" altLang="ko-KR" sz="7200" b="1" dirty="0">
+                <a:solidFill>
+                  <a:schemeClr val="bg1"/>
+                </a:solidFill>
+                <a:effectLst>
+                  <a:outerShdw blurRad="38100" dist="38100" dir="2700000" algn="tl">
+                    <a:srgbClr val="000000">
+                      <a:alpha val="43137"/>
+                    </a:srgbClr>
+                  </a:outerShdw>
+                </a:effectLst>
+                <a:latin typeface="+mj-ea"/>
+                <a:ea typeface="+mj-ea"/>
+              </a:rPr>
+              <a:t>C++ </a:t>
+            </a:r>
+            <a:r>
+              <a:rPr lang="ko-KR" altLang="en-US" sz="7200" b="1" dirty="0">
+                <a:solidFill>
+                  <a:schemeClr val="bg1"/>
+                </a:solidFill>
+                <a:effectLst>
+                  <a:outerShdw blurRad="38100" dist="38100" dir="2700000" algn="tl">
+                    <a:srgbClr val="000000">
+                      <a:alpha val="43137"/>
+                    </a:srgbClr>
+                  </a:outerShdw>
+                </a:effectLst>
+                <a:latin typeface="+mj-ea"/>
+                <a:ea typeface="+mj-ea"/>
+              </a:rPr>
+              <a:t>환경에서 </a:t>
+            </a:r>
+            <a:r>
+              <a:rPr lang="en-US" altLang="ko-KR" sz="7200" b="1" dirty="0">
+                <a:solidFill>
+                  <a:schemeClr val="bg1"/>
+                </a:solidFill>
+                <a:effectLst>
+                  <a:outerShdw blurRad="38100" dist="38100" dir="2700000" algn="tl">
+                    <a:srgbClr val="000000">
+                      <a:alpha val="43137"/>
+                    </a:srgbClr>
+                  </a:outerShdw>
+                </a:effectLst>
+                <a:latin typeface="+mj-ea"/>
+                <a:ea typeface="+mj-ea"/>
+              </a:rPr>
+              <a:t>LLM</a:t>
+            </a:r>
+            <a:r>
+              <a:rPr lang="ko-KR" altLang="en-US" sz="7200" b="1" dirty="0">
+                <a:solidFill>
+                  <a:schemeClr val="bg1"/>
+                </a:solidFill>
+                <a:effectLst>
+                  <a:outerShdw blurRad="38100" dist="38100" dir="2700000" algn="tl">
+                    <a:srgbClr val="000000">
+                      <a:alpha val="43137"/>
+                    </a:srgbClr>
+                  </a:outerShdw>
+                </a:effectLst>
+                <a:latin typeface="+mj-ea"/>
+                <a:ea typeface="+mj-ea"/>
+              </a:rPr>
+              <a:t>을 활용한 소규모 게임 개발 효율성 연구</a:t>
+            </a:r>
+            <a:endParaRPr lang="en-US" altLang="ko-KR" sz="7200" b="1" dirty="0">
+              <a:solidFill>
+                <a:schemeClr val="bg1"/>
+              </a:solidFill>
+              <a:effectLst>
+                <a:outerShdw blurRad="38100" dist="38100" dir="2700000" algn="tl">
+                  <a:srgbClr val="000000">
+                    <a:alpha val="43137"/>
+                  </a:srgbClr>
+                </a:outerShdw>
+              </a:effectLst>
+              <a:latin typeface="+mj-ea"/>
+              <a:ea typeface="+mj-ea"/>
+            </a:endParaRPr>
+          </a:p>
+          <a:p>
+            <a:endParaRPr lang="en-US" altLang="ko-KR" sz="2400" b="1" dirty="0">
+              <a:solidFill>
+                <a:schemeClr val="bg1"/>
+              </a:solidFill>
+              <a:effectLst>
+                <a:outerShdw blurRad="38100" dist="38100" dir="2700000" algn="tl">
+                  <a:srgbClr val="000000">
+                    <a:alpha val="43137"/>
+                  </a:srgbClr>
+                </a:outerShdw>
+              </a:effectLst>
+              <a:latin typeface="+mj-ea"/>
+              <a:ea typeface="+mj-ea"/>
+            </a:endParaRPr>
+          </a:p>
+          <a:p>
+            <a:r>
+              <a:rPr lang="ko-KR" altLang="en-US" sz="6000" b="1" dirty="0">
+                <a:solidFill>
+                  <a:schemeClr val="bg1"/>
+                </a:solidFill>
+                <a:effectLst>
+                  <a:outerShdw blurRad="38100" dist="38100" dir="2700000" algn="tl">
+                    <a:srgbClr val="000000">
+                      <a:alpha val="43137"/>
+                    </a:srgbClr>
+                  </a:outerShdw>
+                </a:effectLst>
+                <a:latin typeface="+mj-ea"/>
+                <a:ea typeface="+mj-ea"/>
+              </a:rPr>
+              <a:t>졸업작품 개발 사례를 중심으로 </a:t>
+            </a:r>
+          </a:p>
+        </p:txBody>
+      </p:sp>
+      <p:sp>
+        <p:nvSpPr>
+          <p:cNvPr id="7" name="TextBox 6">
+            <a:extLst>
+              <a:ext uri="{FF2B5EF4-FFF2-40B4-BE49-F238E27FC236}">
+                <a16:creationId xmlns:a16="http://schemas.microsoft.com/office/drawing/2014/main" id="{AF09E03B-4607-406A-6E2A-5B51E943D17C}"/>
+              </a:ext>
+            </a:extLst>
+          </p:cNvPr>
+          <p:cNvSpPr txBox="1"/>
+          <p:nvPr/>
+        </p:nvSpPr>
+        <p:spPr>
+          <a:xfrm>
+            <a:off x="1146061" y="4372641"/>
+            <a:ext cx="24891561" cy="1754326"/>
+          </a:xfrm>
+          <a:prstGeom prst="rect">
+            <a:avLst/>
+          </a:prstGeom>
+          <a:noFill/>
+        </p:spPr>
+        <p:txBody>
+          <a:bodyPr wrap="square" rtlCol="0">
+            <a:spAutoFit/>
+          </a:bodyPr>
+          <a:lstStyle/>
+          <a:p>
+            <a:r>
+              <a:rPr lang="en-US" altLang="ko-KR" sz="5400" b="1" dirty="0">
+                <a:solidFill>
+                  <a:schemeClr val="bg1"/>
+                </a:solidFill>
+                <a:effectLst>
+                  <a:outerShdw blurRad="38100" dist="38100" dir="2700000" algn="tl">
+                    <a:srgbClr val="000000">
+                      <a:alpha val="43137"/>
+                    </a:srgbClr>
+                  </a:outerShdw>
+                </a:effectLst>
+              </a:rPr>
+              <a:t>Sung-Wook Cho</a:t>
+            </a:r>
+            <a:r>
+              <a:rPr lang="ko-KR" altLang="en-US" sz="4800" b="1" baseline="30000" dirty="0">
+                <a:solidFill>
+                  <a:schemeClr val="bg1">
+                    <a:lumMod val="95000"/>
+                  </a:schemeClr>
+                </a:solidFill>
+                <a:effectLst>
+                  <a:outerShdw blurRad="38100" dist="38100" dir="2700000" algn="tl">
+                    <a:srgbClr val="000000">
+                      <a:alpha val="43137"/>
+                    </a:srgbClr>
+                  </a:outerShdw>
+                </a:effectLst>
+              </a:rPr>
+              <a:t>○</a:t>
+            </a:r>
+            <a:r>
+              <a:rPr lang="ko-KR" altLang="en-US" sz="5400" dirty="0"/>
+              <a:t>  </a:t>
+            </a:r>
+            <a:r>
+              <a:rPr lang="en-US" altLang="ko-KR" sz="5400" b="1" dirty="0">
+                <a:solidFill>
+                  <a:schemeClr val="bg1"/>
+                </a:solidFill>
+                <a:effectLst>
+                  <a:outerShdw blurRad="38100" dist="38100" dir="2700000" algn="tl">
+                    <a:srgbClr val="000000">
+                      <a:alpha val="43137"/>
+                    </a:srgbClr>
+                  </a:outerShdw>
+                </a:effectLst>
+              </a:rPr>
+              <a:t>, Min-Woo Ji, Daniel Kim, Dae-Hyun Lee </a:t>
+            </a:r>
+            <a:endParaRPr lang="en-US" altLang="ko-KR" sz="5400" b="1" dirty="0">
+              <a:solidFill>
+                <a:schemeClr val="bg1"/>
+              </a:solidFill>
+              <a:effectLst>
+                <a:outerShdw blurRad="38100" dist="38100" dir="2700000" algn="tl">
+                  <a:srgbClr val="000000">
+                    <a:alpha val="43137"/>
+                  </a:srgbClr>
+                </a:outerShdw>
+              </a:effectLst>
+              <a:latin typeface="+mj-ea"/>
+              <a:ea typeface="+mj-ea"/>
+            </a:endParaRPr>
+          </a:p>
+          <a:p>
+            <a:r>
+              <a:rPr lang="en-US" altLang="ko-KR" sz="5400" b="1" dirty="0">
+                <a:solidFill>
+                  <a:schemeClr val="bg1"/>
+                </a:solidFill>
+                <a:effectLst>
+                  <a:outerShdw blurRad="38100" dist="38100" dir="2700000" algn="tl">
+                    <a:srgbClr val="000000">
+                      <a:alpha val="43137"/>
+                    </a:srgbClr>
+                  </a:outerShdw>
+                </a:effectLst>
+                <a:ea typeface="+mj-ea"/>
+              </a:rPr>
+              <a:t>Tech University of Korea Dept. </a:t>
+            </a:r>
+            <a:r>
+              <a:rPr lang="en-US" altLang="ko-KR" sz="5400" b="1" dirty="0">
+                <a:solidFill>
+                  <a:schemeClr val="bg1"/>
+                </a:solidFill>
+                <a:effectLst>
+                  <a:outerShdw blurRad="38100" dist="38100" dir="2700000" algn="tl">
+                    <a:srgbClr val="000000">
+                      <a:alpha val="43137"/>
+                    </a:srgbClr>
+                  </a:outerShdw>
+                </a:effectLst>
+              </a:rPr>
+              <a:t>of Game &amp; Multimedia Engineering </a:t>
+            </a:r>
+            <a:endParaRPr lang="ko-KR" altLang="en-US" sz="5400" b="1" dirty="0">
+              <a:solidFill>
+                <a:schemeClr val="bg1"/>
+              </a:solidFill>
+              <a:effectLst>
+                <a:outerShdw blurRad="38100" dist="38100" dir="2700000" algn="tl">
+                  <a:srgbClr val="000000">
+                    <a:alpha val="43137"/>
+                  </a:srgbClr>
+                </a:outerShdw>
+              </a:effectLst>
+              <a:ea typeface="+mj-ea"/>
+            </a:endParaRPr>
+          </a:p>
+        </p:txBody>
+      </p:sp>
+      <p:sp>
+        <p:nvSpPr>
+          <p:cNvPr id="12" name="직사각형 11">
+            <a:extLst>
+              <a:ext uri="{FF2B5EF4-FFF2-40B4-BE49-F238E27FC236}">
+                <a16:creationId xmlns:a16="http://schemas.microsoft.com/office/drawing/2014/main" id="{B5D21401-06AB-A3A4-7FE8-5C6C0A7FEF1A}"/>
               </a:ext>
             </a:extLst>
           </p:cNvPr>
@@ -3065,18 +4738,12 @@
         </p:nvSpPr>
         <p:spPr>
           <a:xfrm>
-            <a:off x="0" y="15283543"/>
-            <a:ext cx="14891657" cy="27917095"/>
+            <a:off x="400048" y="7731171"/>
+            <a:ext cx="15380726" cy="1353835"/>
           </a:xfrm>
           <a:prstGeom prst="rect">
             <a:avLst/>
           </a:prstGeom>
-          <a:solidFill>
-            <a:schemeClr val="accent1">
-              <a:lumMod val="20000"/>
-              <a:lumOff val="80000"/>
-            </a:schemeClr>
-          </a:solidFill>
           <a:ln>
             <a:noFill/>
           </a:ln>
@@ -3102,16 +4769,16 @@
           <a:lstStyle/>
           <a:p>
             <a:pPr algn="ctr"/>
-            <a:endParaRPr lang="ko-KR" altLang="en-US"/>
-          </a:p>
-        </p:txBody>
-      </p:sp>
-      <p:sp>
-        <p:nvSpPr>
-          <p:cNvPr id="6" name="TextBox 5">
+            <a:endParaRPr lang="ko-KR" altLang="en-US" dirty="0"/>
+          </a:p>
+        </p:txBody>
+      </p:sp>
+      <p:sp>
+        <p:nvSpPr>
+          <p:cNvPr id="14" name="TextBox 13">
             <a:extLst>
               <a:ext uri="{FF2B5EF4-FFF2-40B4-BE49-F238E27FC236}">
-                <a16:creationId xmlns:a16="http://schemas.microsoft.com/office/drawing/2014/main" id="{43BC5D55-467B-197E-D070-03403D364044}"/>
+                <a16:creationId xmlns:a16="http://schemas.microsoft.com/office/drawing/2014/main" id="{4BC90D7C-38E1-8D00-3C91-0325FB92D1C2}"/>
               </a:ext>
             </a:extLst>
           </p:cNvPr>
@@ -3120,8 +4787,8 @@
         </p:nvSpPr>
         <p:spPr>
           <a:xfrm>
-            <a:off x="1725384" y="1862814"/>
-            <a:ext cx="11440887" cy="4708981"/>
+            <a:off x="747853" y="8060967"/>
+            <a:ext cx="4296094" cy="830997"/>
           </a:xfrm>
           <a:prstGeom prst="rect">
             <a:avLst/>
@@ -3135,9 +4802,11 @@
           <a:lstStyle/>
           <a:p>
             <a:r>
-              <a:rPr lang="ko-KR" altLang="en-US" sz="7200" b="1" dirty="0" err="1">
+              <a:rPr lang="ko-KR" altLang="en-US" sz="4800" b="1" dirty="0">
                 <a:solidFill>
-                  <a:schemeClr val="bg1"/>
+                  <a:schemeClr val="bg1">
+                    <a:lumMod val="95000"/>
+                  </a:schemeClr>
                 </a:solidFill>
                 <a:effectLst>
                   <a:outerShdw blurRad="38100" dist="38100" dir="2700000" algn="tl">
@@ -3146,15 +4815,519 @@
                     </a:srgbClr>
                   </a:outerShdw>
                 </a:effectLst>
-                <a:latin typeface="+mj-ea"/>
+              </a:rPr>
+              <a:t>연구 배경</a:t>
+            </a:r>
+          </a:p>
+        </p:txBody>
+      </p:sp>
+      <p:sp>
+        <p:nvSpPr>
+          <p:cNvPr id="15" name="TextBox 14">
+            <a:extLst>
+              <a:ext uri="{FF2B5EF4-FFF2-40B4-BE49-F238E27FC236}">
+                <a16:creationId xmlns:a16="http://schemas.microsoft.com/office/drawing/2014/main" id="{34B3F0E1-F99C-F429-46C9-E398A6DEEA6C}"/>
+              </a:ext>
+            </a:extLst>
+          </p:cNvPr>
+          <p:cNvSpPr txBox="1"/>
+          <p:nvPr/>
+        </p:nvSpPr>
+        <p:spPr>
+          <a:xfrm>
+            <a:off x="400049" y="9407980"/>
+            <a:ext cx="15380724" cy="5509200"/>
+          </a:xfrm>
+          <a:prstGeom prst="rect">
+            <a:avLst/>
+          </a:prstGeom>
+          <a:noFill/>
+        </p:spPr>
+        <p:txBody>
+          <a:bodyPr wrap="square" rtlCol="0">
+            <a:spAutoFit/>
+          </a:bodyPr>
+          <a:lstStyle/>
+          <a:p>
+            <a:r>
+              <a:rPr lang="ko-KR" altLang="en-US" sz="3200" dirty="0">
                 <a:ea typeface="+mj-ea"/>
               </a:rPr>
-              <a:t>언리얼</a:t>
-            </a:r>
-            <a:r>
-              <a:rPr lang="ko-KR" altLang="en-US" sz="7200" b="1" dirty="0">
+              <a:t> 최근 전 세계 </a:t>
+            </a:r>
+            <a:r>
+              <a:rPr lang="en-US" altLang="ko-KR" sz="3200" dirty="0">
+                <a:ea typeface="+mj-ea"/>
+              </a:rPr>
+              <a:t>IT </a:t>
+            </a:r>
+            <a:r>
+              <a:rPr lang="ko-KR" altLang="en-US" sz="3200" dirty="0">
+                <a:ea typeface="+mj-ea"/>
+              </a:rPr>
+              <a:t>업계는 </a:t>
+            </a:r>
+            <a:r>
+              <a:rPr lang="en-US" altLang="ko-KR" sz="3200" dirty="0">
+                <a:ea typeface="+mj-ea"/>
+              </a:rPr>
+              <a:t>'</a:t>
+            </a:r>
+            <a:r>
+              <a:rPr lang="ko-KR" altLang="en-US" sz="3200" dirty="0">
+                <a:ea typeface="+mj-ea"/>
+              </a:rPr>
+              <a:t>개발자 채용 감소</a:t>
+            </a:r>
+            <a:r>
+              <a:rPr lang="en-US" altLang="ko-KR" sz="3200" dirty="0">
+                <a:ea typeface="+mj-ea"/>
+              </a:rPr>
+              <a:t>'</a:t>
+            </a:r>
+            <a:r>
+              <a:rPr lang="ko-KR" altLang="en-US" sz="3200" dirty="0">
+                <a:ea typeface="+mj-ea"/>
+              </a:rPr>
+              <a:t>와 </a:t>
+            </a:r>
+            <a:r>
+              <a:rPr lang="en-US" altLang="ko-KR" sz="3200" dirty="0">
+                <a:ea typeface="+mj-ea"/>
+              </a:rPr>
+              <a:t>'AI </a:t>
+            </a:r>
+            <a:r>
+              <a:rPr lang="ko-KR" altLang="en-US" sz="3200" dirty="0">
+                <a:ea typeface="+mj-ea"/>
+              </a:rPr>
+              <a:t>인재 수요 급증</a:t>
+            </a:r>
+            <a:r>
+              <a:rPr lang="en-US" altLang="ko-KR" sz="3200" dirty="0">
+                <a:ea typeface="+mj-ea"/>
+              </a:rPr>
+              <a:t>'</a:t>
+            </a:r>
+            <a:r>
+              <a:rPr lang="ko-KR" altLang="en-US" sz="3200" dirty="0">
+                <a:ea typeface="+mj-ea"/>
+              </a:rPr>
+              <a:t>이라는 구조적 전환기를 맞이하고 있다</a:t>
+            </a:r>
+            <a:r>
+              <a:rPr lang="en-US" altLang="ko-KR" sz="3200" dirty="0">
+                <a:ea typeface="+mj-ea"/>
+              </a:rPr>
+              <a:t>. 2021</a:t>
+            </a:r>
+            <a:r>
+              <a:rPr lang="ko-KR" altLang="en-US" sz="3200" dirty="0">
+                <a:ea typeface="+mj-ea"/>
+              </a:rPr>
+              <a:t>년 이후 개발자 수요는 둔화되었으며</a:t>
+            </a:r>
+            <a:r>
+              <a:rPr lang="en-US" altLang="ko-KR" sz="3200" dirty="0">
+                <a:ea typeface="+mj-ea"/>
+              </a:rPr>
+              <a:t>, 2022</a:t>
+            </a:r>
+            <a:r>
+              <a:rPr lang="ko-KR" altLang="en-US" sz="3200" dirty="0">
+                <a:ea typeface="+mj-ea"/>
+              </a:rPr>
+              <a:t>년부터 </a:t>
+            </a:r>
+            <a:r>
+              <a:rPr lang="en-US" altLang="ko-KR" sz="3200" dirty="0">
+                <a:ea typeface="+mj-ea"/>
+              </a:rPr>
+              <a:t>2024</a:t>
+            </a:r>
+            <a:r>
+              <a:rPr lang="ko-KR" altLang="en-US" sz="3200" dirty="0">
+                <a:ea typeface="+mj-ea"/>
+              </a:rPr>
+              <a:t>년 사이 전 세 계적으로 약 </a:t>
+            </a:r>
+            <a:r>
+              <a:rPr lang="en-US" altLang="ko-KR" sz="3200" dirty="0">
+                <a:ea typeface="+mj-ea"/>
+              </a:rPr>
+              <a:t>56</a:t>
+            </a:r>
+            <a:r>
+              <a:rPr lang="ko-KR" altLang="en-US" sz="3200" dirty="0">
+                <a:ea typeface="+mj-ea"/>
+              </a:rPr>
+              <a:t>만 명 이상의 </a:t>
+            </a:r>
+            <a:r>
+              <a:rPr lang="en-US" altLang="ko-KR" sz="3200" dirty="0">
+                <a:ea typeface="+mj-ea"/>
+              </a:rPr>
+              <a:t>IT </a:t>
+            </a:r>
+            <a:r>
+              <a:rPr lang="ko-KR" altLang="en-US" sz="3200" dirty="0">
+                <a:ea typeface="+mj-ea"/>
+              </a:rPr>
+              <a:t>인력이 감축되었다</a:t>
+            </a:r>
+            <a:r>
+              <a:rPr lang="en-US" altLang="ko-KR" sz="3200" dirty="0">
+                <a:ea typeface="+mj-ea"/>
+              </a:rPr>
+              <a:t>.</a:t>
+            </a:r>
+          </a:p>
+          <a:p>
+            <a:r>
+              <a:rPr lang="ko-KR" altLang="en-US" sz="3200" dirty="0">
+                <a:ea typeface="+mj-ea"/>
+              </a:rPr>
+              <a:t> 이러한 흐름은 게임 업계에도 직결되어</a:t>
+            </a:r>
+            <a:r>
+              <a:rPr lang="en-US" altLang="ko-KR" sz="3200" dirty="0">
+                <a:ea typeface="+mj-ea"/>
+              </a:rPr>
+              <a:t>, </a:t>
+            </a:r>
+            <a:r>
+              <a:rPr lang="ko-KR" altLang="en-US" sz="3200" dirty="0">
+                <a:ea typeface="+mj-ea"/>
+              </a:rPr>
+              <a:t>신입 개발자의 진입 장벽은 높아지는 반면 </a:t>
+            </a:r>
+            <a:r>
+              <a:rPr lang="en-US" altLang="ko-KR" sz="3200" dirty="0">
+                <a:ea typeface="+mj-ea"/>
+              </a:rPr>
+              <a:t>LLM</a:t>
+            </a:r>
+            <a:r>
+              <a:rPr lang="ko-KR" altLang="en-US" sz="3200" dirty="0">
+                <a:ea typeface="+mj-ea"/>
+              </a:rPr>
+              <a:t>을 도구로 활용해 고도의 설계를 수행할 수 있는 능력은 소규모 개발 환경에서 생존을 위한 필수 역량이 되고 있다</a:t>
+            </a:r>
+            <a:r>
+              <a:rPr lang="en-US" altLang="ko-KR" sz="3200" dirty="0">
+                <a:ea typeface="+mj-ea"/>
+              </a:rPr>
+              <a:t>.</a:t>
+            </a:r>
+            <a:r>
+              <a:rPr lang="ko-KR" altLang="en-US" sz="3200" dirty="0">
+                <a:ea typeface="+mj-ea"/>
+              </a:rPr>
+              <a:t> </a:t>
+            </a:r>
+          </a:p>
+          <a:p>
+            <a:r>
+              <a:rPr lang="en-US" altLang="ko-KR" sz="3200" dirty="0">
+                <a:ea typeface="+mj-ea"/>
+              </a:rPr>
+              <a:t> 2020</a:t>
+            </a:r>
+            <a:r>
+              <a:rPr lang="ko-KR" altLang="en-US" sz="3200" dirty="0">
+                <a:ea typeface="+mj-ea"/>
+              </a:rPr>
+              <a:t>년 </a:t>
+            </a:r>
+            <a:r>
+              <a:rPr lang="en-US" altLang="ko-KR" sz="3200" dirty="0">
+                <a:ea typeface="+mj-ea"/>
+              </a:rPr>
+              <a:t>GPT-3</a:t>
+            </a:r>
+            <a:r>
+              <a:rPr lang="ko-KR" altLang="en-US" sz="3200" dirty="0">
+                <a:ea typeface="+mj-ea"/>
+              </a:rPr>
+              <a:t>의 등장을 기점으로 시작된 코딩 보조 능력은 </a:t>
+            </a:r>
+            <a:r>
+              <a:rPr lang="en-US" altLang="ko-KR" sz="3200" dirty="0">
+                <a:ea typeface="+mj-ea"/>
+              </a:rPr>
+              <a:t>2026</a:t>
+            </a:r>
+            <a:r>
+              <a:rPr lang="ko-KR" altLang="en-US" sz="3200" dirty="0">
+                <a:ea typeface="+mj-ea"/>
+              </a:rPr>
+              <a:t>년 현재 </a:t>
+            </a:r>
+            <a:r>
+              <a:rPr lang="en-US" altLang="ko-KR" sz="3200" dirty="0">
+                <a:ea typeface="+mj-ea"/>
+              </a:rPr>
+              <a:t>Claude Opus 4.5 </a:t>
+            </a:r>
+            <a:r>
+              <a:rPr lang="ko-KR" altLang="en-US" sz="3200" dirty="0">
+                <a:ea typeface="+mj-ea"/>
+              </a:rPr>
+              <a:t>및 </a:t>
+            </a:r>
+            <a:r>
+              <a:rPr lang="en-US" altLang="ko-KR" sz="3200" dirty="0">
+                <a:ea typeface="+mj-ea"/>
+              </a:rPr>
+              <a:t>GPT-5.4</a:t>
+            </a:r>
+            <a:r>
+              <a:rPr lang="ko-KR" altLang="en-US" sz="3200" dirty="0">
+                <a:ea typeface="+mj-ea"/>
+              </a:rPr>
+              <a:t>와 같은 모델들이 </a:t>
+            </a:r>
+            <a:r>
+              <a:rPr lang="en-US" altLang="ko-KR" sz="3200" dirty="0">
+                <a:ea typeface="+mj-ea"/>
+              </a:rPr>
+              <a:t>SWE- bench Verified</a:t>
+            </a:r>
+            <a:r>
+              <a:rPr lang="ko-KR" altLang="en-US" sz="3200" dirty="0">
+                <a:ea typeface="+mj-ea"/>
+              </a:rPr>
+              <a:t>에서 </a:t>
+            </a:r>
+            <a:r>
+              <a:rPr lang="en-US" altLang="ko-KR" sz="3200" dirty="0">
+                <a:ea typeface="+mj-ea"/>
+              </a:rPr>
+              <a:t>80%, </a:t>
+            </a:r>
+            <a:r>
+              <a:rPr lang="en-US" altLang="ko-KR" sz="3200" dirty="0" err="1">
+                <a:ea typeface="+mj-ea"/>
+              </a:rPr>
+              <a:t>HumanEval</a:t>
+            </a:r>
+            <a:r>
+              <a:rPr lang="ko-KR" altLang="en-US" sz="3200" dirty="0">
+                <a:ea typeface="+mj-ea"/>
+              </a:rPr>
+              <a:t>에서 </a:t>
+            </a:r>
+            <a:r>
+              <a:rPr lang="en-US" altLang="ko-KR" sz="3200" dirty="0">
+                <a:ea typeface="+mj-ea"/>
+              </a:rPr>
+              <a:t>95% </a:t>
+            </a:r>
+            <a:r>
+              <a:rPr lang="ko-KR" altLang="en-US" sz="3200" dirty="0">
+                <a:ea typeface="+mj-ea"/>
+              </a:rPr>
+              <a:t>이상의 </a:t>
+            </a:r>
+            <a:r>
+              <a:rPr lang="ko-KR" altLang="en-US" sz="3200" dirty="0" err="1">
+                <a:ea typeface="+mj-ea"/>
+              </a:rPr>
+              <a:t>정답률을</a:t>
+            </a:r>
+            <a:r>
+              <a:rPr lang="ko-KR" altLang="en-US" sz="3200" dirty="0">
+                <a:ea typeface="+mj-ea"/>
+              </a:rPr>
+              <a:t> 기록하며 포화 상태에 이르렀다</a:t>
+            </a:r>
+            <a:r>
+              <a:rPr lang="en-US" altLang="ko-KR" sz="3200" dirty="0">
+                <a:ea typeface="+mj-ea"/>
+              </a:rPr>
+              <a:t>. </a:t>
+            </a:r>
+          </a:p>
+          <a:p>
+            <a:r>
+              <a:rPr lang="ko-KR" altLang="en-US" sz="3200" dirty="0">
+                <a:ea typeface="+mj-ea"/>
+              </a:rPr>
+              <a:t> 이제 </a:t>
+            </a:r>
+            <a:r>
+              <a:rPr lang="en-US" altLang="ko-KR" sz="3200" dirty="0">
+                <a:ea typeface="+mj-ea"/>
+              </a:rPr>
+              <a:t>LLM</a:t>
+            </a:r>
+            <a:r>
+              <a:rPr lang="ko-KR" altLang="en-US" sz="3200" dirty="0">
+                <a:ea typeface="+mj-ea"/>
+              </a:rPr>
+              <a:t>은 단순한 </a:t>
+            </a:r>
+            <a:r>
+              <a:rPr lang="en-US" altLang="ko-KR" sz="3200" dirty="0">
+                <a:ea typeface="+mj-ea"/>
+              </a:rPr>
+              <a:t>'</a:t>
+            </a:r>
+            <a:r>
+              <a:rPr lang="ko-KR" altLang="en-US" sz="3200" dirty="0">
+                <a:ea typeface="+mj-ea"/>
+              </a:rPr>
+              <a:t>코드 자동 완성</a:t>
+            </a:r>
+            <a:r>
+              <a:rPr lang="en-US" altLang="ko-KR" sz="3200" dirty="0">
+                <a:ea typeface="+mj-ea"/>
+              </a:rPr>
+              <a:t>'</a:t>
+            </a:r>
+            <a:r>
+              <a:rPr lang="ko-KR" altLang="en-US" sz="3200" dirty="0">
+                <a:ea typeface="+mj-ea"/>
+              </a:rPr>
+              <a:t>을 넘어</a:t>
+            </a:r>
+            <a:r>
+              <a:rPr lang="en-US" altLang="ko-KR" sz="3200" dirty="0">
+                <a:ea typeface="+mj-ea"/>
+              </a:rPr>
+              <a:t>, </a:t>
+            </a:r>
+            <a:r>
+              <a:rPr lang="ko-KR" altLang="en-US" sz="3200" dirty="0">
+                <a:ea typeface="+mj-ea"/>
+              </a:rPr>
+              <a:t>개발자의 자연어 의도를 이해하고 복잡한 아키텍처를 설계하는 이른바 </a:t>
+            </a:r>
+            <a:r>
+              <a:rPr lang="en-US" altLang="ko-KR" sz="3200" dirty="0">
+                <a:ea typeface="+mj-ea"/>
+              </a:rPr>
+              <a:t>'</a:t>
+            </a:r>
+            <a:r>
+              <a:rPr lang="ko-KR" altLang="en-US" sz="3200" dirty="0" err="1">
+                <a:ea typeface="+mj-ea"/>
+              </a:rPr>
+              <a:t>바이브</a:t>
+            </a:r>
+            <a:r>
+              <a:rPr lang="ko-KR" altLang="en-US" sz="3200" dirty="0">
+                <a:ea typeface="+mj-ea"/>
+              </a:rPr>
+              <a:t> 코딩</a:t>
+            </a:r>
+            <a:r>
+              <a:rPr lang="en-US" altLang="ko-KR" sz="3200" dirty="0">
+                <a:ea typeface="+mj-ea"/>
+              </a:rPr>
+              <a:t>’ </a:t>
+            </a:r>
+            <a:r>
+              <a:rPr lang="ko-KR" altLang="en-US" sz="3200" dirty="0">
+                <a:ea typeface="+mj-ea"/>
+              </a:rPr>
+              <a:t>패러다임을 형성하고 있다</a:t>
+            </a:r>
+            <a:r>
+              <a:rPr lang="en-US" altLang="ko-KR" sz="3200" dirty="0">
+                <a:ea typeface="+mj-ea"/>
+              </a:rPr>
+              <a:t>. </a:t>
+            </a:r>
+            <a:endParaRPr lang="ko-KR" altLang="en-US" sz="3200" dirty="0">
+              <a:ea typeface="+mj-ea"/>
+            </a:endParaRPr>
+          </a:p>
+        </p:txBody>
+      </p:sp>
+      <p:sp>
+        <p:nvSpPr>
+          <p:cNvPr id="16" name="직사각형 15">
+            <a:extLst>
+              <a:ext uri="{FF2B5EF4-FFF2-40B4-BE49-F238E27FC236}">
+                <a16:creationId xmlns:a16="http://schemas.microsoft.com/office/drawing/2014/main" id="{E10A15FF-F727-D119-EAC2-7329FEF0AEEF}"/>
+              </a:ext>
+            </a:extLst>
+          </p:cNvPr>
+          <p:cNvSpPr/>
+          <p:nvPr/>
+        </p:nvSpPr>
+        <p:spPr>
+          <a:xfrm>
+            <a:off x="400049" y="15454188"/>
+            <a:ext cx="15380724" cy="1353835"/>
+          </a:xfrm>
+          <a:prstGeom prst="rect">
+            <a:avLst/>
+          </a:prstGeom>
+          <a:ln>
+            <a:noFill/>
+          </a:ln>
+        </p:spPr>
+        <p:style>
+          <a:lnRef idx="2">
+            <a:schemeClr val="accent1">
+              <a:shade val="15000"/>
+            </a:schemeClr>
+          </a:lnRef>
+          <a:fillRef idx="1">
+            <a:schemeClr val="accent1"/>
+          </a:fillRef>
+          <a:effectRef idx="0">
+            <a:schemeClr val="accent1"/>
+          </a:effectRef>
+          <a:fontRef idx="minor">
+            <a:schemeClr val="lt1"/>
+          </a:fontRef>
+        </p:style>
+        <p:txBody>
+          <a:bodyPr rtlCol="0" anchor="ctr"/>
+          <a:lstStyle/>
+          <a:p>
+            <a:pPr algn="ctr"/>
+            <a:endParaRPr lang="ko-KR" altLang="en-US" dirty="0"/>
+          </a:p>
+        </p:txBody>
+      </p:sp>
+      <p:sp>
+        <p:nvSpPr>
+          <p:cNvPr id="17" name="TextBox 16">
+            <a:extLst>
+              <a:ext uri="{FF2B5EF4-FFF2-40B4-BE49-F238E27FC236}">
+                <a16:creationId xmlns:a16="http://schemas.microsoft.com/office/drawing/2014/main" id="{43FCAD09-2321-B5A1-7842-97150CAE5487}"/>
+              </a:ext>
+            </a:extLst>
+          </p:cNvPr>
+          <p:cNvSpPr txBox="1"/>
+          <p:nvPr/>
+        </p:nvSpPr>
+        <p:spPr>
+          <a:xfrm>
+            <a:off x="747852" y="15715606"/>
+            <a:ext cx="4296094" cy="830997"/>
+          </a:xfrm>
+          <a:prstGeom prst="rect">
+            <a:avLst/>
+          </a:prstGeom>
+          <a:noFill/>
+        </p:spPr>
+        <p:txBody>
+          <a:bodyPr wrap="square" rtlCol="0">
+            <a:spAutoFit/>
+          </a:bodyPr>
+          <a:lstStyle/>
+          <a:p>
+            <a:r>
+              <a:rPr lang="ko-KR" altLang="en-US" sz="4800" b="1" dirty="0">
                 <a:solidFill>
-                  <a:schemeClr val="bg1"/>
+                  <a:schemeClr val="bg1">
+                    <a:lumMod val="95000"/>
+                  </a:schemeClr>
                 </a:solidFill>
                 <a:effectLst>
                   <a:outerShdw blurRad="38100" dist="38100" dir="2700000" algn="tl">
@@ -3163,15 +5336,187 @@
                     </a:srgbClr>
                   </a:outerShdw>
                 </a:effectLst>
-                <a:latin typeface="+mj-ea"/>
-                <a:ea typeface="+mj-ea"/>
-              </a:rPr>
+              </a:rPr>
+              <a:t>연구 목적</a:t>
+            </a:r>
+          </a:p>
+        </p:txBody>
+      </p:sp>
+      <p:sp>
+        <p:nvSpPr>
+          <p:cNvPr id="18" name="TextBox 17">
+            <a:extLst>
+              <a:ext uri="{FF2B5EF4-FFF2-40B4-BE49-F238E27FC236}">
+                <a16:creationId xmlns:a16="http://schemas.microsoft.com/office/drawing/2014/main" id="{3CC33C4B-A0F5-AFDE-7007-236ACF2CF260}"/>
+              </a:ext>
+            </a:extLst>
+          </p:cNvPr>
+          <p:cNvSpPr txBox="1"/>
+          <p:nvPr/>
+        </p:nvSpPr>
+        <p:spPr>
+          <a:xfrm>
+            <a:off x="400046" y="17130997"/>
+            <a:ext cx="15380723" cy="1569660"/>
+          </a:xfrm>
+          <a:prstGeom prst="rect">
+            <a:avLst/>
+          </a:prstGeom>
+          <a:noFill/>
+        </p:spPr>
+        <p:txBody>
+          <a:bodyPr wrap="square" rtlCol="0">
+            <a:spAutoFit/>
+          </a:bodyPr>
+          <a:lstStyle/>
+          <a:p>
+            <a:r>
+              <a:rPr lang="ko-KR" altLang="en-US" sz="3200" dirty="0"/>
+              <a:t>본 연구의 목적은 </a:t>
+            </a:r>
+            <a:r>
+              <a:rPr lang="ko-KR" altLang="en-US" sz="3200" dirty="0" err="1"/>
+              <a:t>언리얼</a:t>
+            </a:r>
+            <a:r>
+              <a:rPr lang="ko-KR" altLang="en-US" sz="3200" dirty="0"/>
               <a:t> 엔진 </a:t>
             </a:r>
             <a:r>
-              <a:rPr lang="en-US" altLang="ko-KR" sz="7200" b="1" dirty="0">
+              <a:rPr lang="en-US" altLang="ko-KR" sz="3200" dirty="0"/>
+              <a:t>C++</a:t>
+            </a:r>
+            <a:r>
+              <a:rPr lang="ko-KR" altLang="en-US" sz="3200" dirty="0"/>
+              <a:t>라는 높은 기술적 진입 장벽을 가진 환경에서</a:t>
+            </a:r>
+            <a:r>
+              <a:rPr lang="en-US" altLang="ko-KR" sz="3200" dirty="0"/>
+              <a:t>, LLM </a:t>
+            </a:r>
+            <a:r>
+              <a:rPr lang="ko-KR" altLang="en-US" sz="3200" dirty="0"/>
+              <a:t>기반의 </a:t>
+            </a:r>
+            <a:r>
+              <a:rPr lang="en-US" altLang="ko-KR" sz="3200" dirty="0"/>
+              <a:t>'</a:t>
+            </a:r>
+            <a:r>
+              <a:rPr lang="ko-KR" altLang="en-US" sz="3200" dirty="0" err="1"/>
+              <a:t>바이브</a:t>
+            </a:r>
+            <a:r>
+              <a:rPr lang="ko-KR" altLang="en-US" sz="3200" dirty="0"/>
+              <a:t> 코딩</a:t>
+            </a:r>
+            <a:r>
+              <a:rPr lang="en-US" altLang="ko-KR" sz="3200" dirty="0"/>
+              <a:t>'</a:t>
+            </a:r>
+            <a:r>
+              <a:rPr lang="ko-KR" altLang="en-US" sz="3200" dirty="0"/>
+              <a:t>이 소규모 게임 프로젝트의 생산 한계선을 어떻게 </a:t>
+            </a:r>
+            <a:r>
+              <a:rPr lang="ko-KR" altLang="en-US" sz="3200" dirty="0" err="1"/>
+              <a:t>확장시키는지</a:t>
+            </a:r>
+            <a:r>
+              <a:rPr lang="ko-KR" altLang="en-US" sz="3200" dirty="0"/>
+              <a:t> 규명하는 데 있다</a:t>
+            </a:r>
+            <a:r>
+              <a:rPr lang="en-US" altLang="ko-KR" sz="3200" dirty="0"/>
+              <a:t>. </a:t>
+            </a:r>
+            <a:endParaRPr lang="ko-KR" altLang="en-US" sz="3200" dirty="0"/>
+          </a:p>
+        </p:txBody>
+      </p:sp>
+      <p:sp>
+        <p:nvSpPr>
+          <p:cNvPr id="19" name="직사각형 18">
+            <a:extLst>
+              <a:ext uri="{FF2B5EF4-FFF2-40B4-BE49-F238E27FC236}">
+                <a16:creationId xmlns:a16="http://schemas.microsoft.com/office/drawing/2014/main" id="{E9EB9591-1F82-1AB2-ED2C-F799CCB3C2CD}"/>
+              </a:ext>
+            </a:extLst>
+          </p:cNvPr>
+          <p:cNvSpPr/>
+          <p:nvPr/>
+        </p:nvSpPr>
+        <p:spPr>
+          <a:xfrm>
+            <a:off x="400047" y="19237665"/>
+            <a:ext cx="15380724" cy="1353835"/>
+          </a:xfrm>
+          <a:prstGeom prst="rect">
+            <a:avLst/>
+          </a:prstGeom>
+          <a:ln>
+            <a:noFill/>
+          </a:ln>
+        </p:spPr>
+        <p:style>
+          <a:lnRef idx="2">
+            <a:schemeClr val="accent1">
+              <a:shade val="15000"/>
+            </a:schemeClr>
+          </a:lnRef>
+          <a:fillRef idx="1">
+            <a:schemeClr val="accent1"/>
+          </a:fillRef>
+          <a:effectRef idx="0">
+            <a:schemeClr val="accent1"/>
+          </a:effectRef>
+          <a:fontRef idx="minor">
+            <a:schemeClr val="lt1"/>
+          </a:fontRef>
+        </p:style>
+        <p:txBody>
+          <a:bodyPr rtlCol="0" anchor="ctr"/>
+          <a:lstStyle/>
+          <a:p>
+            <a:pPr algn="ctr"/>
+            <a:endParaRPr lang="ko-KR" altLang="en-US" dirty="0"/>
+          </a:p>
+        </p:txBody>
+      </p:sp>
+      <p:sp>
+        <p:nvSpPr>
+          <p:cNvPr id="20" name="TextBox 19">
+            <a:extLst>
+              <a:ext uri="{FF2B5EF4-FFF2-40B4-BE49-F238E27FC236}">
+                <a16:creationId xmlns:a16="http://schemas.microsoft.com/office/drawing/2014/main" id="{2AA4148B-DE8F-4D42-946F-D59DC80CCE20}"/>
+              </a:ext>
+            </a:extLst>
+          </p:cNvPr>
+          <p:cNvSpPr txBox="1"/>
+          <p:nvPr/>
+        </p:nvSpPr>
+        <p:spPr>
+          <a:xfrm>
+            <a:off x="747851" y="19529556"/>
+            <a:ext cx="4296094" cy="830997"/>
+          </a:xfrm>
+          <a:prstGeom prst="rect">
+            <a:avLst/>
+          </a:prstGeom>
+          <a:noFill/>
+        </p:spPr>
+        <p:txBody>
+          <a:bodyPr wrap="square" rtlCol="0">
+            <a:spAutoFit/>
+          </a:bodyPr>
+          <a:lstStyle/>
+          <a:p>
+            <a:r>
+              <a:rPr lang="ko-KR" altLang="en-US" sz="4800" b="1" dirty="0">
                 <a:solidFill>
-                  <a:schemeClr val="bg1"/>
+                  <a:schemeClr val="bg1">
+                    <a:lumMod val="95000"/>
+                  </a:schemeClr>
                 </a:solidFill>
                 <a:effectLst>
                   <a:outerShdw blurRad="38100" dist="38100" dir="2700000" algn="tl">
@@ -3180,15 +5525,255 @@
                     </a:srgbClr>
                   </a:outerShdw>
                 </a:effectLst>
-                <a:latin typeface="+mj-ea"/>
-                <a:ea typeface="+mj-ea"/>
-              </a:rPr>
-              <a:t>C++ </a:t>
-            </a:r>
-            <a:r>
-              <a:rPr lang="ko-KR" altLang="en-US" sz="7200" b="1" dirty="0">
+              </a:rPr>
+              <a:t>연구 방법</a:t>
+            </a:r>
+          </a:p>
+        </p:txBody>
+      </p:sp>
+      <p:sp>
+        <p:nvSpPr>
+          <p:cNvPr id="21" name="TextBox 20">
+            <a:extLst>
+              <a:ext uri="{FF2B5EF4-FFF2-40B4-BE49-F238E27FC236}">
+                <a16:creationId xmlns:a16="http://schemas.microsoft.com/office/drawing/2014/main" id="{3262513C-9812-2017-89B7-8B41FDD40FA8}"/>
+              </a:ext>
+            </a:extLst>
+          </p:cNvPr>
+          <p:cNvSpPr txBox="1"/>
+          <p:nvPr/>
+        </p:nvSpPr>
+        <p:spPr>
+          <a:xfrm>
+            <a:off x="400046" y="20914474"/>
+            <a:ext cx="15380723" cy="5616922"/>
+          </a:xfrm>
+          <a:prstGeom prst="rect">
+            <a:avLst/>
+          </a:prstGeom>
+          <a:noFill/>
+        </p:spPr>
+        <p:txBody>
+          <a:bodyPr wrap="square" rtlCol="0">
+            <a:spAutoFit/>
+          </a:bodyPr>
+          <a:lstStyle/>
+          <a:p>
+            <a:pPr marL="914400" lvl="1" indent="-457200">
+              <a:lnSpc>
+                <a:spcPct val="150000"/>
+              </a:lnSpc>
+              <a:buFont typeface="Wingdings" panose="05000000000000000000" pitchFamily="2" charset="2"/>
+              <a:buChar char="§"/>
+            </a:pPr>
+            <a:r>
+              <a:rPr lang="ko-KR" altLang="en-US" sz="3600" b="1" dirty="0"/>
+              <a:t>기초 공수</a:t>
+            </a:r>
+            <a:r>
+              <a:rPr lang="en-US" altLang="ko-KR" sz="3600" b="1" dirty="0"/>
+              <a:t>(Baseline) </a:t>
+            </a:r>
+            <a:r>
+              <a:rPr lang="ko-KR" altLang="en-US" sz="3600" b="1" dirty="0"/>
+              <a:t>대비 분석</a:t>
+            </a:r>
+            <a:endParaRPr lang="en-US" altLang="ko-KR" sz="3600" b="1" dirty="0"/>
+          </a:p>
+          <a:p>
+            <a:pPr lvl="1">
+              <a:lnSpc>
+                <a:spcPct val="150000"/>
+              </a:lnSpc>
+            </a:pPr>
+            <a:r>
+              <a:rPr lang="en-US" altLang="ko-KR" sz="3200" dirty="0"/>
+              <a:t>LLM</a:t>
+            </a:r>
+            <a:r>
+              <a:rPr lang="ko-KR" altLang="en-US" sz="3200" dirty="0"/>
+              <a:t>의 보조 없이 진행되었을 때의 예상 소요 시간과 실제 구현 시간을 비교한다</a:t>
+            </a:r>
+            <a:r>
+              <a:rPr lang="en-US" altLang="ko-KR" sz="3200" dirty="0"/>
+              <a:t>.</a:t>
+            </a:r>
+            <a:r>
+              <a:rPr lang="ko-KR" altLang="en-US" sz="3200" dirty="0"/>
+              <a:t> </a:t>
+            </a:r>
+            <a:endParaRPr lang="en-US" altLang="ko-KR" sz="3200" dirty="0"/>
+          </a:p>
+          <a:p>
+            <a:endParaRPr lang="en-US" altLang="ko-KR" sz="1050" b="1" dirty="0"/>
+          </a:p>
+          <a:p>
+            <a:pPr marL="914400" lvl="1" indent="-457200">
+              <a:lnSpc>
+                <a:spcPct val="150000"/>
+              </a:lnSpc>
+              <a:buFont typeface="Wingdings" panose="05000000000000000000" pitchFamily="2" charset="2"/>
+              <a:buChar char="§"/>
+            </a:pPr>
+            <a:r>
+              <a:rPr lang="ko-KR" altLang="en-US" sz="3600" b="1" dirty="0"/>
+              <a:t>기술 장벽 극복 사례 연구</a:t>
+            </a:r>
+            <a:endParaRPr lang="en-US" altLang="ko-KR" sz="3600" b="1" dirty="0"/>
+          </a:p>
+          <a:p>
+            <a:pPr lvl="1"/>
+            <a:r>
+              <a:rPr lang="ko-KR" altLang="en-US" sz="3200" dirty="0"/>
+              <a:t>개발자의 기존 숙련도만으로는 장시간이 소요되었을 작업을 </a:t>
+            </a:r>
+            <a:r>
+              <a:rPr lang="en-US" altLang="ko-KR" sz="3200" dirty="0"/>
+              <a:t>LLM</a:t>
+            </a:r>
+            <a:r>
+              <a:rPr lang="ko-KR" altLang="en-US" sz="3200" dirty="0"/>
+              <a:t>의 아키텍처 가이드를 통해 해결한 사례를 분석한다</a:t>
+            </a:r>
+            <a:r>
+              <a:rPr lang="en-US" altLang="ko-KR" sz="3200" dirty="0"/>
+              <a:t>.</a:t>
+            </a:r>
+          </a:p>
+          <a:p>
+            <a:pPr marL="1485900" lvl="2" indent="-571500">
+              <a:buFontTx/>
+              <a:buChar char="-"/>
+            </a:pPr>
+            <a:endParaRPr lang="ko-KR" altLang="en-US" sz="1050" dirty="0"/>
+          </a:p>
+          <a:p>
+            <a:pPr marL="914400" lvl="1" indent="-457200">
+              <a:lnSpc>
+                <a:spcPct val="150000"/>
+              </a:lnSpc>
+              <a:buFont typeface="Wingdings" panose="05000000000000000000" pitchFamily="2" charset="2"/>
+              <a:buChar char="§"/>
+            </a:pPr>
+            <a:r>
+              <a:rPr lang="ko-KR" altLang="en-US" sz="3600" b="1" dirty="0"/>
+              <a:t>실제 사례 기반 분석</a:t>
+            </a:r>
+            <a:endParaRPr lang="en-US" altLang="ko-KR" sz="3600" b="1" dirty="0"/>
+          </a:p>
+          <a:p>
+            <a:pPr lvl="1"/>
+            <a:r>
+              <a:rPr lang="ko-KR" altLang="en-US" sz="3200" dirty="0"/>
+              <a:t>본 연구팀의 졸업작품 </a:t>
+            </a:r>
+            <a:r>
+              <a:rPr lang="en-US" altLang="ko-KR" sz="3200" dirty="0"/>
+              <a:t>'Containment Cleanup Detail' </a:t>
+            </a:r>
+            <a:r>
+              <a:rPr lang="ko-KR" altLang="en-US" sz="3200" dirty="0"/>
+              <a:t>개발 과정 중 발생한 구체적인 에피소드 사례를 들어 </a:t>
+            </a:r>
+            <a:r>
+              <a:rPr lang="en-US" altLang="ko-KR" sz="3200" dirty="0"/>
+              <a:t>LLM</a:t>
+            </a:r>
+            <a:r>
+              <a:rPr lang="ko-KR" altLang="en-US" sz="3200" dirty="0"/>
+              <a:t>이 미친 영향을 서술한다</a:t>
+            </a:r>
+            <a:r>
+              <a:rPr lang="en-US" altLang="ko-KR" sz="3200" dirty="0"/>
+              <a:t>.</a:t>
+            </a:r>
+            <a:endParaRPr lang="ko-KR" altLang="en-US" sz="3200" dirty="0"/>
+          </a:p>
+        </p:txBody>
+      </p:sp>
+      <p:sp>
+        <p:nvSpPr>
+          <p:cNvPr id="26" name="직사각형 25">
+            <a:extLst>
+              <a:ext uri="{FF2B5EF4-FFF2-40B4-BE49-F238E27FC236}">
+                <a16:creationId xmlns:a16="http://schemas.microsoft.com/office/drawing/2014/main" id="{921EDCD8-F3DB-D4A3-62F3-858D3745E5A3}"/>
+              </a:ext>
+            </a:extLst>
+          </p:cNvPr>
+          <p:cNvSpPr/>
+          <p:nvPr/>
+        </p:nvSpPr>
+        <p:spPr>
+          <a:xfrm>
+            <a:off x="400045" y="26854370"/>
+            <a:ext cx="15380724" cy="1353835"/>
+          </a:xfrm>
+          <a:prstGeom prst="rect">
+            <a:avLst/>
+          </a:prstGeom>
+          <a:ln>
+            <a:noFill/>
+          </a:ln>
+        </p:spPr>
+        <p:style>
+          <a:lnRef idx="2">
+            <a:schemeClr val="accent1">
+              <a:shade val="15000"/>
+            </a:schemeClr>
+          </a:lnRef>
+          <a:fillRef idx="1">
+            <a:schemeClr val="accent1"/>
+          </a:fillRef>
+          <a:effectRef idx="0">
+            <a:schemeClr val="accent1"/>
+          </a:effectRef>
+          <a:fontRef idx="minor">
+            <a:schemeClr val="lt1"/>
+          </a:fontRef>
+        </p:style>
+        <p:txBody>
+          <a:bodyPr rtlCol="0" anchor="ctr"/>
+          <a:lstStyle/>
+          <a:p>
+            <a:pPr algn="ctr"/>
+            <a:endParaRPr lang="ko-KR" altLang="en-US" dirty="0"/>
+          </a:p>
+        </p:txBody>
+      </p:sp>
+      <p:sp>
+        <p:nvSpPr>
+          <p:cNvPr id="27" name="TextBox 26">
+            <a:extLst>
+              <a:ext uri="{FF2B5EF4-FFF2-40B4-BE49-F238E27FC236}">
+                <a16:creationId xmlns:a16="http://schemas.microsoft.com/office/drawing/2014/main" id="{21075576-21D5-05E7-4A68-233FAA7DE201}"/>
+              </a:ext>
+            </a:extLst>
+          </p:cNvPr>
+          <p:cNvSpPr txBox="1"/>
+          <p:nvPr/>
+        </p:nvSpPr>
+        <p:spPr>
+          <a:xfrm>
+            <a:off x="747847" y="27115788"/>
+            <a:ext cx="5595801" cy="830997"/>
+          </a:xfrm>
+          <a:prstGeom prst="rect">
+            <a:avLst/>
+          </a:prstGeom>
+          <a:noFill/>
+        </p:spPr>
+        <p:txBody>
+          <a:bodyPr wrap="square" rtlCol="0">
+            <a:spAutoFit/>
+          </a:bodyPr>
+          <a:lstStyle/>
+          <a:p>
+            <a:r>
+              <a:rPr lang="ko-KR" altLang="en-US" sz="4800" b="1" dirty="0">
                 <a:solidFill>
-                  <a:schemeClr val="bg1"/>
+                  <a:schemeClr val="bg1">
+                    <a:lumMod val="95000"/>
+                  </a:schemeClr>
                 </a:solidFill>
                 <a:effectLst>
                   <a:outerShdw blurRad="38100" dist="38100" dir="2700000" algn="tl">
@@ -3197,15 +5782,96 @@
                     </a:srgbClr>
                   </a:outerShdw>
                 </a:effectLst>
-                <a:latin typeface="+mj-ea"/>
-                <a:ea typeface="+mj-ea"/>
-              </a:rPr>
-              <a:t>환경에서 </a:t>
-            </a:r>
-            <a:r>
-              <a:rPr lang="en-US" altLang="ko-KR" sz="7200" b="1" dirty="0">
+              </a:rPr>
+              <a:t>연구 내용 및 사례</a:t>
+            </a:r>
+          </a:p>
+        </p:txBody>
+      </p:sp>
+      <p:sp>
+        <p:nvSpPr>
+          <p:cNvPr id="29" name="타원 28">
+            <a:extLst>
+              <a:ext uri="{FF2B5EF4-FFF2-40B4-BE49-F238E27FC236}">
+                <a16:creationId xmlns:a16="http://schemas.microsoft.com/office/drawing/2014/main" id="{448A64C3-694A-7240-273F-1848AB41F054}"/>
+              </a:ext>
+            </a:extLst>
+          </p:cNvPr>
+          <p:cNvSpPr/>
+          <p:nvPr/>
+        </p:nvSpPr>
+        <p:spPr>
+          <a:xfrm>
+            <a:off x="400045" y="28534697"/>
+            <a:ext cx="900000" cy="900000"/>
+          </a:xfrm>
+          <a:prstGeom prst="ellipse">
+            <a:avLst/>
+          </a:prstGeom>
+          <a:ln>
+            <a:noFill/>
+          </a:ln>
+        </p:spPr>
+        <p:style>
+          <a:lnRef idx="2">
+            <a:schemeClr val="accent1">
+              <a:shade val="15000"/>
+            </a:schemeClr>
+          </a:lnRef>
+          <a:fillRef idx="1">
+            <a:schemeClr val="accent1"/>
+          </a:fillRef>
+          <a:effectRef idx="0">
+            <a:schemeClr val="accent1"/>
+          </a:effectRef>
+          <a:fontRef idx="minor">
+            <a:schemeClr val="lt1"/>
+          </a:fontRef>
+        </p:style>
+        <p:txBody>
+          <a:bodyPr rtlCol="0" anchor="ctr"/>
+          <a:lstStyle/>
+          <a:p>
+            <a:pPr algn="ctr"/>
+            <a:endParaRPr lang="ko-KR" altLang="en-US"/>
+          </a:p>
+        </p:txBody>
+      </p:sp>
+      <p:sp>
+        <p:nvSpPr>
+          <p:cNvPr id="31" name="TextBox 30">
+            <a:extLst>
+              <a:ext uri="{FF2B5EF4-FFF2-40B4-BE49-F238E27FC236}">
+                <a16:creationId xmlns:a16="http://schemas.microsoft.com/office/drawing/2014/main" id="{7B96CD93-21FD-5108-0375-4A9A6E0CFBC4}"/>
+              </a:ext>
+            </a:extLst>
+          </p:cNvPr>
+          <p:cNvSpPr txBox="1"/>
+          <p:nvPr/>
+        </p:nvSpPr>
+        <p:spPr>
+          <a:xfrm>
+            <a:off x="449082" y="28630754"/>
+            <a:ext cx="801925" cy="707886"/>
+          </a:xfrm>
+          <a:prstGeom prst="rect">
+            <a:avLst/>
+          </a:prstGeom>
+          <a:noFill/>
+        </p:spPr>
+        <p:txBody>
+          <a:bodyPr wrap="square" rtlCol="0">
+            <a:spAutoFit/>
+          </a:bodyPr>
+          <a:lstStyle/>
+          <a:p>
+            <a:pPr algn="ctr"/>
+            <a:r>
+              <a:rPr lang="en-US" altLang="ko-KR" sz="4000" b="1" dirty="0">
                 <a:solidFill>
-                  <a:schemeClr val="bg1"/>
+                  <a:schemeClr val="bg1">
+                    <a:lumMod val="95000"/>
+                  </a:schemeClr>
                 </a:solidFill>
                 <a:effectLst>
                   <a:outerShdw blurRad="38100" dist="38100" dir="2700000" algn="tl">
@@ -3214,31 +5880,14 @@
                     </a:srgbClr>
                   </a:outerShdw>
                 </a:effectLst>
-                <a:latin typeface="+mj-ea"/>
-                <a:ea typeface="+mj-ea"/>
-              </a:rPr>
-              <a:t>LLM</a:t>
-            </a:r>
-            <a:r>
-              <a:rPr lang="ko-KR" altLang="en-US" sz="7200" b="1" dirty="0">
-                <a:solidFill>
-                  <a:schemeClr val="bg1"/>
-                </a:solidFill>
-                <a:effectLst>
-                  <a:outerShdw blurRad="38100" dist="38100" dir="2700000" algn="tl">
-                    <a:srgbClr val="000000">
-                      <a:alpha val="43137"/>
-                    </a:srgbClr>
-                  </a:outerShdw>
-                </a:effectLst>
-                <a:latin typeface="+mj-ea"/>
-                <a:ea typeface="+mj-ea"/>
-              </a:rPr>
-              <a:t>을 활용한 소규모 게임 개발 효율성 연구</a:t>
-            </a:r>
-            <a:endParaRPr lang="en-US" altLang="ko-KR" sz="7200" b="1" dirty="0">
+              </a:rPr>
+              <a:t>1</a:t>
+            </a:r>
+            <a:endParaRPr lang="ko-KR" altLang="en-US" sz="4000" b="1" dirty="0">
               <a:solidFill>
-                <a:schemeClr val="bg1"/>
+                <a:schemeClr val="bg1">
+                  <a:lumMod val="95000"/>
+                </a:schemeClr>
               </a:solidFill>
               <a:effectLst>
                 <a:outerShdw blurRad="38100" dist="38100" dir="2700000" algn="tl">
@@ -3247,53 +5896,16 @@
                   </a:srgbClr>
                 </a:outerShdw>
               </a:effectLst>
-              <a:latin typeface="+mj-ea"/>
-              <a:ea typeface="+mj-ea"/>
             </a:endParaRPr>
           </a:p>
-          <a:p>
-            <a:endParaRPr lang="en-US" altLang="ko-KR" sz="2400" b="1" dirty="0">
-              <a:solidFill>
-                <a:schemeClr val="bg1"/>
-              </a:solidFill>
-              <a:effectLst>
-                <a:outerShdw blurRad="38100" dist="38100" dir="2700000" algn="tl">
-                  <a:srgbClr val="000000">
-                    <a:alpha val="43137"/>
-                  </a:srgbClr>
-                </a:outerShdw>
-              </a:effectLst>
-              <a:latin typeface="+mj-ea"/>
-              <a:ea typeface="+mj-ea"/>
-            </a:endParaRPr>
-          </a:p>
-          <a:p>
-            <a:r>
-              <a:rPr lang="ko-KR" altLang="en-US" sz="6000" b="1" dirty="0">
-                <a:solidFill>
-                  <a:schemeClr val="bg1"/>
-                </a:solidFill>
-                <a:effectLst>
-                  <a:outerShdw blurRad="38100" dist="38100" dir="2700000" algn="tl">
-                    <a:srgbClr val="000000">
-                      <a:alpha val="43137"/>
-                    </a:srgbClr>
-                  </a:outerShdw>
-                </a:effectLst>
-                <a:latin typeface="+mj-ea"/>
-                <a:ea typeface="+mj-ea"/>
-              </a:rPr>
-              <a:t>졸업작품 개발 사례를 중심으로 </a:t>
-            </a:r>
-          </a:p>
-        </p:txBody>
-      </p:sp>
-      <p:sp>
-        <p:nvSpPr>
-          <p:cNvPr id="7" name="TextBox 6">
+        </p:txBody>
+      </p:sp>
+      <p:sp>
+        <p:nvSpPr>
+          <p:cNvPr id="33" name="TextBox 32">
             <a:extLst>
               <a:ext uri="{FF2B5EF4-FFF2-40B4-BE49-F238E27FC236}">
-                <a16:creationId xmlns:a16="http://schemas.microsoft.com/office/drawing/2014/main" id="{BA701207-9B09-00EC-9C05-22CF08B52CB8}"/>
+                <a16:creationId xmlns:a16="http://schemas.microsoft.com/office/drawing/2014/main" id="{7D72EDA1-7417-29AD-648C-C5DD6167E1AF}"/>
               </a:ext>
             </a:extLst>
           </p:cNvPr>
@@ -3302,8 +5914,8 @@
         </p:nvSpPr>
         <p:spPr>
           <a:xfrm>
-            <a:off x="1725383" y="7684738"/>
-            <a:ext cx="11440887" cy="6093976"/>
+            <a:off x="1542882" y="28630754"/>
+            <a:ext cx="12564821" cy="707886"/>
           </a:xfrm>
           <a:prstGeom prst="rect">
             <a:avLst/>
@@ -3317,166 +5929,7 @@
           <a:lstStyle/>
           <a:p>
             <a:r>
-              <a:rPr lang="en-US" altLang="ko-KR" sz="5400" b="1" dirty="0">
-                <a:solidFill>
-                  <a:schemeClr val="bg1"/>
-                </a:solidFill>
-                <a:effectLst>
-                  <a:outerShdw blurRad="38100" dist="38100" dir="2700000" algn="tl">
-                    <a:srgbClr val="000000">
-                      <a:alpha val="43137"/>
-                    </a:srgbClr>
-                  </a:outerShdw>
-                </a:effectLst>
-              </a:rPr>
-              <a:t>Sung-Wook Cho</a:t>
-            </a:r>
-          </a:p>
-          <a:p>
-            <a:r>
-              <a:rPr lang="en-US" altLang="ko-KR" sz="5400" b="1" dirty="0">
-                <a:solidFill>
-                  <a:schemeClr val="bg1"/>
-                </a:solidFill>
-                <a:effectLst>
-                  <a:outerShdw blurRad="38100" dist="38100" dir="2700000" algn="tl">
-                    <a:srgbClr val="000000">
-                      <a:alpha val="43137"/>
-                    </a:srgbClr>
-                  </a:outerShdw>
-                </a:effectLst>
-              </a:rPr>
-              <a:t>Min-Woo Ji</a:t>
-            </a:r>
-          </a:p>
-          <a:p>
-            <a:r>
-              <a:rPr lang="en-US" altLang="ko-KR" sz="5400" b="1" dirty="0">
-                <a:solidFill>
-                  <a:schemeClr val="bg1"/>
-                </a:solidFill>
-                <a:effectLst>
-                  <a:outerShdw blurRad="38100" dist="38100" dir="2700000" algn="tl">
-                    <a:srgbClr val="000000">
-                      <a:alpha val="43137"/>
-                    </a:srgbClr>
-                  </a:outerShdw>
-                </a:effectLst>
-              </a:rPr>
-              <a:t>Daniel Kim</a:t>
-            </a:r>
-          </a:p>
-          <a:p>
-            <a:r>
-              <a:rPr lang="en-US" altLang="ko-KR" sz="5400" b="1" dirty="0">
-                <a:solidFill>
-                  <a:schemeClr val="bg1"/>
-                </a:solidFill>
-                <a:effectLst>
-                  <a:outerShdw blurRad="38100" dist="38100" dir="2700000" algn="tl">
-                    <a:srgbClr val="000000">
-                      <a:alpha val="43137"/>
-                    </a:srgbClr>
-                  </a:outerShdw>
-                </a:effectLst>
-              </a:rPr>
-              <a:t>Dae-Hyun Lee </a:t>
-            </a:r>
-          </a:p>
-          <a:p>
-            <a:endParaRPr lang="en-US" altLang="ko-KR" sz="5400" b="1" dirty="0">
-              <a:solidFill>
-                <a:schemeClr val="bg1"/>
-              </a:solidFill>
-              <a:effectLst>
-                <a:outerShdw blurRad="38100" dist="38100" dir="2700000" algn="tl">
-                  <a:srgbClr val="000000">
-                    <a:alpha val="43137"/>
-                  </a:srgbClr>
-                </a:outerShdw>
-              </a:effectLst>
-              <a:latin typeface="+mj-ea"/>
-              <a:ea typeface="+mj-ea"/>
-            </a:endParaRPr>
-          </a:p>
-          <a:p>
-            <a:r>
-              <a:rPr lang="en-US" altLang="ko-KR" sz="5400" b="1" dirty="0">
-                <a:solidFill>
-                  <a:schemeClr val="bg1"/>
-                </a:solidFill>
-                <a:effectLst>
-                  <a:outerShdw blurRad="38100" dist="38100" dir="2700000" algn="tl">
-                    <a:srgbClr val="000000">
-                      <a:alpha val="43137"/>
-                    </a:srgbClr>
-                  </a:outerShdw>
-                </a:effectLst>
-                <a:ea typeface="+mj-ea"/>
-              </a:rPr>
-              <a:t>Tech University of Korea Dept. </a:t>
-            </a:r>
-            <a:r>
-              <a:rPr lang="en-US" altLang="ko-KR" sz="5400" b="1" dirty="0">
-                <a:solidFill>
-                  <a:schemeClr val="bg1"/>
-                </a:solidFill>
-                <a:effectLst>
-                  <a:outerShdw blurRad="38100" dist="38100" dir="2700000" algn="tl">
-                    <a:srgbClr val="000000">
-                      <a:alpha val="43137"/>
-                    </a:srgbClr>
-                  </a:outerShdw>
-                </a:effectLst>
-              </a:rPr>
-              <a:t>of Game &amp; Multimedia Engineering </a:t>
-            </a:r>
-            <a:endParaRPr lang="ko-KR" altLang="en-US" sz="5400" b="1" dirty="0">
-              <a:solidFill>
-                <a:schemeClr val="bg1"/>
-              </a:solidFill>
-              <a:effectLst>
-                <a:outerShdw blurRad="38100" dist="38100" dir="2700000" algn="tl">
-                  <a:srgbClr val="000000">
-                    <a:alpha val="43137"/>
-                  </a:srgbClr>
-                </a:outerShdw>
-              </a:effectLst>
-              <a:ea typeface="+mj-ea"/>
-            </a:endParaRPr>
-          </a:p>
-        </p:txBody>
-      </p:sp>
-      <p:sp>
-        <p:nvSpPr>
-          <p:cNvPr id="10" name="TextBox 9">
-            <a:extLst>
-              <a:ext uri="{FF2B5EF4-FFF2-40B4-BE49-F238E27FC236}">
-                <a16:creationId xmlns:a16="http://schemas.microsoft.com/office/drawing/2014/main" id="{2A579419-6C8F-BDEC-E74D-20045CAF63CE}"/>
-              </a:ext>
-            </a:extLst>
-          </p:cNvPr>
-          <p:cNvSpPr txBox="1"/>
-          <p:nvPr/>
-        </p:nvSpPr>
-        <p:spPr>
-          <a:xfrm>
-            <a:off x="718454" y="16396486"/>
-            <a:ext cx="13454743" cy="923330"/>
-          </a:xfrm>
-          <a:prstGeom prst="rect">
-            <a:avLst/>
-          </a:prstGeom>
-          <a:noFill/>
-        </p:spPr>
-        <p:txBody>
-          <a:bodyPr wrap="square" rtlCol="0">
-            <a:spAutoFit/>
-          </a:bodyPr>
-          <a:lstStyle/>
-          <a:p>
-            <a:r>
-              <a:rPr lang="ko-KR" altLang="en-US" sz="5400" b="1" dirty="0">
+              <a:rPr lang="en-US" altLang="ko-KR" sz="4000" b="1" dirty="0">
                 <a:solidFill>
                   <a:schemeClr val="accent1">
                     <a:lumMod val="50000"/>
@@ -3490,9 +5943,94 @@
                   </a:outerShdw>
                 </a:effectLst>
               </a:rPr>
-              <a:t>연구 배경</a:t>
-            </a:r>
-            <a:endParaRPr lang="ko-KR" altLang="en-US" b="1" dirty="0">
+              <a:t>Chaos Destruction </a:t>
+            </a:r>
+            <a:r>
+              <a:rPr lang="ko-KR" altLang="en-US" sz="4000" b="1" dirty="0">
+                <a:solidFill>
+                  <a:schemeClr val="accent1">
+                    <a:lumMod val="50000"/>
+                  </a:schemeClr>
+                </a:solidFill>
+                <a:effectLst>
+                  <a:outerShdw blurRad="38100" dist="38100" dir="2700000" algn="tl">
+                    <a:srgbClr val="000000">
+                      <a:alpha val="43137"/>
+                    </a:srgbClr>
+                  </a:outerShdw>
+                </a:effectLst>
+              </a:rPr>
+              <a:t>기반 캐릭터 파편화</a:t>
+            </a:r>
+            <a:r>
+              <a:rPr lang="en-US" altLang="ko-KR" sz="4000" b="1" dirty="0">
+                <a:solidFill>
+                  <a:schemeClr val="accent1">
+                    <a:lumMod val="50000"/>
+                  </a:schemeClr>
+                </a:solidFill>
+                <a:effectLst>
+                  <a:outerShdw blurRad="38100" dist="38100" dir="2700000" algn="tl">
+                    <a:srgbClr val="000000">
+                      <a:alpha val="43137"/>
+                    </a:srgbClr>
+                  </a:outerShdw>
+                </a:effectLst>
+              </a:rPr>
+              <a:t> </a:t>
+            </a:r>
+            <a:r>
+              <a:rPr lang="ko-KR" altLang="en-US" sz="4000" b="1" dirty="0">
+                <a:solidFill>
+                  <a:schemeClr val="accent1">
+                    <a:lumMod val="50000"/>
+                  </a:schemeClr>
+                </a:solidFill>
+                <a:effectLst>
+                  <a:outerShdw blurRad="38100" dist="38100" dir="2700000" algn="tl">
+                    <a:srgbClr val="000000">
+                      <a:alpha val="43137"/>
+                    </a:srgbClr>
+                  </a:outerShdw>
+                </a:effectLst>
+              </a:rPr>
+              <a:t>및 </a:t>
+            </a:r>
+            <a:r>
+              <a:rPr lang="ko-KR" altLang="en-US" sz="4000" b="1" dirty="0" err="1">
+                <a:solidFill>
+                  <a:schemeClr val="accent1">
+                    <a:lumMod val="50000"/>
+                  </a:schemeClr>
+                </a:solidFill>
+                <a:effectLst>
+                  <a:outerShdw blurRad="38100" dist="38100" dir="2700000" algn="tl">
+                    <a:srgbClr val="000000">
+                      <a:alpha val="43137"/>
+                    </a:srgbClr>
+                  </a:outerShdw>
+                </a:effectLst>
+              </a:rPr>
+              <a:t>액터화</a:t>
+            </a:r>
+            <a:r>
+              <a:rPr lang="ko-KR" altLang="en-US" sz="4000" b="1" dirty="0">
+                <a:solidFill>
+                  <a:schemeClr val="accent1">
+                    <a:lumMod val="50000"/>
+                  </a:schemeClr>
+                </a:solidFill>
+                <a:effectLst>
+                  <a:outerShdw blurRad="38100" dist="38100" dir="2700000" algn="tl">
+                    <a:srgbClr val="000000">
+                      <a:alpha val="43137"/>
+                    </a:srgbClr>
+                  </a:outerShdw>
+                </a:effectLst>
+              </a:rPr>
+              <a:t> 시스템</a:t>
+            </a:r>
+            <a:endParaRPr lang="ko-KR" altLang="en-US" sz="4000" dirty="0">
               <a:solidFill>
                 <a:schemeClr val="accent1">
                   <a:lumMod val="50000"/>
@@ -3511,10 +6049,10 @@
       </p:sp>
       <p:sp>
         <p:nvSpPr>
-          <p:cNvPr id="11" name="TextBox 10">
+          <p:cNvPr id="42" name="TextBox 41">
             <a:extLst>
               <a:ext uri="{FF2B5EF4-FFF2-40B4-BE49-F238E27FC236}">
-                <a16:creationId xmlns:a16="http://schemas.microsoft.com/office/drawing/2014/main" id="{BB1C60FF-D576-DB29-9D6D-BCC410E425D8}"/>
+                <a16:creationId xmlns:a16="http://schemas.microsoft.com/office/drawing/2014/main" id="{01B77B5E-A771-BDD9-D14B-E0204474C91F}"/>
               </a:ext>
             </a:extLst>
           </p:cNvPr>
@@ -3523,8 +6061,8 @@
         </p:nvSpPr>
         <p:spPr>
           <a:xfrm>
-            <a:off x="718453" y="17673867"/>
-            <a:ext cx="13454743" cy="9325630"/>
+            <a:off x="400046" y="29683361"/>
+            <a:ext cx="15380722" cy="12749644"/>
           </a:xfrm>
           <a:prstGeom prst="rect">
             <a:avLst/>
@@ -3538,732 +6076,466 @@
           <a:lstStyle/>
           <a:p>
             <a:r>
-              <a:rPr lang="ko-KR" altLang="en-US" sz="4000" b="1" dirty="0">
-                <a:solidFill>
-                  <a:schemeClr val="tx2">
-                    <a:lumMod val="75000"/>
-                  </a:schemeClr>
-                </a:solidFill>
-                <a:ea typeface="+mj-ea"/>
-              </a:rPr>
-              <a:t>최근 전 세계 </a:t>
-            </a:r>
-            <a:r>
-              <a:rPr lang="en-US" altLang="ko-KR" sz="4000" b="1" dirty="0">
-                <a:solidFill>
-                  <a:schemeClr val="tx2">
-                    <a:lumMod val="75000"/>
-                  </a:schemeClr>
-                </a:solidFill>
-                <a:ea typeface="+mj-ea"/>
-              </a:rPr>
-              <a:t>IT </a:t>
-            </a:r>
-            <a:r>
-              <a:rPr lang="ko-KR" altLang="en-US" sz="4000" b="1" dirty="0">
-                <a:solidFill>
-                  <a:schemeClr val="tx2">
-                    <a:lumMod val="75000"/>
-                  </a:schemeClr>
-                </a:solidFill>
-                <a:ea typeface="+mj-ea"/>
-              </a:rPr>
-              <a:t>업계는 </a:t>
-            </a:r>
-            <a:r>
-              <a:rPr lang="en-US" altLang="ko-KR" sz="4000" b="1" dirty="0">
-                <a:solidFill>
-                  <a:schemeClr val="tx2">
-                    <a:lumMod val="75000"/>
-                  </a:schemeClr>
-                </a:solidFill>
-                <a:ea typeface="+mj-ea"/>
-              </a:rPr>
-              <a:t>'</a:t>
-            </a:r>
-            <a:r>
-              <a:rPr lang="ko-KR" altLang="en-US" sz="4000" b="1" dirty="0">
-                <a:solidFill>
-                  <a:schemeClr val="tx2">
-                    <a:lumMod val="75000"/>
-                  </a:schemeClr>
-                </a:solidFill>
-                <a:ea typeface="+mj-ea"/>
-              </a:rPr>
-              <a:t>개발자 채용 감소</a:t>
-            </a:r>
-            <a:r>
-              <a:rPr lang="en-US" altLang="ko-KR" sz="4000" b="1" dirty="0">
-                <a:solidFill>
-                  <a:schemeClr val="tx2">
-                    <a:lumMod val="75000"/>
-                  </a:schemeClr>
-                </a:solidFill>
-                <a:ea typeface="+mj-ea"/>
-              </a:rPr>
-              <a:t>'</a:t>
-            </a:r>
-            <a:r>
-              <a:rPr lang="ko-KR" altLang="en-US" sz="4000" b="1" dirty="0">
-                <a:solidFill>
-                  <a:schemeClr val="tx2">
-                    <a:lumMod val="75000"/>
-                  </a:schemeClr>
-                </a:solidFill>
-                <a:ea typeface="+mj-ea"/>
-              </a:rPr>
-              <a:t>와 </a:t>
-            </a:r>
-            <a:r>
-              <a:rPr lang="en-US" altLang="ko-KR" sz="4000" b="1" dirty="0">
-                <a:solidFill>
-                  <a:schemeClr val="tx2">
-                    <a:lumMod val="75000"/>
-                  </a:schemeClr>
-                </a:solidFill>
-                <a:ea typeface="+mj-ea"/>
-              </a:rPr>
-              <a:t>'AI </a:t>
-            </a:r>
-            <a:r>
-              <a:rPr lang="ko-KR" altLang="en-US" sz="4000" b="1" dirty="0">
-                <a:solidFill>
-                  <a:schemeClr val="tx2">
-                    <a:lumMod val="75000"/>
-                  </a:schemeClr>
-                </a:solidFill>
-                <a:ea typeface="+mj-ea"/>
-              </a:rPr>
-              <a:t>인재 수요 급증</a:t>
-            </a:r>
-            <a:r>
-              <a:rPr lang="en-US" altLang="ko-KR" sz="4000" b="1" dirty="0">
-                <a:solidFill>
-                  <a:schemeClr val="tx2">
-                    <a:lumMod val="75000"/>
-                  </a:schemeClr>
-                </a:solidFill>
-                <a:ea typeface="+mj-ea"/>
-              </a:rPr>
-              <a:t>'</a:t>
-            </a:r>
-            <a:r>
-              <a:rPr lang="ko-KR" altLang="en-US" sz="4000" b="1" dirty="0">
-                <a:solidFill>
-                  <a:schemeClr val="tx2">
-                    <a:lumMod val="75000"/>
-                  </a:schemeClr>
-                </a:solidFill>
-                <a:ea typeface="+mj-ea"/>
-              </a:rPr>
-              <a:t>이라는 구조적 전환기를 맞이하고 있다</a:t>
-            </a:r>
-            <a:r>
-              <a:rPr lang="en-US" altLang="ko-KR" sz="4000" b="1" dirty="0">
-                <a:solidFill>
-                  <a:schemeClr val="tx2">
-                    <a:lumMod val="75000"/>
-                  </a:schemeClr>
-                </a:solidFill>
-                <a:ea typeface="+mj-ea"/>
-              </a:rPr>
-              <a:t>. 2021</a:t>
-            </a:r>
-            <a:r>
-              <a:rPr lang="ko-KR" altLang="en-US" sz="4000" b="1" dirty="0">
-                <a:solidFill>
-                  <a:schemeClr val="tx2">
-                    <a:lumMod val="75000"/>
-                  </a:schemeClr>
-                </a:solidFill>
-                <a:ea typeface="+mj-ea"/>
-              </a:rPr>
-              <a:t>년 이후 개발자 수요는 둔화되었으며</a:t>
-            </a:r>
-            <a:r>
-              <a:rPr lang="en-US" altLang="ko-KR" sz="4000" b="1" dirty="0">
-                <a:solidFill>
-                  <a:schemeClr val="tx2">
-                    <a:lumMod val="75000"/>
-                  </a:schemeClr>
-                </a:solidFill>
-                <a:ea typeface="+mj-ea"/>
-              </a:rPr>
-              <a:t>, 2022</a:t>
-            </a:r>
-            <a:r>
-              <a:rPr lang="ko-KR" altLang="en-US" sz="4000" b="1" dirty="0">
-                <a:solidFill>
-                  <a:schemeClr val="tx2">
-                    <a:lumMod val="75000"/>
-                  </a:schemeClr>
-                </a:solidFill>
-                <a:ea typeface="+mj-ea"/>
-              </a:rPr>
-              <a:t>년부터 </a:t>
-            </a:r>
-            <a:r>
-              <a:rPr lang="en-US" altLang="ko-KR" sz="4000" b="1" dirty="0">
-                <a:solidFill>
-                  <a:schemeClr val="tx2">
-                    <a:lumMod val="75000"/>
-                  </a:schemeClr>
-                </a:solidFill>
-                <a:ea typeface="+mj-ea"/>
-              </a:rPr>
-              <a:t>2024</a:t>
-            </a:r>
-            <a:r>
-              <a:rPr lang="ko-KR" altLang="en-US" sz="4000" b="1" dirty="0">
-                <a:solidFill>
-                  <a:schemeClr val="tx2">
-                    <a:lumMod val="75000"/>
-                  </a:schemeClr>
-                </a:solidFill>
-                <a:ea typeface="+mj-ea"/>
-              </a:rPr>
-              <a:t>년 사이 전 세 계적으로 약 </a:t>
-            </a:r>
-            <a:r>
-              <a:rPr lang="en-US" altLang="ko-KR" sz="4000" b="1" dirty="0">
-                <a:solidFill>
-                  <a:schemeClr val="tx2">
-                    <a:lumMod val="75000"/>
-                  </a:schemeClr>
-                </a:solidFill>
-                <a:ea typeface="+mj-ea"/>
-              </a:rPr>
-              <a:t>56</a:t>
-            </a:r>
-            <a:r>
-              <a:rPr lang="ko-KR" altLang="en-US" sz="4000" b="1" dirty="0">
-                <a:solidFill>
-                  <a:schemeClr val="tx2">
-                    <a:lumMod val="75000"/>
-                  </a:schemeClr>
-                </a:solidFill>
-                <a:ea typeface="+mj-ea"/>
-              </a:rPr>
-              <a:t>만 명 이상의 </a:t>
-            </a:r>
-            <a:r>
-              <a:rPr lang="en-US" altLang="ko-KR" sz="4000" b="1" dirty="0">
-                <a:solidFill>
-                  <a:schemeClr val="tx2">
-                    <a:lumMod val="75000"/>
-                  </a:schemeClr>
-                </a:solidFill>
-                <a:ea typeface="+mj-ea"/>
-              </a:rPr>
-              <a:t>IT </a:t>
-            </a:r>
-            <a:r>
-              <a:rPr lang="ko-KR" altLang="en-US" sz="4000" b="1" dirty="0">
-                <a:solidFill>
-                  <a:schemeClr val="tx2">
-                    <a:lumMod val="75000"/>
-                  </a:schemeClr>
-                </a:solidFill>
-                <a:ea typeface="+mj-ea"/>
-              </a:rPr>
-              <a:t>인력이 감축되었다</a:t>
-            </a:r>
-            <a:r>
-              <a:rPr lang="en-US" altLang="ko-KR" sz="4000" b="1" dirty="0">
-                <a:solidFill>
-                  <a:schemeClr val="tx2">
-                    <a:lumMod val="75000"/>
-                  </a:schemeClr>
-                </a:solidFill>
-                <a:ea typeface="+mj-ea"/>
-              </a:rPr>
+              <a:rPr lang="ko-KR" altLang="en-US" sz="3200" dirty="0"/>
+              <a:t>본 프로젝트는 청소 및 수거</a:t>
+            </a:r>
+            <a:r>
+              <a:rPr lang="en-US" altLang="ko-KR" sz="3200" dirty="0"/>
+              <a:t>, </a:t>
+            </a:r>
+            <a:r>
+              <a:rPr lang="ko-KR" altLang="en-US" sz="3200" dirty="0"/>
+              <a:t>그리고 이를 방해하는 적대적 개체</a:t>
+            </a:r>
+            <a:r>
+              <a:rPr lang="en-US" altLang="ko-KR" sz="3200" dirty="0"/>
+              <a:t>(SCP)</a:t>
+            </a:r>
+            <a:r>
+              <a:rPr lang="ko-KR" altLang="en-US" sz="3200" dirty="0"/>
+              <a:t>와의 상호작용이 핵심 게임성</a:t>
+            </a:r>
+            <a:r>
+              <a:rPr lang="en-US" altLang="ko-KR" sz="3200" dirty="0"/>
+              <a:t>(Gameplay)</a:t>
+            </a:r>
+            <a:r>
+              <a:rPr lang="ko-KR" altLang="en-US" sz="3200" dirty="0"/>
+              <a:t>을 구성하기에 </a:t>
+            </a:r>
+            <a:r>
+              <a:rPr lang="ko-KR" altLang="en-US" sz="3200" dirty="0" err="1"/>
+              <a:t>언리얼</a:t>
+            </a:r>
+            <a:r>
+              <a:rPr lang="ko-KR" altLang="en-US" sz="3200" dirty="0"/>
+              <a:t> 엔진의 </a:t>
+            </a:r>
+            <a:r>
+              <a:rPr lang="en-US" altLang="ko-KR" sz="3200" dirty="0"/>
+              <a:t>Chaos Destruction </a:t>
+            </a:r>
+            <a:r>
+              <a:rPr lang="ko-KR" altLang="en-US" sz="3200" dirty="0"/>
+              <a:t>시스템을 활용하여 캐릭터 </a:t>
+            </a:r>
+            <a:r>
+              <a:rPr lang="ko-KR" altLang="en-US" sz="3200" dirty="0" err="1"/>
+              <a:t>메쉬를</a:t>
+            </a:r>
+            <a:r>
+              <a:rPr lang="ko-KR" altLang="en-US" sz="3200" dirty="0"/>
+              <a:t> 파편화하고</a:t>
+            </a:r>
+            <a:r>
+              <a:rPr lang="en-US" altLang="ko-KR" sz="3200" dirty="0"/>
+              <a:t>, </a:t>
+            </a:r>
+            <a:r>
+              <a:rPr lang="ko-KR" altLang="en-US" sz="3200" dirty="0"/>
+              <a:t>생성된 각 파편에 개별적인 물리 속성을 부여하여 상호작용 가능한 독립적 </a:t>
+            </a:r>
+            <a:r>
+              <a:rPr lang="ko-KR" altLang="en-US" sz="3200" dirty="0" err="1"/>
+              <a:t>액터</a:t>
+            </a:r>
+            <a:r>
+              <a:rPr lang="en-US" altLang="ko-KR" sz="3200" dirty="0"/>
+              <a:t>(Actor)</a:t>
+            </a:r>
+            <a:r>
+              <a:rPr lang="ko-KR" altLang="en-US" sz="3200" dirty="0"/>
+              <a:t>로 변환하는 것을 목표로 하였다</a:t>
+            </a:r>
+            <a:r>
+              <a:rPr lang="en-US" altLang="ko-KR" sz="3200" dirty="0"/>
               <a:t>.</a:t>
             </a:r>
-          </a:p>
-          <a:p>
-            <a:r>
-              <a:rPr lang="ko-KR" altLang="en-US" sz="4000" b="1" dirty="0">
-                <a:solidFill>
-                  <a:schemeClr val="tx2">
-                    <a:lumMod val="75000"/>
-                  </a:schemeClr>
-                </a:solidFill>
-                <a:ea typeface="+mj-ea"/>
-              </a:rPr>
-              <a:t>이러한 흐름은 게임 업계에도 직결되어</a:t>
-            </a:r>
-            <a:r>
-              <a:rPr lang="en-US" altLang="ko-KR" sz="4000" b="1" dirty="0">
-                <a:solidFill>
-                  <a:schemeClr val="tx2">
-                    <a:lumMod val="75000"/>
-                  </a:schemeClr>
-                </a:solidFill>
-                <a:ea typeface="+mj-ea"/>
-              </a:rPr>
+            <a:endParaRPr lang="ko-KR" altLang="en-US" sz="3200" dirty="0"/>
+          </a:p>
+          <a:p>
+            <a:r>
+              <a:rPr lang="ko-KR" altLang="en-US" sz="3200" dirty="0"/>
+              <a:t> </a:t>
+            </a:r>
+            <a:r>
+              <a:rPr lang="en-US" altLang="ko-KR" sz="3200" dirty="0"/>
+              <a:t>	</a:t>
+            </a:r>
+          </a:p>
+          <a:p>
+            <a:r>
+              <a:rPr lang="en-US" altLang="ko-KR" sz="3600" b="1" dirty="0"/>
+              <a:t>1</a:t>
+            </a:r>
+            <a:r>
+              <a:rPr lang="ko-KR" altLang="en-US" sz="3600" b="1" dirty="0"/>
+              <a:t>단계</a:t>
+            </a:r>
+            <a:r>
+              <a:rPr lang="en-US" altLang="ko-KR" sz="3600" b="1" dirty="0"/>
+              <a:t>: Chaos Geometry Collection </a:t>
+            </a:r>
+            <a:r>
+              <a:rPr lang="ko-KR" altLang="en-US" sz="3600" b="1" dirty="0"/>
+              <a:t>생성</a:t>
+            </a:r>
+            <a:endParaRPr lang="ko-KR" altLang="en-US" sz="3200" b="1" dirty="0"/>
+          </a:p>
+          <a:p>
+            <a:r>
+              <a:rPr lang="ko-KR" altLang="en-US" sz="3200" dirty="0"/>
+              <a:t>해당 단계에서는 </a:t>
+            </a:r>
+            <a:r>
+              <a:rPr lang="en-US" altLang="ko-KR" sz="3200" dirty="0"/>
+              <a:t>LLM</a:t>
+            </a:r>
+            <a:r>
+              <a:rPr lang="ko-KR" altLang="en-US" sz="3200" dirty="0"/>
+              <a:t>의 직접적인 활용보다는 개발자의 수동 작업 비중이 높았다</a:t>
+            </a:r>
+            <a:r>
+              <a:rPr lang="en-US" altLang="ko-KR" sz="3200" dirty="0"/>
+              <a:t>. </a:t>
+            </a:r>
+            <a:r>
+              <a:rPr lang="ko-KR" altLang="en-US" sz="3200" dirty="0" err="1"/>
+              <a:t>언리얼</a:t>
+            </a:r>
+            <a:r>
+              <a:rPr lang="ko-KR" altLang="en-US" sz="3200" dirty="0"/>
+              <a:t> 엔진의 </a:t>
+            </a:r>
+            <a:r>
+              <a:rPr lang="en-US" altLang="ko-KR" sz="3200" dirty="0"/>
+              <a:t>Fracture Mode</a:t>
+            </a:r>
+            <a:r>
+              <a:rPr lang="ko-KR" altLang="en-US" sz="3200" dirty="0"/>
+              <a:t>를 통해 캐릭터 </a:t>
+            </a:r>
+            <a:r>
+              <a:rPr lang="ko-KR" altLang="en-US" sz="3200" dirty="0" err="1"/>
+              <a:t>메쉬의</a:t>
+            </a:r>
+            <a:r>
+              <a:rPr lang="ko-KR" altLang="en-US" sz="3200" dirty="0"/>
+              <a:t> 파편화 지점을 지정하고 하위 </a:t>
+            </a:r>
+            <a:r>
+              <a:rPr lang="ko-KR" altLang="en-US" sz="3200" dirty="0" err="1"/>
+              <a:t>메쉬를</a:t>
+            </a:r>
+            <a:r>
+              <a:rPr lang="ko-KR" altLang="en-US" sz="3200" dirty="0"/>
+              <a:t> 생성하는 과정은 시각적 판단이 수반되는 작업이기 때문이다</a:t>
+            </a:r>
+            <a:r>
+              <a:rPr lang="en-US" altLang="ko-KR" sz="3200" dirty="0"/>
+              <a:t>. </a:t>
+            </a:r>
+            <a:r>
+              <a:rPr lang="ko-KR" altLang="en-US" sz="3200" dirty="0"/>
+              <a:t>이 공정을 통해 물리 기반 파편으로 치환될 기초 데이터를 확보하였다</a:t>
+            </a:r>
+            <a:r>
+              <a:rPr lang="en-US" altLang="ko-KR" sz="3200" dirty="0"/>
+              <a:t>.</a:t>
+            </a:r>
+            <a:endParaRPr lang="ko-KR" altLang="en-US" sz="3200" dirty="0"/>
+          </a:p>
+          <a:p>
+            <a:r>
+              <a:rPr lang="ko-KR" altLang="en-US" sz="3200" dirty="0"/>
+              <a:t> </a:t>
+            </a:r>
+          </a:p>
+          <a:p>
+            <a:r>
+              <a:rPr lang="en-US" altLang="ko-KR" sz="3600" b="1" dirty="0"/>
+              <a:t>2</a:t>
+            </a:r>
+            <a:r>
+              <a:rPr lang="ko-KR" altLang="en-US" sz="3600" b="1" dirty="0"/>
+              <a:t>단계</a:t>
+            </a:r>
+            <a:r>
+              <a:rPr lang="en-US" altLang="ko-KR" sz="3600" b="1" dirty="0"/>
+              <a:t>: </a:t>
+            </a:r>
+            <a:r>
+              <a:rPr lang="ko-KR" altLang="en-US" sz="3600" b="1" dirty="0"/>
+              <a:t>파편의 </a:t>
+            </a:r>
+            <a:r>
+              <a:rPr lang="ko-KR" altLang="en-US" sz="3600" b="1" dirty="0" err="1"/>
+              <a:t>액터화</a:t>
+            </a:r>
+            <a:r>
+              <a:rPr lang="ko-KR" altLang="en-US" sz="3600" b="1" dirty="0"/>
+              <a:t> 및 물리 속성 부여</a:t>
+            </a:r>
+            <a:endParaRPr lang="ko-KR" altLang="en-US" sz="3200" dirty="0"/>
+          </a:p>
+          <a:p>
+            <a:r>
+              <a:rPr lang="ko-KR" altLang="en-US" sz="3200" dirty="0"/>
+              <a:t>파편화된 </a:t>
+            </a:r>
+            <a:r>
+              <a:rPr lang="en-US" altLang="ko-KR" sz="3200" dirty="0"/>
+              <a:t>Geometry Collection </a:t>
+            </a:r>
+            <a:r>
+              <a:rPr lang="ko-KR" altLang="en-US" sz="3200" dirty="0"/>
+              <a:t>데이터 자체만으로는 독립적인 상호작용 및 세부 물리 효과 적용에 한계가 존재한다</a:t>
+            </a:r>
+            <a:r>
+              <a:rPr lang="en-US" altLang="ko-KR" sz="3200" dirty="0"/>
+              <a:t>. </a:t>
+            </a:r>
+            <a:r>
+              <a:rPr lang="ko-KR" altLang="en-US" sz="3200" dirty="0"/>
+              <a:t>따라서 상기 단계에서 생성된 파편 </a:t>
+            </a:r>
+            <a:r>
+              <a:rPr lang="ko-KR" altLang="en-US" sz="3200" dirty="0" err="1"/>
+              <a:t>메쉬를</a:t>
+            </a:r>
+            <a:r>
+              <a:rPr lang="ko-KR" altLang="en-US" sz="3200" dirty="0"/>
+              <a:t> 독립적인 </a:t>
+            </a:r>
+            <a:r>
+              <a:rPr lang="ko-KR" altLang="en-US" sz="3200" dirty="0" err="1"/>
+              <a:t>액터로</a:t>
+            </a:r>
+            <a:r>
+              <a:rPr lang="ko-KR" altLang="en-US" sz="3200" dirty="0"/>
+              <a:t> 전환하는 공정을 수행하였다</a:t>
+            </a:r>
+            <a:r>
+              <a:rPr lang="en-US" altLang="ko-KR" sz="3200" dirty="0"/>
+              <a:t>. </a:t>
+            </a:r>
+            <a:r>
+              <a:rPr lang="ko-KR" altLang="en-US" sz="3200" dirty="0"/>
+              <a:t>이 과정에서 </a:t>
+            </a:r>
+            <a:r>
+              <a:rPr lang="en-US" altLang="ko-KR" sz="3200" dirty="0"/>
+              <a:t>LLM</a:t>
+            </a:r>
+            <a:r>
+              <a:rPr lang="ko-KR" altLang="en-US" sz="3200" dirty="0"/>
+              <a:t>은 </a:t>
+            </a:r>
+            <a:r>
+              <a:rPr lang="ko-KR" altLang="en-US" sz="3200" dirty="0" err="1"/>
+              <a:t>스폰할</a:t>
+            </a:r>
+            <a:r>
+              <a:rPr lang="ko-KR" altLang="en-US" sz="3200" dirty="0"/>
+              <a:t> 파편 </a:t>
+            </a:r>
+            <a:r>
+              <a:rPr lang="ko-KR" altLang="en-US" sz="3200" dirty="0" err="1"/>
+              <a:t>메쉬</a:t>
+            </a:r>
+            <a:r>
+              <a:rPr lang="ko-KR" altLang="en-US" sz="3200" dirty="0"/>
+              <a:t> 리스트의 동적 생성 로직과 </a:t>
+            </a:r>
+            <a:r>
+              <a:rPr lang="en-US" altLang="ko-KR" sz="3200" dirty="0" err="1"/>
+              <a:t>SkeletalMeshComponent</a:t>
+            </a:r>
+            <a:r>
+              <a:rPr lang="en-US" altLang="ko-KR" sz="3200" dirty="0"/>
+              <a:t> </a:t>
+            </a:r>
+            <a:r>
+              <a:rPr lang="ko-KR" altLang="en-US" sz="3200" dirty="0"/>
+              <a:t>기반의 </a:t>
+            </a:r>
+            <a:r>
+              <a:rPr lang="ko-KR" altLang="en-US" sz="3200" dirty="0" err="1"/>
+              <a:t>액터</a:t>
+            </a:r>
+            <a:r>
+              <a:rPr lang="ko-KR" altLang="en-US" sz="3200" dirty="0"/>
+              <a:t> 클래스 구조 설계에 활용되었다</a:t>
+            </a:r>
+            <a:r>
+              <a:rPr lang="en-US" altLang="ko-KR" sz="3200" dirty="0"/>
+              <a:t>. </a:t>
+            </a:r>
+            <a:r>
+              <a:rPr lang="ko-KR" altLang="en-US" sz="3200" dirty="0"/>
+              <a:t>특히 시체 파편에 </a:t>
+            </a:r>
+            <a:r>
+              <a:rPr lang="en-US" altLang="ko-KR" sz="3200" dirty="0"/>
+              <a:t>Ragdoll </a:t>
+            </a:r>
+            <a:r>
+              <a:rPr lang="ko-KR" altLang="en-US" sz="3200" dirty="0"/>
+              <a:t>효과를 부여하기 위한 </a:t>
+            </a:r>
+            <a:r>
+              <a:rPr lang="en-US" altLang="ko-KR" sz="3200" dirty="0"/>
+              <a:t>LLM</a:t>
+            </a:r>
+            <a:r>
+              <a:rPr lang="ko-KR" altLang="en-US" sz="3200" dirty="0"/>
+              <a:t>의 기술적 제언은 실증적으로 유효함을 확인하였다</a:t>
+            </a:r>
+            <a:r>
+              <a:rPr lang="en-US" altLang="ko-KR" sz="3200" dirty="0"/>
+              <a:t>. </a:t>
+            </a:r>
+            <a:r>
+              <a:rPr lang="ko-KR" altLang="en-US" sz="3200" dirty="0"/>
+              <a:t>물리 효과의 정밀도를 높이기 위한 </a:t>
+            </a:r>
+            <a:r>
+              <a:rPr lang="en-US" altLang="ko-KR" sz="3200" dirty="0"/>
+              <a:t>Physics Asset </a:t>
+            </a:r>
+            <a:r>
+              <a:rPr lang="ko-KR" altLang="en-US" sz="3200" dirty="0"/>
+              <a:t>생성 및 </a:t>
+            </a:r>
+            <a:r>
+              <a:rPr lang="en-US" altLang="ko-KR" sz="3200" dirty="0"/>
+              <a:t>Skin Weight </a:t>
+            </a:r>
+            <a:r>
+              <a:rPr lang="ko-KR" altLang="en-US" sz="3200" dirty="0"/>
+              <a:t>조정은 개발자가 직접 수행하였으나</a:t>
+            </a:r>
+            <a:r>
+              <a:rPr lang="en-US" altLang="ko-KR" sz="3200" dirty="0"/>
               <a:t>, </a:t>
             </a:r>
             <a:r>
-              <a:rPr lang="ko-KR" altLang="en-US" sz="4000" b="1" dirty="0">
-                <a:solidFill>
-                  <a:schemeClr val="tx2">
-                    <a:lumMod val="75000"/>
-                  </a:schemeClr>
-                </a:solidFill>
-                <a:ea typeface="+mj-ea"/>
-              </a:rPr>
-              <a:t>신입 개발자의 진입 장벽은 높아지는 반면 </a:t>
-            </a:r>
-            <a:r>
-              <a:rPr lang="en-US" altLang="ko-KR" sz="4000" b="1" dirty="0">
-                <a:solidFill>
-                  <a:schemeClr val="tx2">
-                    <a:lumMod val="75000"/>
-                  </a:schemeClr>
-                </a:solidFill>
-                <a:ea typeface="+mj-ea"/>
-              </a:rPr>
+              <a:rPr lang="ko-KR" altLang="en-US" sz="3200" dirty="0"/>
+              <a:t>이를 제어하는 시스템 코드 작성 영역에서는 </a:t>
+            </a:r>
+            <a:r>
+              <a:rPr lang="en-US" altLang="ko-KR" sz="3200" dirty="0"/>
               <a:t>LLM</a:t>
             </a:r>
             <a:r>
-              <a:rPr lang="ko-KR" altLang="en-US" sz="4000" b="1" dirty="0">
-                <a:solidFill>
-                  <a:schemeClr val="tx2">
-                    <a:lumMod val="75000"/>
-                  </a:schemeClr>
-                </a:solidFill>
-                <a:ea typeface="+mj-ea"/>
-              </a:rPr>
-              <a:t>을 도구로 활용해 고도의 설계를 수행할 수 있는 능력은 소규모 개발 환경에서 생존을 위한 필수 역량이 되고 있다</a:t>
-            </a:r>
-            <a:r>
-              <a:rPr lang="en-US" altLang="ko-KR" sz="4000" b="1" dirty="0">
-                <a:solidFill>
-                  <a:schemeClr val="tx2">
-                    <a:lumMod val="75000"/>
-                  </a:schemeClr>
-                </a:solidFill>
-                <a:ea typeface="+mj-ea"/>
-              </a:rPr>
+              <a:rPr lang="ko-KR" altLang="en-US" sz="3200" dirty="0"/>
+              <a:t>이 결정적인 기여를 하였다</a:t>
+            </a:r>
+            <a:r>
+              <a:rPr lang="en-US" altLang="ko-KR" sz="3200" dirty="0"/>
               <a:t>.</a:t>
             </a:r>
-            <a:r>
-              <a:rPr lang="ko-KR" altLang="en-US" sz="4000" b="1" dirty="0">
-                <a:solidFill>
-                  <a:schemeClr val="tx2">
-                    <a:lumMod val="75000"/>
-                  </a:schemeClr>
-                </a:solidFill>
-                <a:ea typeface="+mj-ea"/>
-              </a:rPr>
-              <a:t> </a:t>
-            </a:r>
-          </a:p>
-          <a:p>
-            <a:r>
-              <a:rPr lang="en-US" altLang="ko-KR" sz="4000" b="1" dirty="0">
-                <a:solidFill>
-                  <a:schemeClr val="tx2">
-                    <a:lumMod val="75000"/>
-                  </a:schemeClr>
-                </a:solidFill>
-                <a:ea typeface="+mj-ea"/>
-              </a:rPr>
-              <a:t>2020</a:t>
-            </a:r>
-            <a:r>
-              <a:rPr lang="ko-KR" altLang="en-US" sz="4000" b="1" dirty="0">
-                <a:solidFill>
-                  <a:schemeClr val="tx2">
-                    <a:lumMod val="75000"/>
-                  </a:schemeClr>
-                </a:solidFill>
-                <a:ea typeface="+mj-ea"/>
-              </a:rPr>
-              <a:t>년 </a:t>
-            </a:r>
-            <a:r>
-              <a:rPr lang="en-US" altLang="ko-KR" sz="4000" b="1" dirty="0">
-                <a:solidFill>
-                  <a:schemeClr val="tx2">
-                    <a:lumMod val="75000"/>
-                  </a:schemeClr>
-                </a:solidFill>
-                <a:ea typeface="+mj-ea"/>
-              </a:rPr>
-              <a:t>GPT-3</a:t>
-            </a:r>
-            <a:r>
-              <a:rPr lang="ko-KR" altLang="en-US" sz="4000" b="1" dirty="0">
-                <a:solidFill>
-                  <a:schemeClr val="tx2">
-                    <a:lumMod val="75000"/>
-                  </a:schemeClr>
-                </a:solidFill>
-                <a:ea typeface="+mj-ea"/>
-              </a:rPr>
-              <a:t>의 등장을 기점으로 시작된 코딩 보조 능력은 </a:t>
-            </a:r>
-            <a:r>
-              <a:rPr lang="en-US" altLang="ko-KR" sz="4000" b="1" dirty="0">
-                <a:solidFill>
-                  <a:schemeClr val="tx2">
-                    <a:lumMod val="75000"/>
-                  </a:schemeClr>
-                </a:solidFill>
-                <a:ea typeface="+mj-ea"/>
-              </a:rPr>
-              <a:t>2026</a:t>
-            </a:r>
-            <a:r>
-              <a:rPr lang="ko-KR" altLang="en-US" sz="4000" b="1" dirty="0">
-                <a:solidFill>
-                  <a:schemeClr val="tx2">
-                    <a:lumMod val="75000"/>
-                  </a:schemeClr>
-                </a:solidFill>
-                <a:ea typeface="+mj-ea"/>
-              </a:rPr>
-              <a:t>년 현재 </a:t>
-            </a:r>
-            <a:r>
-              <a:rPr lang="en-US" altLang="ko-KR" sz="4000" b="1" dirty="0">
-                <a:solidFill>
-                  <a:schemeClr val="tx2">
-                    <a:lumMod val="75000"/>
-                  </a:schemeClr>
-                </a:solidFill>
-                <a:ea typeface="+mj-ea"/>
-              </a:rPr>
-              <a:t>Claude Opus 4.5 </a:t>
-            </a:r>
-            <a:r>
-              <a:rPr lang="ko-KR" altLang="en-US" sz="4000" b="1" dirty="0">
-                <a:solidFill>
-                  <a:schemeClr val="tx2">
-                    <a:lumMod val="75000"/>
-                  </a:schemeClr>
-                </a:solidFill>
-                <a:ea typeface="+mj-ea"/>
-              </a:rPr>
-              <a:t>및 </a:t>
-            </a:r>
-            <a:r>
-              <a:rPr lang="en-US" altLang="ko-KR" sz="4000" b="1" dirty="0">
-                <a:solidFill>
-                  <a:schemeClr val="tx2">
-                    <a:lumMod val="75000"/>
-                  </a:schemeClr>
-                </a:solidFill>
-                <a:ea typeface="+mj-ea"/>
-              </a:rPr>
-              <a:t>GPT-5.4</a:t>
-            </a:r>
-            <a:r>
-              <a:rPr lang="ko-KR" altLang="en-US" sz="4000" b="1" dirty="0">
-                <a:solidFill>
-                  <a:schemeClr val="tx2">
-                    <a:lumMod val="75000"/>
-                  </a:schemeClr>
-                </a:solidFill>
-                <a:ea typeface="+mj-ea"/>
-              </a:rPr>
-              <a:t>와 같은 모델들이 </a:t>
-            </a:r>
-            <a:r>
-              <a:rPr lang="en-US" altLang="ko-KR" sz="4000" b="1" dirty="0">
-                <a:solidFill>
-                  <a:schemeClr val="tx2">
-                    <a:lumMod val="75000"/>
-                  </a:schemeClr>
-                </a:solidFill>
-                <a:ea typeface="+mj-ea"/>
-              </a:rPr>
-              <a:t>SWE- bench Verified</a:t>
-            </a:r>
-            <a:r>
-              <a:rPr lang="ko-KR" altLang="en-US" sz="4000" b="1" dirty="0">
-                <a:solidFill>
-                  <a:schemeClr val="tx2">
-                    <a:lumMod val="75000"/>
-                  </a:schemeClr>
-                </a:solidFill>
-                <a:ea typeface="+mj-ea"/>
-              </a:rPr>
-              <a:t>에서 </a:t>
-            </a:r>
-            <a:r>
-              <a:rPr lang="en-US" altLang="ko-KR" sz="4000" b="1" dirty="0">
-                <a:solidFill>
-                  <a:schemeClr val="tx2">
-                    <a:lumMod val="75000"/>
-                  </a:schemeClr>
-                </a:solidFill>
-                <a:ea typeface="+mj-ea"/>
-              </a:rPr>
-              <a:t>80%, </a:t>
-            </a:r>
-            <a:r>
-              <a:rPr lang="en-US" altLang="ko-KR" sz="4000" b="1" dirty="0" err="1">
-                <a:solidFill>
-                  <a:schemeClr val="tx2">
-                    <a:lumMod val="75000"/>
-                  </a:schemeClr>
-                </a:solidFill>
-                <a:ea typeface="+mj-ea"/>
-              </a:rPr>
-              <a:t>HumanEval</a:t>
-            </a:r>
-            <a:r>
-              <a:rPr lang="ko-KR" altLang="en-US" sz="4000" b="1" dirty="0">
-                <a:solidFill>
-                  <a:schemeClr val="tx2">
-                    <a:lumMod val="75000"/>
-                  </a:schemeClr>
-                </a:solidFill>
-                <a:ea typeface="+mj-ea"/>
-              </a:rPr>
-              <a:t>에서 </a:t>
-            </a:r>
-            <a:r>
-              <a:rPr lang="en-US" altLang="ko-KR" sz="4000" b="1" dirty="0">
-                <a:solidFill>
-                  <a:schemeClr val="tx2">
-                    <a:lumMod val="75000"/>
-                  </a:schemeClr>
-                </a:solidFill>
-                <a:ea typeface="+mj-ea"/>
-              </a:rPr>
-              <a:t>95% </a:t>
-            </a:r>
-            <a:r>
-              <a:rPr lang="ko-KR" altLang="en-US" sz="4000" b="1" dirty="0">
-                <a:solidFill>
-                  <a:schemeClr val="tx2">
-                    <a:lumMod val="75000"/>
-                  </a:schemeClr>
-                </a:solidFill>
-                <a:ea typeface="+mj-ea"/>
-              </a:rPr>
-              <a:t>이상의 </a:t>
-            </a:r>
-            <a:r>
-              <a:rPr lang="ko-KR" altLang="en-US" sz="4000" b="1" dirty="0" err="1">
-                <a:solidFill>
-                  <a:schemeClr val="tx2">
-                    <a:lumMod val="75000"/>
-                  </a:schemeClr>
-                </a:solidFill>
-                <a:ea typeface="+mj-ea"/>
-              </a:rPr>
-              <a:t>정답률을</a:t>
-            </a:r>
-            <a:r>
-              <a:rPr lang="ko-KR" altLang="en-US" sz="4000" b="1" dirty="0">
-                <a:solidFill>
-                  <a:schemeClr val="tx2">
-                    <a:lumMod val="75000"/>
-                  </a:schemeClr>
-                </a:solidFill>
-                <a:ea typeface="+mj-ea"/>
-              </a:rPr>
-              <a:t> 기록하며 포화 상태에 이르렀다</a:t>
-            </a:r>
-            <a:r>
-              <a:rPr lang="en-US" altLang="ko-KR" sz="4000" b="1" dirty="0">
-                <a:solidFill>
-                  <a:schemeClr val="tx2">
-                    <a:lumMod val="75000"/>
-                  </a:schemeClr>
-                </a:solidFill>
-                <a:ea typeface="+mj-ea"/>
-              </a:rPr>
-              <a:t>. </a:t>
-            </a:r>
-          </a:p>
-          <a:p>
-            <a:r>
-              <a:rPr lang="ko-KR" altLang="en-US" sz="4000" b="1" dirty="0">
-                <a:solidFill>
-                  <a:schemeClr val="tx2">
-                    <a:lumMod val="75000"/>
-                  </a:schemeClr>
-                </a:solidFill>
-                <a:ea typeface="+mj-ea"/>
-              </a:rPr>
-              <a:t>이제 </a:t>
-            </a:r>
-            <a:r>
-              <a:rPr lang="en-US" altLang="ko-KR" sz="4000" b="1" dirty="0">
-                <a:solidFill>
-                  <a:schemeClr val="tx2">
-                    <a:lumMod val="75000"/>
-                  </a:schemeClr>
-                </a:solidFill>
-                <a:ea typeface="+mj-ea"/>
-              </a:rPr>
+          </a:p>
+          <a:p>
+            <a:endParaRPr lang="ko-KR" altLang="en-US" sz="3200" dirty="0"/>
+          </a:p>
+          <a:p>
+            <a:r>
+              <a:rPr lang="ko-KR" altLang="en-US" sz="3600" b="1" dirty="0"/>
+              <a:t>개발 시간 단축 및 학습 비용 절감</a:t>
+            </a:r>
+            <a:endParaRPr lang="ko-KR" altLang="en-US" sz="3600" dirty="0"/>
+          </a:p>
+          <a:p>
+            <a:r>
+              <a:rPr lang="en-US" altLang="ko-KR" sz="3200" dirty="0"/>
               <a:t>LLM</a:t>
             </a:r>
             <a:r>
-              <a:rPr lang="ko-KR" altLang="en-US" sz="4000" b="1" dirty="0">
-                <a:solidFill>
-                  <a:schemeClr val="tx2">
-                    <a:lumMod val="75000"/>
-                  </a:schemeClr>
-                </a:solidFill>
-                <a:ea typeface="+mj-ea"/>
-              </a:rPr>
-              <a:t>은 단순한 </a:t>
-            </a:r>
-            <a:r>
-              <a:rPr lang="en-US" altLang="ko-KR" sz="4000" b="1" dirty="0">
-                <a:solidFill>
-                  <a:schemeClr val="tx2">
-                    <a:lumMod val="75000"/>
-                  </a:schemeClr>
-                </a:solidFill>
-                <a:ea typeface="+mj-ea"/>
-              </a:rPr>
-              <a:t>'</a:t>
-            </a:r>
-            <a:r>
-              <a:rPr lang="ko-KR" altLang="en-US" sz="4000" b="1" dirty="0">
-                <a:solidFill>
-                  <a:schemeClr val="tx2">
-                    <a:lumMod val="75000"/>
-                  </a:schemeClr>
-                </a:solidFill>
-                <a:ea typeface="+mj-ea"/>
-              </a:rPr>
-              <a:t>코드 자동 완성</a:t>
-            </a:r>
-            <a:r>
-              <a:rPr lang="en-US" altLang="ko-KR" sz="4000" b="1" dirty="0">
-                <a:solidFill>
-                  <a:schemeClr val="tx2">
-                    <a:lumMod val="75000"/>
-                  </a:schemeClr>
-                </a:solidFill>
-                <a:ea typeface="+mj-ea"/>
-              </a:rPr>
-              <a:t>'</a:t>
-            </a:r>
-            <a:r>
-              <a:rPr lang="ko-KR" altLang="en-US" sz="4000" b="1" dirty="0">
-                <a:solidFill>
-                  <a:schemeClr val="tx2">
-                    <a:lumMod val="75000"/>
-                  </a:schemeClr>
-                </a:solidFill>
-                <a:ea typeface="+mj-ea"/>
-              </a:rPr>
-              <a:t>을 넘어</a:t>
-            </a:r>
-            <a:r>
-              <a:rPr lang="en-US" altLang="ko-KR" sz="4000" b="1" dirty="0">
-                <a:solidFill>
-                  <a:schemeClr val="tx2">
-                    <a:lumMod val="75000"/>
-                  </a:schemeClr>
-                </a:solidFill>
-                <a:ea typeface="+mj-ea"/>
-              </a:rPr>
+              <a:rPr lang="ko-KR" altLang="en-US" sz="3200" dirty="0"/>
+              <a:t>은 숙련되지 않은 개발자가 초기 아키텍처를 설계하는 기존 방식 대비 약 </a:t>
+            </a:r>
+            <a:r>
+              <a:rPr lang="en-US" altLang="ko-KR" sz="3200" dirty="0"/>
+              <a:t>70% </a:t>
+            </a:r>
+            <a:r>
+              <a:rPr lang="ko-KR" altLang="en-US" sz="3200" dirty="0"/>
+              <a:t>이상의 시간 효율을 달성하였으며</a:t>
+            </a:r>
+            <a:r>
+              <a:rPr lang="en-US" altLang="ko-KR" sz="3200" dirty="0"/>
               <a:t>, </a:t>
             </a:r>
             <a:r>
-              <a:rPr lang="ko-KR" altLang="en-US" sz="4000" b="1" dirty="0">
-                <a:solidFill>
-                  <a:schemeClr val="tx2">
-                    <a:lumMod val="75000"/>
-                  </a:schemeClr>
-                </a:solidFill>
-                <a:ea typeface="+mj-ea"/>
-              </a:rPr>
-              <a:t>개발자의 자연어 의도를 이해하고 복잡한 아키텍처를 설계하는 이른바 </a:t>
-            </a:r>
-            <a:r>
-              <a:rPr lang="en-US" altLang="ko-KR" sz="4000" b="1" dirty="0">
-                <a:solidFill>
-                  <a:schemeClr val="tx2">
-                    <a:lumMod val="75000"/>
-                  </a:schemeClr>
-                </a:solidFill>
-                <a:ea typeface="+mj-ea"/>
-              </a:rPr>
-              <a:t>'</a:t>
-            </a:r>
-            <a:r>
-              <a:rPr lang="ko-KR" altLang="en-US" sz="4000" b="1" dirty="0" err="1">
-                <a:solidFill>
-                  <a:schemeClr val="tx2">
-                    <a:lumMod val="75000"/>
-                  </a:schemeClr>
-                </a:solidFill>
-                <a:ea typeface="+mj-ea"/>
-              </a:rPr>
-              <a:t>바이브</a:t>
-            </a:r>
-            <a:r>
-              <a:rPr lang="ko-KR" altLang="en-US" sz="4000" b="1" dirty="0">
-                <a:solidFill>
-                  <a:schemeClr val="tx2">
-                    <a:lumMod val="75000"/>
-                  </a:schemeClr>
-                </a:solidFill>
-                <a:ea typeface="+mj-ea"/>
-              </a:rPr>
-              <a:t> 코딩</a:t>
-            </a:r>
-            <a:r>
-              <a:rPr lang="en-US" altLang="ko-KR" sz="4000" b="1" dirty="0">
-                <a:solidFill>
-                  <a:schemeClr val="tx2">
-                    <a:lumMod val="75000"/>
-                  </a:schemeClr>
-                </a:solidFill>
-                <a:ea typeface="+mj-ea"/>
-              </a:rPr>
-              <a:t>’ </a:t>
-            </a:r>
-            <a:r>
-              <a:rPr lang="ko-KR" altLang="en-US" sz="4000" b="1" dirty="0">
-                <a:solidFill>
-                  <a:schemeClr val="tx2">
-                    <a:lumMod val="75000"/>
-                  </a:schemeClr>
-                </a:solidFill>
-                <a:ea typeface="+mj-ea"/>
-              </a:rPr>
-              <a:t>패러다임을 형성하고 있다</a:t>
-            </a:r>
-            <a:r>
-              <a:rPr lang="en-US" altLang="ko-KR" sz="4000" b="1" dirty="0">
-                <a:solidFill>
-                  <a:schemeClr val="tx2">
-                    <a:lumMod val="75000"/>
-                  </a:schemeClr>
-                </a:solidFill>
-                <a:ea typeface="+mj-ea"/>
-              </a:rPr>
-              <a:t>. </a:t>
-            </a:r>
-            <a:endParaRPr lang="ko-KR" altLang="en-US" sz="4000" b="1" dirty="0">
-              <a:solidFill>
-                <a:schemeClr val="tx2">
-                  <a:lumMod val="75000"/>
-                </a:schemeClr>
-              </a:solidFill>
-              <a:ea typeface="+mj-ea"/>
-            </a:endParaRPr>
-          </a:p>
-        </p:txBody>
-      </p:sp>
-      <p:sp>
-        <p:nvSpPr>
-          <p:cNvPr id="12" name="TextBox 11">
+              <a:rPr lang="ko-KR" altLang="en-US" sz="3200" dirty="0"/>
+              <a:t>이는 검색 및 시행착오에 소요되는 시간을 실제 구현 시간으로 전환했음을 의미한다</a:t>
+            </a:r>
+            <a:r>
+              <a:rPr lang="en-US" altLang="ko-KR" sz="3200" dirty="0"/>
+              <a:t>.</a:t>
+            </a:r>
+          </a:p>
+          <a:p>
+            <a:endParaRPr lang="en-US" altLang="ko-KR" sz="1050" b="1" dirty="0"/>
+          </a:p>
+        </p:txBody>
+      </p:sp>
+      <p:sp>
+        <p:nvSpPr>
+          <p:cNvPr id="45" name="직사각형 44">
             <a:extLst>
               <a:ext uri="{FF2B5EF4-FFF2-40B4-BE49-F238E27FC236}">
-                <a16:creationId xmlns:a16="http://schemas.microsoft.com/office/drawing/2014/main" id="{BBE9B039-BE8F-0087-3CBB-6F40C19DF1A1}"/>
+                <a16:creationId xmlns:a16="http://schemas.microsoft.com/office/drawing/2014/main" id="{2DE5D971-E8B0-23CF-5EAD-8352E9CA4EDB}"/>
+              </a:ext>
+            </a:extLst>
+          </p:cNvPr>
+          <p:cNvSpPr/>
+          <p:nvPr/>
+        </p:nvSpPr>
+        <p:spPr>
+          <a:xfrm>
+            <a:off x="16618517" y="27616333"/>
+            <a:ext cx="15380724" cy="1353835"/>
+          </a:xfrm>
+          <a:prstGeom prst="rect">
+            <a:avLst/>
+          </a:prstGeom>
+          <a:ln>
+            <a:noFill/>
+          </a:ln>
+        </p:spPr>
+        <p:style>
+          <a:lnRef idx="2">
+            <a:schemeClr val="accent1">
+              <a:shade val="15000"/>
+            </a:schemeClr>
+          </a:lnRef>
+          <a:fillRef idx="1">
+            <a:schemeClr val="accent1"/>
+          </a:fillRef>
+          <a:effectRef idx="0">
+            <a:schemeClr val="accent1"/>
+          </a:effectRef>
+          <a:fontRef idx="minor">
+            <a:schemeClr val="lt1"/>
+          </a:fontRef>
+        </p:style>
+        <p:txBody>
+          <a:bodyPr rtlCol="0" anchor="ctr"/>
+          <a:lstStyle/>
+          <a:p>
+            <a:pPr algn="ctr"/>
+            <a:endParaRPr lang="ko-KR" altLang="en-US" dirty="0"/>
+          </a:p>
+        </p:txBody>
+      </p:sp>
+      <p:sp>
+        <p:nvSpPr>
+          <p:cNvPr id="46" name="TextBox 45">
+            <a:extLst>
+              <a:ext uri="{FF2B5EF4-FFF2-40B4-BE49-F238E27FC236}">
+                <a16:creationId xmlns:a16="http://schemas.microsoft.com/office/drawing/2014/main" id="{159C3437-9C9E-61C1-908C-729ECCA68E8C}"/>
               </a:ext>
             </a:extLst>
           </p:cNvPr>
@@ -4272,8 +6544,8 @@
         </p:nvSpPr>
         <p:spPr>
           <a:xfrm>
-            <a:off x="718453" y="33637727"/>
-            <a:ext cx="13454743" cy="923330"/>
+            <a:off x="16966321" y="27908224"/>
+            <a:ext cx="4296094" cy="830997"/>
           </a:xfrm>
           <a:prstGeom prst="rect">
             <a:avLst/>
@@ -4287,7 +6559,629 @@
           <a:lstStyle/>
           <a:p>
             <a:r>
-              <a:rPr lang="ko-KR" altLang="en-US" sz="5400" b="1" dirty="0">
+              <a:rPr lang="ko-KR" altLang="en-US" sz="4800" b="1" dirty="0">
+                <a:solidFill>
+                  <a:schemeClr val="bg1">
+                    <a:lumMod val="95000"/>
+                  </a:schemeClr>
+                </a:solidFill>
+                <a:effectLst>
+                  <a:outerShdw blurRad="38100" dist="38100" dir="2700000" algn="tl">
+                    <a:srgbClr val="000000">
+                      <a:alpha val="43137"/>
+                    </a:srgbClr>
+                  </a:outerShdw>
+                </a:effectLst>
+              </a:rPr>
+              <a:t>한계점 및 결론</a:t>
+            </a:r>
+          </a:p>
+        </p:txBody>
+      </p:sp>
+      <p:sp>
+        <p:nvSpPr>
+          <p:cNvPr id="47" name="TextBox 46">
+            <a:extLst>
+              <a:ext uri="{FF2B5EF4-FFF2-40B4-BE49-F238E27FC236}">
+                <a16:creationId xmlns:a16="http://schemas.microsoft.com/office/drawing/2014/main" id="{1C9F5761-F99F-35D4-6286-D5B2FE70B4A1}"/>
+              </a:ext>
+            </a:extLst>
+          </p:cNvPr>
+          <p:cNvSpPr txBox="1"/>
+          <p:nvPr/>
+        </p:nvSpPr>
+        <p:spPr>
+          <a:xfrm>
+            <a:off x="16618515" y="29262059"/>
+            <a:ext cx="15380722" cy="13080504"/>
+          </a:xfrm>
+          <a:prstGeom prst="rect">
+            <a:avLst/>
+          </a:prstGeom>
+          <a:noFill/>
+        </p:spPr>
+        <p:txBody>
+          <a:bodyPr wrap="square" rtlCol="0">
+            <a:spAutoFit/>
+          </a:bodyPr>
+          <a:lstStyle/>
+          <a:p>
+            <a:r>
+              <a:rPr lang="ko-KR" altLang="en-US" sz="3600" b="1" dirty="0"/>
+              <a:t>외부 </a:t>
+            </a:r>
+            <a:r>
+              <a:rPr lang="en-US" altLang="ko-KR" sz="3600" b="1" dirty="0"/>
+              <a:t>SDK </a:t>
+            </a:r>
+            <a:r>
+              <a:rPr lang="ko-KR" altLang="en-US" sz="3600" b="1" dirty="0"/>
+              <a:t>및 복합 네트워크 환경의 디버깅 한계</a:t>
+            </a:r>
+            <a:endParaRPr lang="ko-KR" altLang="en-US" sz="3600" dirty="0"/>
+          </a:p>
+          <a:p>
+            <a:r>
+              <a:rPr lang="ko-KR" altLang="en-US" sz="3200" dirty="0"/>
+              <a:t>본 프로젝트에서 도입한 스팀 온라인 세션</a:t>
+            </a:r>
+            <a:r>
+              <a:rPr lang="en-US" altLang="ko-KR" sz="3200" dirty="0"/>
+              <a:t>(Steam Online Session) </a:t>
+            </a:r>
+            <a:r>
+              <a:rPr lang="ko-KR" altLang="en-US" sz="3200" dirty="0"/>
+              <a:t>구현 과정에서 </a:t>
+            </a:r>
+            <a:r>
+              <a:rPr lang="en-US" altLang="ko-KR" sz="3200" dirty="0"/>
+              <a:t>LLM</a:t>
+            </a:r>
+            <a:r>
+              <a:rPr lang="ko-KR" altLang="en-US" sz="3200" dirty="0"/>
+              <a:t>은 명확한 해결책을 제시하는 데 한계를 보였다</a:t>
+            </a:r>
+            <a:r>
+              <a:rPr lang="en-US" altLang="ko-KR" sz="3200" dirty="0"/>
+              <a:t>.</a:t>
+            </a:r>
+            <a:r>
+              <a:rPr lang="ko-KR" altLang="en-US" sz="3200" dirty="0"/>
+              <a:t> </a:t>
+            </a:r>
+            <a:endParaRPr lang="en-US" altLang="ko-KR" sz="3200" dirty="0"/>
+          </a:p>
+          <a:p>
+            <a:r>
+              <a:rPr lang="ko-KR" altLang="en-US" sz="3200" dirty="0"/>
+              <a:t> </a:t>
+            </a:r>
+          </a:p>
+          <a:p>
+            <a:r>
+              <a:rPr lang="ko-KR" altLang="en-US" sz="3600" b="1" dirty="0"/>
+              <a:t>기술적 </a:t>
+            </a:r>
+            <a:r>
+              <a:rPr lang="ko-KR" altLang="en-US" sz="3600" b="1" dirty="0" err="1"/>
+              <a:t>할루시네이션과</a:t>
+            </a:r>
+            <a:r>
+              <a:rPr lang="ko-KR" altLang="en-US" sz="3600" b="1" dirty="0"/>
+              <a:t> 버전 파편화 문제</a:t>
+            </a:r>
+            <a:endParaRPr lang="ko-KR" altLang="en-US" sz="3600" dirty="0"/>
+          </a:p>
+          <a:p>
+            <a:r>
+              <a:rPr lang="ko-KR" altLang="en-US" sz="3200" dirty="0"/>
+              <a:t>개발 과정에서 </a:t>
+            </a:r>
+            <a:r>
+              <a:rPr lang="en-US" altLang="ko-KR" sz="3200" dirty="0"/>
+              <a:t>LLM</a:t>
+            </a:r>
+            <a:r>
+              <a:rPr lang="ko-KR" altLang="en-US" sz="3200" dirty="0"/>
+              <a:t>은 명시적인 버전 지정에도 불구하고 잘못된 정보를 제공하는 </a:t>
+            </a:r>
+            <a:r>
+              <a:rPr lang="ko-KR" altLang="en-US" sz="3200" dirty="0" err="1"/>
+              <a:t>할루시네이션</a:t>
+            </a:r>
+            <a:r>
+              <a:rPr lang="ko-KR" altLang="en-US" sz="3200" dirty="0"/>
+              <a:t> 현상을 보였다</a:t>
+            </a:r>
+            <a:r>
+              <a:rPr lang="en-US" altLang="ko-KR" sz="3200" dirty="0"/>
+              <a:t>. </a:t>
+            </a:r>
+            <a:r>
+              <a:rPr lang="ko-KR" altLang="en-US" sz="3200" dirty="0"/>
+              <a:t>프롬프트에 </a:t>
+            </a:r>
+            <a:r>
+              <a:rPr lang="en-US" altLang="ko-KR" sz="3200" dirty="0"/>
+              <a:t>'Unreal Engine 5.7'</a:t>
+            </a:r>
+            <a:r>
+              <a:rPr lang="ko-KR" altLang="en-US" sz="3200" dirty="0"/>
+              <a:t>를 명시하였음에도</a:t>
+            </a:r>
+            <a:r>
+              <a:rPr lang="en-US" altLang="ko-KR" sz="3200" dirty="0"/>
+              <a:t>, </a:t>
+            </a:r>
+            <a:r>
+              <a:rPr lang="ko-KR" altLang="en-US" sz="3200" dirty="0"/>
+              <a:t>최신 </a:t>
+            </a:r>
+            <a:r>
+              <a:rPr lang="en-US" altLang="ko-KR" sz="3200" dirty="0"/>
+              <a:t>API</a:t>
+            </a:r>
+            <a:r>
+              <a:rPr lang="ko-KR" altLang="en-US" sz="3200" dirty="0"/>
+              <a:t>와의 호환성이 결여된 구 버전</a:t>
+            </a:r>
+            <a:r>
+              <a:rPr lang="en-US" altLang="ko-KR" sz="3200" dirty="0"/>
+              <a:t>(UE4)</a:t>
+            </a:r>
+            <a:r>
+              <a:rPr lang="ko-KR" altLang="en-US" sz="3200" dirty="0"/>
+              <a:t>의 함수를 제안하는 등의 사례가 빈번히 발생하였다</a:t>
+            </a:r>
+            <a:r>
+              <a:rPr lang="en-US" altLang="ko-KR" sz="3200" dirty="0"/>
+              <a:t>. </a:t>
+            </a:r>
+            <a:r>
+              <a:rPr lang="ko-KR" altLang="en-US" sz="3200" dirty="0"/>
+              <a:t>이에 개발자가 컴파일 에러를 직접 수정하기 위해 다시 공식 문서를 교차 검증해야 하는 </a:t>
+            </a:r>
+            <a:r>
+              <a:rPr lang="en-US" altLang="ko-KR" sz="3200" dirty="0"/>
+              <a:t>'</a:t>
+            </a:r>
+            <a:r>
+              <a:rPr lang="ko-KR" altLang="en-US" sz="3200" dirty="0"/>
+              <a:t>역</a:t>
+            </a:r>
+            <a:r>
+              <a:rPr lang="en-US" altLang="ko-KR" sz="3200" dirty="0"/>
+              <a:t>(</a:t>
+            </a:r>
+            <a:r>
+              <a:rPr lang="ko-KR" altLang="en-US" sz="3200" dirty="0"/>
+              <a:t>逆</a:t>
+            </a:r>
+            <a:r>
+              <a:rPr lang="en-US" altLang="ko-KR" sz="3200" dirty="0"/>
+              <a:t>) </a:t>
+            </a:r>
+            <a:r>
+              <a:rPr lang="ko-KR" altLang="en-US" sz="3200" dirty="0"/>
+              <a:t>효율성</a:t>
+            </a:r>
+            <a:r>
+              <a:rPr lang="en-US" altLang="ko-KR" sz="3200" dirty="0"/>
+              <a:t>'</a:t>
+            </a:r>
+            <a:r>
+              <a:rPr lang="ko-KR" altLang="en-US" sz="3200" dirty="0"/>
+              <a:t>이 발생하였다</a:t>
+            </a:r>
+            <a:r>
+              <a:rPr lang="en-US" altLang="ko-KR" sz="3200" dirty="0"/>
+              <a:t>. </a:t>
+            </a:r>
+            <a:endParaRPr lang="ko-KR" altLang="en-US" sz="3200" dirty="0"/>
+          </a:p>
+          <a:p>
+            <a:r>
+              <a:rPr lang="ko-KR" altLang="en-US" sz="3200" dirty="0"/>
+              <a:t> </a:t>
+            </a:r>
+            <a:endParaRPr lang="en-US" altLang="ko-KR" sz="3200" dirty="0"/>
+          </a:p>
+          <a:p>
+            <a:r>
+              <a:rPr lang="ko-KR" altLang="en-US" sz="3600" b="1" dirty="0"/>
+              <a:t>대화의 관성과 문맥 오염 </a:t>
+            </a:r>
+            <a:r>
+              <a:rPr lang="en-US" altLang="ko-KR" sz="3600" b="1" dirty="0"/>
+              <a:t>(Context Contamination)</a:t>
+            </a:r>
+            <a:endParaRPr lang="ko-KR" altLang="en-US" sz="3600" dirty="0"/>
+          </a:p>
+          <a:p>
+            <a:r>
+              <a:rPr lang="en-US" altLang="ko-KR" sz="3200" dirty="0"/>
+              <a:t>LLM</a:t>
+            </a:r>
+            <a:r>
+              <a:rPr lang="ko-KR" altLang="en-US" sz="3200" dirty="0"/>
+              <a:t>과의 장기적인 협업 과정에서 발생하는 </a:t>
+            </a:r>
+            <a:r>
+              <a:rPr lang="en-US" altLang="ko-KR" sz="3200" dirty="0"/>
+              <a:t>'</a:t>
+            </a:r>
+            <a:r>
+              <a:rPr lang="ko-KR" altLang="en-US" sz="3200" dirty="0"/>
+              <a:t>정보 고착화</a:t>
+            </a:r>
+            <a:r>
+              <a:rPr lang="en-US" altLang="ko-KR" sz="3200" dirty="0"/>
+              <a:t>' </a:t>
+            </a:r>
+            <a:r>
+              <a:rPr lang="ko-KR" altLang="en-US" sz="3200" dirty="0"/>
+              <a:t>현상은 개발의 유연성을 떨어뜨리는 또 다른 한계점으로 나타났다</a:t>
+            </a:r>
+            <a:r>
+              <a:rPr lang="en-US" altLang="ko-KR" sz="3200" dirty="0"/>
+              <a:t>.</a:t>
+            </a:r>
+            <a:r>
+              <a:rPr lang="ko-KR" altLang="en-US" sz="3200" dirty="0"/>
+              <a:t> 대화가 길어질수록 </a:t>
+            </a:r>
+            <a:r>
+              <a:rPr lang="en-US" altLang="ko-KR" sz="3200" dirty="0"/>
+              <a:t>LLM</a:t>
+            </a:r>
+            <a:r>
+              <a:rPr lang="ko-KR" altLang="en-US" sz="3200" dirty="0"/>
+              <a:t>은 이전 발화</a:t>
+            </a:r>
+            <a:r>
+              <a:rPr lang="en-US" altLang="ko-KR" sz="3200" dirty="0"/>
+              <a:t>(Utterance)</a:t>
+            </a:r>
+            <a:r>
+              <a:rPr lang="ko-KR" altLang="en-US" sz="3200" dirty="0"/>
+              <a:t>에서 형성된 맥락에 과도하게 의존하는 경향을 보였다</a:t>
+            </a:r>
+            <a:r>
+              <a:rPr lang="en-US" altLang="ko-KR" sz="3200" dirty="0"/>
+              <a:t>. </a:t>
+            </a:r>
+            <a:r>
+              <a:rPr lang="ko-KR" altLang="en-US" sz="3200" dirty="0"/>
+              <a:t>이로 인해 개발자가 명확히 새로운 기준이나 수정된 라이브러리 정보를 제공하더라도</a:t>
+            </a:r>
+            <a:r>
+              <a:rPr lang="en-US" altLang="ko-KR" sz="3200" dirty="0"/>
+              <a:t>, </a:t>
+            </a:r>
+            <a:r>
+              <a:rPr lang="ko-KR" altLang="en-US" sz="3200" dirty="0"/>
+              <a:t>모델이 이전 답변의 코드 구조를 반복 출력하거나 수정 사항을 누락하는 </a:t>
+            </a:r>
+            <a:r>
+              <a:rPr lang="en-US" altLang="ko-KR" sz="3200" dirty="0"/>
+              <a:t>'</a:t>
+            </a:r>
+            <a:r>
+              <a:rPr lang="ko-KR" altLang="en-US" sz="3200" dirty="0"/>
+              <a:t>대화의 관성</a:t>
+            </a:r>
+            <a:r>
+              <a:rPr lang="en-US" altLang="ko-KR" sz="3200" dirty="0"/>
+              <a:t>' </a:t>
+            </a:r>
+            <a:r>
+              <a:rPr lang="ko-KR" altLang="en-US" sz="3200" dirty="0"/>
+              <a:t>현상이 발생하여 불필요하게 반복해서 수정사항을 지시해야 했고</a:t>
+            </a:r>
+            <a:r>
+              <a:rPr lang="en-US" altLang="ko-KR" sz="3200" dirty="0"/>
+              <a:t>, </a:t>
+            </a:r>
+            <a:r>
+              <a:rPr lang="ko-KR" altLang="en-US" sz="3200" dirty="0"/>
+              <a:t>때때로 대화 기록을 초기화하고 새로운 세션을 시작해야 하는 상황이 빈번하는 등 재입력 비용이 필요했다</a:t>
+            </a:r>
+            <a:r>
+              <a:rPr lang="en-US" altLang="ko-KR" sz="3200" dirty="0"/>
+              <a:t>.</a:t>
+            </a:r>
+          </a:p>
+          <a:p>
+            <a:endParaRPr lang="en-US" altLang="ko-KR" sz="3200" dirty="0"/>
+          </a:p>
+          <a:p>
+            <a:r>
+              <a:rPr lang="ko-KR" altLang="en-US" sz="3600" b="1" dirty="0"/>
+              <a:t>결론</a:t>
+            </a:r>
+            <a:endParaRPr lang="ko-KR" altLang="en-US" sz="3600" dirty="0"/>
+          </a:p>
+          <a:p>
+            <a:r>
+              <a:rPr lang="ko-KR" altLang="en-US" sz="3200" dirty="0"/>
+              <a:t>위와 같은 한계점들은 </a:t>
+            </a:r>
+            <a:r>
+              <a:rPr lang="en-US" altLang="ko-KR" sz="3200" dirty="0"/>
+              <a:t>LLM </a:t>
+            </a:r>
+            <a:r>
+              <a:rPr lang="ko-KR" altLang="en-US" sz="3200" dirty="0"/>
+              <a:t>기반 개발 환경에서 개발자의 역할이 </a:t>
+            </a:r>
+            <a:r>
+              <a:rPr lang="en-US" altLang="ko-KR" sz="3200" dirty="0"/>
+              <a:t>'</a:t>
+            </a:r>
+            <a:r>
+              <a:rPr lang="ko-KR" altLang="en-US" sz="3200" dirty="0"/>
+              <a:t>작성</a:t>
+            </a:r>
+            <a:r>
+              <a:rPr lang="en-US" altLang="ko-KR" sz="3200" dirty="0"/>
+              <a:t>'</a:t>
+            </a:r>
+            <a:r>
+              <a:rPr lang="ko-KR" altLang="en-US" sz="3200" dirty="0"/>
+              <a:t>에서 </a:t>
+            </a:r>
+            <a:r>
+              <a:rPr lang="en-US" altLang="ko-KR" sz="3200" dirty="0"/>
+              <a:t>'</a:t>
+            </a:r>
+            <a:r>
+              <a:rPr lang="ko-KR" altLang="en-US" sz="3200" dirty="0"/>
+              <a:t>검토 및 검증</a:t>
+            </a:r>
+            <a:r>
+              <a:rPr lang="en-US" altLang="ko-KR" sz="3200" dirty="0"/>
+              <a:t>'</a:t>
+            </a:r>
+            <a:r>
+              <a:rPr lang="ko-KR" altLang="en-US" sz="3200" dirty="0"/>
+              <a:t>으로 변화해야 함을 시사한다</a:t>
+            </a:r>
+            <a:r>
+              <a:rPr lang="en-US" altLang="ko-KR" sz="3200" dirty="0"/>
+              <a:t>. </a:t>
+            </a:r>
+          </a:p>
+          <a:p>
+            <a:r>
+              <a:rPr lang="ko-KR" altLang="en-US" sz="3200" dirty="0"/>
+              <a:t>개발자 개인의 도메인 지식</a:t>
+            </a:r>
+            <a:r>
+              <a:rPr lang="en-US" altLang="ko-KR" sz="3200" dirty="0"/>
+              <a:t>(Domain Knowledge)</a:t>
+            </a:r>
+            <a:r>
+              <a:rPr lang="ko-KR" altLang="en-US" sz="3200" dirty="0"/>
+              <a:t>이 전제되어야만 진정한 효율성 향상을 기대할 수 있으며</a:t>
+            </a:r>
+            <a:r>
+              <a:rPr lang="en-US" altLang="ko-KR" sz="3200" dirty="0"/>
+              <a:t>,</a:t>
+            </a:r>
+            <a:r>
+              <a:rPr lang="ko-KR" altLang="en-US" sz="3200" dirty="0"/>
+              <a:t> 아직 </a:t>
+            </a:r>
+            <a:r>
+              <a:rPr lang="en-US" altLang="ko-KR" sz="3200" dirty="0"/>
+              <a:t>LLM</a:t>
+            </a:r>
+            <a:r>
+              <a:rPr lang="ko-KR" altLang="en-US" sz="3200" dirty="0"/>
+              <a:t>은 개발자를 완전히 대체할 수 없고</a:t>
+            </a:r>
+            <a:r>
+              <a:rPr lang="en-US" altLang="ko-KR" sz="3200" dirty="0"/>
+              <a:t>, </a:t>
+            </a:r>
+            <a:r>
+              <a:rPr lang="ko-KR" altLang="en-US" sz="3200" dirty="0"/>
+              <a:t>개발자의 역량에 따라 그 활용 가치가 결정되는 고도의 </a:t>
+            </a:r>
+            <a:r>
+              <a:rPr lang="en-US" altLang="ko-KR" sz="3200" dirty="0"/>
+              <a:t>'</a:t>
+            </a:r>
+            <a:r>
+              <a:rPr lang="ko-KR" altLang="en-US" sz="3200" dirty="0"/>
+              <a:t>지능형 도구</a:t>
+            </a:r>
+            <a:r>
+              <a:rPr lang="en-US" altLang="ko-KR" sz="3200" dirty="0"/>
+              <a:t>'</a:t>
+            </a:r>
+            <a:r>
+              <a:rPr lang="ko-KR" altLang="en-US" sz="3200" dirty="0"/>
+              <a:t>로서 기능함을 확인하였다</a:t>
+            </a:r>
+            <a:r>
+              <a:rPr lang="en-US" altLang="ko-KR" sz="3200" dirty="0"/>
+              <a:t>. </a:t>
+            </a:r>
+            <a:endParaRPr lang="ko-KR" altLang="en-US" sz="3200" dirty="0"/>
+          </a:p>
+        </p:txBody>
+      </p:sp>
+      <p:graphicFrame>
+        <p:nvGraphicFramePr>
+          <p:cNvPr id="54" name="차트 53">
+            <a:extLst>
+              <a:ext uri="{FF2B5EF4-FFF2-40B4-BE49-F238E27FC236}">
+                <a16:creationId xmlns:a16="http://schemas.microsoft.com/office/drawing/2014/main" id="{DF56601F-1687-5162-6873-F6FCECE8217E}"/>
+              </a:ext>
+            </a:extLst>
+          </p:cNvPr>
+          <p:cNvGraphicFramePr/>
+          <p:nvPr>
+            <p:extLst>
+              <p:ext uri="{D42A27DB-BD31-4B8C-83A1-F6EECF244321}">
+                <p14:modId xmlns:p14="http://schemas.microsoft.com/office/powerpoint/2010/main" val="454962833"/>
+              </p:ext>
+            </p:extLst>
+          </p:nvPr>
+        </p:nvGraphicFramePr>
+        <p:xfrm>
+          <a:off x="16618515" y="8033113"/>
+          <a:ext cx="15380722" cy="3402010"/>
+        </p:xfrm>
+        <a:graphic>
+          <a:graphicData uri="http://schemas.openxmlformats.org/drawingml/2006/chart">
+            <c:chart xmlns:c="http://schemas.openxmlformats.org/drawingml/2006/chart" xmlns:r="http://schemas.openxmlformats.org/officeDocument/2006/relationships" r:id="rId4"/>
+          </a:graphicData>
+        </a:graphic>
+      </p:graphicFrame>
+      <p:sp>
+        <p:nvSpPr>
+          <p:cNvPr id="55" name="타원 54">
+            <a:extLst>
+              <a:ext uri="{FF2B5EF4-FFF2-40B4-BE49-F238E27FC236}">
+                <a16:creationId xmlns:a16="http://schemas.microsoft.com/office/drawing/2014/main" id="{3B61C5DE-8B9B-EFD1-3C77-F06A2C62D31E}"/>
+              </a:ext>
+            </a:extLst>
+          </p:cNvPr>
+          <p:cNvSpPr/>
+          <p:nvPr/>
+        </p:nvSpPr>
+        <p:spPr>
+          <a:xfrm>
+            <a:off x="16618515" y="12120654"/>
+            <a:ext cx="900000" cy="900000"/>
+          </a:xfrm>
+          <a:prstGeom prst="ellipse">
+            <a:avLst/>
+          </a:prstGeom>
+          <a:ln>
+            <a:noFill/>
+          </a:ln>
+        </p:spPr>
+        <p:style>
+          <a:lnRef idx="2">
+            <a:schemeClr val="accent1">
+              <a:shade val="15000"/>
+            </a:schemeClr>
+          </a:lnRef>
+          <a:fillRef idx="1">
+            <a:schemeClr val="accent1"/>
+          </a:fillRef>
+          <a:effectRef idx="0">
+            <a:schemeClr val="accent1"/>
+          </a:effectRef>
+          <a:fontRef idx="minor">
+            <a:schemeClr val="lt1"/>
+          </a:fontRef>
+        </p:style>
+        <p:txBody>
+          <a:bodyPr rtlCol="0" anchor="ctr"/>
+          <a:lstStyle/>
+          <a:p>
+            <a:pPr algn="ctr"/>
+            <a:endParaRPr lang="ko-KR" altLang="en-US"/>
+          </a:p>
+        </p:txBody>
+      </p:sp>
+      <p:sp>
+        <p:nvSpPr>
+          <p:cNvPr id="56" name="TextBox 55">
+            <a:extLst>
+              <a:ext uri="{FF2B5EF4-FFF2-40B4-BE49-F238E27FC236}">
+                <a16:creationId xmlns:a16="http://schemas.microsoft.com/office/drawing/2014/main" id="{44005418-FA0A-3D77-DCC5-84757F290425}"/>
+              </a:ext>
+            </a:extLst>
+          </p:cNvPr>
+          <p:cNvSpPr txBox="1"/>
+          <p:nvPr/>
+        </p:nvSpPr>
+        <p:spPr>
+          <a:xfrm>
+            <a:off x="16667552" y="12216711"/>
+            <a:ext cx="801925" cy="707886"/>
+          </a:xfrm>
+          <a:prstGeom prst="rect">
+            <a:avLst/>
+          </a:prstGeom>
+          <a:noFill/>
+        </p:spPr>
+        <p:txBody>
+          <a:bodyPr wrap="square" rtlCol="0">
+            <a:spAutoFit/>
+          </a:bodyPr>
+          <a:lstStyle/>
+          <a:p>
+            <a:pPr algn="ctr"/>
+            <a:r>
+              <a:rPr lang="en-US" altLang="ko-KR" sz="4000" b="1" dirty="0">
+                <a:solidFill>
+                  <a:schemeClr val="bg1">
+                    <a:lumMod val="95000"/>
+                  </a:schemeClr>
+                </a:solidFill>
+                <a:effectLst>
+                  <a:outerShdw blurRad="38100" dist="38100" dir="2700000" algn="tl">
+                    <a:srgbClr val="000000">
+                      <a:alpha val="43137"/>
+                    </a:srgbClr>
+                  </a:outerShdw>
+                </a:effectLst>
+              </a:rPr>
+              <a:t>2</a:t>
+            </a:r>
+            <a:endParaRPr lang="ko-KR" altLang="en-US" sz="4000" b="1" dirty="0">
+              <a:solidFill>
+                <a:schemeClr val="bg1">
+                  <a:lumMod val="95000"/>
+                </a:schemeClr>
+              </a:solidFill>
+              <a:effectLst>
+                <a:outerShdw blurRad="38100" dist="38100" dir="2700000" algn="tl">
+                  <a:srgbClr val="000000">
+                    <a:alpha val="43137"/>
+                  </a:srgbClr>
+                </a:outerShdw>
+              </a:effectLst>
+            </a:endParaRPr>
+          </a:p>
+        </p:txBody>
+      </p:sp>
+      <p:sp>
+        <p:nvSpPr>
+          <p:cNvPr id="57" name="TextBox 56">
+            <a:extLst>
+              <a:ext uri="{FF2B5EF4-FFF2-40B4-BE49-F238E27FC236}">
+                <a16:creationId xmlns:a16="http://schemas.microsoft.com/office/drawing/2014/main" id="{B97C9456-7012-1919-C017-17B01672CD08}"/>
+              </a:ext>
+            </a:extLst>
+          </p:cNvPr>
+          <p:cNvSpPr txBox="1"/>
+          <p:nvPr/>
+        </p:nvSpPr>
+        <p:spPr>
+          <a:xfrm>
+            <a:off x="17761352" y="12216711"/>
+            <a:ext cx="12564821" cy="707886"/>
+          </a:xfrm>
+          <a:prstGeom prst="rect">
+            <a:avLst/>
+          </a:prstGeom>
+          <a:noFill/>
+        </p:spPr>
+        <p:txBody>
+          <a:bodyPr wrap="square" rtlCol="0">
+            <a:spAutoFit/>
+          </a:bodyPr>
+          <a:lstStyle/>
+          <a:p>
+            <a:r>
+              <a:rPr lang="en-US" altLang="ko-KR" sz="4000" b="1" dirty="0">
                 <a:solidFill>
                   <a:schemeClr val="accent1">
                     <a:lumMod val="50000"/>
@@ -4300,43 +7194,11 @@
                     </a:srgbClr>
                   </a:outerShdw>
                 </a:effectLst>
-                <a:latin typeface="+mn-ea"/>
-              </a:rPr>
-              <a:t>연구 방법</a:t>
-            </a:r>
-          </a:p>
-        </p:txBody>
-      </p:sp>
-      <p:sp>
-        <p:nvSpPr>
-          <p:cNvPr id="13" name="TextBox 12">
-            <a:extLst>
-              <a:ext uri="{FF2B5EF4-FFF2-40B4-BE49-F238E27FC236}">
-                <a16:creationId xmlns:a16="http://schemas.microsoft.com/office/drawing/2014/main" id="{7B1AD083-2F16-07D5-47B8-F8BEDA6D8DD6}"/>
-              </a:ext>
-            </a:extLst>
-          </p:cNvPr>
-          <p:cNvSpPr txBox="1"/>
-          <p:nvPr/>
-        </p:nvSpPr>
-        <p:spPr>
-          <a:xfrm>
-            <a:off x="718454" y="28300972"/>
-            <a:ext cx="13454743" cy="923330"/>
-          </a:xfrm>
-          <a:prstGeom prst="rect">
-            <a:avLst/>
-          </a:prstGeom>
-          <a:noFill/>
-        </p:spPr>
-        <p:txBody>
-          <a:bodyPr wrap="square" rtlCol="0">
-            <a:spAutoFit/>
-          </a:bodyPr>
-          <a:lstStyle/>
-          <a:p>
-            <a:r>
-              <a:rPr lang="ko-KR" altLang="en-US" sz="5400" b="1" dirty="0">
+              </a:rPr>
+              <a:t>LLM </a:t>
+            </a:r>
+            <a:r>
+              <a:rPr lang="ko-KR" altLang="en-US" sz="4000" b="1" dirty="0" err="1">
                 <a:solidFill>
                   <a:schemeClr val="accent1">
                     <a:lumMod val="50000"/>
@@ -4349,19 +7211,49 @@
                     </a:srgbClr>
                   </a:outerShdw>
                 </a:effectLst>
-                <a:latin typeface="+mn-ea"/>
-              </a:rPr>
-              <a:t>연구 목적</a:t>
-            </a:r>
-          </a:p>
-        </p:txBody>
-      </p:sp>
-      <p:sp>
-        <p:nvSpPr>
-          <p:cNvPr id="14" name="TextBox 13">
+              </a:rPr>
+              <a:t>멀티모달</a:t>
+            </a:r>
+            <a:r>
+              <a:rPr lang="ko-KR" altLang="en-US" sz="4000" b="1" dirty="0">
+                <a:solidFill>
+                  <a:schemeClr val="accent1">
+                    <a:lumMod val="50000"/>
+                  </a:schemeClr>
+                </a:solidFill>
+                <a:effectLst>
+                  <a:outerShdw blurRad="38100" dist="38100" dir="2700000" algn="tl">
+                    <a:srgbClr val="000000">
+                      <a:alpha val="43137"/>
+                    </a:srgbClr>
+                  </a:outerShdw>
+                </a:effectLst>
+              </a:rPr>
+              <a:t> 기능을 활용한 시각적 로직의 코드 변환</a:t>
+            </a:r>
+            <a:endParaRPr lang="ko-KR" altLang="en-US" sz="4000" dirty="0">
+              <a:solidFill>
+                <a:schemeClr val="accent1">
+                  <a:lumMod val="50000"/>
+                </a:schemeClr>
+              </a:solidFill>
+              <a:effectLst>
+                <a:outerShdw blurRad="38100" dist="38100" dir="2700000" algn="tl">
+                  <a:srgbClr val="000000">
+                    <a:alpha val="43137"/>
+                  </a:srgbClr>
+                </a:outerShdw>
+              </a:effectLst>
+            </a:endParaRPr>
+          </a:p>
+        </p:txBody>
+      </p:sp>
+      <p:sp>
+        <p:nvSpPr>
+          <p:cNvPr id="58" name="TextBox 57">
             <a:extLst>
               <a:ext uri="{FF2B5EF4-FFF2-40B4-BE49-F238E27FC236}">
-                <a16:creationId xmlns:a16="http://schemas.microsoft.com/office/drawing/2014/main" id="{10F9E64D-7F4F-CCFE-AC45-EA7B645ED037}"/>
+                <a16:creationId xmlns:a16="http://schemas.microsoft.com/office/drawing/2014/main" id="{4722985B-4C8A-3A30-6997-E4B442E3F76A}"/>
               </a:ext>
             </a:extLst>
           </p:cNvPr>
@@ -4370,8 +7262,8 @@
         </p:nvSpPr>
         <p:spPr>
           <a:xfrm>
-            <a:off x="718453" y="29578353"/>
-            <a:ext cx="13454743" cy="2554545"/>
+            <a:off x="16618515" y="13475535"/>
+            <a:ext cx="15380722" cy="13634502"/>
           </a:xfrm>
           <a:prstGeom prst="rect">
             <a:avLst/>
@@ -4385,461 +7277,413 @@
           <a:lstStyle/>
           <a:p>
             <a:r>
-              <a:rPr lang="ko-KR" altLang="en-US" sz="4000" b="1" dirty="0">
-                <a:solidFill>
-                  <a:schemeClr val="tx2">
-                    <a:lumMod val="75000"/>
-                  </a:schemeClr>
-                </a:solidFill>
-                <a:ea typeface="+mj-ea"/>
-              </a:rPr>
-              <a:t>본 연구의 목적은 </a:t>
-            </a:r>
-            <a:r>
-              <a:rPr lang="ko-KR" altLang="en-US" sz="4000" b="1" dirty="0" err="1">
-                <a:solidFill>
-                  <a:schemeClr val="tx2">
-                    <a:lumMod val="75000"/>
-                  </a:schemeClr>
-                </a:solidFill>
-              </a:rPr>
+              <a:rPr lang="ko-KR" altLang="en-US" sz="3200" dirty="0"/>
+              <a:t>본 연구에서는 소규모 게임 개발 과정에서 성능 최적화와 개발 속도 사이의 간극을 줄이기 위해</a:t>
+            </a:r>
+            <a:r>
+              <a:rPr lang="en-US" altLang="ko-KR" sz="3200" dirty="0"/>
+              <a:t>, LLM</a:t>
+            </a:r>
+            <a:r>
+              <a:rPr lang="ko-KR" altLang="en-US" sz="3200" dirty="0"/>
+              <a:t>의 이미지 인식 기능을 활용한 노드 분석 및 </a:t>
+            </a:r>
+            <a:r>
+              <a:rPr lang="en-US" altLang="ko-KR" sz="3200" dirty="0"/>
+              <a:t>C++ </a:t>
+            </a:r>
+            <a:r>
+              <a:rPr lang="ko-KR" altLang="en-US" sz="3200" dirty="0"/>
+              <a:t>변환 프로세스를 시도하였다</a:t>
+            </a:r>
+            <a:r>
+              <a:rPr lang="en-US" altLang="ko-KR" sz="3200" dirty="0"/>
+              <a:t>. </a:t>
+            </a:r>
+          </a:p>
+          <a:p>
+            <a:endParaRPr lang="en-US" altLang="ko-KR" sz="3200" b="1" dirty="0"/>
+          </a:p>
+          <a:p>
+            <a:r>
+              <a:rPr lang="ko-KR" altLang="en-US" sz="3600" b="1" dirty="0"/>
+              <a:t>시각적 노드 그래프의 논리적 인식 및 구조화</a:t>
+            </a:r>
+            <a:endParaRPr lang="ko-KR" altLang="en-US" sz="3600" dirty="0"/>
+          </a:p>
+          <a:p>
+            <a:r>
+              <a:rPr lang="ko-KR" altLang="en-US" sz="3200" dirty="0"/>
+              <a:t>전통적인 방식에서 </a:t>
+            </a:r>
+            <a:r>
+              <a:rPr lang="ko-KR" altLang="en-US" sz="3200" dirty="0" err="1"/>
+              <a:t>블루프린트</a:t>
+            </a:r>
+            <a:r>
+              <a:rPr lang="ko-KR" altLang="en-US" sz="3200" dirty="0"/>
+              <a:t> 로직을 </a:t>
+            </a:r>
+            <a:r>
+              <a:rPr lang="en-US" altLang="ko-KR" sz="3200" dirty="0"/>
+              <a:t>C++</a:t>
+            </a:r>
+            <a:r>
+              <a:rPr lang="ko-KR" altLang="en-US" sz="3200" dirty="0"/>
+              <a:t>로 이식하기 위해서는 개발자가 직접 노드의 실행 흐름과 데이터 핀의 연결 관계를 역설계해야 했다</a:t>
+            </a:r>
+            <a:r>
+              <a:rPr lang="en-US" altLang="ko-KR" sz="3200" dirty="0"/>
+              <a:t>. </a:t>
+            </a:r>
+            <a:r>
+              <a:rPr lang="ko-KR" altLang="en-US" sz="3200" dirty="0"/>
+              <a:t>본 연구에서는 </a:t>
+            </a:r>
+            <a:r>
+              <a:rPr lang="ko-KR" altLang="en-US" sz="3200" dirty="0" err="1"/>
+              <a:t>멀티모달</a:t>
+            </a:r>
+            <a:r>
+              <a:rPr lang="ko-KR" altLang="en-US" sz="3200" dirty="0"/>
+              <a:t> </a:t>
+            </a:r>
+            <a:r>
+              <a:rPr lang="en-US" altLang="ko-KR" sz="3200" dirty="0"/>
+              <a:t>LLM</a:t>
+            </a:r>
+            <a:r>
+              <a:rPr lang="ko-KR" altLang="en-US" sz="3200" dirty="0"/>
+              <a:t>에 </a:t>
+            </a:r>
+            <a:r>
+              <a:rPr lang="ko-KR" altLang="en-US" sz="3200" dirty="0" err="1"/>
+              <a:t>블루프린트</a:t>
+            </a:r>
+            <a:r>
+              <a:rPr lang="ko-KR" altLang="en-US" sz="3200" dirty="0"/>
+              <a:t> 에디터의 스크린샷을 </a:t>
+            </a:r>
+            <a:r>
+              <a:rPr lang="ko-KR" altLang="en-US" sz="3200" dirty="0" err="1"/>
+              <a:t>입력값으로</a:t>
+            </a:r>
+            <a:r>
+              <a:rPr lang="ko-KR" altLang="en-US" sz="3200" dirty="0"/>
+              <a:t> 제공하였다</a:t>
+            </a:r>
+            <a:r>
+              <a:rPr lang="en-US" altLang="ko-KR" sz="3200" dirty="0"/>
+              <a:t>.</a:t>
+            </a:r>
+            <a:r>
+              <a:rPr lang="ko-KR" altLang="en-US" sz="3200" dirty="0"/>
+              <a:t>  </a:t>
+            </a:r>
+          </a:p>
+          <a:p>
+            <a:endParaRPr lang="en-US" altLang="ko-KR" sz="3600" b="1" dirty="0"/>
+          </a:p>
+          <a:p>
+            <a:r>
+              <a:rPr lang="en-US" altLang="ko-KR" sz="3600" b="1" dirty="0"/>
+              <a:t>C++ </a:t>
+            </a:r>
+            <a:r>
+              <a:rPr lang="ko-KR" altLang="en-US" sz="3600" b="1" dirty="0"/>
+              <a:t>클래스 변환</a:t>
+            </a:r>
+            <a:endParaRPr lang="ko-KR" altLang="en-US" sz="3600" dirty="0"/>
+          </a:p>
+          <a:p>
+            <a:r>
+              <a:rPr lang="ko-KR" altLang="en-US" sz="3200" dirty="0"/>
+              <a:t>인식된 시각적 논리를 바탕으로</a:t>
+            </a:r>
+            <a:r>
+              <a:rPr lang="en-US" altLang="ko-KR" sz="3200" dirty="0"/>
+              <a:t>, LLM</a:t>
+            </a:r>
+            <a:r>
+              <a:rPr lang="ko-KR" altLang="en-US" sz="3200" dirty="0"/>
+              <a:t>은 </a:t>
+            </a:r>
+            <a:r>
+              <a:rPr lang="ko-KR" altLang="en-US" sz="3200" dirty="0" err="1"/>
               <a:t>언리얼</a:t>
             </a:r>
             <a:r>
-              <a:rPr lang="ko-KR" altLang="en-US" sz="4000" b="1" dirty="0">
-                <a:solidFill>
-                  <a:schemeClr val="tx2">
-                    <a:lumMod val="75000"/>
-                  </a:schemeClr>
-                </a:solidFill>
-              </a:rPr>
-              <a:t> 엔진 </a:t>
-            </a:r>
-            <a:r>
-              <a:rPr lang="en-US" altLang="ko-KR" sz="4000" b="1" dirty="0">
-                <a:solidFill>
-                  <a:schemeClr val="tx2">
-                    <a:lumMod val="75000"/>
-                  </a:schemeClr>
-                </a:solidFill>
-              </a:rPr>
-              <a:t>C++</a:t>
-            </a:r>
-            <a:r>
-              <a:rPr lang="ko-KR" altLang="en-US" sz="4000" b="1" dirty="0">
-                <a:solidFill>
-                  <a:schemeClr val="tx2">
-                    <a:lumMod val="75000"/>
-                  </a:schemeClr>
-                </a:solidFill>
-              </a:rPr>
-              <a:t>라는 높은 기술적 진입 장벽을 가진 환경에서</a:t>
-            </a:r>
-            <a:r>
-              <a:rPr lang="en-US" altLang="ko-KR" sz="4000" b="1" dirty="0">
-                <a:solidFill>
-                  <a:schemeClr val="tx2">
-                    <a:lumMod val="75000"/>
-                  </a:schemeClr>
-                </a:solidFill>
-              </a:rPr>
-              <a:t>, LLM </a:t>
-            </a:r>
-            <a:r>
-              <a:rPr lang="ko-KR" altLang="en-US" sz="4000" b="1" dirty="0">
-                <a:solidFill>
-                  <a:schemeClr val="tx2">
-                    <a:lumMod val="75000"/>
-                  </a:schemeClr>
-                </a:solidFill>
-              </a:rPr>
-              <a:t>기반의 </a:t>
-            </a:r>
-            <a:r>
-              <a:rPr lang="en-US" altLang="ko-KR" sz="4000" b="1" dirty="0">
-                <a:solidFill>
-                  <a:schemeClr val="tx2">
-                    <a:lumMod val="75000"/>
-                  </a:schemeClr>
-                </a:solidFill>
-              </a:rPr>
-              <a:t>'</a:t>
-            </a:r>
-            <a:r>
-              <a:rPr lang="ko-KR" altLang="en-US" sz="4000" b="1" dirty="0" err="1">
-                <a:solidFill>
-                  <a:schemeClr val="tx2">
-                    <a:lumMod val="75000"/>
-                  </a:schemeClr>
-                </a:solidFill>
-              </a:rPr>
-              <a:t>바이브</a:t>
-            </a:r>
-            <a:r>
-              <a:rPr lang="ko-KR" altLang="en-US" sz="4000" b="1" dirty="0">
-                <a:solidFill>
-                  <a:schemeClr val="tx2">
-                    <a:lumMod val="75000"/>
-                  </a:schemeClr>
-                </a:solidFill>
-              </a:rPr>
-              <a:t> 코딩</a:t>
-            </a:r>
-            <a:r>
-              <a:rPr lang="en-US" altLang="ko-KR" sz="4000" b="1" dirty="0">
-                <a:solidFill>
-                  <a:schemeClr val="tx2">
-                    <a:lumMod val="75000"/>
-                  </a:schemeClr>
-                </a:solidFill>
-              </a:rPr>
-              <a:t>'</a:t>
-            </a:r>
-            <a:r>
-              <a:rPr lang="ko-KR" altLang="en-US" sz="4000" b="1" dirty="0">
-                <a:solidFill>
-                  <a:schemeClr val="tx2">
-                    <a:lumMod val="75000"/>
-                  </a:schemeClr>
-                </a:solidFill>
-              </a:rPr>
-              <a:t>이 소규모 게임 프로젝트의 생산 한계선을 어떻게 </a:t>
-            </a:r>
-            <a:r>
-              <a:rPr lang="ko-KR" altLang="en-US" sz="4000" b="1" dirty="0" err="1">
-                <a:solidFill>
-                  <a:schemeClr val="tx2">
-                    <a:lumMod val="75000"/>
-                  </a:schemeClr>
-                </a:solidFill>
-              </a:rPr>
-              <a:t>확장시키는지</a:t>
-            </a:r>
-            <a:r>
-              <a:rPr lang="ko-KR" altLang="en-US" sz="4000" b="1" dirty="0">
-                <a:solidFill>
-                  <a:schemeClr val="tx2">
-                    <a:lumMod val="75000"/>
-                  </a:schemeClr>
-                </a:solidFill>
-              </a:rPr>
-              <a:t> 규명하는 데 있다</a:t>
-            </a:r>
-            <a:r>
-              <a:rPr lang="en-US" altLang="ko-KR" sz="4000" b="1" dirty="0">
-                <a:solidFill>
-                  <a:schemeClr val="tx2">
-                    <a:lumMod val="75000"/>
-                  </a:schemeClr>
-                </a:solidFill>
-              </a:rPr>
+              <a:rPr lang="ko-KR" altLang="en-US" sz="3200" dirty="0"/>
+              <a:t> 엔진의 코딩 표준을 준수하는 </a:t>
+            </a:r>
+            <a:r>
+              <a:rPr lang="en-US" altLang="ko-KR" sz="3200" dirty="0"/>
+              <a:t>C++ </a:t>
+            </a:r>
+            <a:r>
+              <a:rPr lang="ko-KR" altLang="en-US" sz="3200" dirty="0"/>
+              <a:t>코드를 생성하는데 성공하였다</a:t>
+            </a:r>
+            <a:r>
+              <a:rPr lang="en-US" altLang="ko-KR" sz="3200" dirty="0"/>
+              <a:t>.</a:t>
+            </a:r>
+            <a:endParaRPr lang="ko-KR" altLang="en-US" sz="3200" dirty="0"/>
+          </a:p>
+          <a:p>
+            <a:r>
+              <a:rPr lang="en-US" altLang="ko-KR" sz="3200" dirty="0"/>
+              <a:t>LLM</a:t>
+            </a:r>
+            <a:r>
+              <a:rPr lang="ko-KR" altLang="en-US" sz="3200" dirty="0"/>
+              <a:t>은 </a:t>
+            </a:r>
+            <a:r>
+              <a:rPr lang="ko-KR" altLang="en-US" sz="3200" dirty="0" err="1"/>
+              <a:t>블루프린트의</a:t>
+            </a:r>
+            <a:r>
+              <a:rPr lang="ko-KR" altLang="en-US" sz="3200" dirty="0"/>
+              <a:t> 각 노드에 대응하는 </a:t>
+            </a:r>
+            <a:r>
+              <a:rPr lang="en-US" altLang="ko-KR" sz="3200" dirty="0"/>
+              <a:t>UFUNCTION </a:t>
+            </a:r>
+            <a:r>
+              <a:rPr lang="ko-KR" altLang="en-US" sz="3200" dirty="0"/>
+              <a:t>및 </a:t>
+            </a:r>
+            <a:r>
+              <a:rPr lang="en-US" altLang="ko-KR" sz="3200" dirty="0"/>
+              <a:t>UPROPERTY </a:t>
+            </a:r>
+            <a:r>
+              <a:rPr lang="ko-KR" altLang="en-US" sz="3200" dirty="0"/>
+              <a:t>매크로를 포함한 헤더</a:t>
+            </a:r>
+            <a:r>
+              <a:rPr lang="en-US" altLang="ko-KR" sz="3200" dirty="0"/>
+              <a:t>(.h)</a:t>
+            </a:r>
+            <a:r>
+              <a:rPr lang="ko-KR" altLang="en-US" sz="3200" dirty="0"/>
+              <a:t>와 소스</a:t>
+            </a:r>
+            <a:r>
+              <a:rPr lang="en-US" altLang="ko-KR" sz="3200" dirty="0"/>
+              <a:t>(.</a:t>
+            </a:r>
+            <a:r>
+              <a:rPr lang="en-US" altLang="ko-KR" sz="3200" dirty="0" err="1"/>
+              <a:t>cpp</a:t>
+            </a:r>
+            <a:r>
+              <a:rPr lang="en-US" altLang="ko-KR" sz="3200" dirty="0"/>
+              <a:t>) </a:t>
+            </a:r>
+            <a:r>
+              <a:rPr lang="ko-KR" altLang="en-US" sz="3200" dirty="0"/>
+              <a:t>파일을 구성하였다</a:t>
+            </a:r>
+            <a:r>
+              <a:rPr lang="en-US" altLang="ko-KR" sz="3200" dirty="0"/>
               <a:t>. </a:t>
             </a:r>
-            <a:endParaRPr lang="ko-KR" altLang="en-US" sz="4000" b="1" dirty="0">
-              <a:solidFill>
-                <a:schemeClr val="tx2">
-                  <a:lumMod val="75000"/>
-                </a:schemeClr>
-              </a:solidFill>
-              <a:ea typeface="+mj-ea"/>
-            </a:endParaRPr>
-          </a:p>
-        </p:txBody>
-      </p:sp>
-      <p:sp>
-        <p:nvSpPr>
-          <p:cNvPr id="15" name="TextBox 14">
-            <a:extLst>
-              <a:ext uri="{FF2B5EF4-FFF2-40B4-BE49-F238E27FC236}">
-                <a16:creationId xmlns:a16="http://schemas.microsoft.com/office/drawing/2014/main" id="{07BE6545-76E5-EBA3-349E-09B6ED05E91B}"/>
-              </a:ext>
-            </a:extLst>
-          </p:cNvPr>
-          <p:cNvSpPr txBox="1"/>
-          <p:nvPr/>
-        </p:nvSpPr>
-        <p:spPr>
-          <a:xfrm>
-            <a:off x="718453" y="34915108"/>
-            <a:ext cx="13454743" cy="6617196"/>
-          </a:xfrm>
-          <a:prstGeom prst="rect">
-            <a:avLst/>
-          </a:prstGeom>
-          <a:noFill/>
-        </p:spPr>
-        <p:txBody>
-          <a:bodyPr wrap="square" rtlCol="0">
-            <a:spAutoFit/>
-          </a:bodyPr>
-          <a:lstStyle/>
-          <a:p>
-            <a:pPr marL="571500" indent="-571500">
-              <a:buFont typeface="Wingdings" panose="05000000000000000000" pitchFamily="2" charset="2"/>
-              <a:buChar char="§"/>
-            </a:pPr>
-            <a:r>
-              <a:rPr lang="ko-KR" altLang="en-US" sz="4000" b="1" dirty="0">
-                <a:solidFill>
-                  <a:schemeClr val="tx2">
-                    <a:lumMod val="75000"/>
-                  </a:schemeClr>
-                </a:solidFill>
-              </a:rPr>
-              <a:t>기초 공수</a:t>
-            </a:r>
-            <a:r>
-              <a:rPr lang="en-US" altLang="ko-KR" sz="4000" b="1" dirty="0">
-                <a:solidFill>
-                  <a:schemeClr val="tx2">
-                    <a:lumMod val="75000"/>
-                  </a:schemeClr>
-                </a:solidFill>
-              </a:rPr>
-              <a:t>(Baseline) </a:t>
-            </a:r>
-            <a:r>
-              <a:rPr lang="ko-KR" altLang="en-US" sz="4000" b="1" dirty="0">
-                <a:solidFill>
-                  <a:schemeClr val="tx2">
-                    <a:lumMod val="75000"/>
-                  </a:schemeClr>
-                </a:solidFill>
-              </a:rPr>
-              <a:t>대비 분석</a:t>
-            </a:r>
-            <a:r>
-              <a:rPr lang="en-US" altLang="ko-KR" sz="4000" b="1" dirty="0">
-                <a:solidFill>
-                  <a:schemeClr val="tx2">
-                    <a:lumMod val="75000"/>
-                  </a:schemeClr>
-                </a:solidFill>
-              </a:rPr>
-              <a:t>: </a:t>
-            </a:r>
-          </a:p>
-          <a:p>
-            <a:r>
-              <a:rPr lang="en-US" altLang="ko-KR" sz="4000" b="1" dirty="0">
-                <a:solidFill>
-                  <a:schemeClr val="tx2">
-                    <a:lumMod val="75000"/>
-                  </a:schemeClr>
-                </a:solidFill>
-              </a:rPr>
-              <a:t>LLM</a:t>
-            </a:r>
-            <a:r>
-              <a:rPr lang="ko-KR" altLang="en-US" sz="4000" b="1" dirty="0">
-                <a:solidFill>
-                  <a:schemeClr val="tx2">
-                    <a:lumMod val="75000"/>
-                  </a:schemeClr>
-                </a:solidFill>
-              </a:rPr>
-              <a:t>의 보조 없이 진행되었을 때의 예상 소요 시간과 실제 구현 시간을 비교  </a:t>
-            </a:r>
-            <a:endParaRPr lang="en-US" altLang="ko-KR" sz="4000" b="1" dirty="0">
-              <a:solidFill>
-                <a:schemeClr val="tx2">
-                  <a:lumMod val="75000"/>
-                </a:schemeClr>
-              </a:solidFill>
-            </a:endParaRPr>
-          </a:p>
-          <a:p>
-            <a:endParaRPr lang="en-US" altLang="ko-KR" sz="1200" b="1" dirty="0">
-              <a:solidFill>
-                <a:schemeClr val="tx2">
-                  <a:lumMod val="75000"/>
-                </a:schemeClr>
-              </a:solidFill>
-            </a:endParaRPr>
-          </a:p>
-          <a:p>
-            <a:pPr marL="571500" indent="-571500">
-              <a:buFont typeface="Wingdings" panose="05000000000000000000" pitchFamily="2" charset="2"/>
-              <a:buChar char="§"/>
-            </a:pPr>
-            <a:r>
-              <a:rPr lang="ko-KR" altLang="en-US" sz="4000" b="1" dirty="0">
-                <a:solidFill>
-                  <a:schemeClr val="tx2">
-                    <a:lumMod val="75000"/>
-                  </a:schemeClr>
-                </a:solidFill>
-              </a:rPr>
-              <a:t>기술 장벽 극복 사례 연구</a:t>
-            </a:r>
-            <a:r>
-              <a:rPr lang="en-US" altLang="ko-KR" sz="4000" b="1" dirty="0">
-                <a:solidFill>
-                  <a:schemeClr val="tx2">
-                    <a:lumMod val="75000"/>
-                  </a:schemeClr>
-                </a:solidFill>
-              </a:rPr>
-              <a:t>: </a:t>
-            </a:r>
-          </a:p>
-          <a:p>
-            <a:r>
-              <a:rPr lang="ko-KR" altLang="en-US" sz="4000" b="1" dirty="0">
-                <a:solidFill>
-                  <a:schemeClr val="tx2">
-                    <a:lumMod val="75000"/>
-                  </a:schemeClr>
-                </a:solidFill>
-              </a:rPr>
-              <a:t>개발자의 기존 숙련도만으로는 장시간이 소요되었을 작업을 </a:t>
-            </a:r>
-            <a:r>
-              <a:rPr lang="en-US" altLang="ko-KR" sz="4000" b="1" dirty="0">
-                <a:solidFill>
-                  <a:schemeClr val="tx2">
-                    <a:lumMod val="75000"/>
-                  </a:schemeClr>
-                </a:solidFill>
-              </a:rPr>
-              <a:t>LLM</a:t>
-            </a:r>
-            <a:r>
-              <a:rPr lang="ko-KR" altLang="en-US" sz="4000" b="1" dirty="0">
-                <a:solidFill>
-                  <a:schemeClr val="tx2">
-                    <a:lumMod val="75000"/>
-                  </a:schemeClr>
-                </a:solidFill>
-              </a:rPr>
-              <a:t>의 아키텍처 가이드를 통해 해결한 사례를 분석한다</a:t>
-            </a:r>
-            <a:r>
-              <a:rPr lang="en-US" altLang="ko-KR" sz="4000" b="1" dirty="0">
-                <a:solidFill>
-                  <a:schemeClr val="tx2">
-                    <a:lumMod val="75000"/>
-                  </a:schemeClr>
-                </a:solidFill>
-              </a:rPr>
+            <a:r>
+              <a:rPr lang="ko-KR" altLang="en-US" sz="3200" dirty="0"/>
+              <a:t>특히 가상 머신 오버헤드가 발생하는 </a:t>
+            </a:r>
+            <a:r>
+              <a:rPr lang="ko-KR" altLang="en-US" sz="3200" dirty="0" err="1"/>
+              <a:t>블루프린트</a:t>
+            </a:r>
+            <a:r>
+              <a:rPr lang="ko-KR" altLang="en-US" sz="3200" dirty="0"/>
+              <a:t> 로직을 네이티브 </a:t>
+            </a:r>
+            <a:r>
+              <a:rPr lang="en-US" altLang="ko-KR" sz="3200" dirty="0"/>
+              <a:t>C++ </a:t>
+            </a:r>
+            <a:r>
+              <a:rPr lang="ko-KR" altLang="en-US" sz="3200" dirty="0"/>
+              <a:t>코드로 치환함으로써 실행 성능을 극대화하였다</a:t>
+            </a:r>
+            <a:r>
+              <a:rPr lang="en-US" altLang="ko-KR" sz="3200" dirty="0"/>
               <a:t>.</a:t>
             </a:r>
           </a:p>
           <a:p>
-            <a:pPr marL="571500" indent="-571500">
-              <a:buFontTx/>
-              <a:buChar char="-"/>
-            </a:pPr>
-            <a:endParaRPr lang="ko-KR" altLang="en-US" sz="1200" b="1" dirty="0">
-              <a:solidFill>
-                <a:schemeClr val="tx2">
-                  <a:lumMod val="75000"/>
-                </a:schemeClr>
-              </a:solidFill>
-            </a:endParaRPr>
-          </a:p>
-          <a:p>
-            <a:pPr marL="571500" indent="-571500">
-              <a:buFont typeface="Wingdings" panose="05000000000000000000" pitchFamily="2" charset="2"/>
-              <a:buChar char="§"/>
-            </a:pPr>
-            <a:r>
-              <a:rPr lang="ko-KR" altLang="en-US" sz="4000" b="1" dirty="0">
-                <a:solidFill>
-                  <a:schemeClr val="tx2">
-                    <a:lumMod val="75000"/>
-                  </a:schemeClr>
-                </a:solidFill>
-              </a:rPr>
-              <a:t> 실제 사례 기반 분석</a:t>
-            </a:r>
-            <a:r>
-              <a:rPr lang="en-US" altLang="ko-KR" sz="4000" b="1" dirty="0">
-                <a:solidFill>
-                  <a:schemeClr val="tx2">
-                    <a:lumMod val="75000"/>
-                  </a:schemeClr>
-                </a:solidFill>
-              </a:rPr>
-              <a:t>: </a:t>
-            </a:r>
-          </a:p>
-          <a:p>
-            <a:r>
-              <a:rPr lang="ko-KR" altLang="en-US" sz="4000" b="1" dirty="0">
-                <a:solidFill>
-                  <a:schemeClr val="tx2">
-                    <a:lumMod val="75000"/>
-                  </a:schemeClr>
-                </a:solidFill>
-              </a:rPr>
-              <a:t>본 연구팀의 졸업작품 </a:t>
-            </a:r>
-            <a:r>
-              <a:rPr lang="en-US" altLang="ko-KR" sz="4000" b="1" dirty="0">
-                <a:solidFill>
-                  <a:schemeClr val="tx2">
-                    <a:lumMod val="75000"/>
-                  </a:schemeClr>
-                </a:solidFill>
-              </a:rPr>
-              <a:t>'Containment Cleanup Detail' </a:t>
-            </a:r>
-            <a:r>
-              <a:rPr lang="ko-KR" altLang="en-US" sz="4000" b="1" dirty="0">
-                <a:solidFill>
-                  <a:schemeClr val="tx2">
-                    <a:lumMod val="75000"/>
-                  </a:schemeClr>
-                </a:solidFill>
-              </a:rPr>
-              <a:t>개발 과정 중 발생한 구체적인 에피소드 사례를 들어 </a:t>
-            </a:r>
-            <a:r>
-              <a:rPr lang="en-US" altLang="ko-KR" sz="4000" b="1" dirty="0">
-                <a:solidFill>
-                  <a:schemeClr val="tx2">
-                    <a:lumMod val="75000"/>
-                  </a:schemeClr>
-                </a:solidFill>
-              </a:rPr>
-              <a:t>LLM</a:t>
-            </a:r>
-            <a:r>
-              <a:rPr lang="ko-KR" altLang="en-US" sz="4000" b="1" dirty="0">
-                <a:solidFill>
-                  <a:schemeClr val="tx2">
-                    <a:lumMod val="75000"/>
-                  </a:schemeClr>
-                </a:solidFill>
-              </a:rPr>
-              <a:t>이 미친 영향을 서술한다</a:t>
-            </a:r>
-            <a:r>
-              <a:rPr lang="en-US" altLang="ko-KR" sz="4000" b="1" dirty="0">
-                <a:solidFill>
-                  <a:schemeClr val="tx2">
-                    <a:lumMod val="75000"/>
-                  </a:schemeClr>
-                </a:solidFill>
-              </a:rPr>
+            <a:r>
+              <a:rPr lang="ko-KR" altLang="en-US" sz="3200" dirty="0"/>
+              <a:t>또한</a:t>
+            </a:r>
+            <a:r>
+              <a:rPr lang="en-US" altLang="ko-KR" sz="3200" dirty="0"/>
+              <a:t> </a:t>
+            </a:r>
+            <a:r>
+              <a:rPr lang="ko-KR" altLang="en-US" sz="3200" dirty="0"/>
+              <a:t>생성된 코드에서 발생할 수 있는 잠재적인 널 포인터 참조나 타입 불일치를 사전에 식별하고 보정하는 검수 과정을 수행하였다</a:t>
+            </a:r>
+            <a:r>
+              <a:rPr lang="en-US" altLang="ko-KR" sz="3200" dirty="0"/>
               <a:t>.</a:t>
             </a:r>
-            <a:endParaRPr lang="ko-KR" altLang="en-US" sz="4000" b="1" dirty="0">
-              <a:solidFill>
-                <a:schemeClr val="tx2">
-                  <a:lumMod val="75000"/>
-                </a:schemeClr>
-              </a:solidFill>
+            <a:endParaRPr lang="ko-KR" altLang="en-US" sz="3200" dirty="0"/>
+          </a:p>
+          <a:p>
+            <a:endParaRPr lang="en-US" altLang="ko-KR" sz="3200" dirty="0">
               <a:effectLst/>
             </a:endParaRPr>
+          </a:p>
+          <a:p>
+            <a:r>
+              <a:rPr lang="en-US" altLang="ko-KR" sz="3600" b="1" dirty="0"/>
+              <a:t>'</a:t>
+            </a:r>
+            <a:r>
+              <a:rPr lang="ko-KR" altLang="en-US" sz="3600" b="1" dirty="0"/>
+              <a:t>프로토타이핑</a:t>
+            </a:r>
+            <a:r>
+              <a:rPr lang="en-US" altLang="ko-KR" sz="3600" b="1" dirty="0"/>
+              <a:t>-</a:t>
+            </a:r>
+            <a:r>
+              <a:rPr lang="ko-KR" altLang="en-US" sz="3600" b="1" dirty="0"/>
+              <a:t>최적화</a:t>
+            </a:r>
+            <a:r>
+              <a:rPr lang="en-US" altLang="ko-KR" sz="3600" b="1" dirty="0"/>
+              <a:t>' </a:t>
+            </a:r>
+            <a:r>
+              <a:rPr lang="ko-KR" altLang="en-US" sz="3600" b="1" dirty="0"/>
+              <a:t>워크플로우의 선순환</a:t>
+            </a:r>
+            <a:endParaRPr lang="ko-KR" altLang="en-US" sz="3600" dirty="0"/>
+          </a:p>
+          <a:p>
+            <a:r>
+              <a:rPr lang="ko-KR" altLang="en-US" sz="3200" dirty="0" err="1"/>
+              <a:t>멀티모달</a:t>
+            </a:r>
+            <a:r>
+              <a:rPr lang="ko-KR" altLang="en-US" sz="3200" dirty="0"/>
+              <a:t> 기능을 활용한 변환 프로세스는 단순한 도구의 활용을 넘어</a:t>
+            </a:r>
+            <a:r>
+              <a:rPr lang="en-US" altLang="ko-KR" sz="3200" dirty="0"/>
+              <a:t>, </a:t>
+            </a:r>
+            <a:r>
+              <a:rPr lang="ko-KR" altLang="en-US" sz="3200" dirty="0"/>
+              <a:t>개발 주기 전체의 효율성을 개선하였다</a:t>
+            </a:r>
+            <a:r>
+              <a:rPr lang="en-US" altLang="ko-KR" sz="3200" dirty="0"/>
+              <a:t>.</a:t>
+            </a:r>
+            <a:endParaRPr lang="ko-KR" altLang="en-US" sz="3200" dirty="0"/>
+          </a:p>
+          <a:p>
+            <a:r>
+              <a:rPr lang="ko-KR" altLang="en-US" sz="3200" dirty="0"/>
+              <a:t>시각적 직관성이 높은 </a:t>
+            </a:r>
+            <a:r>
+              <a:rPr lang="ko-KR" altLang="en-US" sz="3200" dirty="0" err="1"/>
+              <a:t>블루프린트로</a:t>
+            </a:r>
+            <a:r>
+              <a:rPr lang="ko-KR" altLang="en-US" sz="3200" dirty="0"/>
+              <a:t> 기능을 빠르게 구현</a:t>
+            </a:r>
+            <a:r>
+              <a:rPr lang="en-US" altLang="ko-KR" sz="3200" dirty="0"/>
+              <a:t>(Prototyping)</a:t>
+            </a:r>
+            <a:r>
+              <a:rPr lang="ko-KR" altLang="en-US" sz="3200" dirty="0"/>
+              <a:t>한 후</a:t>
+            </a:r>
+            <a:r>
+              <a:rPr lang="en-US" altLang="ko-KR" sz="3200" dirty="0"/>
+              <a:t>, LLM</a:t>
+            </a:r>
+            <a:r>
+              <a:rPr lang="ko-KR" altLang="en-US" sz="3200" dirty="0"/>
+              <a:t>을 통해 즉시 </a:t>
+            </a:r>
+            <a:r>
+              <a:rPr lang="en-US" altLang="ko-KR" sz="3200" dirty="0"/>
+              <a:t>C++</a:t>
+            </a:r>
+            <a:r>
+              <a:rPr lang="ko-KR" altLang="en-US" sz="3200" dirty="0"/>
+              <a:t>로 안정화</a:t>
+            </a:r>
+            <a:r>
+              <a:rPr lang="en-US" altLang="ko-KR" sz="3200" dirty="0"/>
+              <a:t>(Stabilization)</a:t>
+            </a:r>
+            <a:r>
+              <a:rPr lang="ko-KR" altLang="en-US" sz="3200" dirty="0"/>
+              <a:t>하는 이분법적 접근이 </a:t>
+            </a:r>
+            <a:r>
+              <a:rPr lang="ko-KR" altLang="en-US" sz="3200" dirty="0" err="1"/>
+              <a:t>가능해졌으며</a:t>
+            </a:r>
+            <a:r>
+              <a:rPr lang="en-US" altLang="ko-KR" sz="3200" dirty="0"/>
+              <a:t>, </a:t>
+            </a:r>
+          </a:p>
+          <a:p>
+            <a:r>
+              <a:rPr lang="ko-KR" altLang="en-US" sz="3200" dirty="0"/>
+              <a:t>복잡한 로직을 텍스트로 설명하거나 문서화할 필요 없이 스크린샷 한 장으로 의도를 전달함으로써</a:t>
+            </a:r>
+            <a:r>
+              <a:rPr lang="en-US" altLang="ko-KR" sz="3200" dirty="0"/>
+              <a:t>, </a:t>
+            </a:r>
+            <a:r>
+              <a:rPr lang="ko-KR" altLang="en-US" sz="3200" dirty="0"/>
+              <a:t>개발자와 </a:t>
+            </a:r>
+            <a:r>
+              <a:rPr lang="en-US" altLang="ko-KR" sz="3200" dirty="0"/>
+              <a:t>AI </a:t>
+            </a:r>
+            <a:r>
+              <a:rPr lang="ko-KR" altLang="en-US" sz="3200" dirty="0"/>
+              <a:t>간의 정보 전달 효율을 극대화하고 개발 흐름이 끊기는 </a:t>
+            </a:r>
+            <a:endParaRPr lang="en-US" altLang="ko-KR" sz="3200" dirty="0"/>
+          </a:p>
+          <a:p>
+            <a:r>
+              <a:rPr lang="ko-KR" altLang="en-US" sz="3200" dirty="0"/>
+              <a:t>맥락 전환 비용을 최소화할 수 있었다</a:t>
+            </a:r>
+            <a:r>
+              <a:rPr lang="en-US" altLang="ko-KR" sz="3200" dirty="0"/>
+              <a:t>.</a:t>
+            </a:r>
+            <a:endParaRPr lang="ko-KR" altLang="en-US" sz="3200" dirty="0"/>
           </a:p>
         </p:txBody>
       </p:sp>
     </p:spTree>
     <p:extLst>
       <p:ext uri="{BB962C8B-B14F-4D97-AF65-F5344CB8AC3E}">
-        <p14:creationId xmlns:p14="http://schemas.microsoft.com/office/powerpoint/2010/main" val="4195701786"/>
+        <p14:creationId xmlns:p14="http://schemas.microsoft.com/office/powerpoint/2010/main" val="4247808439"/>
       </p:ext>
     </p:extLst>
   </p:cSld>
@@ -5108,4 +7952,319 @@
     </a:ext>
   </a:extLst>
 </a:theme>
+</file>
+
+<file path=ppt/theme/theme2.xml><?xml version="1.0" encoding="utf-8"?>
+<a:theme xmlns:a="http://schemas.openxmlformats.org/drawingml/2006/main" name="Office 테마">
+  <a:themeElements>
+    <a:clrScheme name="Office">
+      <a:dk1>
+        <a:sysClr val="windowText" lastClr="000000"/>
+      </a:dk1>
+      <a:lt1>
+        <a:sysClr val="window" lastClr="FFFFFF"/>
+      </a:lt1>
+      <a:dk2>
+        <a:srgbClr val="0E2841"/>
+      </a:dk2>
+      <a:lt2>
+        <a:srgbClr val="E8E8E8"/>
+      </a:lt2>
+      <a:accent1>
+        <a:srgbClr val="156082"/>
+      </a:accent1>
+      <a:accent2>
+        <a:srgbClr val="E97132"/>
+      </a:accent2>
+      <a:accent3>
+        <a:srgbClr val="196B24"/>
+      </a:accent3>
+      <a:accent4>
+        <a:srgbClr val="0F9ED5"/>
+      </a:accent4>
+      <a:accent5>
+        <a:srgbClr val="A02B93"/>
+      </a:accent5>
+      <a:accent6>
+        <a:srgbClr val="4EA72E"/>
+      </a:accent6>
+      <a:hlink>
+        <a:srgbClr val="467886"/>
+      </a:hlink>
+      <a:folHlink>
+        <a:srgbClr val="96607D"/>
+      </a:folHlink>
+    </a:clrScheme>
+    <a:fontScheme name="Office">
+      <a:majorFont>
+        <a:latin typeface="맑은 고딕" panose="02110004020202020204"/>
+        <a:ea typeface=""/>
+        <a:cs typeface=""/>
+        <a:font script="Jpan" typeface="游ゴシック Light"/>
+        <a:font script="Hang" typeface="맑은 고딕"/>
+        <a:font script="Hans" typeface="等线 Light"/>
+        <a:font script="Hant" typeface="新細明體"/>
+        <a:font script="Arab" typeface="Times New Roman"/>
+        <a:font script="Hebr" typeface="Times New Roman"/>
+        <a:font script="Thai" typeface="Angsana New"/>
+        <a:font script="Ethi" typeface="Nyala"/>
+        <a:font script="Beng" typeface="Vrinda"/>
+        <a:font script="Gujr" typeface="Shruti"/>
+        <a:font script="Khmr" typeface="MoolBoran"/>
+        <a:font script="Knda" typeface="Tunga"/>
+        <a:font script="Guru" typeface="Raavi"/>
+        <a:font script="Cans" typeface="Euphemia"/>
+        <a:font script="Cher" typeface="Plantagenet Cherokee"/>
+        <a:font script="Yiii" typeface="Microsoft Yi Baiti"/>
+        <a:font script="Tibt" typeface="Microsoft Himalaya"/>
+        <a:font script="Thaa" typeface="MV Boli"/>
+        <a:font script="Deva" typeface="Mangal"/>
+        <a:font script="Telu" typeface="Gautami"/>
+        <a:font script="Taml" typeface="Latha"/>
+        <a:font script="Syrc" typeface="Estrangelo Edessa"/>
+        <a:font script="Orya" typeface="Kalinga"/>
+        <a:font script="Mlym" typeface="Kartika"/>
+        <a:font script="Laoo" typeface="DokChampa"/>
+        <a:font script="Sinh" typeface="Iskoola Pota"/>
+        <a:font script="Mong" typeface="Mongolian Baiti"/>
+        <a:font script="Viet" typeface="Times New Roman"/>
+        <a:font script="Uigh" typeface="Microsoft Uighur"/>
+        <a:font script="Geor" typeface="Sylfaen"/>
+        <a:font script="Armn" typeface="Arial"/>
+        <a:font script="Bugi" typeface="Leelawadee UI"/>
+        <a:font script="Bopo" typeface="Microsoft JhengHei"/>
+        <a:font script="Java" typeface="Javanese Text"/>
+        <a:font script="Lisu" typeface="Segoe UI"/>
+        <a:font script="Mymr" typeface="Myanmar Text"/>
+        <a:font script="Nkoo" typeface="Ebrima"/>
+        <a:font script="Olck" typeface="Nirmala UI"/>
+        <a:font script="Osma" typeface="Ebrima"/>
+        <a:font script="Phag" typeface="Phagspa"/>
+        <a:font script="Syrn" typeface="Estrangelo Edessa"/>
+        <a:font script="Syrj" typeface="Estrangelo Edessa"/>
+        <a:font script="Syre" typeface="Estrangelo Edessa"/>
+        <a:font script="Sora" typeface="Nirmala UI"/>
+        <a:font script="Tale" typeface="Microsoft Tai Le"/>
+        <a:font script="Talu" typeface="Microsoft New Tai Lue"/>
+        <a:font script="Tfng" typeface="Ebrima"/>
+      </a:majorFont>
+      <a:minorFont>
+        <a:latin typeface="맑은 고딕" panose="02110004020202020204"/>
+        <a:ea typeface=""/>
+        <a:cs typeface=""/>
+        <a:font script="Jpan" typeface="游ゴシック"/>
+        <a:font script="Hang" typeface="맑은 고딕"/>
+        <a:font script="Hans" typeface="等线"/>
+        <a:font script="Hant" typeface="新細明體"/>
+        <a:font script="Arab" typeface="Arial"/>
+        <a:font script="Hebr" typeface="Arial"/>
+        <a:font script="Thai" typeface="Cordia New"/>
+        <a:font script="Ethi" typeface="Nyala"/>
+        <a:font script="Beng" typeface="Vrinda"/>
+        <a:font script="Gujr" typeface="Shruti"/>
+        <a:font script="Khmr" typeface="DaunPenh"/>
+        <a:font script="Knda" typeface="Tunga"/>
+        <a:font script="Guru" typeface="Raavi"/>
+        <a:font script="Cans" typeface="Euphemia"/>
+        <a:font script="Cher" typeface="Plantagenet Cherokee"/>
+        <a:font script="Yiii" typeface="Microsoft Yi Baiti"/>
+        <a:font script="Tibt" typeface="Microsoft Himalaya"/>
+        <a:font script="Thaa" typeface="MV Boli"/>
+        <a:font script="Deva" typeface="Mangal"/>
+        <a:font script="Telu" typeface="Gautami"/>
+        <a:font script="Taml" typeface="Latha"/>
+        <a:font script="Syrc" typeface="Estrangelo Edessa"/>
+        <a:font script="Orya" typeface="Kalinga"/>
+        <a:font script="Mlym" typeface="Kartika"/>
+        <a:font script="Laoo" typeface="DokChampa"/>
+        <a:font script="Sinh" typeface="Iskoola Pota"/>
+        <a:font script="Mong" typeface="Mongolian Baiti"/>
+        <a:font script="Viet" typeface="Arial"/>
+        <a:font script="Uigh" typeface="Microsoft Uighur"/>
+        <a:font script="Geor" typeface="Sylfaen"/>
+        <a:font script="Armn" typeface="Arial"/>
+        <a:font script="Bugi" typeface="Leelawadee UI"/>
+        <a:font script="Bopo" typeface="Microsoft JhengHei"/>
+        <a:font script="Java" typeface="Javanese Text"/>
+        <a:font script="Lisu" typeface="Segoe UI"/>
+        <a:font script="Mymr" typeface="Myanmar Text"/>
+        <a:font script="Nkoo" typeface="Ebrima"/>
+        <a:font script="Olck" typeface="Nirmala UI"/>
+        <a:font script="Osma" typeface="Ebrima"/>
+        <a:font script="Phag" typeface="Phagspa"/>
+        <a:font script="Syrn" typeface="Estrangelo Edessa"/>
+        <a:font script="Syrj" typeface="Estrangelo Edessa"/>
+        <a:font script="Syre" typeface="Estrangelo Edessa"/>
+        <a:font script="Sora" typeface="Nirmala UI"/>
+        <a:font script="Tale" typeface="Microsoft Tai Le"/>
+        <a:font script="Talu" typeface="Microsoft New Tai Lue"/>
+        <a:font script="Tfng" typeface="Ebrima"/>
+      </a:minorFont>
+    </a:fontScheme>
+    <a:fmtScheme name="Office">
+      <a:fillStyleLst>
+        <a:solidFill>
+          <a:schemeClr val="phClr"/>
+        </a:solidFill>
+        <a:gradFill rotWithShape="1">
+          <a:gsLst>
+            <a:gs pos="0">
+              <a:schemeClr val="phClr">
+                <a:lumMod val="110000"/>
+                <a:satMod val="105000"/>
+                <a:tint val="67000"/>
+              </a:schemeClr>
+            </a:gs>
+            <a:gs pos="50000">
+              <a:schemeClr val="phClr">
+                <a:lumMod val="105000"/>
+                <a:satMod val="103000"/>
+                <a:tint val="73000"/>
+              </a:schemeClr>
+            </a:gs>
+            <a:gs pos="100000">
+              <a:schemeClr val="phClr">
+                <a:lumMod val="105000"/>
+                <a:satMod val="109000"/>
+                <a:tint val="81000"/>
+              </a:schemeClr>
+            </a:gs>
+          </a:gsLst>
+          <a:lin ang="5400000" scaled="0"/>
+        </a:gradFill>
+        <a:gradFill rotWithShape="1">
+          <a:gsLst>
+            <a:gs pos="0">
+              <a:schemeClr val="phClr">
+                <a:satMod val="103000"/>
+                <a:lumMod val="102000"/>
+                <a:tint val="94000"/>
+              </a:schemeClr>
+            </a:gs>
+            <a:gs pos="50000">
+              <a:schemeClr val="phClr">
+                <a:satMod val="110000"/>
+                <a:lumMod val="100000"/>
+                <a:shade val="100000"/>
+              </a:schemeClr>
+            </a:gs>
+            <a:gs pos="100000">
+              <a:schemeClr val="phClr">
+                <a:lumMod val="99000"/>
+                <a:satMod val="120000"/>
+                <a:shade val="78000"/>
+              </a:schemeClr>
+            </a:gs>
+          </a:gsLst>
+          <a:lin ang="5400000" scaled="0"/>
+        </a:gradFill>
+      </a:fillStyleLst>
+      <a:lnStyleLst>
+        <a:ln w="12700" cap="flat" cmpd="sng" algn="ctr">
+          <a:solidFill>
+            <a:schemeClr val="phClr"/>
+          </a:solidFill>
+          <a:prstDash val="solid"/>
+          <a:miter lim="800000"/>
+        </a:ln>
+        <a:ln w="19050" cap="flat" cmpd="sng" algn="ctr">
+          <a:solidFill>
+            <a:schemeClr val="phClr"/>
+          </a:solidFill>
+          <a:prstDash val="solid"/>
+          <a:miter lim="800000"/>
+        </a:ln>
+        <a:ln w="25400" cap="flat" cmpd="sng" algn="ctr">
+          <a:solidFill>
+            <a:schemeClr val="phClr"/>
+          </a:solidFill>
+          <a:prstDash val="solid"/>
+          <a:miter lim="800000"/>
+        </a:ln>
+      </a:lnStyleLst>
+      <a:effectStyleLst>
+        <a:effectStyle>
+          <a:effectLst/>
+        </a:effectStyle>
+        <a:effectStyle>
+          <a:effectLst/>
+        </a:effectStyle>
+        <a:effectStyle>
+          <a:effectLst>
+            <a:outerShdw blurRad="57150" dist="19050" dir="5400000" algn="ctr" rotWithShape="0">
+              <a:srgbClr val="000000">
+                <a:alpha val="63000"/>
+              </a:srgbClr>
+            </a:outerShdw>
+          </a:effectLst>
+        </a:effectStyle>
+      </a:effectStyleLst>
+      <a:bgFillStyleLst>
+        <a:solidFill>
+          <a:schemeClr val="phClr"/>
+        </a:solidFill>
+        <a:solidFill>
+          <a:schemeClr val="phClr">
+            <a:tint val="95000"/>
+            <a:satMod val="170000"/>
+          </a:schemeClr>
+        </a:solidFill>
+        <a:gradFill rotWithShape="1">
+          <a:gsLst>
+            <a:gs pos="0">
+              <a:schemeClr val="phClr">
+                <a:tint val="93000"/>
+                <a:satMod val="150000"/>
+                <a:shade val="98000"/>
+                <a:lumMod val="102000"/>
+              </a:schemeClr>
+            </a:gs>
+            <a:gs pos="50000">
+              <a:schemeClr val="phClr">
+                <a:tint val="98000"/>
+                <a:satMod val="130000"/>
+                <a:shade val="90000"/>
+                <a:lumMod val="103000"/>
+              </a:schemeClr>
+            </a:gs>
+            <a:gs pos="100000">
+              <a:schemeClr val="phClr">
+                <a:shade val="63000"/>
+                <a:satMod val="120000"/>
+              </a:schemeClr>
+            </a:gs>
+          </a:gsLst>
+          <a:lin ang="5400000" scaled="0"/>
+        </a:gradFill>
+      </a:bgFillStyleLst>
+    </a:fmtScheme>
+  </a:themeElements>
+  <a:objectDefaults>
+    <a:lnDef>
+      <a:spPr/>
+      <a:bodyPr/>
+      <a:lstStyle/>
+      <a:style>
+        <a:lnRef idx="2">
+          <a:schemeClr val="accent1"/>
+        </a:lnRef>
+        <a:fillRef idx="0">
+          <a:schemeClr val="accent1"/>
+        </a:fillRef>
+        <a:effectRef idx="1">
+          <a:schemeClr val="accent1"/>
+        </a:effectRef>
+        <a:fontRef idx="minor">
+          <a:schemeClr val="tx1"/>
+        </a:fontRef>
+      </a:style>
+    </a:lnDef>
+  </a:objectDefaults>
+  <a:extraClrSchemeLst/>
+  <a:extLst>
+    <a:ext uri="{05A4C25C-085E-4340-85A3-A5531E510DB2}">
+      <thm15:themeFamily xmlns:thm15="http://schemas.microsoft.com/office/thememl/2012/main" name="Office Theme" id="{2E142A2C-CD16-42D6-873A-C26D2A0506FA}" vid="{1BDDFF52-6CD6-40A5-AB3C-68EB2F1E4D0A}"/>
+    </a:ext>
+  </a:extLst>
+</a:theme>
 </file>
--- a/문서/논문_포스터ver.pptx
+++ b/문서/논문_포스터ver.pptx
@@ -11,7 +11,7 @@
     <p:sldId id="257" r:id="rId2"/>
   </p:sldIdLst>
   <p:sldSz cx="32399288" cy="43200638"/>
-  <p:notesSz cx="6858000" cy="9144000"/>
+  <p:notesSz cx="32554863" cy="46234350"/>
   <p:defaultTextStyle>
     <a:defPPr>
       <a:defRPr lang="en-US"/>
@@ -185,7 +185,7 @@
               <a:cs typeface="+mn-cs"/>
             </a:defRPr>
           </a:pPr>
-          <a:endParaRPr lang="ko-KR"/>
+          <a:endParaRPr lang="en-US"/>
         </a:p>
       </c:txPr>
     </c:title>
@@ -1057,18 +1057,18 @@
         </p:nvSpPr>
         <p:spPr>
           <a:xfrm>
-            <a:off x="0" y="0"/>
-            <a:ext cx="2971800" cy="458788"/>
+            <a:off x="2" y="0"/>
+            <a:ext cx="14107106" cy="2319747"/>
           </a:xfrm>
           <a:prstGeom prst="rect">
             <a:avLst/>
           </a:prstGeom>
         </p:spPr>
         <p:txBody>
-          <a:bodyPr vert="horz" lIns="91440" tIns="45720" rIns="91440" bIns="45720" rtlCol="0"/>
+          <a:bodyPr vert="horz" lIns="450207" tIns="225106" rIns="450207" bIns="225106" rtlCol="0"/>
           <a:lstStyle>
             <a:lvl1pPr algn="l">
-              <a:defRPr sz="1200"/>
+              <a:defRPr sz="5900"/>
             </a:lvl1pPr>
           </a:lstStyle>
           <a:p>
@@ -1088,18 +1088,18 @@
         </p:nvSpPr>
         <p:spPr>
           <a:xfrm>
-            <a:off x="3884613" y="0"/>
-            <a:ext cx="2971800" cy="458788"/>
+            <a:off x="18440226" y="0"/>
+            <a:ext cx="14107106" cy="2319747"/>
           </a:xfrm>
           <a:prstGeom prst="rect">
             <a:avLst/>
           </a:prstGeom>
         </p:spPr>
         <p:txBody>
-          <a:bodyPr vert="horz" lIns="91440" tIns="45720" rIns="91440" bIns="45720" rtlCol="0"/>
+          <a:bodyPr vert="horz" lIns="450207" tIns="225106" rIns="450207" bIns="225106" rtlCol="0"/>
           <a:lstStyle>
             <a:lvl1pPr algn="r">
-              <a:defRPr sz="1200"/>
+              <a:defRPr sz="5900"/>
             </a:lvl1pPr>
           </a:lstStyle>
           <a:p>
@@ -1123,8 +1123,8 @@
         </p:nvSpPr>
         <p:spPr>
           <a:xfrm>
-            <a:off x="2271713" y="1143000"/>
-            <a:ext cx="2314575" cy="3086100"/>
+            <a:off x="10425113" y="5780088"/>
+            <a:ext cx="11704637" cy="15605125"/>
           </a:xfrm>
           <a:prstGeom prst="rect">
             <a:avLst/>
@@ -1137,7 +1137,7 @@
           </a:ln>
         </p:spPr>
         <p:txBody>
-          <a:bodyPr vert="horz" lIns="91440" tIns="45720" rIns="91440" bIns="45720" rtlCol="0" anchor="ctr"/>
+          <a:bodyPr vert="horz" lIns="450207" tIns="225106" rIns="450207" bIns="225106" rtlCol="0" anchor="ctr"/>
           <a:lstStyle/>
           <a:p>
             <a:endParaRPr lang="ko-KR" altLang="en-US"/>
@@ -1156,15 +1156,15 @@
         </p:nvSpPr>
         <p:spPr>
           <a:xfrm>
-            <a:off x="685800" y="4400550"/>
-            <a:ext cx="5486400" cy="3600450"/>
+            <a:off x="3255489" y="22250281"/>
+            <a:ext cx="26043889" cy="18204776"/>
           </a:xfrm>
           <a:prstGeom prst="rect">
             <a:avLst/>
           </a:prstGeom>
         </p:spPr>
         <p:txBody>
-          <a:bodyPr vert="horz" lIns="91440" tIns="45720" rIns="91440" bIns="45720" rtlCol="0"/>
+          <a:bodyPr vert="horz" lIns="450207" tIns="225106" rIns="450207" bIns="225106" rtlCol="0"/>
           <a:lstStyle/>
           <a:p>
             <a:pPr lvl="0"/>
@@ -1215,18 +1215,18 @@
         </p:nvSpPr>
         <p:spPr>
           <a:xfrm>
-            <a:off x="0" y="8685213"/>
-            <a:ext cx="2971800" cy="458787"/>
+            <a:off x="2" y="43914615"/>
+            <a:ext cx="14107106" cy="2319742"/>
           </a:xfrm>
           <a:prstGeom prst="rect">
             <a:avLst/>
           </a:prstGeom>
         </p:spPr>
         <p:txBody>
-          <a:bodyPr vert="horz" lIns="91440" tIns="45720" rIns="91440" bIns="45720" rtlCol="0" anchor="b"/>
+          <a:bodyPr vert="horz" lIns="450207" tIns="225106" rIns="450207" bIns="225106" rtlCol="0" anchor="b"/>
           <a:lstStyle>
             <a:lvl1pPr algn="l">
-              <a:defRPr sz="1200"/>
+              <a:defRPr sz="5900"/>
             </a:lvl1pPr>
           </a:lstStyle>
           <a:p>
@@ -1246,18 +1246,18 @@
         </p:nvSpPr>
         <p:spPr>
           <a:xfrm>
-            <a:off x="3884613" y="8685213"/>
-            <a:ext cx="2971800" cy="458787"/>
+            <a:off x="18440226" y="43914615"/>
+            <a:ext cx="14107106" cy="2319742"/>
           </a:xfrm>
           <a:prstGeom prst="rect">
             <a:avLst/>
           </a:prstGeom>
         </p:spPr>
         <p:txBody>
-          <a:bodyPr vert="horz" lIns="91440" tIns="45720" rIns="91440" bIns="45720" rtlCol="0" anchor="b"/>
+          <a:bodyPr vert="horz" lIns="450207" tIns="225106" rIns="450207" bIns="225106" rtlCol="0" anchor="b"/>
           <a:lstStyle>
             <a:lvl1pPr algn="r">
-              <a:defRPr sz="1200"/>
+              <a:defRPr sz="5900"/>
             </a:lvl1pPr>
           </a:lstStyle>
           <a:p>
@@ -4329,8 +4329,8 @@
         </p:nvSpPr>
         <p:spPr>
           <a:xfrm>
-            <a:off x="0" y="1"/>
-            <a:ext cx="32399288" cy="7200899"/>
+            <a:off x="0" y="2"/>
+            <a:ext cx="32399288" cy="6627870"/>
           </a:xfrm>
           <a:prstGeom prst="rect">
             <a:avLst/>
@@ -4392,8 +4392,8 @@
         </p:blipFill>
         <p:spPr>
           <a:xfrm>
-            <a:off x="25198388" y="286515"/>
-            <a:ext cx="6627869" cy="6627869"/>
+            <a:off x="25729522" y="0"/>
+            <a:ext cx="6669766" cy="6627870"/>
           </a:xfrm>
           <a:prstGeom prst="rect">
             <a:avLst/>
@@ -4414,7 +4414,7 @@
         </p:nvSpPr>
         <p:spPr>
           <a:xfrm>
-            <a:off x="1146061" y="1349380"/>
+            <a:off x="850044" y="1091128"/>
             <a:ext cx="30107166" cy="2492990"/>
           </a:xfrm>
           <a:prstGeom prst="rect">
@@ -4440,8 +4440,8 @@
                     </a:srgbClr>
                   </a:outerShdw>
                 </a:effectLst>
-                <a:latin typeface="+mj-ea"/>
-                <a:ea typeface="+mj-ea"/>
+                <a:latin typeface="Noto Sans KR Black" panose="020B0200000000000000" pitchFamily="50" charset="-127"/>
+                <a:ea typeface="Noto Sans KR Black" panose="020B0200000000000000" pitchFamily="50" charset="-127"/>
               </a:rPr>
               <a:t>언리얼</a:t>
             </a:r>
@@ -4457,8 +4457,8 @@
                     </a:srgbClr>
                   </a:outerShdw>
                 </a:effectLst>
-                <a:latin typeface="+mj-ea"/>
-                <a:ea typeface="+mj-ea"/>
+                <a:latin typeface="Noto Sans KR Black" panose="020B0200000000000000" pitchFamily="50" charset="-127"/>
+                <a:ea typeface="Noto Sans KR Black" panose="020B0200000000000000" pitchFamily="50" charset="-127"/>
               </a:rPr>
               <a:t> 엔진 </a:t>
             </a:r>
@@ -4474,8 +4474,8 @@
                     </a:srgbClr>
                   </a:outerShdw>
                 </a:effectLst>
-                <a:latin typeface="+mj-ea"/>
-                <a:ea typeface="+mj-ea"/>
+                <a:latin typeface="Noto Sans KR Black" panose="020B0200000000000000" pitchFamily="50" charset="-127"/>
+                <a:ea typeface="Noto Sans KR Black" panose="020B0200000000000000" pitchFamily="50" charset="-127"/>
               </a:rPr>
               <a:t>C++ </a:t>
             </a:r>
@@ -4491,8 +4491,8 @@
                     </a:srgbClr>
                   </a:outerShdw>
                 </a:effectLst>
-                <a:latin typeface="+mj-ea"/>
-                <a:ea typeface="+mj-ea"/>
+                <a:latin typeface="Noto Sans KR Black" panose="020B0200000000000000" pitchFamily="50" charset="-127"/>
+                <a:ea typeface="Noto Sans KR Black" panose="020B0200000000000000" pitchFamily="50" charset="-127"/>
               </a:rPr>
               <a:t>환경에서 </a:t>
             </a:r>
@@ -4508,8 +4508,8 @@
                     </a:srgbClr>
                   </a:outerShdw>
                 </a:effectLst>
-                <a:latin typeface="+mj-ea"/>
-                <a:ea typeface="+mj-ea"/>
+                <a:latin typeface="Noto Sans KR Black" panose="020B0200000000000000" pitchFamily="50" charset="-127"/>
+                <a:ea typeface="Noto Sans KR Black" panose="020B0200000000000000" pitchFamily="50" charset="-127"/>
               </a:rPr>
               <a:t>LLM</a:t>
             </a:r>
@@ -4525,8 +4525,8 @@
                     </a:srgbClr>
                   </a:outerShdw>
                 </a:effectLst>
-                <a:latin typeface="+mj-ea"/>
-                <a:ea typeface="+mj-ea"/>
+                <a:latin typeface="Noto Sans KR Black" panose="020B0200000000000000" pitchFamily="50" charset="-127"/>
+                <a:ea typeface="Noto Sans KR Black" panose="020B0200000000000000" pitchFamily="50" charset="-127"/>
               </a:rPr>
               <a:t>을 활용한 소규모 게임 개발 효율성 연구</a:t>
             </a:r>
@@ -4541,8 +4541,8 @@
                   </a:srgbClr>
                 </a:outerShdw>
               </a:effectLst>
-              <a:latin typeface="+mj-ea"/>
-              <a:ea typeface="+mj-ea"/>
+              <a:latin typeface="Noto Sans KR Black" panose="020B0200000000000000" pitchFamily="50" charset="-127"/>
+              <a:ea typeface="Noto Sans KR Black" panose="020B0200000000000000" pitchFamily="50" charset="-127"/>
             </a:endParaRPr>
           </a:p>
           <a:p>
@@ -4557,8 +4557,8 @@
                   </a:srgbClr>
                 </a:outerShdw>
               </a:effectLst>
-              <a:latin typeface="+mj-ea"/>
-              <a:ea typeface="+mj-ea"/>
+              <a:latin typeface="Noto Sans KR Black" panose="020B0200000000000000" pitchFamily="50" charset="-127"/>
+              <a:ea typeface="Noto Sans KR Black" panose="020B0200000000000000" pitchFamily="50" charset="-127"/>
             </a:endParaRPr>
           </a:p>
           <a:p>
@@ -4574,8 +4574,8 @@
                     </a:srgbClr>
                   </a:outerShdw>
                 </a:effectLst>
-                <a:latin typeface="+mj-ea"/>
-                <a:ea typeface="+mj-ea"/>
+                <a:latin typeface="Noto Sans KR Black" panose="020B0200000000000000" pitchFamily="50" charset="-127"/>
+                <a:ea typeface="Noto Sans KR Black" panose="020B0200000000000000" pitchFamily="50" charset="-127"/>
               </a:rPr>
               <a:t>졸업작품 개발 사례를 중심으로 </a:t>
             </a:r>
@@ -4596,7 +4596,7 @@
         </p:nvSpPr>
         <p:spPr>
           <a:xfrm>
-            <a:off x="1146061" y="4372641"/>
+            <a:off x="747851" y="4259434"/>
             <a:ext cx="24891561" cy="1754326"/>
           </a:xfrm>
           <a:prstGeom prst="rect">
@@ -4622,6 +4622,8 @@
                     </a:srgbClr>
                   </a:outerShdw>
                 </a:effectLst>
+                <a:latin typeface="Noto Sans KR SemiBold" panose="020B0200000000000000" pitchFamily="50" charset="-127"/>
+                <a:ea typeface="Noto Sans KR SemiBold" panose="020B0200000000000000" pitchFamily="50" charset="-127"/>
               </a:rPr>
               <a:t>Sung-Wook Cho</a:t>
             </a:r>
@@ -4639,11 +4641,16 @@
                     </a:srgbClr>
                   </a:outerShdw>
                 </a:effectLst>
+                <a:latin typeface="Noto Sans KR SemiBold" panose="020B0200000000000000" pitchFamily="50" charset="-127"/>
+                <a:ea typeface="Noto Sans KR SemiBold" panose="020B0200000000000000" pitchFamily="50" charset="-127"/>
               </a:rPr>
               <a:t>○</a:t>
             </a:r>
             <a:r>
-              <a:rPr lang="ko-KR" altLang="en-US" sz="5400" dirty="0"/>
+              <a:rPr lang="ko-KR" altLang="en-US" sz="5400" dirty="0">
+                <a:latin typeface="Noto Sans KR SemiBold" panose="020B0200000000000000" pitchFamily="50" charset="-127"/>
+                <a:ea typeface="Noto Sans KR SemiBold" panose="020B0200000000000000" pitchFamily="50" charset="-127"/>
+              </a:rPr>
               <a:t>  </a:t>
             </a:r>
             <a:r>
@@ -4658,23 +4665,11 @@
                     </a:srgbClr>
                   </a:outerShdw>
                 </a:effectLst>
+                <a:latin typeface="Noto Sans KR SemiBold" panose="020B0200000000000000" pitchFamily="50" charset="-127"/>
+                <a:ea typeface="Noto Sans KR SemiBold" panose="020B0200000000000000" pitchFamily="50" charset="-127"/>
               </a:rPr>
               <a:t>, Min-Woo Ji, Daniel Kim, Dae-Hyun Lee </a:t>
             </a:r>
-            <a:endParaRPr lang="en-US" altLang="ko-KR" sz="5400" b="1" dirty="0">
-              <a:solidFill>
-                <a:schemeClr val="bg1"/>
-              </a:solidFill>
-              <a:effectLst>
-                <a:outerShdw blurRad="38100" dist="38100" dir="2700000" algn="tl">
-                  <a:srgbClr val="000000">
-                    <a:alpha val="43137"/>
-                  </a:srgbClr>
-                </a:outerShdw>
-              </a:effectLst>
-              <a:latin typeface="+mj-ea"/>
-              <a:ea typeface="+mj-ea"/>
-            </a:endParaRPr>
           </a:p>
           <a:p>
             <a:r>
@@ -4689,24 +4684,10 @@
                     </a:srgbClr>
                   </a:outerShdw>
                 </a:effectLst>
-                <a:ea typeface="+mj-ea"/>
-              </a:rPr>
-              <a:t>Tech University of Korea Dept. </a:t>
-            </a:r>
-            <a:r>
-              <a:rPr lang="en-US" altLang="ko-KR" sz="5400" b="1" dirty="0">
-                <a:solidFill>
-                  <a:schemeClr val="bg1"/>
-                </a:solidFill>
-                <a:effectLst>
-                  <a:outerShdw blurRad="38100" dist="38100" dir="2700000" algn="tl">
-                    <a:srgbClr val="000000">
-                      <a:alpha val="43137"/>
-                    </a:srgbClr>
-                  </a:outerShdw>
-                </a:effectLst>
-              </a:rPr>
-              <a:t>of Game &amp; Multimedia Engineering </a:t>
+                <a:latin typeface="Noto Sans KR SemiBold" panose="020B0200000000000000" pitchFamily="50" charset="-127"/>
+                <a:ea typeface="Noto Sans KR SemiBold" panose="020B0200000000000000" pitchFamily="50" charset="-127"/>
+              </a:rPr>
+              <a:t>Tech University of Korea Dept. of Game &amp; Multimedia Engineering </a:t>
             </a:r>
             <a:endParaRPr lang="ko-KR" altLang="en-US" sz="5400" b="1" dirty="0">
               <a:solidFill>
@@ -4719,7 +4700,8 @@
                   </a:srgbClr>
                 </a:outerShdw>
               </a:effectLst>
-              <a:ea typeface="+mj-ea"/>
+              <a:latin typeface="Noto Sans KR SemiBold" panose="020B0200000000000000" pitchFamily="50" charset="-127"/>
+              <a:ea typeface="Noto Sans KR SemiBold" panose="020B0200000000000000" pitchFamily="50" charset="-127"/>
             </a:endParaRPr>
           </a:p>
         </p:txBody>
@@ -4738,7 +4720,7 @@
         </p:nvSpPr>
         <p:spPr>
           <a:xfrm>
-            <a:off x="400048" y="7731171"/>
+            <a:off x="400048" y="7216821"/>
             <a:ext cx="15380726" cy="1353835"/>
           </a:xfrm>
           <a:prstGeom prst="rect">
@@ -4787,7 +4769,7 @@
         </p:nvSpPr>
         <p:spPr>
           <a:xfrm>
-            <a:off x="747853" y="8060967"/>
+            <a:off x="747851" y="7474774"/>
             <a:ext cx="4296094" cy="830997"/>
           </a:xfrm>
           <a:prstGeom prst="rect">
@@ -4815,6 +4797,8 @@
                     </a:srgbClr>
                   </a:outerShdw>
                 </a:effectLst>
+                <a:latin typeface="Noto Sans KR Black" panose="020B0200000000000000" pitchFamily="50" charset="-127"/>
+                <a:ea typeface="Noto Sans KR Black" panose="020B0200000000000000" pitchFamily="50" charset="-127"/>
               </a:rPr>
               <a:t>연구 배경</a:t>
             </a:r>
@@ -4835,8 +4819,8 @@
         </p:nvSpPr>
         <p:spPr>
           <a:xfrm>
-            <a:off x="400049" y="9407980"/>
-            <a:ext cx="15380724" cy="5509200"/>
+            <a:off x="400049" y="8893630"/>
+            <a:ext cx="15380724" cy="5471691"/>
           </a:xfrm>
           <a:prstGeom prst="rect">
             <a:avLst/>
@@ -4849,398 +4833,476 @@
           </a:bodyPr>
           <a:lstStyle/>
           <a:p>
-            <a:r>
-              <a:rPr lang="ko-KR" altLang="en-US" sz="3200" dirty="0">
-                <a:ea typeface="+mj-ea"/>
-              </a:rPr>
-              <a:t> 최근 전 세계 </a:t>
-            </a:r>
-            <a:r>
-              <a:rPr lang="en-US" altLang="ko-KR" sz="3200" dirty="0">
-                <a:ea typeface="+mj-ea"/>
+            <a:pPr>
+              <a:lnSpc>
+                <a:spcPct val="110000"/>
+              </a:lnSpc>
+            </a:pPr>
+            <a:r>
+              <a:rPr lang="ko-KR" altLang="en-US" sz="3200" dirty="0">
+                <a:latin typeface="Noto Sans KR Light" panose="020B0200000000000000" pitchFamily="50" charset="-127"/>
+                <a:ea typeface="Noto Sans KR Light" panose="020B0200000000000000" pitchFamily="50" charset="-127"/>
+              </a:rPr>
+              <a:t>최근 전 세계 </a:t>
+            </a:r>
+            <a:r>
+              <a:rPr lang="en-US" altLang="ko-KR" sz="3200" dirty="0">
+                <a:latin typeface="Noto Sans KR Light" panose="020B0200000000000000" pitchFamily="50" charset="-127"/>
+                <a:ea typeface="Noto Sans KR Light" panose="020B0200000000000000" pitchFamily="50" charset="-127"/>
               </a:rPr>
               <a:t>IT </a:t>
             </a:r>
             <a:r>
               <a:rPr lang="ko-KR" altLang="en-US" sz="3200" dirty="0">
-                <a:ea typeface="+mj-ea"/>
+                <a:latin typeface="Noto Sans KR Light" panose="020B0200000000000000" pitchFamily="50" charset="-127"/>
+                <a:ea typeface="Noto Sans KR Light" panose="020B0200000000000000" pitchFamily="50" charset="-127"/>
               </a:rPr>
               <a:t>업계는 </a:t>
             </a:r>
             <a:r>
               <a:rPr lang="en-US" altLang="ko-KR" sz="3200" dirty="0">
-                <a:ea typeface="+mj-ea"/>
+                <a:latin typeface="Noto Sans KR Light" panose="020B0200000000000000" pitchFamily="50" charset="-127"/>
+                <a:ea typeface="Noto Sans KR Light" panose="020B0200000000000000" pitchFamily="50" charset="-127"/>
               </a:rPr>
               <a:t>'</a:t>
             </a:r>
             <a:r>
               <a:rPr lang="ko-KR" altLang="en-US" sz="3200" dirty="0">
-                <a:ea typeface="+mj-ea"/>
+                <a:latin typeface="Noto Sans KR Light" panose="020B0200000000000000" pitchFamily="50" charset="-127"/>
+                <a:ea typeface="Noto Sans KR Light" panose="020B0200000000000000" pitchFamily="50" charset="-127"/>
               </a:rPr>
               <a:t>개발자 채용 감소</a:t>
             </a:r>
             <a:r>
               <a:rPr lang="en-US" altLang="ko-KR" sz="3200" dirty="0">
-                <a:ea typeface="+mj-ea"/>
+                <a:latin typeface="Noto Sans KR Light" panose="020B0200000000000000" pitchFamily="50" charset="-127"/>
+                <a:ea typeface="Noto Sans KR Light" panose="020B0200000000000000" pitchFamily="50" charset="-127"/>
               </a:rPr>
               <a:t>'</a:t>
             </a:r>
             <a:r>
               <a:rPr lang="ko-KR" altLang="en-US" sz="3200" dirty="0">
-                <a:ea typeface="+mj-ea"/>
+                <a:latin typeface="Noto Sans KR Light" panose="020B0200000000000000" pitchFamily="50" charset="-127"/>
+                <a:ea typeface="Noto Sans KR Light" panose="020B0200000000000000" pitchFamily="50" charset="-127"/>
               </a:rPr>
               <a:t>와 </a:t>
             </a:r>
             <a:r>
               <a:rPr lang="en-US" altLang="ko-KR" sz="3200" dirty="0">
-                <a:ea typeface="+mj-ea"/>
+                <a:latin typeface="Noto Sans KR Light" panose="020B0200000000000000" pitchFamily="50" charset="-127"/>
+                <a:ea typeface="Noto Sans KR Light" panose="020B0200000000000000" pitchFamily="50" charset="-127"/>
               </a:rPr>
               <a:t>'AI </a:t>
             </a:r>
             <a:r>
               <a:rPr lang="ko-KR" altLang="en-US" sz="3200" dirty="0">
-                <a:ea typeface="+mj-ea"/>
+                <a:latin typeface="Noto Sans KR Light" panose="020B0200000000000000" pitchFamily="50" charset="-127"/>
+                <a:ea typeface="Noto Sans KR Light" panose="020B0200000000000000" pitchFamily="50" charset="-127"/>
               </a:rPr>
               <a:t>인재 수요 급증</a:t>
             </a:r>
             <a:r>
               <a:rPr lang="en-US" altLang="ko-KR" sz="3200" dirty="0">
-                <a:ea typeface="+mj-ea"/>
+                <a:latin typeface="Noto Sans KR Light" panose="020B0200000000000000" pitchFamily="50" charset="-127"/>
+                <a:ea typeface="Noto Sans KR Light" panose="020B0200000000000000" pitchFamily="50" charset="-127"/>
               </a:rPr>
               <a:t>'</a:t>
             </a:r>
             <a:r>
               <a:rPr lang="ko-KR" altLang="en-US" sz="3200" dirty="0">
-                <a:ea typeface="+mj-ea"/>
+                <a:latin typeface="Noto Sans KR Light" panose="020B0200000000000000" pitchFamily="50" charset="-127"/>
+                <a:ea typeface="Noto Sans KR Light" panose="020B0200000000000000" pitchFamily="50" charset="-127"/>
               </a:rPr>
               <a:t>이라는 구조적 전환기를 맞이하고 있다</a:t>
             </a:r>
             <a:r>
               <a:rPr lang="en-US" altLang="ko-KR" sz="3200" dirty="0">
-                <a:ea typeface="+mj-ea"/>
+                <a:latin typeface="Noto Sans KR Light" panose="020B0200000000000000" pitchFamily="50" charset="-127"/>
+                <a:ea typeface="Noto Sans KR Light" panose="020B0200000000000000" pitchFamily="50" charset="-127"/>
               </a:rPr>
               <a:t>. 2021</a:t>
             </a:r>
             <a:r>
               <a:rPr lang="ko-KR" altLang="en-US" sz="3200" dirty="0">
-                <a:ea typeface="+mj-ea"/>
+                <a:latin typeface="Noto Sans KR Light" panose="020B0200000000000000" pitchFamily="50" charset="-127"/>
+                <a:ea typeface="Noto Sans KR Light" panose="020B0200000000000000" pitchFamily="50" charset="-127"/>
               </a:rPr>
               <a:t>년 이후 개발자 수요는 둔화되었으며</a:t>
             </a:r>
             <a:r>
               <a:rPr lang="en-US" altLang="ko-KR" sz="3200" dirty="0">
-                <a:ea typeface="+mj-ea"/>
+                <a:latin typeface="Noto Sans KR Light" panose="020B0200000000000000" pitchFamily="50" charset="-127"/>
+                <a:ea typeface="Noto Sans KR Light" panose="020B0200000000000000" pitchFamily="50" charset="-127"/>
               </a:rPr>
               <a:t>, 2022</a:t>
             </a:r>
             <a:r>
               <a:rPr lang="ko-KR" altLang="en-US" sz="3200" dirty="0">
-                <a:ea typeface="+mj-ea"/>
+                <a:latin typeface="Noto Sans KR Light" panose="020B0200000000000000" pitchFamily="50" charset="-127"/>
+                <a:ea typeface="Noto Sans KR Light" panose="020B0200000000000000" pitchFamily="50" charset="-127"/>
               </a:rPr>
               <a:t>년부터 </a:t>
             </a:r>
             <a:r>
               <a:rPr lang="en-US" altLang="ko-KR" sz="3200" dirty="0">
-                <a:ea typeface="+mj-ea"/>
+                <a:latin typeface="Noto Sans KR Light" panose="020B0200000000000000" pitchFamily="50" charset="-127"/>
+                <a:ea typeface="Noto Sans KR Light" panose="020B0200000000000000" pitchFamily="50" charset="-127"/>
               </a:rPr>
               <a:t>2024</a:t>
             </a:r>
             <a:r>
               <a:rPr lang="ko-KR" altLang="en-US" sz="3200" dirty="0">
-                <a:ea typeface="+mj-ea"/>
+                <a:latin typeface="Noto Sans KR Light" panose="020B0200000000000000" pitchFamily="50" charset="-127"/>
+                <a:ea typeface="Noto Sans KR Light" panose="020B0200000000000000" pitchFamily="50" charset="-127"/>
               </a:rPr>
               <a:t>년 사이 전 세 계적으로 약 </a:t>
             </a:r>
             <a:r>
               <a:rPr lang="en-US" altLang="ko-KR" sz="3200" dirty="0">
-                <a:ea typeface="+mj-ea"/>
+                <a:latin typeface="Noto Sans KR Light" panose="020B0200000000000000" pitchFamily="50" charset="-127"/>
+                <a:ea typeface="Noto Sans KR Light" panose="020B0200000000000000" pitchFamily="50" charset="-127"/>
               </a:rPr>
               <a:t>56</a:t>
             </a:r>
             <a:r>
               <a:rPr lang="ko-KR" altLang="en-US" sz="3200" dirty="0">
-                <a:ea typeface="+mj-ea"/>
+                <a:latin typeface="Noto Sans KR Light" panose="020B0200000000000000" pitchFamily="50" charset="-127"/>
+                <a:ea typeface="Noto Sans KR Light" panose="020B0200000000000000" pitchFamily="50" charset="-127"/>
               </a:rPr>
               <a:t>만 명 이상의 </a:t>
             </a:r>
             <a:r>
               <a:rPr lang="en-US" altLang="ko-KR" sz="3200" dirty="0">
-                <a:ea typeface="+mj-ea"/>
+                <a:latin typeface="Noto Sans KR Light" panose="020B0200000000000000" pitchFamily="50" charset="-127"/>
+                <a:ea typeface="Noto Sans KR Light" panose="020B0200000000000000" pitchFamily="50" charset="-127"/>
               </a:rPr>
               <a:t>IT </a:t>
             </a:r>
             <a:r>
               <a:rPr lang="ko-KR" altLang="en-US" sz="3200" dirty="0">
-                <a:ea typeface="+mj-ea"/>
+                <a:latin typeface="Noto Sans KR Light" panose="020B0200000000000000" pitchFamily="50" charset="-127"/>
+                <a:ea typeface="Noto Sans KR Light" panose="020B0200000000000000" pitchFamily="50" charset="-127"/>
               </a:rPr>
               <a:t>인력이 감축되었다</a:t>
             </a:r>
             <a:r>
               <a:rPr lang="en-US" altLang="ko-KR" sz="3200" dirty="0">
-                <a:ea typeface="+mj-ea"/>
+                <a:latin typeface="Noto Sans KR Light" panose="020B0200000000000000" pitchFamily="50" charset="-127"/>
+                <a:ea typeface="Noto Sans KR Light" panose="020B0200000000000000" pitchFamily="50" charset="-127"/>
               </a:rPr>
               <a:t>.</a:t>
             </a:r>
           </a:p>
           <a:p>
-            <a:r>
-              <a:rPr lang="ko-KR" altLang="en-US" sz="3200" dirty="0">
-                <a:ea typeface="+mj-ea"/>
-              </a:rPr>
-              <a:t> 이러한 흐름은 게임 업계에도 직결되어</a:t>
-            </a:r>
-            <a:r>
-              <a:rPr lang="en-US" altLang="ko-KR" sz="3200" dirty="0">
-                <a:ea typeface="+mj-ea"/>
+            <a:pPr>
+              <a:lnSpc>
+                <a:spcPct val="110000"/>
+              </a:lnSpc>
+            </a:pPr>
+            <a:r>
+              <a:rPr lang="ko-KR" altLang="en-US" sz="3200" dirty="0">
+                <a:latin typeface="Noto Sans KR Light" panose="020B0200000000000000" pitchFamily="50" charset="-127"/>
+                <a:ea typeface="Noto Sans KR Light" panose="020B0200000000000000" pitchFamily="50" charset="-127"/>
+              </a:rPr>
+              <a:t>이러한 흐름은 게임 업계에도 직결되어</a:t>
+            </a:r>
+            <a:r>
+              <a:rPr lang="en-US" altLang="ko-KR" sz="3200" dirty="0">
+                <a:latin typeface="Noto Sans KR Light" panose="020B0200000000000000" pitchFamily="50" charset="-127"/>
+                <a:ea typeface="Noto Sans KR Light" panose="020B0200000000000000" pitchFamily="50" charset="-127"/>
               </a:rPr>
               <a:t>, </a:t>
             </a:r>
             <a:r>
               <a:rPr lang="ko-KR" altLang="en-US" sz="3200" dirty="0">
-                <a:ea typeface="+mj-ea"/>
+                <a:latin typeface="Noto Sans KR Light" panose="020B0200000000000000" pitchFamily="50" charset="-127"/>
+                <a:ea typeface="Noto Sans KR Light" panose="020B0200000000000000" pitchFamily="50" charset="-127"/>
               </a:rPr>
               <a:t>신입 개발자의 진입 장벽은 높아지는 반면 </a:t>
             </a:r>
             <a:r>
               <a:rPr lang="en-US" altLang="ko-KR" sz="3200" dirty="0">
-                <a:ea typeface="+mj-ea"/>
+                <a:latin typeface="Noto Sans KR Light" panose="020B0200000000000000" pitchFamily="50" charset="-127"/>
+                <a:ea typeface="Noto Sans KR Light" panose="020B0200000000000000" pitchFamily="50" charset="-127"/>
               </a:rPr>
               <a:t>LLM</a:t>
             </a:r>
             <a:r>
               <a:rPr lang="ko-KR" altLang="en-US" sz="3200" dirty="0">
-                <a:ea typeface="+mj-ea"/>
+                <a:latin typeface="Noto Sans KR Light" panose="020B0200000000000000" pitchFamily="50" charset="-127"/>
+                <a:ea typeface="Noto Sans KR Light" panose="020B0200000000000000" pitchFamily="50" charset="-127"/>
               </a:rPr>
               <a:t>을 도구로 활용해 고도의 설계를 수행할 수 있는 능력은 소규모 개발 환경에서 생존을 위한 필수 역량이 되고 있다</a:t>
             </a:r>
             <a:r>
               <a:rPr lang="en-US" altLang="ko-KR" sz="3200" dirty="0">
-                <a:ea typeface="+mj-ea"/>
+                <a:latin typeface="Noto Sans KR Light" panose="020B0200000000000000" pitchFamily="50" charset="-127"/>
+                <a:ea typeface="Noto Sans KR Light" panose="020B0200000000000000" pitchFamily="50" charset="-127"/>
               </a:rPr>
               <a:t>.</a:t>
             </a:r>
             <a:r>
               <a:rPr lang="ko-KR" altLang="en-US" sz="3200" dirty="0">
-                <a:ea typeface="+mj-ea"/>
+                <a:latin typeface="Noto Sans KR Light" panose="020B0200000000000000" pitchFamily="50" charset="-127"/>
+                <a:ea typeface="Noto Sans KR Light" panose="020B0200000000000000" pitchFamily="50" charset="-127"/>
               </a:rPr>
               <a:t> </a:t>
             </a:r>
-          </a:p>
-          <a:p>
-            <a:r>
-              <a:rPr lang="en-US" altLang="ko-KR" sz="3200" dirty="0">
-                <a:ea typeface="+mj-ea"/>
-              </a:rPr>
-              <a:t> 2020</a:t>
-            </a:r>
-            <a:r>
-              <a:rPr lang="ko-KR" altLang="en-US" sz="3200" dirty="0">
-                <a:ea typeface="+mj-ea"/>
+            <a:r>
+              <a:rPr lang="en-US" altLang="ko-KR" sz="3200" dirty="0">
+                <a:latin typeface="Noto Sans KR Light" panose="020B0200000000000000" pitchFamily="50" charset="-127"/>
+                <a:ea typeface="Noto Sans KR Light" panose="020B0200000000000000" pitchFamily="50" charset="-127"/>
+              </a:rPr>
+              <a:t>2020</a:t>
+            </a:r>
+            <a:r>
+              <a:rPr lang="ko-KR" altLang="en-US" sz="3200" dirty="0">
+                <a:latin typeface="Noto Sans KR Light" panose="020B0200000000000000" pitchFamily="50" charset="-127"/>
+                <a:ea typeface="Noto Sans KR Light" panose="020B0200000000000000" pitchFamily="50" charset="-127"/>
               </a:rPr>
               <a:t>년 </a:t>
             </a:r>
             <a:r>
               <a:rPr lang="en-US" altLang="ko-KR" sz="3200" dirty="0">
-                <a:ea typeface="+mj-ea"/>
+                <a:latin typeface="Noto Sans KR Light" panose="020B0200000000000000" pitchFamily="50" charset="-127"/>
+                <a:ea typeface="Noto Sans KR Light" panose="020B0200000000000000" pitchFamily="50" charset="-127"/>
               </a:rPr>
               <a:t>GPT-3</a:t>
             </a:r>
             <a:r>
               <a:rPr lang="ko-KR" altLang="en-US" sz="3200" dirty="0">
-                <a:ea typeface="+mj-ea"/>
+                <a:latin typeface="Noto Sans KR Light" panose="020B0200000000000000" pitchFamily="50" charset="-127"/>
+                <a:ea typeface="Noto Sans KR Light" panose="020B0200000000000000" pitchFamily="50" charset="-127"/>
               </a:rPr>
               <a:t>의 등장을 기점으로 시작된 코딩 보조 능력은 </a:t>
             </a:r>
             <a:r>
               <a:rPr lang="en-US" altLang="ko-KR" sz="3200" dirty="0">
-                <a:ea typeface="+mj-ea"/>
+                <a:latin typeface="Noto Sans KR Light" panose="020B0200000000000000" pitchFamily="50" charset="-127"/>
+                <a:ea typeface="Noto Sans KR Light" panose="020B0200000000000000" pitchFamily="50" charset="-127"/>
               </a:rPr>
               <a:t>2026</a:t>
             </a:r>
             <a:r>
               <a:rPr lang="ko-KR" altLang="en-US" sz="3200" dirty="0">
-                <a:ea typeface="+mj-ea"/>
+                <a:latin typeface="Noto Sans KR Light" panose="020B0200000000000000" pitchFamily="50" charset="-127"/>
+                <a:ea typeface="Noto Sans KR Light" panose="020B0200000000000000" pitchFamily="50" charset="-127"/>
               </a:rPr>
               <a:t>년 현재 </a:t>
             </a:r>
             <a:r>
               <a:rPr lang="en-US" altLang="ko-KR" sz="3200" dirty="0">
-                <a:ea typeface="+mj-ea"/>
+                <a:latin typeface="Noto Sans KR Light" panose="020B0200000000000000" pitchFamily="50" charset="-127"/>
+                <a:ea typeface="Noto Sans KR Light" panose="020B0200000000000000" pitchFamily="50" charset="-127"/>
               </a:rPr>
               <a:t>Claude Opus 4.5 </a:t>
             </a:r>
             <a:r>
               <a:rPr lang="ko-KR" altLang="en-US" sz="3200" dirty="0">
-                <a:ea typeface="+mj-ea"/>
+                <a:latin typeface="Noto Sans KR Light" panose="020B0200000000000000" pitchFamily="50" charset="-127"/>
+                <a:ea typeface="Noto Sans KR Light" panose="020B0200000000000000" pitchFamily="50" charset="-127"/>
               </a:rPr>
               <a:t>및 </a:t>
             </a:r>
             <a:r>
               <a:rPr lang="en-US" altLang="ko-KR" sz="3200" dirty="0">
-                <a:ea typeface="+mj-ea"/>
+                <a:latin typeface="Noto Sans KR Light" panose="020B0200000000000000" pitchFamily="50" charset="-127"/>
+                <a:ea typeface="Noto Sans KR Light" panose="020B0200000000000000" pitchFamily="50" charset="-127"/>
               </a:rPr>
               <a:t>GPT-5.4</a:t>
             </a:r>
             <a:r>
               <a:rPr lang="ko-KR" altLang="en-US" sz="3200" dirty="0">
-                <a:ea typeface="+mj-ea"/>
+                <a:latin typeface="Noto Sans KR Light" panose="020B0200000000000000" pitchFamily="50" charset="-127"/>
+                <a:ea typeface="Noto Sans KR Light" panose="020B0200000000000000" pitchFamily="50" charset="-127"/>
               </a:rPr>
               <a:t>와 같은 모델들이 </a:t>
             </a:r>
             <a:r>
               <a:rPr lang="en-US" altLang="ko-KR" sz="3200" dirty="0">
-                <a:ea typeface="+mj-ea"/>
+                <a:latin typeface="Noto Sans KR Light" panose="020B0200000000000000" pitchFamily="50" charset="-127"/>
+                <a:ea typeface="Noto Sans KR Light" panose="020B0200000000000000" pitchFamily="50" charset="-127"/>
               </a:rPr>
               <a:t>SWE- bench Verified</a:t>
             </a:r>
             <a:r>
               <a:rPr lang="ko-KR" altLang="en-US" sz="3200" dirty="0">
-                <a:ea typeface="+mj-ea"/>
+                <a:latin typeface="Noto Sans KR Light" panose="020B0200000000000000" pitchFamily="50" charset="-127"/>
+                <a:ea typeface="Noto Sans KR Light" panose="020B0200000000000000" pitchFamily="50" charset="-127"/>
               </a:rPr>
               <a:t>에서 </a:t>
             </a:r>
             <a:r>
               <a:rPr lang="en-US" altLang="ko-KR" sz="3200" dirty="0">
-                <a:ea typeface="+mj-ea"/>
+                <a:latin typeface="Noto Sans KR Light" panose="020B0200000000000000" pitchFamily="50" charset="-127"/>
+                <a:ea typeface="Noto Sans KR Light" panose="020B0200000000000000" pitchFamily="50" charset="-127"/>
               </a:rPr>
               <a:t>80%, </a:t>
             </a:r>
             <a:r>
               <a:rPr lang="en-US" altLang="ko-KR" sz="3200" dirty="0" err="1">
-                <a:ea typeface="+mj-ea"/>
+                <a:latin typeface="Noto Sans KR Light" panose="020B0200000000000000" pitchFamily="50" charset="-127"/>
+                <a:ea typeface="Noto Sans KR Light" panose="020B0200000000000000" pitchFamily="50" charset="-127"/>
               </a:rPr>
               <a:t>HumanEval</a:t>
             </a:r>
             <a:r>
               <a:rPr lang="ko-KR" altLang="en-US" sz="3200" dirty="0">
-                <a:ea typeface="+mj-ea"/>
+                <a:latin typeface="Noto Sans KR Light" panose="020B0200000000000000" pitchFamily="50" charset="-127"/>
+                <a:ea typeface="Noto Sans KR Light" panose="020B0200000000000000" pitchFamily="50" charset="-127"/>
               </a:rPr>
               <a:t>에서 </a:t>
             </a:r>
             <a:r>
               <a:rPr lang="en-US" altLang="ko-KR" sz="3200" dirty="0">
-                <a:ea typeface="+mj-ea"/>
+                <a:latin typeface="Noto Sans KR Light" panose="020B0200000000000000" pitchFamily="50" charset="-127"/>
+                <a:ea typeface="Noto Sans KR Light" panose="020B0200000000000000" pitchFamily="50" charset="-127"/>
               </a:rPr>
               <a:t>95% </a:t>
             </a:r>
             <a:r>
               <a:rPr lang="ko-KR" altLang="en-US" sz="3200" dirty="0">
-                <a:ea typeface="+mj-ea"/>
+                <a:latin typeface="Noto Sans KR Light" panose="020B0200000000000000" pitchFamily="50" charset="-127"/>
+                <a:ea typeface="Noto Sans KR Light" panose="020B0200000000000000" pitchFamily="50" charset="-127"/>
               </a:rPr>
               <a:t>이상의 </a:t>
             </a:r>
             <a:r>
               <a:rPr lang="ko-KR" altLang="en-US" sz="3200" dirty="0" err="1">
-                <a:ea typeface="+mj-ea"/>
+                <a:latin typeface="Noto Sans KR Light" panose="020B0200000000000000" pitchFamily="50" charset="-127"/>
+                <a:ea typeface="Noto Sans KR Light" panose="020B0200000000000000" pitchFamily="50" charset="-127"/>
               </a:rPr>
               <a:t>정답률을</a:t>
             </a:r>
             <a:r>
               <a:rPr lang="ko-KR" altLang="en-US" sz="3200" dirty="0">
-                <a:ea typeface="+mj-ea"/>
+                <a:latin typeface="Noto Sans KR Light" panose="020B0200000000000000" pitchFamily="50" charset="-127"/>
+                <a:ea typeface="Noto Sans KR Light" panose="020B0200000000000000" pitchFamily="50" charset="-127"/>
               </a:rPr>
               <a:t> 기록하며 포화 상태에 이르렀다</a:t>
             </a:r>
             <a:r>
               <a:rPr lang="en-US" altLang="ko-KR" sz="3200" dirty="0">
-                <a:ea typeface="+mj-ea"/>
+                <a:latin typeface="Noto Sans KR Light" panose="020B0200000000000000" pitchFamily="50" charset="-127"/>
+                <a:ea typeface="Noto Sans KR Light" panose="020B0200000000000000" pitchFamily="50" charset="-127"/>
               </a:rPr>
               <a:t>. </a:t>
             </a:r>
           </a:p>
           <a:p>
-            <a:r>
-              <a:rPr lang="ko-KR" altLang="en-US" sz="3200" dirty="0">
-                <a:ea typeface="+mj-ea"/>
-              </a:rPr>
-              <a:t> 이제 </a:t>
-            </a:r>
-            <a:r>
-              <a:rPr lang="en-US" altLang="ko-KR" sz="3200" dirty="0">
-                <a:ea typeface="+mj-ea"/>
+            <a:pPr>
+              <a:lnSpc>
+                <a:spcPct val="110000"/>
+              </a:lnSpc>
+            </a:pPr>
+            <a:r>
+              <a:rPr lang="ko-KR" altLang="en-US" sz="3200" dirty="0">
+                <a:latin typeface="Noto Sans KR Light" panose="020B0200000000000000" pitchFamily="50" charset="-127"/>
+                <a:ea typeface="Noto Sans KR Light" panose="020B0200000000000000" pitchFamily="50" charset="-127"/>
+              </a:rPr>
+              <a:t>이제 </a:t>
+            </a:r>
+            <a:r>
+              <a:rPr lang="en-US" altLang="ko-KR" sz="3200" dirty="0">
+                <a:latin typeface="Noto Sans KR Light" panose="020B0200000000000000" pitchFamily="50" charset="-127"/>
+                <a:ea typeface="Noto Sans KR Light" panose="020B0200000000000000" pitchFamily="50" charset="-127"/>
               </a:rPr>
               <a:t>LLM</a:t>
             </a:r>
             <a:r>
               <a:rPr lang="ko-KR" altLang="en-US" sz="3200" dirty="0">
-                <a:ea typeface="+mj-ea"/>
+                <a:latin typeface="Noto Sans KR Light" panose="020B0200000000000000" pitchFamily="50" charset="-127"/>
+                <a:ea typeface="Noto Sans KR Light" panose="020B0200000000000000" pitchFamily="50" charset="-127"/>
               </a:rPr>
               <a:t>은 단순한 </a:t>
             </a:r>
             <a:r>
               <a:rPr lang="en-US" altLang="ko-KR" sz="3200" dirty="0">
-                <a:ea typeface="+mj-ea"/>
+                <a:latin typeface="Noto Sans KR Light" panose="020B0200000000000000" pitchFamily="50" charset="-127"/>
+                <a:ea typeface="Noto Sans KR Light" panose="020B0200000000000000" pitchFamily="50" charset="-127"/>
               </a:rPr>
               <a:t>'</a:t>
             </a:r>
             <a:r>
               <a:rPr lang="ko-KR" altLang="en-US" sz="3200" dirty="0">
-                <a:ea typeface="+mj-ea"/>
+                <a:latin typeface="Noto Sans KR Light" panose="020B0200000000000000" pitchFamily="50" charset="-127"/>
+                <a:ea typeface="Noto Sans KR Light" panose="020B0200000000000000" pitchFamily="50" charset="-127"/>
               </a:rPr>
               <a:t>코드 자동 완성</a:t>
             </a:r>
             <a:r>
               <a:rPr lang="en-US" altLang="ko-KR" sz="3200" dirty="0">
-                <a:ea typeface="+mj-ea"/>
+                <a:latin typeface="Noto Sans KR Light" panose="020B0200000000000000" pitchFamily="50" charset="-127"/>
+                <a:ea typeface="Noto Sans KR Light" panose="020B0200000000000000" pitchFamily="50" charset="-127"/>
               </a:rPr>
               <a:t>'</a:t>
             </a:r>
             <a:r>
               <a:rPr lang="ko-KR" altLang="en-US" sz="3200" dirty="0">
-                <a:ea typeface="+mj-ea"/>
+                <a:latin typeface="Noto Sans KR Light" panose="020B0200000000000000" pitchFamily="50" charset="-127"/>
+                <a:ea typeface="Noto Sans KR Light" panose="020B0200000000000000" pitchFamily="50" charset="-127"/>
               </a:rPr>
               <a:t>을 넘어</a:t>
             </a:r>
             <a:r>
               <a:rPr lang="en-US" altLang="ko-KR" sz="3200" dirty="0">
-                <a:ea typeface="+mj-ea"/>
+                <a:latin typeface="Noto Sans KR Light" panose="020B0200000000000000" pitchFamily="50" charset="-127"/>
+                <a:ea typeface="Noto Sans KR Light" panose="020B0200000000000000" pitchFamily="50" charset="-127"/>
               </a:rPr>
               <a:t>, </a:t>
             </a:r>
             <a:r>
               <a:rPr lang="ko-KR" altLang="en-US" sz="3200" dirty="0">
-                <a:ea typeface="+mj-ea"/>
+                <a:latin typeface="Noto Sans KR Light" panose="020B0200000000000000" pitchFamily="50" charset="-127"/>
+                <a:ea typeface="Noto Sans KR Light" panose="020B0200000000000000" pitchFamily="50" charset="-127"/>
               </a:rPr>
               <a:t>개발자의 자연어 의도를 이해하고 복잡한 아키텍처를 설계하는 이른바 </a:t>
             </a:r>
             <a:r>
               <a:rPr lang="en-US" altLang="ko-KR" sz="3200" dirty="0">
-                <a:ea typeface="+mj-ea"/>
+                <a:latin typeface="Noto Sans KR Light" panose="020B0200000000000000" pitchFamily="50" charset="-127"/>
+                <a:ea typeface="Noto Sans KR Light" panose="020B0200000000000000" pitchFamily="50" charset="-127"/>
               </a:rPr>
               <a:t>'</a:t>
             </a:r>
             <a:r>
               <a:rPr lang="ko-KR" altLang="en-US" sz="3200" dirty="0" err="1">
-                <a:ea typeface="+mj-ea"/>
+                <a:latin typeface="Noto Sans KR Light" panose="020B0200000000000000" pitchFamily="50" charset="-127"/>
+                <a:ea typeface="Noto Sans KR Light" panose="020B0200000000000000" pitchFamily="50" charset="-127"/>
               </a:rPr>
               <a:t>바이브</a:t>
             </a:r>
             <a:r>
               <a:rPr lang="ko-KR" altLang="en-US" sz="3200" dirty="0">
-                <a:ea typeface="+mj-ea"/>
+                <a:latin typeface="Noto Sans KR Light" panose="020B0200000000000000" pitchFamily="50" charset="-127"/>
+                <a:ea typeface="Noto Sans KR Light" panose="020B0200000000000000" pitchFamily="50" charset="-127"/>
               </a:rPr>
               <a:t> 코딩</a:t>
             </a:r>
             <a:r>
               <a:rPr lang="en-US" altLang="ko-KR" sz="3200" dirty="0">
-                <a:ea typeface="+mj-ea"/>
+                <a:latin typeface="Noto Sans KR Light" panose="020B0200000000000000" pitchFamily="50" charset="-127"/>
+                <a:ea typeface="Noto Sans KR Light" panose="020B0200000000000000" pitchFamily="50" charset="-127"/>
               </a:rPr>
               <a:t>’ </a:t>
             </a:r>
             <a:r>
               <a:rPr lang="ko-KR" altLang="en-US" sz="3200" dirty="0">
-                <a:ea typeface="+mj-ea"/>
+                <a:latin typeface="Noto Sans KR Light" panose="020B0200000000000000" pitchFamily="50" charset="-127"/>
+                <a:ea typeface="Noto Sans KR Light" panose="020B0200000000000000" pitchFamily="50" charset="-127"/>
               </a:rPr>
               <a:t>패러다임을 형성하고 있다</a:t>
             </a:r>
             <a:r>
               <a:rPr lang="en-US" altLang="ko-KR" sz="3200" dirty="0">
-                <a:ea typeface="+mj-ea"/>
+                <a:latin typeface="Noto Sans KR Light" panose="020B0200000000000000" pitchFamily="50" charset="-127"/>
+                <a:ea typeface="Noto Sans KR Light" panose="020B0200000000000000" pitchFamily="50" charset="-127"/>
               </a:rPr>
               <a:t>. </a:t>
             </a:r>
             <a:endParaRPr lang="ko-KR" altLang="en-US" sz="3200" dirty="0">
-              <a:ea typeface="+mj-ea"/>
+              <a:latin typeface="Noto Sans KR Light" panose="020B0200000000000000" pitchFamily="50" charset="-127"/>
+              <a:ea typeface="Noto Sans KR Light" panose="020B0200000000000000" pitchFamily="50" charset="-127"/>
             </a:endParaRPr>
           </a:p>
         </p:txBody>
@@ -5259,7 +5321,7 @@
         </p:nvSpPr>
         <p:spPr>
           <a:xfrm>
-            <a:off x="400049" y="15454188"/>
+            <a:off x="400049" y="14939838"/>
             <a:ext cx="15380724" cy="1353835"/>
           </a:xfrm>
           <a:prstGeom prst="rect">
@@ -5308,7 +5370,7 @@
         </p:nvSpPr>
         <p:spPr>
           <a:xfrm>
-            <a:off x="747852" y="15715606"/>
+            <a:off x="747851" y="15201256"/>
             <a:ext cx="4296094" cy="830997"/>
           </a:xfrm>
           <a:prstGeom prst="rect">
@@ -5336,6 +5398,8 @@
                     </a:srgbClr>
                   </a:outerShdw>
                 </a:effectLst>
+                <a:latin typeface="Noto Sans KR Black" panose="020B0200000000000000" pitchFamily="50" charset="-127"/>
+                <a:ea typeface="Noto Sans KR Black" panose="020B0200000000000000" pitchFamily="50" charset="-127"/>
               </a:rPr>
               <a:t>연구 목적</a:t>
             </a:r>
@@ -5356,8 +5420,8 @@
         </p:nvSpPr>
         <p:spPr>
           <a:xfrm>
-            <a:off x="400046" y="17130997"/>
-            <a:ext cx="15380723" cy="1569660"/>
+            <a:off x="400046" y="16616647"/>
+            <a:ext cx="15380723" cy="1679883"/>
           </a:xfrm>
           <a:prstGeom prst="rect">
             <a:avLst/>
@@ -5370,67 +5434,120 @@
           </a:bodyPr>
           <a:lstStyle/>
           <a:p>
-            <a:r>
-              <a:rPr lang="ko-KR" altLang="en-US" sz="3200" dirty="0"/>
+            <a:pPr>
+              <a:lnSpc>
+                <a:spcPct val="110000"/>
+              </a:lnSpc>
+            </a:pPr>
+            <a:r>
+              <a:rPr lang="ko-KR" altLang="en-US" sz="3200" dirty="0">
+                <a:latin typeface="Noto Sans KR Light" panose="020B0200000000000000" pitchFamily="50" charset="-127"/>
+                <a:ea typeface="Noto Sans KR Light" panose="020B0200000000000000" pitchFamily="50" charset="-127"/>
+              </a:rPr>
               <a:t>본 연구의 목적은 </a:t>
             </a:r>
             <a:r>
-              <a:rPr lang="ko-KR" altLang="en-US" sz="3200" dirty="0" err="1"/>
+              <a:rPr lang="ko-KR" altLang="en-US" sz="3200" dirty="0" err="1">
+                <a:latin typeface="Noto Sans KR Light" panose="020B0200000000000000" pitchFamily="50" charset="-127"/>
+                <a:ea typeface="Noto Sans KR Light" panose="020B0200000000000000" pitchFamily="50" charset="-127"/>
+              </a:rPr>
               <a:t>언리얼</a:t>
             </a:r>
             <a:r>
-              <a:rPr lang="ko-KR" altLang="en-US" sz="3200" dirty="0"/>
+              <a:rPr lang="ko-KR" altLang="en-US" sz="3200" dirty="0">
+                <a:latin typeface="Noto Sans KR Light" panose="020B0200000000000000" pitchFamily="50" charset="-127"/>
+                <a:ea typeface="Noto Sans KR Light" panose="020B0200000000000000" pitchFamily="50" charset="-127"/>
+              </a:rPr>
               <a:t> 엔진 </a:t>
             </a:r>
             <a:r>
-              <a:rPr lang="en-US" altLang="ko-KR" sz="3200" dirty="0"/>
+              <a:rPr lang="en-US" altLang="ko-KR" sz="3200" dirty="0">
+                <a:latin typeface="Noto Sans KR Light" panose="020B0200000000000000" pitchFamily="50" charset="-127"/>
+                <a:ea typeface="Noto Sans KR Light" panose="020B0200000000000000" pitchFamily="50" charset="-127"/>
+              </a:rPr>
               <a:t>C++</a:t>
             </a:r>
             <a:r>
-              <a:rPr lang="ko-KR" altLang="en-US" sz="3200" dirty="0"/>
+              <a:rPr lang="ko-KR" altLang="en-US" sz="3200" dirty="0">
+                <a:latin typeface="Noto Sans KR Light" panose="020B0200000000000000" pitchFamily="50" charset="-127"/>
+                <a:ea typeface="Noto Sans KR Light" panose="020B0200000000000000" pitchFamily="50" charset="-127"/>
+              </a:rPr>
               <a:t>라는 높은 기술적 진입 장벽을 가진 환경에서</a:t>
             </a:r>
             <a:r>
-              <a:rPr lang="en-US" altLang="ko-KR" sz="3200" dirty="0"/>
+              <a:rPr lang="en-US" altLang="ko-KR" sz="3200" dirty="0">
+                <a:latin typeface="Noto Sans KR Light" panose="020B0200000000000000" pitchFamily="50" charset="-127"/>
+                <a:ea typeface="Noto Sans KR Light" panose="020B0200000000000000" pitchFamily="50" charset="-127"/>
+              </a:rPr>
               <a:t>, LLM </a:t>
             </a:r>
             <a:r>
-              <a:rPr lang="ko-KR" altLang="en-US" sz="3200" dirty="0"/>
+              <a:rPr lang="ko-KR" altLang="en-US" sz="3200" dirty="0">
+                <a:latin typeface="Noto Sans KR Light" panose="020B0200000000000000" pitchFamily="50" charset="-127"/>
+                <a:ea typeface="Noto Sans KR Light" panose="020B0200000000000000" pitchFamily="50" charset="-127"/>
+              </a:rPr>
               <a:t>기반의 </a:t>
             </a:r>
             <a:r>
-              <a:rPr lang="en-US" altLang="ko-KR" sz="3200" dirty="0"/>
+              <a:rPr lang="en-US" altLang="ko-KR" sz="3200" dirty="0">
+                <a:latin typeface="Noto Sans KR Light" panose="020B0200000000000000" pitchFamily="50" charset="-127"/>
+                <a:ea typeface="Noto Sans KR Light" panose="020B0200000000000000" pitchFamily="50" charset="-127"/>
+              </a:rPr>
               <a:t>'</a:t>
             </a:r>
             <a:r>
-              <a:rPr lang="ko-KR" altLang="en-US" sz="3200" dirty="0" err="1"/>
+              <a:rPr lang="ko-KR" altLang="en-US" sz="3200" dirty="0" err="1">
+                <a:latin typeface="Noto Sans KR Light" panose="020B0200000000000000" pitchFamily="50" charset="-127"/>
+                <a:ea typeface="Noto Sans KR Light" panose="020B0200000000000000" pitchFamily="50" charset="-127"/>
+              </a:rPr>
               <a:t>바이브</a:t>
             </a:r>
             <a:r>
-              <a:rPr lang="ko-KR" altLang="en-US" sz="3200" dirty="0"/>
+              <a:rPr lang="ko-KR" altLang="en-US" sz="3200" dirty="0">
+                <a:latin typeface="Noto Sans KR Light" panose="020B0200000000000000" pitchFamily="50" charset="-127"/>
+                <a:ea typeface="Noto Sans KR Light" panose="020B0200000000000000" pitchFamily="50" charset="-127"/>
+              </a:rPr>
               <a:t> 코딩</a:t>
             </a:r>
             <a:r>
-              <a:rPr lang="en-US" altLang="ko-KR" sz="3200" dirty="0"/>
+              <a:rPr lang="en-US" altLang="ko-KR" sz="3200" dirty="0">
+                <a:latin typeface="Noto Sans KR Light" panose="020B0200000000000000" pitchFamily="50" charset="-127"/>
+                <a:ea typeface="Noto Sans KR Light" panose="020B0200000000000000" pitchFamily="50" charset="-127"/>
+              </a:rPr>
               <a:t>'</a:t>
             </a:r>
             <a:r>
-              <a:rPr lang="ko-KR" altLang="en-US" sz="3200" dirty="0"/>
+              <a:rPr lang="ko-KR" altLang="en-US" sz="3200" dirty="0">
+                <a:latin typeface="Noto Sans KR Light" panose="020B0200000000000000" pitchFamily="50" charset="-127"/>
+                <a:ea typeface="Noto Sans KR Light" panose="020B0200000000000000" pitchFamily="50" charset="-127"/>
+              </a:rPr>
               <a:t>이 소규모 게임 프로젝트의 생산 한계선을 어떻게 </a:t>
             </a:r>
             <a:r>
-              <a:rPr lang="ko-KR" altLang="en-US" sz="3200" dirty="0" err="1"/>
+              <a:rPr lang="ko-KR" altLang="en-US" sz="3200" dirty="0" err="1">
+                <a:latin typeface="Noto Sans KR Light" panose="020B0200000000000000" pitchFamily="50" charset="-127"/>
+                <a:ea typeface="Noto Sans KR Light" panose="020B0200000000000000" pitchFamily="50" charset="-127"/>
+              </a:rPr>
               <a:t>확장시키는지</a:t>
             </a:r>
             <a:r>
-              <a:rPr lang="ko-KR" altLang="en-US" sz="3200" dirty="0"/>
+              <a:rPr lang="ko-KR" altLang="en-US" sz="3200" dirty="0">
+                <a:latin typeface="Noto Sans KR Light" panose="020B0200000000000000" pitchFamily="50" charset="-127"/>
+                <a:ea typeface="Noto Sans KR Light" panose="020B0200000000000000" pitchFamily="50" charset="-127"/>
+              </a:rPr>
               <a:t> 규명하는 데 있다</a:t>
             </a:r>
             <a:r>
-              <a:rPr lang="en-US" altLang="ko-KR" sz="3200" dirty="0"/>
+              <a:rPr lang="en-US" altLang="ko-KR" sz="3200" dirty="0">
+                <a:latin typeface="Noto Sans KR Light" panose="020B0200000000000000" pitchFamily="50" charset="-127"/>
+                <a:ea typeface="Noto Sans KR Light" panose="020B0200000000000000" pitchFamily="50" charset="-127"/>
+              </a:rPr>
               <a:t>. </a:t>
             </a:r>
-            <a:endParaRPr lang="ko-KR" altLang="en-US" sz="3200" dirty="0"/>
+            <a:endParaRPr lang="ko-KR" altLang="en-US" sz="3200" dirty="0">
+              <a:latin typeface="Noto Sans KR Light" panose="020B0200000000000000" pitchFamily="50" charset="-127"/>
+              <a:ea typeface="Noto Sans KR Light" panose="020B0200000000000000" pitchFamily="50" charset="-127"/>
+            </a:endParaRPr>
           </a:p>
         </p:txBody>
       </p:sp>
@@ -5448,7 +5565,7 @@
         </p:nvSpPr>
         <p:spPr>
           <a:xfrm>
-            <a:off x="400047" y="19237665"/>
+            <a:off x="400047" y="18723315"/>
             <a:ext cx="15380724" cy="1353835"/>
           </a:xfrm>
           <a:prstGeom prst="rect">
@@ -5497,7 +5614,7 @@
         </p:nvSpPr>
         <p:spPr>
           <a:xfrm>
-            <a:off x="747851" y="19529556"/>
+            <a:off x="747851" y="18990383"/>
             <a:ext cx="4296094" cy="830997"/>
           </a:xfrm>
           <a:prstGeom prst="rect">
@@ -5525,6 +5642,8 @@
                     </a:srgbClr>
                   </a:outerShdw>
                 </a:effectLst>
+                <a:latin typeface="Noto Sans KR Black" panose="020B0200000000000000" pitchFamily="50" charset="-127"/>
+                <a:ea typeface="Noto Sans KR Black" panose="020B0200000000000000" pitchFamily="50" charset="-127"/>
               </a:rPr>
               <a:t>연구 방법</a:t>
             </a:r>
@@ -5545,8 +5664,8 @@
         </p:nvSpPr>
         <p:spPr>
           <a:xfrm>
-            <a:off x="400046" y="20914474"/>
-            <a:ext cx="15380723" cy="5616922"/>
+            <a:off x="400046" y="20400124"/>
+            <a:ext cx="15380723" cy="4946932"/>
           </a:xfrm>
           <a:prstGeom prst="rect">
             <a:avLst/>
@@ -5561,133 +5680,227 @@
           <a:p>
             <a:pPr marL="914400" lvl="1" indent="-457200">
               <a:lnSpc>
-                <a:spcPct val="150000"/>
+                <a:spcPct val="110000"/>
               </a:lnSpc>
               <a:buFont typeface="Wingdings" panose="05000000000000000000" pitchFamily="2" charset="2"/>
               <a:buChar char="§"/>
             </a:pPr>
             <a:r>
-              <a:rPr lang="ko-KR" altLang="en-US" sz="3600" b="1" dirty="0"/>
+              <a:rPr lang="ko-KR" altLang="en-US" sz="3600" b="1" dirty="0">
+                <a:latin typeface="Noto Sans KR Black" panose="020B0200000000000000" pitchFamily="50" charset="-127"/>
+                <a:ea typeface="Noto Sans KR Black" panose="020B0200000000000000" pitchFamily="50" charset="-127"/>
+              </a:rPr>
               <a:t>기초 공수</a:t>
             </a:r>
             <a:r>
-              <a:rPr lang="en-US" altLang="ko-KR" sz="3600" b="1" dirty="0"/>
+              <a:rPr lang="en-US" altLang="ko-KR" sz="3600" b="1" dirty="0">
+                <a:latin typeface="Noto Sans KR Black" panose="020B0200000000000000" pitchFamily="50" charset="-127"/>
+                <a:ea typeface="Noto Sans KR Black" panose="020B0200000000000000" pitchFamily="50" charset="-127"/>
+              </a:rPr>
               <a:t>(Baseline) </a:t>
             </a:r>
             <a:r>
-              <a:rPr lang="ko-KR" altLang="en-US" sz="3600" b="1" dirty="0"/>
+              <a:rPr lang="ko-KR" altLang="en-US" sz="3600" b="1" dirty="0">
+                <a:latin typeface="Noto Sans KR Black" panose="020B0200000000000000" pitchFamily="50" charset="-127"/>
+                <a:ea typeface="Noto Sans KR Black" panose="020B0200000000000000" pitchFamily="50" charset="-127"/>
+              </a:rPr>
               <a:t>대비 분석</a:t>
             </a:r>
-            <a:endParaRPr lang="en-US" altLang="ko-KR" sz="3600" b="1" dirty="0"/>
+            <a:endParaRPr lang="en-US" altLang="ko-KR" sz="3600" b="1" dirty="0">
+              <a:latin typeface="Noto Sans KR Black" panose="020B0200000000000000" pitchFamily="50" charset="-127"/>
+              <a:ea typeface="Noto Sans KR Black" panose="020B0200000000000000" pitchFamily="50" charset="-127"/>
+            </a:endParaRPr>
           </a:p>
           <a:p>
             <a:pPr lvl="1">
               <a:lnSpc>
-                <a:spcPct val="150000"/>
+                <a:spcPct val="110000"/>
               </a:lnSpc>
             </a:pPr>
             <a:r>
-              <a:rPr lang="en-US" altLang="ko-KR" sz="3200" dirty="0"/>
+              <a:rPr lang="en-US" altLang="ko-KR" sz="3200" dirty="0">
+                <a:latin typeface="Noto Sans KR Light" panose="020B0200000000000000" pitchFamily="50" charset="-127"/>
+                <a:ea typeface="Noto Sans KR Light" panose="020B0200000000000000" pitchFamily="50" charset="-127"/>
+              </a:rPr>
               <a:t>LLM</a:t>
             </a:r>
             <a:r>
-              <a:rPr lang="ko-KR" altLang="en-US" sz="3200" dirty="0"/>
+              <a:rPr lang="ko-KR" altLang="en-US" sz="3200" dirty="0">
+                <a:latin typeface="Noto Sans KR Light" panose="020B0200000000000000" pitchFamily="50" charset="-127"/>
+                <a:ea typeface="Noto Sans KR Light" panose="020B0200000000000000" pitchFamily="50" charset="-127"/>
+              </a:rPr>
               <a:t>의 보조 없이 진행되었을 때의 예상 소요 시간과 실제 구현 시간을 비교한다</a:t>
             </a:r>
             <a:r>
-              <a:rPr lang="en-US" altLang="ko-KR" sz="3200" dirty="0"/>
+              <a:rPr lang="en-US" altLang="ko-KR" sz="3200" dirty="0">
+                <a:latin typeface="Noto Sans KR Light" panose="020B0200000000000000" pitchFamily="50" charset="-127"/>
+                <a:ea typeface="Noto Sans KR Light" panose="020B0200000000000000" pitchFamily="50" charset="-127"/>
+              </a:rPr>
               <a:t>.</a:t>
             </a:r>
             <a:r>
-              <a:rPr lang="ko-KR" altLang="en-US" sz="3200" dirty="0"/>
+              <a:rPr lang="ko-KR" altLang="en-US" sz="3200" dirty="0">
+                <a:latin typeface="Noto Sans KR Light" panose="020B0200000000000000" pitchFamily="50" charset="-127"/>
+                <a:ea typeface="Noto Sans KR Light" panose="020B0200000000000000" pitchFamily="50" charset="-127"/>
+              </a:rPr>
               <a:t> </a:t>
             </a:r>
-            <a:endParaRPr lang="en-US" altLang="ko-KR" sz="3200" dirty="0"/>
-          </a:p>
-          <a:p>
-            <a:endParaRPr lang="en-US" altLang="ko-KR" sz="1050" b="1" dirty="0"/>
+            <a:endParaRPr lang="en-US" altLang="ko-KR" sz="3200" dirty="0">
+              <a:latin typeface="Noto Sans KR Light" panose="020B0200000000000000" pitchFamily="50" charset="-127"/>
+              <a:ea typeface="Noto Sans KR Light" panose="020B0200000000000000" pitchFamily="50" charset="-127"/>
+            </a:endParaRPr>
+          </a:p>
+          <a:p>
+            <a:pPr>
+              <a:lnSpc>
+                <a:spcPct val="110000"/>
+              </a:lnSpc>
+            </a:pPr>
+            <a:endParaRPr lang="en-US" altLang="ko-KR" sz="1050" b="1" dirty="0">
+              <a:latin typeface="Noto Sans KR Light" panose="020B0200000000000000" pitchFamily="50" charset="-127"/>
+              <a:ea typeface="Noto Sans KR Light" panose="020B0200000000000000" pitchFamily="50" charset="-127"/>
+            </a:endParaRPr>
           </a:p>
           <a:p>
             <a:pPr marL="914400" lvl="1" indent="-457200">
               <a:lnSpc>
-                <a:spcPct val="150000"/>
+                <a:spcPct val="110000"/>
               </a:lnSpc>
               <a:buFont typeface="Wingdings" panose="05000000000000000000" pitchFamily="2" charset="2"/>
               <a:buChar char="§"/>
             </a:pPr>
             <a:r>
-              <a:rPr lang="ko-KR" altLang="en-US" sz="3600" b="1" dirty="0"/>
+              <a:rPr lang="ko-KR" altLang="en-US" sz="3600" b="1" dirty="0">
+                <a:latin typeface="Noto Sans KR Black" panose="020B0200000000000000" pitchFamily="50" charset="-127"/>
+                <a:ea typeface="Noto Sans KR Black" panose="020B0200000000000000" pitchFamily="50" charset="-127"/>
+              </a:rPr>
               <a:t>기술 장벽 극복 사례 연구</a:t>
             </a:r>
-            <a:endParaRPr lang="en-US" altLang="ko-KR" sz="3600" b="1" dirty="0"/>
-          </a:p>
-          <a:p>
-            <a:pPr lvl="1"/>
-            <a:r>
-              <a:rPr lang="ko-KR" altLang="en-US" sz="3200" dirty="0"/>
+            <a:endParaRPr lang="en-US" altLang="ko-KR" sz="3600" b="1" dirty="0">
+              <a:latin typeface="Noto Sans KR Black" panose="020B0200000000000000" pitchFamily="50" charset="-127"/>
+              <a:ea typeface="Noto Sans KR Black" panose="020B0200000000000000" pitchFamily="50" charset="-127"/>
+            </a:endParaRPr>
+          </a:p>
+          <a:p>
+            <a:pPr lvl="1">
+              <a:lnSpc>
+                <a:spcPct val="110000"/>
+              </a:lnSpc>
+            </a:pPr>
+            <a:r>
+              <a:rPr lang="ko-KR" altLang="en-US" sz="3200" dirty="0">
+                <a:latin typeface="Noto Sans KR Light" panose="020B0200000000000000" pitchFamily="50" charset="-127"/>
+                <a:ea typeface="Noto Sans KR Light" panose="020B0200000000000000" pitchFamily="50" charset="-127"/>
+              </a:rPr>
               <a:t>개발자의 기존 숙련도만으로는 장시간이 소요되었을 작업을 </a:t>
             </a:r>
             <a:r>
-              <a:rPr lang="en-US" altLang="ko-KR" sz="3200" dirty="0"/>
+              <a:rPr lang="en-US" altLang="ko-KR" sz="3200" dirty="0">
+                <a:latin typeface="Noto Sans KR Light" panose="020B0200000000000000" pitchFamily="50" charset="-127"/>
+                <a:ea typeface="Noto Sans KR Light" panose="020B0200000000000000" pitchFamily="50" charset="-127"/>
+              </a:rPr>
               <a:t>LLM</a:t>
             </a:r>
             <a:r>
-              <a:rPr lang="ko-KR" altLang="en-US" sz="3200" dirty="0"/>
+              <a:rPr lang="ko-KR" altLang="en-US" sz="3200" dirty="0">
+                <a:latin typeface="Noto Sans KR Light" panose="020B0200000000000000" pitchFamily="50" charset="-127"/>
+                <a:ea typeface="Noto Sans KR Light" panose="020B0200000000000000" pitchFamily="50" charset="-127"/>
+              </a:rPr>
               <a:t>의 아키텍처 가이드를 통해 해결한 사례를 분석한다</a:t>
             </a:r>
             <a:r>
-              <a:rPr lang="en-US" altLang="ko-KR" sz="3200" dirty="0"/>
+              <a:rPr lang="en-US" altLang="ko-KR" sz="3200" dirty="0">
+                <a:latin typeface="Noto Sans KR Light" panose="020B0200000000000000" pitchFamily="50" charset="-127"/>
+                <a:ea typeface="Noto Sans KR Light" panose="020B0200000000000000" pitchFamily="50" charset="-127"/>
+              </a:rPr>
               <a:t>.</a:t>
             </a:r>
           </a:p>
           <a:p>
             <a:pPr marL="1485900" lvl="2" indent="-571500">
+              <a:lnSpc>
+                <a:spcPct val="110000"/>
+              </a:lnSpc>
               <a:buFontTx/>
               <a:buChar char="-"/>
             </a:pPr>
-            <a:endParaRPr lang="ko-KR" altLang="en-US" sz="1050" dirty="0"/>
+            <a:endParaRPr lang="ko-KR" altLang="en-US" sz="1050" dirty="0">
+              <a:latin typeface="Noto Sans KR Light" panose="020B0200000000000000" pitchFamily="50" charset="-127"/>
+              <a:ea typeface="Noto Sans KR Light" panose="020B0200000000000000" pitchFamily="50" charset="-127"/>
+            </a:endParaRPr>
           </a:p>
           <a:p>
             <a:pPr marL="914400" lvl="1" indent="-457200">
               <a:lnSpc>
-                <a:spcPct val="150000"/>
+                <a:spcPct val="110000"/>
               </a:lnSpc>
               <a:buFont typeface="Wingdings" panose="05000000000000000000" pitchFamily="2" charset="2"/>
               <a:buChar char="§"/>
             </a:pPr>
             <a:r>
-              <a:rPr lang="ko-KR" altLang="en-US" sz="3600" b="1" dirty="0"/>
+              <a:rPr lang="ko-KR" altLang="en-US" sz="3600" b="1" dirty="0">
+                <a:latin typeface="Noto Sans KR Black" panose="020B0200000000000000" pitchFamily="50" charset="-127"/>
+                <a:ea typeface="Noto Sans KR Black" panose="020B0200000000000000" pitchFamily="50" charset="-127"/>
+              </a:rPr>
               <a:t>실제 사례 기반 분석</a:t>
             </a:r>
-            <a:endParaRPr lang="en-US" altLang="ko-KR" sz="3600" b="1" dirty="0"/>
-          </a:p>
-          <a:p>
-            <a:pPr lvl="1"/>
-            <a:r>
-              <a:rPr lang="ko-KR" altLang="en-US" sz="3200" dirty="0"/>
+            <a:endParaRPr lang="en-US" altLang="ko-KR" sz="3600" b="1" dirty="0">
+              <a:latin typeface="Noto Sans KR Black" panose="020B0200000000000000" pitchFamily="50" charset="-127"/>
+              <a:ea typeface="Noto Sans KR Black" panose="020B0200000000000000" pitchFamily="50" charset="-127"/>
+            </a:endParaRPr>
+          </a:p>
+          <a:p>
+            <a:pPr lvl="1">
+              <a:lnSpc>
+                <a:spcPct val="110000"/>
+              </a:lnSpc>
+            </a:pPr>
+            <a:r>
+              <a:rPr lang="ko-KR" altLang="en-US" sz="3200" dirty="0">
+                <a:latin typeface="Noto Sans KR Light" panose="020B0200000000000000" pitchFamily="50" charset="-127"/>
+                <a:ea typeface="Noto Sans KR Light" panose="020B0200000000000000" pitchFamily="50" charset="-127"/>
+              </a:rPr>
               <a:t>본 연구팀의 졸업작품 </a:t>
             </a:r>
             <a:r>
-              <a:rPr lang="en-US" altLang="ko-KR" sz="3200" dirty="0"/>
+              <a:rPr lang="en-US" altLang="ko-KR" sz="3200" dirty="0">
+                <a:latin typeface="Noto Sans KR Light" panose="020B0200000000000000" pitchFamily="50" charset="-127"/>
+                <a:ea typeface="Noto Sans KR Light" panose="020B0200000000000000" pitchFamily="50" charset="-127"/>
+              </a:rPr>
               <a:t>'Containment Cleanup Detail' </a:t>
             </a:r>
             <a:r>
-              <a:rPr lang="ko-KR" altLang="en-US" sz="3200" dirty="0"/>
+              <a:rPr lang="ko-KR" altLang="en-US" sz="3200" dirty="0">
+                <a:latin typeface="Noto Sans KR Light" panose="020B0200000000000000" pitchFamily="50" charset="-127"/>
+                <a:ea typeface="Noto Sans KR Light" panose="020B0200000000000000" pitchFamily="50" charset="-127"/>
+              </a:rPr>
               <a:t>개발 과정 중 발생한 구체적인 에피소드 사례를 들어 </a:t>
             </a:r>
             <a:r>
-              <a:rPr lang="en-US" altLang="ko-KR" sz="3200" dirty="0"/>
+              <a:rPr lang="en-US" altLang="ko-KR" sz="3200" dirty="0">
+                <a:latin typeface="Noto Sans KR Light" panose="020B0200000000000000" pitchFamily="50" charset="-127"/>
+                <a:ea typeface="Noto Sans KR Light" panose="020B0200000000000000" pitchFamily="50" charset="-127"/>
+              </a:rPr>
               <a:t>LLM</a:t>
             </a:r>
             <a:r>
-              <a:rPr lang="ko-KR" altLang="en-US" sz="3200" dirty="0"/>
+              <a:rPr lang="ko-KR" altLang="en-US" sz="3200" dirty="0">
+                <a:latin typeface="Noto Sans KR Light" panose="020B0200000000000000" pitchFamily="50" charset="-127"/>
+                <a:ea typeface="Noto Sans KR Light" panose="020B0200000000000000" pitchFamily="50" charset="-127"/>
+              </a:rPr>
               <a:t>이 미친 영향을 서술한다</a:t>
             </a:r>
             <a:r>
-              <a:rPr lang="en-US" altLang="ko-KR" sz="3200" dirty="0"/>
+              <a:rPr lang="en-US" altLang="ko-KR" sz="3200" dirty="0">
+                <a:latin typeface="Noto Sans KR Light" panose="020B0200000000000000" pitchFamily="50" charset="-127"/>
+                <a:ea typeface="Noto Sans KR Light" panose="020B0200000000000000" pitchFamily="50" charset="-127"/>
+              </a:rPr>
               <a:t>.</a:t>
             </a:r>
-            <a:endParaRPr lang="ko-KR" altLang="en-US" sz="3200" dirty="0"/>
+            <a:endParaRPr lang="ko-KR" altLang="en-US" sz="3200" dirty="0">
+              <a:latin typeface="Noto Sans KR Light" panose="020B0200000000000000" pitchFamily="50" charset="-127"/>
+              <a:ea typeface="Noto Sans KR Light" panose="020B0200000000000000" pitchFamily="50" charset="-127"/>
+            </a:endParaRPr>
           </a:p>
         </p:txBody>
       </p:sp>
@@ -5705,7 +5918,7 @@
         </p:nvSpPr>
         <p:spPr>
           <a:xfrm>
-            <a:off x="400045" y="26854370"/>
+            <a:off x="400045" y="25878266"/>
             <a:ext cx="15380724" cy="1353835"/>
           </a:xfrm>
           <a:prstGeom prst="rect">
@@ -5754,7 +5967,7 @@
         </p:nvSpPr>
         <p:spPr>
           <a:xfrm>
-            <a:off x="747847" y="27115788"/>
+            <a:off x="747851" y="26139684"/>
             <a:ext cx="5595801" cy="830997"/>
           </a:xfrm>
           <a:prstGeom prst="rect">
@@ -5782,6 +5995,8 @@
                     </a:srgbClr>
                   </a:outerShdw>
                 </a:effectLst>
+                <a:latin typeface="Noto Sans KR Black" panose="020B0200000000000000" pitchFamily="50" charset="-127"/>
+                <a:ea typeface="Noto Sans KR Black" panose="020B0200000000000000" pitchFamily="50" charset="-127"/>
               </a:rPr>
               <a:t>연구 내용 및 사례</a:t>
             </a:r>
@@ -5802,7 +6017,7 @@
         </p:nvSpPr>
         <p:spPr>
           <a:xfrm>
-            <a:off x="400045" y="28534697"/>
+            <a:off x="400045" y="27558593"/>
             <a:ext cx="900000" cy="900000"/>
           </a:xfrm>
           <a:prstGeom prst="ellipse">
@@ -5851,7 +6066,7 @@
         </p:nvSpPr>
         <p:spPr>
           <a:xfrm>
-            <a:off x="449082" y="28630754"/>
+            <a:off x="449082" y="27654650"/>
             <a:ext cx="801925" cy="707886"/>
           </a:xfrm>
           <a:prstGeom prst="rect">
@@ -5914,8 +6129,8 @@
         </p:nvSpPr>
         <p:spPr>
           <a:xfrm>
-            <a:off x="1542882" y="28630754"/>
-            <a:ext cx="12564821" cy="707886"/>
+            <a:off x="1542882" y="27654650"/>
+            <a:ext cx="13049418" cy="707886"/>
           </a:xfrm>
           <a:prstGeom prst="rect">
             <a:avLst/>
@@ -5935,13 +6150,8 @@
                     <a:lumMod val="50000"/>
                   </a:schemeClr>
                 </a:solidFill>
-                <a:effectLst>
-                  <a:outerShdw blurRad="38100" dist="38100" dir="2700000" algn="tl">
-                    <a:srgbClr val="000000">
-                      <a:alpha val="43137"/>
-                    </a:srgbClr>
-                  </a:outerShdw>
-                </a:effectLst>
+                <a:latin typeface="Noto Sans KR Black" panose="020B0200000000000000" pitchFamily="50" charset="-127"/>
+                <a:ea typeface="Noto Sans KR Black" panose="020B0200000000000000" pitchFamily="50" charset="-127"/>
               </a:rPr>
               <a:t>Chaos Destruction </a:t>
             </a:r>
@@ -5952,13 +6162,8 @@
                     <a:lumMod val="50000"/>
                   </a:schemeClr>
                 </a:solidFill>
-                <a:effectLst>
-                  <a:outerShdw blurRad="38100" dist="38100" dir="2700000" algn="tl">
-                    <a:srgbClr val="000000">
-                      <a:alpha val="43137"/>
-                    </a:srgbClr>
-                  </a:outerShdw>
-                </a:effectLst>
+                <a:latin typeface="Noto Sans KR Black" panose="020B0200000000000000" pitchFamily="50" charset="-127"/>
+                <a:ea typeface="Noto Sans KR Black" panose="020B0200000000000000" pitchFamily="50" charset="-127"/>
               </a:rPr>
               <a:t>기반 캐릭터 파편화</a:t>
             </a:r>
@@ -5969,13 +6174,8 @@
                     <a:lumMod val="50000"/>
                   </a:schemeClr>
                 </a:solidFill>
-                <a:effectLst>
-                  <a:outerShdw blurRad="38100" dist="38100" dir="2700000" algn="tl">
-                    <a:srgbClr val="000000">
-                      <a:alpha val="43137"/>
-                    </a:srgbClr>
-                  </a:outerShdw>
-                </a:effectLst>
+                <a:latin typeface="Noto Sans KR Black" panose="020B0200000000000000" pitchFamily="50" charset="-127"/>
+                <a:ea typeface="Noto Sans KR Black" panose="020B0200000000000000" pitchFamily="50" charset="-127"/>
               </a:rPr>
               <a:t> </a:t>
             </a:r>
@@ -5986,13 +6186,8 @@
                     <a:lumMod val="50000"/>
                   </a:schemeClr>
                 </a:solidFill>
-                <a:effectLst>
-                  <a:outerShdw blurRad="38100" dist="38100" dir="2700000" algn="tl">
-                    <a:srgbClr val="000000">
-                      <a:alpha val="43137"/>
-                    </a:srgbClr>
-                  </a:outerShdw>
-                </a:effectLst>
+                <a:latin typeface="Noto Sans KR Black" panose="020B0200000000000000" pitchFamily="50" charset="-127"/>
+                <a:ea typeface="Noto Sans KR Black" panose="020B0200000000000000" pitchFamily="50" charset="-127"/>
               </a:rPr>
               <a:t>및 </a:t>
             </a:r>
@@ -6003,13 +6198,8 @@
                     <a:lumMod val="50000"/>
                   </a:schemeClr>
                 </a:solidFill>
-                <a:effectLst>
-                  <a:outerShdw blurRad="38100" dist="38100" dir="2700000" algn="tl">
-                    <a:srgbClr val="000000">
-                      <a:alpha val="43137"/>
-                    </a:srgbClr>
-                  </a:outerShdw>
-                </a:effectLst>
+                <a:latin typeface="Noto Sans KR Black" panose="020B0200000000000000" pitchFamily="50" charset="-127"/>
+                <a:ea typeface="Noto Sans KR Black" panose="020B0200000000000000" pitchFamily="50" charset="-127"/>
               </a:rPr>
               <a:t>액터화</a:t>
             </a:r>
@@ -6020,13 +6210,8 @@
                     <a:lumMod val="50000"/>
                   </a:schemeClr>
                 </a:solidFill>
-                <a:effectLst>
-                  <a:outerShdw blurRad="38100" dist="38100" dir="2700000" algn="tl">
-                    <a:srgbClr val="000000">
-                      <a:alpha val="43137"/>
-                    </a:srgbClr>
-                  </a:outerShdw>
-                </a:effectLst>
+                <a:latin typeface="Noto Sans KR Black" panose="020B0200000000000000" pitchFamily="50" charset="-127"/>
+                <a:ea typeface="Noto Sans KR Black" panose="020B0200000000000000" pitchFamily="50" charset="-127"/>
               </a:rPr>
               <a:t> 시스템</a:t>
             </a:r>
@@ -6036,13 +6221,8 @@
                   <a:lumMod val="50000"/>
                 </a:schemeClr>
               </a:solidFill>
-              <a:effectLst>
-                <a:outerShdw blurRad="38100" dist="38100" dir="2700000" algn="tl">
-                  <a:srgbClr val="000000">
-                    <a:alpha val="43137"/>
-                  </a:srgbClr>
-                </a:outerShdw>
-              </a:effectLst>
+              <a:latin typeface="Noto Sans KR Black" panose="020B0200000000000000" pitchFamily="50" charset="-127"/>
+              <a:ea typeface="Noto Sans KR Black" panose="020B0200000000000000" pitchFamily="50" charset="-127"/>
             </a:endParaRPr>
           </a:p>
         </p:txBody>
@@ -6061,8 +6241,8 @@
         </p:nvSpPr>
         <p:spPr>
           <a:xfrm>
-            <a:off x="400046" y="29683361"/>
-            <a:ext cx="15380722" cy="12749644"/>
+            <a:off x="400046" y="28707257"/>
+            <a:ext cx="15380722" cy="14003064"/>
           </a:xfrm>
           <a:prstGeom prst="rect">
             <a:avLst/>
@@ -6075,409 +6255,767 @@
           </a:bodyPr>
           <a:lstStyle/>
           <a:p>
-            <a:r>
-              <a:rPr lang="ko-KR" altLang="en-US" sz="3200" dirty="0"/>
+            <a:pPr>
+              <a:lnSpc>
+                <a:spcPct val="110000"/>
+              </a:lnSpc>
+            </a:pPr>
+            <a:r>
+              <a:rPr lang="ko-KR" altLang="en-US" sz="3200" dirty="0">
+                <a:latin typeface="Noto Sans KR Light" panose="020B0200000000000000" pitchFamily="50" charset="-127"/>
+                <a:ea typeface="Noto Sans KR Light" panose="020B0200000000000000" pitchFamily="50" charset="-127"/>
+              </a:rPr>
               <a:t>본 프로젝트는 청소 및 수거</a:t>
             </a:r>
             <a:r>
-              <a:rPr lang="en-US" altLang="ko-KR" sz="3200" dirty="0"/>
+              <a:rPr lang="en-US" altLang="ko-KR" sz="3200" dirty="0">
+                <a:latin typeface="Noto Sans KR Light" panose="020B0200000000000000" pitchFamily="50" charset="-127"/>
+                <a:ea typeface="Noto Sans KR Light" panose="020B0200000000000000" pitchFamily="50" charset="-127"/>
+              </a:rPr>
               <a:t>, </a:t>
             </a:r>
             <a:r>
-              <a:rPr lang="ko-KR" altLang="en-US" sz="3200" dirty="0"/>
+              <a:rPr lang="ko-KR" altLang="en-US" sz="3200" dirty="0">
+                <a:latin typeface="Noto Sans KR Light" panose="020B0200000000000000" pitchFamily="50" charset="-127"/>
+                <a:ea typeface="Noto Sans KR Light" panose="020B0200000000000000" pitchFamily="50" charset="-127"/>
+              </a:rPr>
               <a:t>그리고 이를 방해하는 적대적 개체</a:t>
             </a:r>
             <a:r>
-              <a:rPr lang="en-US" altLang="ko-KR" sz="3200" dirty="0"/>
+              <a:rPr lang="en-US" altLang="ko-KR" sz="3200" dirty="0">
+                <a:latin typeface="Noto Sans KR Light" panose="020B0200000000000000" pitchFamily="50" charset="-127"/>
+                <a:ea typeface="Noto Sans KR Light" panose="020B0200000000000000" pitchFamily="50" charset="-127"/>
+              </a:rPr>
               <a:t>(SCP)</a:t>
             </a:r>
             <a:r>
-              <a:rPr lang="ko-KR" altLang="en-US" sz="3200" dirty="0"/>
+              <a:rPr lang="ko-KR" altLang="en-US" sz="3200" dirty="0">
+                <a:latin typeface="Noto Sans KR Light" panose="020B0200000000000000" pitchFamily="50" charset="-127"/>
+                <a:ea typeface="Noto Sans KR Light" panose="020B0200000000000000" pitchFamily="50" charset="-127"/>
+              </a:rPr>
               <a:t>와의 상호작용이 핵심 게임성</a:t>
             </a:r>
             <a:r>
-              <a:rPr lang="en-US" altLang="ko-KR" sz="3200" dirty="0"/>
+              <a:rPr lang="en-US" altLang="ko-KR" sz="3200" dirty="0">
+                <a:latin typeface="Noto Sans KR Light" panose="020B0200000000000000" pitchFamily="50" charset="-127"/>
+                <a:ea typeface="Noto Sans KR Light" panose="020B0200000000000000" pitchFamily="50" charset="-127"/>
+              </a:rPr>
               <a:t>(Gameplay)</a:t>
             </a:r>
             <a:r>
-              <a:rPr lang="ko-KR" altLang="en-US" sz="3200" dirty="0"/>
+              <a:rPr lang="ko-KR" altLang="en-US" sz="3200" dirty="0">
+                <a:latin typeface="Noto Sans KR Light" panose="020B0200000000000000" pitchFamily="50" charset="-127"/>
+                <a:ea typeface="Noto Sans KR Light" panose="020B0200000000000000" pitchFamily="50" charset="-127"/>
+              </a:rPr>
               <a:t>을 구성하기에 </a:t>
             </a:r>
             <a:r>
-              <a:rPr lang="ko-KR" altLang="en-US" sz="3200" dirty="0" err="1"/>
+              <a:rPr lang="ko-KR" altLang="en-US" sz="3200" dirty="0" err="1">
+                <a:latin typeface="Noto Sans KR Light" panose="020B0200000000000000" pitchFamily="50" charset="-127"/>
+                <a:ea typeface="Noto Sans KR Light" panose="020B0200000000000000" pitchFamily="50" charset="-127"/>
+              </a:rPr>
               <a:t>언리얼</a:t>
             </a:r>
             <a:r>
-              <a:rPr lang="ko-KR" altLang="en-US" sz="3200" dirty="0"/>
+              <a:rPr lang="ko-KR" altLang="en-US" sz="3200" dirty="0">
+                <a:latin typeface="Noto Sans KR Light" panose="020B0200000000000000" pitchFamily="50" charset="-127"/>
+                <a:ea typeface="Noto Sans KR Light" panose="020B0200000000000000" pitchFamily="50" charset="-127"/>
+              </a:rPr>
               <a:t> 엔진의 </a:t>
             </a:r>
             <a:r>
-              <a:rPr lang="en-US" altLang="ko-KR" sz="3200" dirty="0"/>
+              <a:rPr lang="en-US" altLang="ko-KR" sz="3200" dirty="0">
+                <a:latin typeface="Noto Sans KR Light" panose="020B0200000000000000" pitchFamily="50" charset="-127"/>
+                <a:ea typeface="Noto Sans KR Light" panose="020B0200000000000000" pitchFamily="50" charset="-127"/>
+              </a:rPr>
               <a:t>Chaos Destruction </a:t>
             </a:r>
             <a:r>
-              <a:rPr lang="ko-KR" altLang="en-US" sz="3200" dirty="0"/>
+              <a:rPr lang="ko-KR" altLang="en-US" sz="3200" dirty="0">
+                <a:latin typeface="Noto Sans KR Light" panose="020B0200000000000000" pitchFamily="50" charset="-127"/>
+                <a:ea typeface="Noto Sans KR Light" panose="020B0200000000000000" pitchFamily="50" charset="-127"/>
+              </a:rPr>
               <a:t>시스템을 활용하여 캐릭터 </a:t>
             </a:r>
             <a:r>
-              <a:rPr lang="ko-KR" altLang="en-US" sz="3200" dirty="0" err="1"/>
+              <a:rPr lang="ko-KR" altLang="en-US" sz="3200" dirty="0" err="1">
+                <a:latin typeface="Noto Sans KR Light" panose="020B0200000000000000" pitchFamily="50" charset="-127"/>
+                <a:ea typeface="Noto Sans KR Light" panose="020B0200000000000000" pitchFamily="50" charset="-127"/>
+              </a:rPr>
               <a:t>메쉬를</a:t>
             </a:r>
             <a:r>
-              <a:rPr lang="ko-KR" altLang="en-US" sz="3200" dirty="0"/>
+              <a:rPr lang="ko-KR" altLang="en-US" sz="3200" dirty="0">
+                <a:latin typeface="Noto Sans KR Light" panose="020B0200000000000000" pitchFamily="50" charset="-127"/>
+                <a:ea typeface="Noto Sans KR Light" panose="020B0200000000000000" pitchFamily="50" charset="-127"/>
+              </a:rPr>
               <a:t> 파편화하고</a:t>
             </a:r>
             <a:r>
-              <a:rPr lang="en-US" altLang="ko-KR" sz="3200" dirty="0"/>
+              <a:rPr lang="en-US" altLang="ko-KR" sz="3200" dirty="0">
+                <a:latin typeface="Noto Sans KR Light" panose="020B0200000000000000" pitchFamily="50" charset="-127"/>
+                <a:ea typeface="Noto Sans KR Light" panose="020B0200000000000000" pitchFamily="50" charset="-127"/>
+              </a:rPr>
               <a:t>, </a:t>
             </a:r>
             <a:r>
-              <a:rPr lang="ko-KR" altLang="en-US" sz="3200" dirty="0"/>
+              <a:rPr lang="ko-KR" altLang="en-US" sz="3200" dirty="0">
+                <a:latin typeface="Noto Sans KR Light" panose="020B0200000000000000" pitchFamily="50" charset="-127"/>
+                <a:ea typeface="Noto Sans KR Light" panose="020B0200000000000000" pitchFamily="50" charset="-127"/>
+              </a:rPr>
               <a:t>생성된 각 파편에 개별적인 물리 속성을 부여하여 상호작용 가능한 독립적 </a:t>
             </a:r>
             <a:r>
-              <a:rPr lang="ko-KR" altLang="en-US" sz="3200" dirty="0" err="1"/>
+              <a:rPr lang="ko-KR" altLang="en-US" sz="3200" dirty="0" err="1">
+                <a:latin typeface="Noto Sans KR Light" panose="020B0200000000000000" pitchFamily="50" charset="-127"/>
+                <a:ea typeface="Noto Sans KR Light" panose="020B0200000000000000" pitchFamily="50" charset="-127"/>
+              </a:rPr>
               <a:t>액터</a:t>
             </a:r>
             <a:r>
-              <a:rPr lang="en-US" altLang="ko-KR" sz="3200" dirty="0"/>
+              <a:rPr lang="en-US" altLang="ko-KR" sz="3200" dirty="0">
+                <a:latin typeface="Noto Sans KR Light" panose="020B0200000000000000" pitchFamily="50" charset="-127"/>
+                <a:ea typeface="Noto Sans KR Light" panose="020B0200000000000000" pitchFamily="50" charset="-127"/>
+              </a:rPr>
               <a:t>(Actor)</a:t>
             </a:r>
             <a:r>
-              <a:rPr lang="ko-KR" altLang="en-US" sz="3200" dirty="0"/>
+              <a:rPr lang="ko-KR" altLang="en-US" sz="3200" dirty="0">
+                <a:latin typeface="Noto Sans KR Light" panose="020B0200000000000000" pitchFamily="50" charset="-127"/>
+                <a:ea typeface="Noto Sans KR Light" panose="020B0200000000000000" pitchFamily="50" charset="-127"/>
+              </a:rPr>
               <a:t>로 변환하는 것을 목표로 하였다</a:t>
             </a:r>
             <a:r>
-              <a:rPr lang="en-US" altLang="ko-KR" sz="3200" dirty="0"/>
+              <a:rPr lang="en-US" altLang="ko-KR" sz="3200" dirty="0">
+                <a:latin typeface="Noto Sans KR Light" panose="020B0200000000000000" pitchFamily="50" charset="-127"/>
+                <a:ea typeface="Noto Sans KR Light" panose="020B0200000000000000" pitchFamily="50" charset="-127"/>
+              </a:rPr>
               <a:t>.</a:t>
             </a:r>
-            <a:endParaRPr lang="ko-KR" altLang="en-US" sz="3200" dirty="0"/>
-          </a:p>
-          <a:p>
-            <a:r>
-              <a:rPr lang="ko-KR" altLang="en-US" sz="3200" dirty="0"/>
+            <a:endParaRPr lang="ko-KR" altLang="en-US" sz="3200" dirty="0">
+              <a:latin typeface="Noto Sans KR Light" panose="020B0200000000000000" pitchFamily="50" charset="-127"/>
+              <a:ea typeface="Noto Sans KR Light" panose="020B0200000000000000" pitchFamily="50" charset="-127"/>
+            </a:endParaRPr>
+          </a:p>
+          <a:p>
+            <a:pPr>
+              <a:lnSpc>
+                <a:spcPct val="110000"/>
+              </a:lnSpc>
+            </a:pPr>
+            <a:r>
+              <a:rPr lang="ko-KR" altLang="en-US" sz="3200" dirty="0">
+                <a:latin typeface="Noto Sans KR Light" panose="020B0200000000000000" pitchFamily="50" charset="-127"/>
+                <a:ea typeface="Noto Sans KR Light" panose="020B0200000000000000" pitchFamily="50" charset="-127"/>
+              </a:rPr>
               <a:t> </a:t>
             </a:r>
             <a:r>
-              <a:rPr lang="en-US" altLang="ko-KR" sz="3200" dirty="0"/>
+              <a:rPr lang="en-US" altLang="ko-KR" sz="3200" dirty="0">
+                <a:latin typeface="Noto Sans KR Light" panose="020B0200000000000000" pitchFamily="50" charset="-127"/>
+                <a:ea typeface="Noto Sans KR Light" panose="020B0200000000000000" pitchFamily="50" charset="-127"/>
+              </a:rPr>
               <a:t>	</a:t>
             </a:r>
           </a:p>
           <a:p>
-            <a:r>
-              <a:rPr lang="en-US" altLang="ko-KR" sz="3600" b="1" dirty="0"/>
+            <a:pPr>
+              <a:lnSpc>
+                <a:spcPct val="110000"/>
+              </a:lnSpc>
+            </a:pPr>
+            <a:r>
+              <a:rPr lang="en-US" altLang="ko-KR" sz="3600" b="1" dirty="0">
+                <a:latin typeface="Noto Sans KR Black" panose="020B0200000000000000" pitchFamily="50" charset="-127"/>
+                <a:ea typeface="Noto Sans KR Black" panose="020B0200000000000000" pitchFamily="50" charset="-127"/>
+              </a:rPr>
               <a:t>1</a:t>
             </a:r>
             <a:r>
-              <a:rPr lang="ko-KR" altLang="en-US" sz="3600" b="1" dirty="0"/>
+              <a:rPr lang="ko-KR" altLang="en-US" sz="3600" b="1" dirty="0">
+                <a:latin typeface="Noto Sans KR Black" panose="020B0200000000000000" pitchFamily="50" charset="-127"/>
+                <a:ea typeface="Noto Sans KR Black" panose="020B0200000000000000" pitchFamily="50" charset="-127"/>
+              </a:rPr>
               <a:t>단계</a:t>
             </a:r>
             <a:r>
-              <a:rPr lang="en-US" altLang="ko-KR" sz="3600" b="1" dirty="0"/>
+              <a:rPr lang="en-US" altLang="ko-KR" sz="3600" b="1" dirty="0">
+                <a:latin typeface="Noto Sans KR Black" panose="020B0200000000000000" pitchFamily="50" charset="-127"/>
+                <a:ea typeface="Noto Sans KR Black" panose="020B0200000000000000" pitchFamily="50" charset="-127"/>
+              </a:rPr>
               <a:t>: Chaos Geometry Collection </a:t>
             </a:r>
             <a:r>
-              <a:rPr lang="ko-KR" altLang="en-US" sz="3600" b="1" dirty="0"/>
+              <a:rPr lang="ko-KR" altLang="en-US" sz="3600" b="1" dirty="0">
+                <a:latin typeface="Noto Sans KR Black" panose="020B0200000000000000" pitchFamily="50" charset="-127"/>
+                <a:ea typeface="Noto Sans KR Black" panose="020B0200000000000000" pitchFamily="50" charset="-127"/>
+              </a:rPr>
               <a:t>생성</a:t>
             </a:r>
-            <a:endParaRPr lang="ko-KR" altLang="en-US" sz="3200" b="1" dirty="0"/>
-          </a:p>
-          <a:p>
-            <a:r>
-              <a:rPr lang="ko-KR" altLang="en-US" sz="3200" dirty="0"/>
+            <a:endParaRPr lang="ko-KR" altLang="en-US" sz="3200" b="1" dirty="0">
+              <a:latin typeface="Noto Sans KR Black" panose="020B0200000000000000" pitchFamily="50" charset="-127"/>
+              <a:ea typeface="Noto Sans KR Black" panose="020B0200000000000000" pitchFamily="50" charset="-127"/>
+            </a:endParaRPr>
+          </a:p>
+          <a:p>
+            <a:pPr>
+              <a:lnSpc>
+                <a:spcPct val="110000"/>
+              </a:lnSpc>
+            </a:pPr>
+            <a:r>
+              <a:rPr lang="ko-KR" altLang="en-US" sz="3200" dirty="0">
+                <a:latin typeface="Noto Sans KR Light" panose="020B0200000000000000" pitchFamily="50" charset="-127"/>
+                <a:ea typeface="Noto Sans KR Light" panose="020B0200000000000000" pitchFamily="50" charset="-127"/>
+              </a:rPr>
               <a:t>해당 단계에서는 </a:t>
             </a:r>
             <a:r>
-              <a:rPr lang="en-US" altLang="ko-KR" sz="3200" dirty="0"/>
+              <a:rPr lang="en-US" altLang="ko-KR" sz="3200" dirty="0">
+                <a:latin typeface="Noto Sans KR Light" panose="020B0200000000000000" pitchFamily="50" charset="-127"/>
+                <a:ea typeface="Noto Sans KR Light" panose="020B0200000000000000" pitchFamily="50" charset="-127"/>
+              </a:rPr>
               <a:t>LLM</a:t>
             </a:r>
             <a:r>
-              <a:rPr lang="ko-KR" altLang="en-US" sz="3200" dirty="0"/>
+              <a:rPr lang="ko-KR" altLang="en-US" sz="3200" dirty="0">
+                <a:latin typeface="Noto Sans KR Light" panose="020B0200000000000000" pitchFamily="50" charset="-127"/>
+                <a:ea typeface="Noto Sans KR Light" panose="020B0200000000000000" pitchFamily="50" charset="-127"/>
+              </a:rPr>
               <a:t>의 직접적인 활용보다는 개발자의 수동 작업 비중이 높았다</a:t>
             </a:r>
             <a:r>
-              <a:rPr lang="en-US" altLang="ko-KR" sz="3200" dirty="0"/>
+              <a:rPr lang="en-US" altLang="ko-KR" sz="3200" dirty="0">
+                <a:latin typeface="Noto Sans KR Light" panose="020B0200000000000000" pitchFamily="50" charset="-127"/>
+                <a:ea typeface="Noto Sans KR Light" panose="020B0200000000000000" pitchFamily="50" charset="-127"/>
+              </a:rPr>
               <a:t>. </a:t>
             </a:r>
             <a:r>
-              <a:rPr lang="ko-KR" altLang="en-US" sz="3200" dirty="0" err="1"/>
+              <a:rPr lang="ko-KR" altLang="en-US" sz="3200" dirty="0" err="1">
+                <a:latin typeface="Noto Sans KR Light" panose="020B0200000000000000" pitchFamily="50" charset="-127"/>
+                <a:ea typeface="Noto Sans KR Light" panose="020B0200000000000000" pitchFamily="50" charset="-127"/>
+              </a:rPr>
               <a:t>언리얼</a:t>
             </a:r>
             <a:r>
-              <a:rPr lang="ko-KR" altLang="en-US" sz="3200" dirty="0"/>
+              <a:rPr lang="ko-KR" altLang="en-US" sz="3200" dirty="0">
+                <a:latin typeface="Noto Sans KR Light" panose="020B0200000000000000" pitchFamily="50" charset="-127"/>
+                <a:ea typeface="Noto Sans KR Light" panose="020B0200000000000000" pitchFamily="50" charset="-127"/>
+              </a:rPr>
               <a:t> 엔진의 </a:t>
             </a:r>
             <a:r>
-              <a:rPr lang="en-US" altLang="ko-KR" sz="3200" dirty="0"/>
+              <a:rPr lang="en-US" altLang="ko-KR" sz="3200" dirty="0">
+                <a:latin typeface="Noto Sans KR Light" panose="020B0200000000000000" pitchFamily="50" charset="-127"/>
+                <a:ea typeface="Noto Sans KR Light" panose="020B0200000000000000" pitchFamily="50" charset="-127"/>
+              </a:rPr>
               <a:t>Fracture Mode</a:t>
             </a:r>
             <a:r>
-              <a:rPr lang="ko-KR" altLang="en-US" sz="3200" dirty="0"/>
+              <a:rPr lang="ko-KR" altLang="en-US" sz="3200" dirty="0">
+                <a:latin typeface="Noto Sans KR Light" panose="020B0200000000000000" pitchFamily="50" charset="-127"/>
+                <a:ea typeface="Noto Sans KR Light" panose="020B0200000000000000" pitchFamily="50" charset="-127"/>
+              </a:rPr>
               <a:t>를 통해 캐릭터 </a:t>
             </a:r>
             <a:r>
-              <a:rPr lang="ko-KR" altLang="en-US" sz="3200" dirty="0" err="1"/>
+              <a:rPr lang="ko-KR" altLang="en-US" sz="3200" dirty="0" err="1">
+                <a:latin typeface="Noto Sans KR Light" panose="020B0200000000000000" pitchFamily="50" charset="-127"/>
+                <a:ea typeface="Noto Sans KR Light" panose="020B0200000000000000" pitchFamily="50" charset="-127"/>
+              </a:rPr>
               <a:t>메쉬의</a:t>
             </a:r>
             <a:r>
-              <a:rPr lang="ko-KR" altLang="en-US" sz="3200" dirty="0"/>
+              <a:rPr lang="ko-KR" altLang="en-US" sz="3200" dirty="0">
+                <a:latin typeface="Noto Sans KR Light" panose="020B0200000000000000" pitchFamily="50" charset="-127"/>
+                <a:ea typeface="Noto Sans KR Light" panose="020B0200000000000000" pitchFamily="50" charset="-127"/>
+              </a:rPr>
               <a:t> 파편화 지점을 지정하고 하위 </a:t>
             </a:r>
             <a:r>
-              <a:rPr lang="ko-KR" altLang="en-US" sz="3200" dirty="0" err="1"/>
+              <a:rPr lang="ko-KR" altLang="en-US" sz="3200" dirty="0" err="1">
+                <a:latin typeface="Noto Sans KR Light" panose="020B0200000000000000" pitchFamily="50" charset="-127"/>
+                <a:ea typeface="Noto Sans KR Light" panose="020B0200000000000000" pitchFamily="50" charset="-127"/>
+              </a:rPr>
               <a:t>메쉬를</a:t>
             </a:r>
             <a:r>
-              <a:rPr lang="ko-KR" altLang="en-US" sz="3200" dirty="0"/>
+              <a:rPr lang="ko-KR" altLang="en-US" sz="3200" dirty="0">
+                <a:latin typeface="Noto Sans KR Light" panose="020B0200000000000000" pitchFamily="50" charset="-127"/>
+                <a:ea typeface="Noto Sans KR Light" panose="020B0200000000000000" pitchFamily="50" charset="-127"/>
+              </a:rPr>
               <a:t> 생성하는 과정은 시각적 판단이 수반되는 작업이기 때문이다</a:t>
             </a:r>
             <a:r>
-              <a:rPr lang="en-US" altLang="ko-KR" sz="3200" dirty="0"/>
+              <a:rPr lang="en-US" altLang="ko-KR" sz="3200" dirty="0">
+                <a:latin typeface="Noto Sans KR Light" panose="020B0200000000000000" pitchFamily="50" charset="-127"/>
+                <a:ea typeface="Noto Sans KR Light" panose="020B0200000000000000" pitchFamily="50" charset="-127"/>
+              </a:rPr>
               <a:t>. </a:t>
             </a:r>
             <a:r>
-              <a:rPr lang="ko-KR" altLang="en-US" sz="3200" dirty="0"/>
+              <a:rPr lang="ko-KR" altLang="en-US" sz="3200" dirty="0">
+                <a:latin typeface="Noto Sans KR Light" panose="020B0200000000000000" pitchFamily="50" charset="-127"/>
+                <a:ea typeface="Noto Sans KR Light" panose="020B0200000000000000" pitchFamily="50" charset="-127"/>
+              </a:rPr>
               <a:t>이 공정을 통해 물리 기반 파편으로 치환될 기초 데이터를 확보하였다</a:t>
             </a:r>
             <a:r>
-              <a:rPr lang="en-US" altLang="ko-KR" sz="3200" dirty="0"/>
+              <a:rPr lang="en-US" altLang="ko-KR" sz="3200" dirty="0">
+                <a:latin typeface="Noto Sans KR Light" panose="020B0200000000000000" pitchFamily="50" charset="-127"/>
+                <a:ea typeface="Noto Sans KR Light" panose="020B0200000000000000" pitchFamily="50" charset="-127"/>
+              </a:rPr>
               <a:t>.</a:t>
             </a:r>
-            <a:endParaRPr lang="ko-KR" altLang="en-US" sz="3200" dirty="0"/>
-          </a:p>
-          <a:p>
-            <a:r>
-              <a:rPr lang="ko-KR" altLang="en-US" sz="3200" dirty="0"/>
+            <a:endParaRPr lang="ko-KR" altLang="en-US" sz="3200" dirty="0">
+              <a:latin typeface="Noto Sans KR Light" panose="020B0200000000000000" pitchFamily="50" charset="-127"/>
+              <a:ea typeface="Noto Sans KR Light" panose="020B0200000000000000" pitchFamily="50" charset="-127"/>
+            </a:endParaRPr>
+          </a:p>
+          <a:p>
+            <a:pPr>
+              <a:lnSpc>
+                <a:spcPct val="110000"/>
+              </a:lnSpc>
+            </a:pPr>
+            <a:r>
+              <a:rPr lang="ko-KR" altLang="en-US" sz="3200" dirty="0">
+                <a:latin typeface="Noto Sans KR Light" panose="020B0200000000000000" pitchFamily="50" charset="-127"/>
+                <a:ea typeface="Noto Sans KR Light" panose="020B0200000000000000" pitchFamily="50" charset="-127"/>
+              </a:rPr>
               <a:t> </a:t>
             </a:r>
           </a:p>
           <a:p>
-            <a:r>
-              <a:rPr lang="en-US" altLang="ko-KR" sz="3600" b="1" dirty="0"/>
+            <a:pPr>
+              <a:lnSpc>
+                <a:spcPct val="110000"/>
+              </a:lnSpc>
+            </a:pPr>
+            <a:r>
+              <a:rPr lang="en-US" altLang="ko-KR" sz="3600" b="1" dirty="0">
+                <a:latin typeface="Noto Sans KR Black" panose="020B0200000000000000" pitchFamily="50" charset="-127"/>
+                <a:ea typeface="Noto Sans KR Black" panose="020B0200000000000000" pitchFamily="50" charset="-127"/>
+              </a:rPr>
               <a:t>2</a:t>
             </a:r>
             <a:r>
-              <a:rPr lang="ko-KR" altLang="en-US" sz="3600" b="1" dirty="0"/>
+              <a:rPr lang="ko-KR" altLang="en-US" sz="3600" b="1" dirty="0">
+                <a:latin typeface="Noto Sans KR Black" panose="020B0200000000000000" pitchFamily="50" charset="-127"/>
+                <a:ea typeface="Noto Sans KR Black" panose="020B0200000000000000" pitchFamily="50" charset="-127"/>
+              </a:rPr>
               <a:t>단계</a:t>
             </a:r>
             <a:r>
-              <a:rPr lang="en-US" altLang="ko-KR" sz="3600" b="1" dirty="0"/>
+              <a:rPr lang="en-US" altLang="ko-KR" sz="3600" b="1" dirty="0">
+                <a:latin typeface="Noto Sans KR Black" panose="020B0200000000000000" pitchFamily="50" charset="-127"/>
+                <a:ea typeface="Noto Sans KR Black" panose="020B0200000000000000" pitchFamily="50" charset="-127"/>
+              </a:rPr>
               <a:t>: </a:t>
             </a:r>
             <a:r>
-              <a:rPr lang="ko-KR" altLang="en-US" sz="3600" b="1" dirty="0"/>
+              <a:rPr lang="ko-KR" altLang="en-US" sz="3600" b="1" dirty="0">
+                <a:latin typeface="Noto Sans KR Black" panose="020B0200000000000000" pitchFamily="50" charset="-127"/>
+                <a:ea typeface="Noto Sans KR Black" panose="020B0200000000000000" pitchFamily="50" charset="-127"/>
+              </a:rPr>
               <a:t>파편의 </a:t>
             </a:r>
             <a:r>
-              <a:rPr lang="ko-KR" altLang="en-US" sz="3600" b="1" dirty="0" err="1"/>
+              <a:rPr lang="ko-KR" altLang="en-US" sz="3600" b="1" dirty="0" err="1">
+                <a:latin typeface="Noto Sans KR Black" panose="020B0200000000000000" pitchFamily="50" charset="-127"/>
+                <a:ea typeface="Noto Sans KR Black" panose="020B0200000000000000" pitchFamily="50" charset="-127"/>
+              </a:rPr>
               <a:t>액터화</a:t>
             </a:r>
             <a:r>
-              <a:rPr lang="ko-KR" altLang="en-US" sz="3600" b="1" dirty="0"/>
+              <a:rPr lang="ko-KR" altLang="en-US" sz="3600" b="1" dirty="0">
+                <a:latin typeface="Noto Sans KR Black" panose="020B0200000000000000" pitchFamily="50" charset="-127"/>
+                <a:ea typeface="Noto Sans KR Black" panose="020B0200000000000000" pitchFamily="50" charset="-127"/>
+              </a:rPr>
               <a:t> 및 물리 속성 부여</a:t>
             </a:r>
-            <a:endParaRPr lang="ko-KR" altLang="en-US" sz="3200" dirty="0"/>
-          </a:p>
-          <a:p>
-            <a:r>
-              <a:rPr lang="ko-KR" altLang="en-US" sz="3200" dirty="0"/>
+            <a:endParaRPr lang="ko-KR" altLang="en-US" sz="3200" dirty="0">
+              <a:latin typeface="Noto Sans KR Black" panose="020B0200000000000000" pitchFamily="50" charset="-127"/>
+              <a:ea typeface="Noto Sans KR Black" panose="020B0200000000000000" pitchFamily="50" charset="-127"/>
+            </a:endParaRPr>
+          </a:p>
+          <a:p>
+            <a:pPr>
+              <a:lnSpc>
+                <a:spcPct val="110000"/>
+              </a:lnSpc>
+            </a:pPr>
+            <a:r>
+              <a:rPr lang="ko-KR" altLang="en-US" sz="3200" dirty="0">
+                <a:latin typeface="Noto Sans KR Light" panose="020B0200000000000000" pitchFamily="50" charset="-127"/>
+                <a:ea typeface="Noto Sans KR Light" panose="020B0200000000000000" pitchFamily="50" charset="-127"/>
+              </a:rPr>
               <a:t>파편화된 </a:t>
             </a:r>
             <a:r>
-              <a:rPr lang="en-US" altLang="ko-KR" sz="3200" dirty="0"/>
+              <a:rPr lang="en-US" altLang="ko-KR" sz="3200" dirty="0">
+                <a:latin typeface="Noto Sans KR Light" panose="020B0200000000000000" pitchFamily="50" charset="-127"/>
+                <a:ea typeface="Noto Sans KR Light" panose="020B0200000000000000" pitchFamily="50" charset="-127"/>
+              </a:rPr>
               <a:t>Geometry Collection </a:t>
             </a:r>
             <a:r>
-              <a:rPr lang="ko-KR" altLang="en-US" sz="3200" dirty="0"/>
+              <a:rPr lang="ko-KR" altLang="en-US" sz="3200" dirty="0">
+                <a:latin typeface="Noto Sans KR Light" panose="020B0200000000000000" pitchFamily="50" charset="-127"/>
+                <a:ea typeface="Noto Sans KR Light" panose="020B0200000000000000" pitchFamily="50" charset="-127"/>
+              </a:rPr>
               <a:t>데이터 자체만으로는 독립적인 상호작용 및 세부 물리 효과 적용에 한계가 존재한다</a:t>
             </a:r>
             <a:r>
-              <a:rPr lang="en-US" altLang="ko-KR" sz="3200" dirty="0"/>
+              <a:rPr lang="en-US" altLang="ko-KR" sz="3200" dirty="0">
+                <a:latin typeface="Noto Sans KR Light" panose="020B0200000000000000" pitchFamily="50" charset="-127"/>
+                <a:ea typeface="Noto Sans KR Light" panose="020B0200000000000000" pitchFamily="50" charset="-127"/>
+              </a:rPr>
               <a:t>. </a:t>
             </a:r>
             <a:r>
-              <a:rPr lang="ko-KR" altLang="en-US" sz="3200" dirty="0"/>
+              <a:rPr lang="ko-KR" altLang="en-US" sz="3200" dirty="0">
+                <a:latin typeface="Noto Sans KR Light" panose="020B0200000000000000" pitchFamily="50" charset="-127"/>
+                <a:ea typeface="Noto Sans KR Light" panose="020B0200000000000000" pitchFamily="50" charset="-127"/>
+              </a:rPr>
               <a:t>따라서 상기 단계에서 생성된 파편 </a:t>
             </a:r>
             <a:r>
-              <a:rPr lang="ko-KR" altLang="en-US" sz="3200" dirty="0" err="1"/>
+              <a:rPr lang="ko-KR" altLang="en-US" sz="3200" dirty="0" err="1">
+                <a:latin typeface="Noto Sans KR Light" panose="020B0200000000000000" pitchFamily="50" charset="-127"/>
+                <a:ea typeface="Noto Sans KR Light" panose="020B0200000000000000" pitchFamily="50" charset="-127"/>
+              </a:rPr>
               <a:t>메쉬를</a:t>
             </a:r>
             <a:r>
-              <a:rPr lang="ko-KR" altLang="en-US" sz="3200" dirty="0"/>
+              <a:rPr lang="ko-KR" altLang="en-US" sz="3200" dirty="0">
+                <a:latin typeface="Noto Sans KR Light" panose="020B0200000000000000" pitchFamily="50" charset="-127"/>
+                <a:ea typeface="Noto Sans KR Light" panose="020B0200000000000000" pitchFamily="50" charset="-127"/>
+              </a:rPr>
               <a:t> 독립적인 </a:t>
             </a:r>
             <a:r>
-              <a:rPr lang="ko-KR" altLang="en-US" sz="3200" dirty="0" err="1"/>
+              <a:rPr lang="ko-KR" altLang="en-US" sz="3200" dirty="0" err="1">
+                <a:latin typeface="Noto Sans KR Light" panose="020B0200000000000000" pitchFamily="50" charset="-127"/>
+                <a:ea typeface="Noto Sans KR Light" panose="020B0200000000000000" pitchFamily="50" charset="-127"/>
+              </a:rPr>
               <a:t>액터로</a:t>
             </a:r>
             <a:r>
-              <a:rPr lang="ko-KR" altLang="en-US" sz="3200" dirty="0"/>
+              <a:rPr lang="ko-KR" altLang="en-US" sz="3200" dirty="0">
+                <a:latin typeface="Noto Sans KR Light" panose="020B0200000000000000" pitchFamily="50" charset="-127"/>
+                <a:ea typeface="Noto Sans KR Light" panose="020B0200000000000000" pitchFamily="50" charset="-127"/>
+              </a:rPr>
               <a:t> 전환하는 공정을 수행하였다</a:t>
             </a:r>
             <a:r>
-              <a:rPr lang="en-US" altLang="ko-KR" sz="3200" dirty="0"/>
+              <a:rPr lang="en-US" altLang="ko-KR" sz="3200" dirty="0">
+                <a:latin typeface="Noto Sans KR Light" panose="020B0200000000000000" pitchFamily="50" charset="-127"/>
+                <a:ea typeface="Noto Sans KR Light" panose="020B0200000000000000" pitchFamily="50" charset="-127"/>
+              </a:rPr>
               <a:t>. </a:t>
             </a:r>
             <a:r>
-              <a:rPr lang="ko-KR" altLang="en-US" sz="3200" dirty="0"/>
+              <a:rPr lang="ko-KR" altLang="en-US" sz="3200" dirty="0">
+                <a:latin typeface="Noto Sans KR Light" panose="020B0200000000000000" pitchFamily="50" charset="-127"/>
+                <a:ea typeface="Noto Sans KR Light" panose="020B0200000000000000" pitchFamily="50" charset="-127"/>
+              </a:rPr>
               <a:t>이 과정에서 </a:t>
             </a:r>
             <a:r>
-              <a:rPr lang="en-US" altLang="ko-KR" sz="3200" dirty="0"/>
+              <a:rPr lang="en-US" altLang="ko-KR" sz="3200" dirty="0">
+                <a:latin typeface="Noto Sans KR Light" panose="020B0200000000000000" pitchFamily="50" charset="-127"/>
+                <a:ea typeface="Noto Sans KR Light" panose="020B0200000000000000" pitchFamily="50" charset="-127"/>
+              </a:rPr>
               <a:t>LLM</a:t>
             </a:r>
             <a:r>
-              <a:rPr lang="ko-KR" altLang="en-US" sz="3200" dirty="0"/>
+              <a:rPr lang="ko-KR" altLang="en-US" sz="3200" dirty="0">
+                <a:latin typeface="Noto Sans KR Light" panose="020B0200000000000000" pitchFamily="50" charset="-127"/>
+                <a:ea typeface="Noto Sans KR Light" panose="020B0200000000000000" pitchFamily="50" charset="-127"/>
+              </a:rPr>
               <a:t>은 </a:t>
             </a:r>
             <a:r>
-              <a:rPr lang="ko-KR" altLang="en-US" sz="3200" dirty="0" err="1"/>
+              <a:rPr lang="ko-KR" altLang="en-US" sz="3200" dirty="0" err="1">
+                <a:latin typeface="Noto Sans KR Light" panose="020B0200000000000000" pitchFamily="50" charset="-127"/>
+                <a:ea typeface="Noto Sans KR Light" panose="020B0200000000000000" pitchFamily="50" charset="-127"/>
+              </a:rPr>
               <a:t>스폰할</a:t>
             </a:r>
             <a:r>
-              <a:rPr lang="ko-KR" altLang="en-US" sz="3200" dirty="0"/>
+              <a:rPr lang="ko-KR" altLang="en-US" sz="3200" dirty="0">
+                <a:latin typeface="Noto Sans KR Light" panose="020B0200000000000000" pitchFamily="50" charset="-127"/>
+                <a:ea typeface="Noto Sans KR Light" panose="020B0200000000000000" pitchFamily="50" charset="-127"/>
+              </a:rPr>
               <a:t> 파편 </a:t>
             </a:r>
             <a:r>
-              <a:rPr lang="ko-KR" altLang="en-US" sz="3200" dirty="0" err="1"/>
+              <a:rPr lang="ko-KR" altLang="en-US" sz="3200" dirty="0" err="1">
+                <a:latin typeface="Noto Sans KR Light" panose="020B0200000000000000" pitchFamily="50" charset="-127"/>
+                <a:ea typeface="Noto Sans KR Light" panose="020B0200000000000000" pitchFamily="50" charset="-127"/>
+              </a:rPr>
               <a:t>메쉬</a:t>
             </a:r>
             <a:r>
-              <a:rPr lang="ko-KR" altLang="en-US" sz="3200" dirty="0"/>
+              <a:rPr lang="ko-KR" altLang="en-US" sz="3200" dirty="0">
+                <a:latin typeface="Noto Sans KR Light" panose="020B0200000000000000" pitchFamily="50" charset="-127"/>
+                <a:ea typeface="Noto Sans KR Light" panose="020B0200000000000000" pitchFamily="50" charset="-127"/>
+              </a:rPr>
               <a:t> 리스트의 동적 생성 로직과 </a:t>
             </a:r>
             <a:r>
-              <a:rPr lang="en-US" altLang="ko-KR" sz="3200" dirty="0" err="1"/>
+              <a:rPr lang="en-US" altLang="ko-KR" sz="3200" dirty="0" err="1">
+                <a:latin typeface="Noto Sans KR Light" panose="020B0200000000000000" pitchFamily="50" charset="-127"/>
+                <a:ea typeface="Noto Sans KR Light" panose="020B0200000000000000" pitchFamily="50" charset="-127"/>
+              </a:rPr>
               <a:t>SkeletalMeshComponent</a:t>
             </a:r>
             <a:r>
-              <a:rPr lang="en-US" altLang="ko-KR" sz="3200" dirty="0"/>
+              <a:rPr lang="en-US" altLang="ko-KR" sz="3200" dirty="0">
+                <a:latin typeface="Noto Sans KR Light" panose="020B0200000000000000" pitchFamily="50" charset="-127"/>
+                <a:ea typeface="Noto Sans KR Light" panose="020B0200000000000000" pitchFamily="50" charset="-127"/>
+              </a:rPr>
               <a:t> </a:t>
             </a:r>
             <a:r>
-              <a:rPr lang="ko-KR" altLang="en-US" sz="3200" dirty="0"/>
+              <a:rPr lang="ko-KR" altLang="en-US" sz="3200" dirty="0">
+                <a:latin typeface="Noto Sans KR Light" panose="020B0200000000000000" pitchFamily="50" charset="-127"/>
+                <a:ea typeface="Noto Sans KR Light" panose="020B0200000000000000" pitchFamily="50" charset="-127"/>
+              </a:rPr>
               <a:t>기반의 </a:t>
             </a:r>
             <a:r>
-              <a:rPr lang="ko-KR" altLang="en-US" sz="3200" dirty="0" err="1"/>
+              <a:rPr lang="ko-KR" altLang="en-US" sz="3200" dirty="0" err="1">
+                <a:latin typeface="Noto Sans KR Light" panose="020B0200000000000000" pitchFamily="50" charset="-127"/>
+                <a:ea typeface="Noto Sans KR Light" panose="020B0200000000000000" pitchFamily="50" charset="-127"/>
+              </a:rPr>
               <a:t>액터</a:t>
             </a:r>
             <a:r>
-              <a:rPr lang="ko-KR" altLang="en-US" sz="3200" dirty="0"/>
+              <a:rPr lang="ko-KR" altLang="en-US" sz="3200" dirty="0">
+                <a:latin typeface="Noto Sans KR Light" panose="020B0200000000000000" pitchFamily="50" charset="-127"/>
+                <a:ea typeface="Noto Sans KR Light" panose="020B0200000000000000" pitchFamily="50" charset="-127"/>
+              </a:rPr>
               <a:t> 클래스 구조 설계에 활용되었다</a:t>
             </a:r>
             <a:r>
-              <a:rPr lang="en-US" altLang="ko-KR" sz="3200" dirty="0"/>
+              <a:rPr lang="en-US" altLang="ko-KR" sz="3200" dirty="0">
+                <a:latin typeface="Noto Sans KR Light" panose="020B0200000000000000" pitchFamily="50" charset="-127"/>
+                <a:ea typeface="Noto Sans KR Light" panose="020B0200000000000000" pitchFamily="50" charset="-127"/>
+              </a:rPr>
               <a:t>. </a:t>
             </a:r>
             <a:r>
-              <a:rPr lang="ko-KR" altLang="en-US" sz="3200" dirty="0"/>
+              <a:rPr lang="ko-KR" altLang="en-US" sz="3200" dirty="0">
+                <a:latin typeface="Noto Sans KR Light" panose="020B0200000000000000" pitchFamily="50" charset="-127"/>
+                <a:ea typeface="Noto Sans KR Light" panose="020B0200000000000000" pitchFamily="50" charset="-127"/>
+              </a:rPr>
               <a:t>특히 시체 파편에 </a:t>
             </a:r>
             <a:r>
-              <a:rPr lang="en-US" altLang="ko-KR" sz="3200" dirty="0"/>
+              <a:rPr lang="en-US" altLang="ko-KR" sz="3200" dirty="0">
+                <a:latin typeface="Noto Sans KR Light" panose="020B0200000000000000" pitchFamily="50" charset="-127"/>
+                <a:ea typeface="Noto Sans KR Light" panose="020B0200000000000000" pitchFamily="50" charset="-127"/>
+              </a:rPr>
               <a:t>Ragdoll </a:t>
             </a:r>
             <a:r>
-              <a:rPr lang="ko-KR" altLang="en-US" sz="3200" dirty="0"/>
+              <a:rPr lang="ko-KR" altLang="en-US" sz="3200" dirty="0">
+                <a:latin typeface="Noto Sans KR Light" panose="020B0200000000000000" pitchFamily="50" charset="-127"/>
+                <a:ea typeface="Noto Sans KR Light" panose="020B0200000000000000" pitchFamily="50" charset="-127"/>
+              </a:rPr>
               <a:t>효과를 부여하기 위한 </a:t>
             </a:r>
             <a:r>
-              <a:rPr lang="en-US" altLang="ko-KR" sz="3200" dirty="0"/>
+              <a:rPr lang="en-US" altLang="ko-KR" sz="3200" dirty="0">
+                <a:latin typeface="Noto Sans KR Light" panose="020B0200000000000000" pitchFamily="50" charset="-127"/>
+                <a:ea typeface="Noto Sans KR Light" panose="020B0200000000000000" pitchFamily="50" charset="-127"/>
+              </a:rPr>
               <a:t>LLM</a:t>
             </a:r>
             <a:r>
-              <a:rPr lang="ko-KR" altLang="en-US" sz="3200" dirty="0"/>
+              <a:rPr lang="ko-KR" altLang="en-US" sz="3200" dirty="0">
+                <a:latin typeface="Noto Sans KR Light" panose="020B0200000000000000" pitchFamily="50" charset="-127"/>
+                <a:ea typeface="Noto Sans KR Light" panose="020B0200000000000000" pitchFamily="50" charset="-127"/>
+              </a:rPr>
               <a:t>의 기술적 제언은 실증적으로 유효함을 확인하였다</a:t>
             </a:r>
             <a:r>
-              <a:rPr lang="en-US" altLang="ko-KR" sz="3200" dirty="0"/>
+              <a:rPr lang="en-US" altLang="ko-KR" sz="3200" dirty="0">
+                <a:latin typeface="Noto Sans KR Light" panose="020B0200000000000000" pitchFamily="50" charset="-127"/>
+                <a:ea typeface="Noto Sans KR Light" panose="020B0200000000000000" pitchFamily="50" charset="-127"/>
+              </a:rPr>
               <a:t>. </a:t>
             </a:r>
             <a:r>
-              <a:rPr lang="ko-KR" altLang="en-US" sz="3200" dirty="0"/>
+              <a:rPr lang="ko-KR" altLang="en-US" sz="3200" dirty="0">
+                <a:latin typeface="Noto Sans KR Light" panose="020B0200000000000000" pitchFamily="50" charset="-127"/>
+                <a:ea typeface="Noto Sans KR Light" panose="020B0200000000000000" pitchFamily="50" charset="-127"/>
+              </a:rPr>
               <a:t>물리 효과의 정밀도를 높이기 위한 </a:t>
             </a:r>
             <a:r>
-              <a:rPr lang="en-US" altLang="ko-KR" sz="3200" dirty="0"/>
+              <a:rPr lang="en-US" altLang="ko-KR" sz="3200" dirty="0">
+                <a:latin typeface="Noto Sans KR Light" panose="020B0200000000000000" pitchFamily="50" charset="-127"/>
+                <a:ea typeface="Noto Sans KR Light" panose="020B0200000000000000" pitchFamily="50" charset="-127"/>
+              </a:rPr>
               <a:t>Physics Asset </a:t>
             </a:r>
             <a:r>
-              <a:rPr lang="ko-KR" altLang="en-US" sz="3200" dirty="0"/>
+              <a:rPr lang="ko-KR" altLang="en-US" sz="3200" dirty="0">
+                <a:latin typeface="Noto Sans KR Light" panose="020B0200000000000000" pitchFamily="50" charset="-127"/>
+                <a:ea typeface="Noto Sans KR Light" panose="020B0200000000000000" pitchFamily="50" charset="-127"/>
+              </a:rPr>
               <a:t>생성 및 </a:t>
             </a:r>
             <a:r>
-              <a:rPr lang="en-US" altLang="ko-KR" sz="3200" dirty="0"/>
+              <a:rPr lang="en-US" altLang="ko-KR" sz="3200" dirty="0">
+                <a:latin typeface="Noto Sans KR Light" panose="020B0200000000000000" pitchFamily="50" charset="-127"/>
+                <a:ea typeface="Noto Sans KR Light" panose="020B0200000000000000" pitchFamily="50" charset="-127"/>
+              </a:rPr>
               <a:t>Skin Weight </a:t>
             </a:r>
             <a:r>
-              <a:rPr lang="ko-KR" altLang="en-US" sz="3200" dirty="0"/>
+              <a:rPr lang="ko-KR" altLang="en-US" sz="3200" dirty="0">
+                <a:latin typeface="Noto Sans KR Light" panose="020B0200000000000000" pitchFamily="50" charset="-127"/>
+                <a:ea typeface="Noto Sans KR Light" panose="020B0200000000000000" pitchFamily="50" charset="-127"/>
+              </a:rPr>
               <a:t>조정은 개발자가 직접 수행하였으나</a:t>
             </a:r>
             <a:r>
-              <a:rPr lang="en-US" altLang="ko-KR" sz="3200" dirty="0"/>
+              <a:rPr lang="en-US" altLang="ko-KR" sz="3200" dirty="0">
+                <a:latin typeface="Noto Sans KR Light" panose="020B0200000000000000" pitchFamily="50" charset="-127"/>
+                <a:ea typeface="Noto Sans KR Light" panose="020B0200000000000000" pitchFamily="50" charset="-127"/>
+              </a:rPr>
               <a:t>, </a:t>
             </a:r>
             <a:r>
-              <a:rPr lang="ko-KR" altLang="en-US" sz="3200" dirty="0"/>
+              <a:rPr lang="ko-KR" altLang="en-US" sz="3200" dirty="0">
+                <a:latin typeface="Noto Sans KR Light" panose="020B0200000000000000" pitchFamily="50" charset="-127"/>
+                <a:ea typeface="Noto Sans KR Light" panose="020B0200000000000000" pitchFamily="50" charset="-127"/>
+              </a:rPr>
               <a:t>이를 제어하는 시스템 코드 작성 영역에서는 </a:t>
             </a:r>
             <a:r>
-              <a:rPr lang="en-US" altLang="ko-KR" sz="3200" dirty="0"/>
+              <a:rPr lang="en-US" altLang="ko-KR" sz="3200" dirty="0">
+                <a:latin typeface="Noto Sans KR Light" panose="020B0200000000000000" pitchFamily="50" charset="-127"/>
+                <a:ea typeface="Noto Sans KR Light" panose="020B0200000000000000" pitchFamily="50" charset="-127"/>
+              </a:rPr>
               <a:t>LLM</a:t>
             </a:r>
             <a:r>
-              <a:rPr lang="ko-KR" altLang="en-US" sz="3200" dirty="0"/>
+              <a:rPr lang="ko-KR" altLang="en-US" sz="3200" dirty="0">
+                <a:latin typeface="Noto Sans KR Light" panose="020B0200000000000000" pitchFamily="50" charset="-127"/>
+                <a:ea typeface="Noto Sans KR Light" panose="020B0200000000000000" pitchFamily="50" charset="-127"/>
+              </a:rPr>
               <a:t>이 결정적인 기여를 하였다</a:t>
             </a:r>
             <a:r>
-              <a:rPr lang="en-US" altLang="ko-KR" sz="3200" dirty="0"/>
+              <a:rPr lang="en-US" altLang="ko-KR" sz="3200" dirty="0">
+                <a:latin typeface="Noto Sans KR Light" panose="020B0200000000000000" pitchFamily="50" charset="-127"/>
+                <a:ea typeface="Noto Sans KR Light" panose="020B0200000000000000" pitchFamily="50" charset="-127"/>
+              </a:rPr>
               <a:t>.</a:t>
             </a:r>
           </a:p>
           <a:p>
-            <a:endParaRPr lang="ko-KR" altLang="en-US" sz="3200" dirty="0"/>
-          </a:p>
-          <a:p>
-            <a:r>
-              <a:rPr lang="ko-KR" altLang="en-US" sz="3600" b="1" dirty="0"/>
+            <a:pPr>
+              <a:lnSpc>
+                <a:spcPct val="110000"/>
+              </a:lnSpc>
+            </a:pPr>
+            <a:endParaRPr lang="ko-KR" altLang="en-US" sz="3200" dirty="0">
+              <a:latin typeface="Noto Sans KR Light" panose="020B0200000000000000" pitchFamily="50" charset="-127"/>
+              <a:ea typeface="Noto Sans KR Light" panose="020B0200000000000000" pitchFamily="50" charset="-127"/>
+            </a:endParaRPr>
+          </a:p>
+          <a:p>
+            <a:pPr>
+              <a:lnSpc>
+                <a:spcPct val="110000"/>
+              </a:lnSpc>
+            </a:pPr>
+            <a:r>
+              <a:rPr lang="ko-KR" altLang="en-US" sz="3600" b="1" dirty="0">
+                <a:latin typeface="Noto Sans KR Black" panose="020B0200000000000000" pitchFamily="50" charset="-127"/>
+                <a:ea typeface="Noto Sans KR Black" panose="020B0200000000000000" pitchFamily="50" charset="-127"/>
+              </a:rPr>
               <a:t>개발 시간 단축 및 학습 비용 절감</a:t>
             </a:r>
-            <a:endParaRPr lang="ko-KR" altLang="en-US" sz="3600" dirty="0"/>
-          </a:p>
-          <a:p>
-            <a:r>
-              <a:rPr lang="en-US" altLang="ko-KR" sz="3200" dirty="0"/>
+            <a:endParaRPr lang="ko-KR" altLang="en-US" sz="3600" dirty="0">
+              <a:latin typeface="Noto Sans KR Black" panose="020B0200000000000000" pitchFamily="50" charset="-127"/>
+              <a:ea typeface="Noto Sans KR Black" panose="020B0200000000000000" pitchFamily="50" charset="-127"/>
+            </a:endParaRPr>
+          </a:p>
+          <a:p>
+            <a:pPr>
+              <a:lnSpc>
+                <a:spcPct val="110000"/>
+              </a:lnSpc>
+            </a:pPr>
+            <a:r>
+              <a:rPr lang="en-US" altLang="ko-KR" sz="3200" dirty="0">
+                <a:latin typeface="Noto Sans KR Light" panose="020B0200000000000000" pitchFamily="50" charset="-127"/>
+                <a:ea typeface="Noto Sans KR Light" panose="020B0200000000000000" pitchFamily="50" charset="-127"/>
+              </a:rPr>
               <a:t>LLM</a:t>
             </a:r>
             <a:r>
-              <a:rPr lang="ko-KR" altLang="en-US" sz="3200" dirty="0"/>
+              <a:rPr lang="ko-KR" altLang="en-US" sz="3200" dirty="0">
+                <a:latin typeface="Noto Sans KR Light" panose="020B0200000000000000" pitchFamily="50" charset="-127"/>
+                <a:ea typeface="Noto Sans KR Light" panose="020B0200000000000000" pitchFamily="50" charset="-127"/>
+              </a:rPr>
               <a:t>은 숙련되지 않은 개발자가 초기 아키텍처를 설계하는 기존 방식 대비 약 </a:t>
             </a:r>
             <a:r>
-              <a:rPr lang="en-US" altLang="ko-KR" sz="3200" dirty="0"/>
+              <a:rPr lang="en-US" altLang="ko-KR" sz="3200" dirty="0">
+                <a:latin typeface="Noto Sans KR Light" panose="020B0200000000000000" pitchFamily="50" charset="-127"/>
+                <a:ea typeface="Noto Sans KR Light" panose="020B0200000000000000" pitchFamily="50" charset="-127"/>
+              </a:rPr>
               <a:t>70% </a:t>
             </a:r>
             <a:r>
-              <a:rPr lang="ko-KR" altLang="en-US" sz="3200" dirty="0"/>
+              <a:rPr lang="ko-KR" altLang="en-US" sz="3200" dirty="0">
+                <a:latin typeface="Noto Sans KR Light" panose="020B0200000000000000" pitchFamily="50" charset="-127"/>
+                <a:ea typeface="Noto Sans KR Light" panose="020B0200000000000000" pitchFamily="50" charset="-127"/>
+              </a:rPr>
               <a:t>이상의 시간 효율을 달성하였으며</a:t>
             </a:r>
             <a:r>
-              <a:rPr lang="en-US" altLang="ko-KR" sz="3200" dirty="0"/>
+              <a:rPr lang="en-US" altLang="ko-KR" sz="3200" dirty="0">
+                <a:latin typeface="Noto Sans KR Light" panose="020B0200000000000000" pitchFamily="50" charset="-127"/>
+                <a:ea typeface="Noto Sans KR Light" panose="020B0200000000000000" pitchFamily="50" charset="-127"/>
+              </a:rPr>
               <a:t>, </a:t>
             </a:r>
             <a:r>
-              <a:rPr lang="ko-KR" altLang="en-US" sz="3200" dirty="0"/>
+              <a:rPr lang="ko-KR" altLang="en-US" sz="3200" dirty="0">
+                <a:latin typeface="Noto Sans KR Light" panose="020B0200000000000000" pitchFamily="50" charset="-127"/>
+                <a:ea typeface="Noto Sans KR Light" panose="020B0200000000000000" pitchFamily="50" charset="-127"/>
+              </a:rPr>
               <a:t>이는 검색 및 시행착오에 소요되는 시간을 실제 구현 시간으로 전환했음을 의미한다</a:t>
             </a:r>
             <a:r>
-              <a:rPr lang="en-US" altLang="ko-KR" sz="3200" dirty="0"/>
+              <a:rPr lang="en-US" altLang="ko-KR" sz="3200" dirty="0">
+                <a:latin typeface="Noto Sans KR Light" panose="020B0200000000000000" pitchFamily="50" charset="-127"/>
+                <a:ea typeface="Noto Sans KR Light" panose="020B0200000000000000" pitchFamily="50" charset="-127"/>
+              </a:rPr>
               <a:t>.</a:t>
             </a:r>
           </a:p>
           <a:p>
-            <a:endParaRPr lang="en-US" altLang="ko-KR" sz="1050" b="1" dirty="0"/>
+            <a:pPr>
+              <a:lnSpc>
+                <a:spcPct val="110000"/>
+              </a:lnSpc>
+            </a:pPr>
+            <a:endParaRPr lang="en-US" altLang="ko-KR" sz="1050" b="1" dirty="0">
+              <a:latin typeface="Noto Sans KR Light" panose="020B0200000000000000" pitchFamily="50" charset="-127"/>
+              <a:ea typeface="Noto Sans KR Light" panose="020B0200000000000000" pitchFamily="50" charset="-127"/>
+            </a:endParaRPr>
           </a:p>
         </p:txBody>
       </p:sp>
@@ -6495,7 +7033,7 @@
         </p:nvSpPr>
         <p:spPr>
           <a:xfrm>
-            <a:off x="16618517" y="27616333"/>
+            <a:off x="16618517" y="26490993"/>
             <a:ext cx="15380724" cy="1353835"/>
           </a:xfrm>
           <a:prstGeom prst="rect">
@@ -6544,7 +7082,7 @@
         </p:nvSpPr>
         <p:spPr>
           <a:xfrm>
-            <a:off x="16966321" y="27908224"/>
+            <a:off x="16995863" y="26752411"/>
             <a:ext cx="4296094" cy="830997"/>
           </a:xfrm>
           <a:prstGeom prst="rect">
@@ -6572,6 +7110,8 @@
                     </a:srgbClr>
                   </a:outerShdw>
                 </a:effectLst>
+                <a:latin typeface="Noto Sans KR Black" panose="020B0200000000000000" pitchFamily="50" charset="-127"/>
+                <a:ea typeface="Noto Sans KR Black" panose="020B0200000000000000" pitchFamily="50" charset="-127"/>
               </a:rPr>
               <a:t>한계점 및 결론</a:t>
             </a:r>
@@ -6592,8 +7132,8 @@
         </p:nvSpPr>
         <p:spPr>
           <a:xfrm>
-            <a:off x="16618515" y="29262059"/>
-            <a:ext cx="15380722" cy="13080504"/>
+            <a:off x="16618515" y="28136719"/>
+            <a:ext cx="15380722" cy="14409522"/>
           </a:xfrm>
           <a:prstGeom prst="rect">
             <a:avLst/>
@@ -6606,409 +7146,775 @@
           </a:bodyPr>
           <a:lstStyle/>
           <a:p>
-            <a:r>
-              <a:rPr lang="ko-KR" altLang="en-US" sz="3600" b="1" dirty="0"/>
+            <a:pPr>
+              <a:lnSpc>
+                <a:spcPct val="110000"/>
+              </a:lnSpc>
+            </a:pPr>
+            <a:r>
+              <a:rPr lang="ko-KR" altLang="en-US" sz="3600" b="1" dirty="0">
+                <a:latin typeface="Noto Sans KR Black" panose="020B0200000000000000" pitchFamily="50" charset="-127"/>
+                <a:ea typeface="Noto Sans KR Black" panose="020B0200000000000000" pitchFamily="50" charset="-127"/>
+              </a:rPr>
               <a:t>외부 </a:t>
             </a:r>
             <a:r>
-              <a:rPr lang="en-US" altLang="ko-KR" sz="3600" b="1" dirty="0"/>
+              <a:rPr lang="en-US" altLang="ko-KR" sz="3600" b="1" dirty="0">
+                <a:latin typeface="Noto Sans KR Black" panose="020B0200000000000000" pitchFamily="50" charset="-127"/>
+                <a:ea typeface="Noto Sans KR Black" panose="020B0200000000000000" pitchFamily="50" charset="-127"/>
+              </a:rPr>
               <a:t>SDK </a:t>
             </a:r>
             <a:r>
-              <a:rPr lang="ko-KR" altLang="en-US" sz="3600" b="1" dirty="0"/>
+              <a:rPr lang="ko-KR" altLang="en-US" sz="3600" b="1" dirty="0">
+                <a:latin typeface="Noto Sans KR Black" panose="020B0200000000000000" pitchFamily="50" charset="-127"/>
+                <a:ea typeface="Noto Sans KR Black" panose="020B0200000000000000" pitchFamily="50" charset="-127"/>
+              </a:rPr>
               <a:t>및 복합 네트워크 환경의 디버깅 한계</a:t>
             </a:r>
-            <a:endParaRPr lang="ko-KR" altLang="en-US" sz="3600" dirty="0"/>
-          </a:p>
-          <a:p>
-            <a:r>
-              <a:rPr lang="ko-KR" altLang="en-US" sz="3200" dirty="0"/>
+            <a:endParaRPr lang="ko-KR" altLang="en-US" sz="3600" dirty="0">
+              <a:latin typeface="Noto Sans KR Black" panose="020B0200000000000000" pitchFamily="50" charset="-127"/>
+              <a:ea typeface="Noto Sans KR Black" panose="020B0200000000000000" pitchFamily="50" charset="-127"/>
+            </a:endParaRPr>
+          </a:p>
+          <a:p>
+            <a:pPr>
+              <a:lnSpc>
+                <a:spcPct val="110000"/>
+              </a:lnSpc>
+            </a:pPr>
+            <a:r>
+              <a:rPr lang="ko-KR" altLang="en-US" sz="3200" dirty="0">
+                <a:latin typeface="Noto Sans KR Light" panose="020B0200000000000000" pitchFamily="50" charset="-127"/>
+                <a:ea typeface="Noto Sans KR Light" panose="020B0200000000000000" pitchFamily="50" charset="-127"/>
+              </a:rPr>
               <a:t>본 프로젝트에서 도입한 스팀 온라인 세션</a:t>
             </a:r>
             <a:r>
-              <a:rPr lang="en-US" altLang="ko-KR" sz="3200" dirty="0"/>
+              <a:rPr lang="en-US" altLang="ko-KR" sz="3200" dirty="0">
+                <a:latin typeface="Noto Sans KR Light" panose="020B0200000000000000" pitchFamily="50" charset="-127"/>
+                <a:ea typeface="Noto Sans KR Light" panose="020B0200000000000000" pitchFamily="50" charset="-127"/>
+              </a:rPr>
               <a:t>(Steam Online Session) </a:t>
             </a:r>
             <a:r>
-              <a:rPr lang="ko-KR" altLang="en-US" sz="3200" dirty="0"/>
+              <a:rPr lang="ko-KR" altLang="en-US" sz="3200" dirty="0">
+                <a:latin typeface="Noto Sans KR Light" panose="020B0200000000000000" pitchFamily="50" charset="-127"/>
+                <a:ea typeface="Noto Sans KR Light" panose="020B0200000000000000" pitchFamily="50" charset="-127"/>
+              </a:rPr>
               <a:t>구현 과정에서 </a:t>
             </a:r>
             <a:r>
-              <a:rPr lang="en-US" altLang="ko-KR" sz="3200" dirty="0"/>
+              <a:rPr lang="en-US" altLang="ko-KR" sz="3200" dirty="0">
+                <a:latin typeface="Noto Sans KR Light" panose="020B0200000000000000" pitchFamily="50" charset="-127"/>
+                <a:ea typeface="Noto Sans KR Light" panose="020B0200000000000000" pitchFamily="50" charset="-127"/>
+              </a:rPr>
               <a:t>LLM</a:t>
             </a:r>
             <a:r>
-              <a:rPr lang="ko-KR" altLang="en-US" sz="3200" dirty="0"/>
+              <a:rPr lang="ko-KR" altLang="en-US" sz="3200" dirty="0">
+                <a:latin typeface="Noto Sans KR Light" panose="020B0200000000000000" pitchFamily="50" charset="-127"/>
+                <a:ea typeface="Noto Sans KR Light" panose="020B0200000000000000" pitchFamily="50" charset="-127"/>
+              </a:rPr>
               <a:t>은 명확한 해결책을 제시하는 데 한계를 보였다</a:t>
             </a:r>
             <a:r>
-              <a:rPr lang="en-US" altLang="ko-KR" sz="3200" dirty="0"/>
+              <a:rPr lang="en-US" altLang="ko-KR" sz="3200" dirty="0">
+                <a:latin typeface="Noto Sans KR Light" panose="020B0200000000000000" pitchFamily="50" charset="-127"/>
+                <a:ea typeface="Noto Sans KR Light" panose="020B0200000000000000" pitchFamily="50" charset="-127"/>
+              </a:rPr>
               <a:t>.</a:t>
             </a:r>
             <a:r>
-              <a:rPr lang="ko-KR" altLang="en-US" sz="3200" dirty="0"/>
+              <a:rPr lang="ko-KR" altLang="en-US" sz="3200" dirty="0">
+                <a:latin typeface="Noto Sans KR Light" panose="020B0200000000000000" pitchFamily="50" charset="-127"/>
+                <a:ea typeface="Noto Sans KR Light" panose="020B0200000000000000" pitchFamily="50" charset="-127"/>
+              </a:rPr>
               <a:t> </a:t>
             </a:r>
-            <a:endParaRPr lang="en-US" altLang="ko-KR" sz="3200" dirty="0"/>
-          </a:p>
-          <a:p>
-            <a:r>
-              <a:rPr lang="ko-KR" altLang="en-US" sz="3200" dirty="0"/>
+            <a:endParaRPr lang="en-US" altLang="ko-KR" sz="3200" dirty="0">
+              <a:latin typeface="Noto Sans KR Light" panose="020B0200000000000000" pitchFamily="50" charset="-127"/>
+              <a:ea typeface="Noto Sans KR Light" panose="020B0200000000000000" pitchFamily="50" charset="-127"/>
+            </a:endParaRPr>
+          </a:p>
+          <a:p>
+            <a:pPr>
+              <a:lnSpc>
+                <a:spcPct val="110000"/>
+              </a:lnSpc>
+            </a:pPr>
+            <a:r>
+              <a:rPr lang="ko-KR" altLang="en-US" sz="3200" dirty="0">
+                <a:latin typeface="Noto Sans KR Light" panose="020B0200000000000000" pitchFamily="50" charset="-127"/>
+                <a:ea typeface="Noto Sans KR Light" panose="020B0200000000000000" pitchFamily="50" charset="-127"/>
+              </a:rPr>
               <a:t> </a:t>
             </a:r>
           </a:p>
           <a:p>
-            <a:r>
-              <a:rPr lang="ko-KR" altLang="en-US" sz="3600" b="1" dirty="0"/>
+            <a:pPr>
+              <a:lnSpc>
+                <a:spcPct val="110000"/>
+              </a:lnSpc>
+            </a:pPr>
+            <a:r>
+              <a:rPr lang="ko-KR" altLang="en-US" sz="3600" b="1" dirty="0">
+                <a:latin typeface="Noto Sans KR Black" panose="020B0200000000000000" pitchFamily="50" charset="-127"/>
+                <a:ea typeface="Noto Sans KR Black" panose="020B0200000000000000" pitchFamily="50" charset="-127"/>
+              </a:rPr>
               <a:t>기술적 </a:t>
             </a:r>
             <a:r>
-              <a:rPr lang="ko-KR" altLang="en-US" sz="3600" b="1" dirty="0" err="1"/>
+              <a:rPr lang="ko-KR" altLang="en-US" sz="3600" b="1" dirty="0" err="1">
+                <a:latin typeface="Noto Sans KR Black" panose="020B0200000000000000" pitchFamily="50" charset="-127"/>
+                <a:ea typeface="Noto Sans KR Black" panose="020B0200000000000000" pitchFamily="50" charset="-127"/>
+              </a:rPr>
               <a:t>할루시네이션과</a:t>
             </a:r>
             <a:r>
-              <a:rPr lang="ko-KR" altLang="en-US" sz="3600" b="1" dirty="0"/>
+              <a:rPr lang="ko-KR" altLang="en-US" sz="3600" b="1" dirty="0">
+                <a:latin typeface="Noto Sans KR Black" panose="020B0200000000000000" pitchFamily="50" charset="-127"/>
+                <a:ea typeface="Noto Sans KR Black" panose="020B0200000000000000" pitchFamily="50" charset="-127"/>
+              </a:rPr>
               <a:t> 버전 파편화 문제</a:t>
             </a:r>
-            <a:endParaRPr lang="ko-KR" altLang="en-US" sz="3600" dirty="0"/>
-          </a:p>
-          <a:p>
-            <a:r>
-              <a:rPr lang="ko-KR" altLang="en-US" sz="3200" dirty="0"/>
+            <a:endParaRPr lang="ko-KR" altLang="en-US" sz="3600" dirty="0">
+              <a:latin typeface="Noto Sans KR Black" panose="020B0200000000000000" pitchFamily="50" charset="-127"/>
+              <a:ea typeface="Noto Sans KR Black" panose="020B0200000000000000" pitchFamily="50" charset="-127"/>
+            </a:endParaRPr>
+          </a:p>
+          <a:p>
+            <a:pPr>
+              <a:lnSpc>
+                <a:spcPct val="110000"/>
+              </a:lnSpc>
+            </a:pPr>
+            <a:r>
+              <a:rPr lang="ko-KR" altLang="en-US" sz="3200" dirty="0">
+                <a:latin typeface="Noto Sans KR Light" panose="020B0200000000000000" pitchFamily="50" charset="-127"/>
+                <a:ea typeface="Noto Sans KR Light" panose="020B0200000000000000" pitchFamily="50" charset="-127"/>
+              </a:rPr>
               <a:t>개발 과정에서 </a:t>
             </a:r>
             <a:r>
-              <a:rPr lang="en-US" altLang="ko-KR" sz="3200" dirty="0"/>
+              <a:rPr lang="en-US" altLang="ko-KR" sz="3200" dirty="0">
+                <a:latin typeface="Noto Sans KR Light" panose="020B0200000000000000" pitchFamily="50" charset="-127"/>
+                <a:ea typeface="Noto Sans KR Light" panose="020B0200000000000000" pitchFamily="50" charset="-127"/>
+              </a:rPr>
               <a:t>LLM</a:t>
             </a:r>
             <a:r>
-              <a:rPr lang="ko-KR" altLang="en-US" sz="3200" dirty="0"/>
+              <a:rPr lang="ko-KR" altLang="en-US" sz="3200" dirty="0">
+                <a:latin typeface="Noto Sans KR Light" panose="020B0200000000000000" pitchFamily="50" charset="-127"/>
+                <a:ea typeface="Noto Sans KR Light" panose="020B0200000000000000" pitchFamily="50" charset="-127"/>
+              </a:rPr>
               <a:t>은 명시적인 버전 지정에도 불구하고 잘못된 정보를 제공하는 </a:t>
             </a:r>
             <a:r>
-              <a:rPr lang="ko-KR" altLang="en-US" sz="3200" dirty="0" err="1"/>
+              <a:rPr lang="ko-KR" altLang="en-US" sz="3200" dirty="0" err="1">
+                <a:latin typeface="Noto Sans KR Light" panose="020B0200000000000000" pitchFamily="50" charset="-127"/>
+                <a:ea typeface="Noto Sans KR Light" panose="020B0200000000000000" pitchFamily="50" charset="-127"/>
+              </a:rPr>
               <a:t>할루시네이션</a:t>
             </a:r>
             <a:r>
-              <a:rPr lang="ko-KR" altLang="en-US" sz="3200" dirty="0"/>
+              <a:rPr lang="ko-KR" altLang="en-US" sz="3200" dirty="0">
+                <a:latin typeface="Noto Sans KR Light" panose="020B0200000000000000" pitchFamily="50" charset="-127"/>
+                <a:ea typeface="Noto Sans KR Light" panose="020B0200000000000000" pitchFamily="50" charset="-127"/>
+              </a:rPr>
               <a:t> 현상을 보였다</a:t>
             </a:r>
             <a:r>
-              <a:rPr lang="en-US" altLang="ko-KR" sz="3200" dirty="0"/>
+              <a:rPr lang="en-US" altLang="ko-KR" sz="3200" dirty="0">
+                <a:latin typeface="Noto Sans KR Light" panose="020B0200000000000000" pitchFamily="50" charset="-127"/>
+                <a:ea typeface="Noto Sans KR Light" panose="020B0200000000000000" pitchFamily="50" charset="-127"/>
+              </a:rPr>
               <a:t>. </a:t>
             </a:r>
             <a:r>
-              <a:rPr lang="ko-KR" altLang="en-US" sz="3200" dirty="0"/>
+              <a:rPr lang="ko-KR" altLang="en-US" sz="3200" dirty="0">
+                <a:latin typeface="Noto Sans KR Light" panose="020B0200000000000000" pitchFamily="50" charset="-127"/>
+                <a:ea typeface="Noto Sans KR Light" panose="020B0200000000000000" pitchFamily="50" charset="-127"/>
+              </a:rPr>
               <a:t>프롬프트에 </a:t>
             </a:r>
             <a:r>
-              <a:rPr lang="en-US" altLang="ko-KR" sz="3200" dirty="0"/>
+              <a:rPr lang="en-US" altLang="ko-KR" sz="3200" dirty="0">
+                <a:latin typeface="Noto Sans KR Light" panose="020B0200000000000000" pitchFamily="50" charset="-127"/>
+                <a:ea typeface="Noto Sans KR Light" panose="020B0200000000000000" pitchFamily="50" charset="-127"/>
+              </a:rPr>
               <a:t>'Unreal Engine 5.7'</a:t>
             </a:r>
             <a:r>
-              <a:rPr lang="ko-KR" altLang="en-US" sz="3200" dirty="0"/>
+              <a:rPr lang="ko-KR" altLang="en-US" sz="3200" dirty="0">
+                <a:latin typeface="Noto Sans KR Light" panose="020B0200000000000000" pitchFamily="50" charset="-127"/>
+                <a:ea typeface="Noto Sans KR Light" panose="020B0200000000000000" pitchFamily="50" charset="-127"/>
+              </a:rPr>
               <a:t>를 명시하였음에도</a:t>
             </a:r>
             <a:r>
-              <a:rPr lang="en-US" altLang="ko-KR" sz="3200" dirty="0"/>
+              <a:rPr lang="en-US" altLang="ko-KR" sz="3200" dirty="0">
+                <a:latin typeface="Noto Sans KR Light" panose="020B0200000000000000" pitchFamily="50" charset="-127"/>
+                <a:ea typeface="Noto Sans KR Light" panose="020B0200000000000000" pitchFamily="50" charset="-127"/>
+              </a:rPr>
               <a:t>, </a:t>
             </a:r>
             <a:r>
-              <a:rPr lang="ko-KR" altLang="en-US" sz="3200" dirty="0"/>
+              <a:rPr lang="ko-KR" altLang="en-US" sz="3200" dirty="0">
+                <a:latin typeface="Noto Sans KR Light" panose="020B0200000000000000" pitchFamily="50" charset="-127"/>
+                <a:ea typeface="Noto Sans KR Light" panose="020B0200000000000000" pitchFamily="50" charset="-127"/>
+              </a:rPr>
               <a:t>최신 </a:t>
             </a:r>
             <a:r>
-              <a:rPr lang="en-US" altLang="ko-KR" sz="3200" dirty="0"/>
+              <a:rPr lang="en-US" altLang="ko-KR" sz="3200" dirty="0">
+                <a:latin typeface="Noto Sans KR Light" panose="020B0200000000000000" pitchFamily="50" charset="-127"/>
+                <a:ea typeface="Noto Sans KR Light" panose="020B0200000000000000" pitchFamily="50" charset="-127"/>
+              </a:rPr>
               <a:t>API</a:t>
             </a:r>
             <a:r>
-              <a:rPr lang="ko-KR" altLang="en-US" sz="3200" dirty="0"/>
+              <a:rPr lang="ko-KR" altLang="en-US" sz="3200" dirty="0">
+                <a:latin typeface="Noto Sans KR Light" panose="020B0200000000000000" pitchFamily="50" charset="-127"/>
+                <a:ea typeface="Noto Sans KR Light" panose="020B0200000000000000" pitchFamily="50" charset="-127"/>
+              </a:rPr>
               <a:t>와의 호환성이 결여된 구 버전</a:t>
             </a:r>
             <a:r>
-              <a:rPr lang="en-US" altLang="ko-KR" sz="3200" dirty="0"/>
+              <a:rPr lang="en-US" altLang="ko-KR" sz="3200" dirty="0">
+                <a:latin typeface="Noto Sans KR Light" panose="020B0200000000000000" pitchFamily="50" charset="-127"/>
+                <a:ea typeface="Noto Sans KR Light" panose="020B0200000000000000" pitchFamily="50" charset="-127"/>
+              </a:rPr>
               <a:t>(UE4)</a:t>
             </a:r>
             <a:r>
-              <a:rPr lang="ko-KR" altLang="en-US" sz="3200" dirty="0"/>
+              <a:rPr lang="ko-KR" altLang="en-US" sz="3200" dirty="0">
+                <a:latin typeface="Noto Sans KR Light" panose="020B0200000000000000" pitchFamily="50" charset="-127"/>
+                <a:ea typeface="Noto Sans KR Light" panose="020B0200000000000000" pitchFamily="50" charset="-127"/>
+              </a:rPr>
               <a:t>의 함수를 제안하는 등의 사례가 빈번히 발생하였다</a:t>
             </a:r>
             <a:r>
-              <a:rPr lang="en-US" altLang="ko-KR" sz="3200" dirty="0"/>
+              <a:rPr lang="en-US" altLang="ko-KR" sz="3200" dirty="0">
+                <a:latin typeface="Noto Sans KR Light" panose="020B0200000000000000" pitchFamily="50" charset="-127"/>
+                <a:ea typeface="Noto Sans KR Light" panose="020B0200000000000000" pitchFamily="50" charset="-127"/>
+              </a:rPr>
               <a:t>. </a:t>
             </a:r>
             <a:r>
-              <a:rPr lang="ko-KR" altLang="en-US" sz="3200" dirty="0"/>
+              <a:rPr lang="ko-KR" altLang="en-US" sz="3200" dirty="0">
+                <a:latin typeface="Noto Sans KR Light" panose="020B0200000000000000" pitchFamily="50" charset="-127"/>
+                <a:ea typeface="Noto Sans KR Light" panose="020B0200000000000000" pitchFamily="50" charset="-127"/>
+              </a:rPr>
               <a:t>이에 개발자가 컴파일 에러를 직접 수정하기 위해 다시 공식 문서를 교차 검증해야 하는 </a:t>
             </a:r>
             <a:r>
-              <a:rPr lang="en-US" altLang="ko-KR" sz="3200" dirty="0"/>
+              <a:rPr lang="en-US" altLang="ko-KR" sz="3200" dirty="0">
+                <a:latin typeface="Noto Sans KR Light" panose="020B0200000000000000" pitchFamily="50" charset="-127"/>
+                <a:ea typeface="Noto Sans KR Light" panose="020B0200000000000000" pitchFamily="50" charset="-127"/>
+              </a:rPr>
               <a:t>'</a:t>
             </a:r>
             <a:r>
-              <a:rPr lang="ko-KR" altLang="en-US" sz="3200" dirty="0"/>
+              <a:rPr lang="ko-KR" altLang="en-US" sz="3200" dirty="0">
+                <a:latin typeface="Noto Sans KR Light" panose="020B0200000000000000" pitchFamily="50" charset="-127"/>
+                <a:ea typeface="Noto Sans KR Light" panose="020B0200000000000000" pitchFamily="50" charset="-127"/>
+              </a:rPr>
               <a:t>역</a:t>
             </a:r>
             <a:r>
-              <a:rPr lang="en-US" altLang="ko-KR" sz="3200" dirty="0"/>
+              <a:rPr lang="en-US" altLang="ko-KR" sz="3200" dirty="0">
+                <a:latin typeface="Noto Sans KR Light" panose="020B0200000000000000" pitchFamily="50" charset="-127"/>
+                <a:ea typeface="Noto Sans KR Light" panose="020B0200000000000000" pitchFamily="50" charset="-127"/>
+              </a:rPr>
               <a:t>(</a:t>
             </a:r>
             <a:r>
-              <a:rPr lang="ko-KR" altLang="en-US" sz="3200" dirty="0"/>
+              <a:rPr lang="ko-KR" altLang="en-US" sz="3200" dirty="0">
+                <a:latin typeface="Noto Sans KR Light" panose="020B0200000000000000" pitchFamily="50" charset="-127"/>
+                <a:ea typeface="Noto Sans KR Light" panose="020B0200000000000000" pitchFamily="50" charset="-127"/>
+              </a:rPr>
               <a:t>逆</a:t>
             </a:r>
             <a:r>
-              <a:rPr lang="en-US" altLang="ko-KR" sz="3200" dirty="0"/>
+              <a:rPr lang="en-US" altLang="ko-KR" sz="3200" dirty="0">
+                <a:latin typeface="Noto Sans KR Light" panose="020B0200000000000000" pitchFamily="50" charset="-127"/>
+                <a:ea typeface="Noto Sans KR Light" panose="020B0200000000000000" pitchFamily="50" charset="-127"/>
+              </a:rPr>
               <a:t>) </a:t>
             </a:r>
             <a:r>
-              <a:rPr lang="ko-KR" altLang="en-US" sz="3200" dirty="0"/>
+              <a:rPr lang="ko-KR" altLang="en-US" sz="3200" dirty="0">
+                <a:latin typeface="Noto Sans KR Light" panose="020B0200000000000000" pitchFamily="50" charset="-127"/>
+                <a:ea typeface="Noto Sans KR Light" panose="020B0200000000000000" pitchFamily="50" charset="-127"/>
+              </a:rPr>
               <a:t>효율성</a:t>
             </a:r>
             <a:r>
-              <a:rPr lang="en-US" altLang="ko-KR" sz="3200" dirty="0"/>
+              <a:rPr lang="en-US" altLang="ko-KR" sz="3200" dirty="0">
+                <a:latin typeface="Noto Sans KR Light" panose="020B0200000000000000" pitchFamily="50" charset="-127"/>
+                <a:ea typeface="Noto Sans KR Light" panose="020B0200000000000000" pitchFamily="50" charset="-127"/>
+              </a:rPr>
               <a:t>'</a:t>
             </a:r>
             <a:r>
-              <a:rPr lang="ko-KR" altLang="en-US" sz="3200" dirty="0"/>
+              <a:rPr lang="ko-KR" altLang="en-US" sz="3200" dirty="0">
+                <a:latin typeface="Noto Sans KR Light" panose="020B0200000000000000" pitchFamily="50" charset="-127"/>
+                <a:ea typeface="Noto Sans KR Light" panose="020B0200000000000000" pitchFamily="50" charset="-127"/>
+              </a:rPr>
               <a:t>이 발생하였다</a:t>
             </a:r>
             <a:r>
-              <a:rPr lang="en-US" altLang="ko-KR" sz="3200" dirty="0"/>
+              <a:rPr lang="en-US" altLang="ko-KR" sz="3200" dirty="0">
+                <a:latin typeface="Noto Sans KR Light" panose="020B0200000000000000" pitchFamily="50" charset="-127"/>
+                <a:ea typeface="Noto Sans KR Light" panose="020B0200000000000000" pitchFamily="50" charset="-127"/>
+              </a:rPr>
               <a:t>. </a:t>
             </a:r>
-            <a:endParaRPr lang="ko-KR" altLang="en-US" sz="3200" dirty="0"/>
-          </a:p>
-          <a:p>
-            <a:r>
-              <a:rPr lang="ko-KR" altLang="en-US" sz="3200" dirty="0"/>
+            <a:endParaRPr lang="ko-KR" altLang="en-US" sz="3200" dirty="0">
+              <a:latin typeface="Noto Sans KR Light" panose="020B0200000000000000" pitchFamily="50" charset="-127"/>
+              <a:ea typeface="Noto Sans KR Light" panose="020B0200000000000000" pitchFamily="50" charset="-127"/>
+            </a:endParaRPr>
+          </a:p>
+          <a:p>
+            <a:pPr>
+              <a:lnSpc>
+                <a:spcPct val="110000"/>
+              </a:lnSpc>
+            </a:pPr>
+            <a:r>
+              <a:rPr lang="ko-KR" altLang="en-US" sz="3200" dirty="0">
+                <a:latin typeface="Noto Sans KR Black" panose="020B0200000000000000" pitchFamily="50" charset="-127"/>
+                <a:ea typeface="Noto Sans KR Black" panose="020B0200000000000000" pitchFamily="50" charset="-127"/>
+              </a:rPr>
               <a:t> </a:t>
             </a:r>
-            <a:endParaRPr lang="en-US" altLang="ko-KR" sz="3200" dirty="0"/>
-          </a:p>
-          <a:p>
-            <a:r>
-              <a:rPr lang="ko-KR" altLang="en-US" sz="3600" b="1" dirty="0"/>
+            <a:endParaRPr lang="en-US" altLang="ko-KR" sz="3200" dirty="0">
+              <a:latin typeface="Noto Sans KR Black" panose="020B0200000000000000" pitchFamily="50" charset="-127"/>
+              <a:ea typeface="Noto Sans KR Black" panose="020B0200000000000000" pitchFamily="50" charset="-127"/>
+            </a:endParaRPr>
+          </a:p>
+          <a:p>
+            <a:pPr>
+              <a:lnSpc>
+                <a:spcPct val="110000"/>
+              </a:lnSpc>
+            </a:pPr>
+            <a:r>
+              <a:rPr lang="ko-KR" altLang="en-US" sz="3600" b="1" dirty="0">
+                <a:latin typeface="Noto Sans KR Black" panose="020B0200000000000000" pitchFamily="50" charset="-127"/>
+                <a:ea typeface="Noto Sans KR Black" panose="020B0200000000000000" pitchFamily="50" charset="-127"/>
+              </a:rPr>
               <a:t>대화의 관성과 문맥 오염 </a:t>
             </a:r>
             <a:r>
-              <a:rPr lang="en-US" altLang="ko-KR" sz="3600" b="1" dirty="0"/>
+              <a:rPr lang="en-US" altLang="ko-KR" sz="3600" b="1" dirty="0">
+                <a:latin typeface="Noto Sans KR Black" panose="020B0200000000000000" pitchFamily="50" charset="-127"/>
+                <a:ea typeface="Noto Sans KR Black" panose="020B0200000000000000" pitchFamily="50" charset="-127"/>
+              </a:rPr>
               <a:t>(Context Contamination)</a:t>
             </a:r>
-            <a:endParaRPr lang="ko-KR" altLang="en-US" sz="3600" dirty="0"/>
-          </a:p>
-          <a:p>
-            <a:r>
-              <a:rPr lang="en-US" altLang="ko-KR" sz="3200" dirty="0"/>
+            <a:endParaRPr lang="ko-KR" altLang="en-US" sz="3600" dirty="0">
+              <a:latin typeface="Noto Sans KR Black" panose="020B0200000000000000" pitchFamily="50" charset="-127"/>
+              <a:ea typeface="Noto Sans KR Black" panose="020B0200000000000000" pitchFamily="50" charset="-127"/>
+            </a:endParaRPr>
+          </a:p>
+          <a:p>
+            <a:pPr>
+              <a:lnSpc>
+                <a:spcPct val="110000"/>
+              </a:lnSpc>
+            </a:pPr>
+            <a:r>
+              <a:rPr lang="en-US" altLang="ko-KR" sz="3200" dirty="0">
+                <a:latin typeface="Noto Sans KR Light" panose="020B0200000000000000" pitchFamily="50" charset="-127"/>
+                <a:ea typeface="Noto Sans KR Light" panose="020B0200000000000000" pitchFamily="50" charset="-127"/>
+              </a:rPr>
               <a:t>LLM</a:t>
             </a:r>
             <a:r>
-              <a:rPr lang="ko-KR" altLang="en-US" sz="3200" dirty="0"/>
+              <a:rPr lang="ko-KR" altLang="en-US" sz="3200" dirty="0">
+                <a:latin typeface="Noto Sans KR Light" panose="020B0200000000000000" pitchFamily="50" charset="-127"/>
+                <a:ea typeface="Noto Sans KR Light" panose="020B0200000000000000" pitchFamily="50" charset="-127"/>
+              </a:rPr>
               <a:t>과의 장기적인 협업 과정에서 발생하는 </a:t>
             </a:r>
             <a:r>
-              <a:rPr lang="en-US" altLang="ko-KR" sz="3200" dirty="0"/>
+              <a:rPr lang="en-US" altLang="ko-KR" sz="3200" dirty="0">
+                <a:latin typeface="Noto Sans KR Light" panose="020B0200000000000000" pitchFamily="50" charset="-127"/>
+                <a:ea typeface="Noto Sans KR Light" panose="020B0200000000000000" pitchFamily="50" charset="-127"/>
+              </a:rPr>
               <a:t>'</a:t>
             </a:r>
             <a:r>
-              <a:rPr lang="ko-KR" altLang="en-US" sz="3200" dirty="0"/>
+              <a:rPr lang="ko-KR" altLang="en-US" sz="3200" dirty="0">
+                <a:latin typeface="Noto Sans KR Light" panose="020B0200000000000000" pitchFamily="50" charset="-127"/>
+                <a:ea typeface="Noto Sans KR Light" panose="020B0200000000000000" pitchFamily="50" charset="-127"/>
+              </a:rPr>
               <a:t>정보 고착화</a:t>
             </a:r>
             <a:r>
-              <a:rPr lang="en-US" altLang="ko-KR" sz="3200" dirty="0"/>
+              <a:rPr lang="en-US" altLang="ko-KR" sz="3200" dirty="0">
+                <a:latin typeface="Noto Sans KR Light" panose="020B0200000000000000" pitchFamily="50" charset="-127"/>
+                <a:ea typeface="Noto Sans KR Light" panose="020B0200000000000000" pitchFamily="50" charset="-127"/>
+              </a:rPr>
               <a:t>' </a:t>
             </a:r>
             <a:r>
-              <a:rPr lang="ko-KR" altLang="en-US" sz="3200" dirty="0"/>
+              <a:rPr lang="ko-KR" altLang="en-US" sz="3200" dirty="0">
+                <a:latin typeface="Noto Sans KR Light" panose="020B0200000000000000" pitchFamily="50" charset="-127"/>
+                <a:ea typeface="Noto Sans KR Light" panose="020B0200000000000000" pitchFamily="50" charset="-127"/>
+              </a:rPr>
               <a:t>현상은 개발의 유연성을 떨어뜨리는 또 다른 한계점으로 나타났다</a:t>
             </a:r>
             <a:r>
-              <a:rPr lang="en-US" altLang="ko-KR" sz="3200" dirty="0"/>
+              <a:rPr lang="en-US" altLang="ko-KR" sz="3200" dirty="0">
+                <a:latin typeface="Noto Sans KR Light" panose="020B0200000000000000" pitchFamily="50" charset="-127"/>
+                <a:ea typeface="Noto Sans KR Light" panose="020B0200000000000000" pitchFamily="50" charset="-127"/>
+              </a:rPr>
               <a:t>.</a:t>
             </a:r>
             <a:r>
-              <a:rPr lang="ko-KR" altLang="en-US" sz="3200" dirty="0"/>
+              <a:rPr lang="ko-KR" altLang="en-US" sz="3200" dirty="0">
+                <a:latin typeface="Noto Sans KR Light" panose="020B0200000000000000" pitchFamily="50" charset="-127"/>
+                <a:ea typeface="Noto Sans KR Light" panose="020B0200000000000000" pitchFamily="50" charset="-127"/>
+              </a:rPr>
               <a:t> 대화가 길어질수록 </a:t>
             </a:r>
             <a:r>
-              <a:rPr lang="en-US" altLang="ko-KR" sz="3200" dirty="0"/>
+              <a:rPr lang="en-US" altLang="ko-KR" sz="3200" dirty="0">
+                <a:latin typeface="Noto Sans KR Light" panose="020B0200000000000000" pitchFamily="50" charset="-127"/>
+                <a:ea typeface="Noto Sans KR Light" panose="020B0200000000000000" pitchFamily="50" charset="-127"/>
+              </a:rPr>
               <a:t>LLM</a:t>
             </a:r>
             <a:r>
-              <a:rPr lang="ko-KR" altLang="en-US" sz="3200" dirty="0"/>
+              <a:rPr lang="ko-KR" altLang="en-US" sz="3200" dirty="0">
+                <a:latin typeface="Noto Sans KR Light" panose="020B0200000000000000" pitchFamily="50" charset="-127"/>
+                <a:ea typeface="Noto Sans KR Light" panose="020B0200000000000000" pitchFamily="50" charset="-127"/>
+              </a:rPr>
               <a:t>은 이전 발화</a:t>
             </a:r>
             <a:r>
-              <a:rPr lang="en-US" altLang="ko-KR" sz="3200" dirty="0"/>
+              <a:rPr lang="en-US" altLang="ko-KR" sz="3200" dirty="0">
+                <a:latin typeface="Noto Sans KR Light" panose="020B0200000000000000" pitchFamily="50" charset="-127"/>
+                <a:ea typeface="Noto Sans KR Light" panose="020B0200000000000000" pitchFamily="50" charset="-127"/>
+              </a:rPr>
               <a:t>(Utterance)</a:t>
             </a:r>
             <a:r>
-              <a:rPr lang="ko-KR" altLang="en-US" sz="3200" dirty="0"/>
+              <a:rPr lang="ko-KR" altLang="en-US" sz="3200" dirty="0">
+                <a:latin typeface="Noto Sans KR Light" panose="020B0200000000000000" pitchFamily="50" charset="-127"/>
+                <a:ea typeface="Noto Sans KR Light" panose="020B0200000000000000" pitchFamily="50" charset="-127"/>
+              </a:rPr>
               <a:t>에서 형성된 맥락에 과도하게 의존하는 경향을 보였다</a:t>
             </a:r>
             <a:r>
-              <a:rPr lang="en-US" altLang="ko-KR" sz="3200" dirty="0"/>
+              <a:rPr lang="en-US" altLang="ko-KR" sz="3200" dirty="0">
+                <a:latin typeface="Noto Sans KR Light" panose="020B0200000000000000" pitchFamily="50" charset="-127"/>
+                <a:ea typeface="Noto Sans KR Light" panose="020B0200000000000000" pitchFamily="50" charset="-127"/>
+              </a:rPr>
               <a:t>. </a:t>
             </a:r>
             <a:r>
-              <a:rPr lang="ko-KR" altLang="en-US" sz="3200" dirty="0"/>
+              <a:rPr lang="ko-KR" altLang="en-US" sz="3200" dirty="0">
+                <a:latin typeface="Noto Sans KR Light" panose="020B0200000000000000" pitchFamily="50" charset="-127"/>
+                <a:ea typeface="Noto Sans KR Light" panose="020B0200000000000000" pitchFamily="50" charset="-127"/>
+              </a:rPr>
               <a:t>이로 인해 개발자가 명확히 새로운 기준이나 수정된 라이브러리 정보를 제공하더라도</a:t>
             </a:r>
             <a:r>
-              <a:rPr lang="en-US" altLang="ko-KR" sz="3200" dirty="0"/>
+              <a:rPr lang="en-US" altLang="ko-KR" sz="3200" dirty="0">
+                <a:latin typeface="Noto Sans KR Light" panose="020B0200000000000000" pitchFamily="50" charset="-127"/>
+                <a:ea typeface="Noto Sans KR Light" panose="020B0200000000000000" pitchFamily="50" charset="-127"/>
+              </a:rPr>
               <a:t>, </a:t>
             </a:r>
             <a:r>
-              <a:rPr lang="ko-KR" altLang="en-US" sz="3200" dirty="0"/>
+              <a:rPr lang="ko-KR" altLang="en-US" sz="3200" dirty="0">
+                <a:latin typeface="Noto Sans KR Light" panose="020B0200000000000000" pitchFamily="50" charset="-127"/>
+                <a:ea typeface="Noto Sans KR Light" panose="020B0200000000000000" pitchFamily="50" charset="-127"/>
+              </a:rPr>
               <a:t>모델이 이전 답변의 코드 구조를 반복 출력하거나 수정 사항을 누락하는 </a:t>
             </a:r>
             <a:r>
-              <a:rPr lang="en-US" altLang="ko-KR" sz="3200" dirty="0"/>
+              <a:rPr lang="en-US" altLang="ko-KR" sz="3200" dirty="0">
+                <a:latin typeface="Noto Sans KR Light" panose="020B0200000000000000" pitchFamily="50" charset="-127"/>
+                <a:ea typeface="Noto Sans KR Light" panose="020B0200000000000000" pitchFamily="50" charset="-127"/>
+              </a:rPr>
               <a:t>'</a:t>
             </a:r>
             <a:r>
-              <a:rPr lang="ko-KR" altLang="en-US" sz="3200" dirty="0"/>
+              <a:rPr lang="ko-KR" altLang="en-US" sz="3200" dirty="0">
+                <a:latin typeface="Noto Sans KR Light" panose="020B0200000000000000" pitchFamily="50" charset="-127"/>
+                <a:ea typeface="Noto Sans KR Light" panose="020B0200000000000000" pitchFamily="50" charset="-127"/>
+              </a:rPr>
               <a:t>대화의 관성</a:t>
             </a:r>
             <a:r>
-              <a:rPr lang="en-US" altLang="ko-KR" sz="3200" dirty="0"/>
+              <a:rPr lang="en-US" altLang="ko-KR" sz="3200" dirty="0">
+                <a:latin typeface="Noto Sans KR Light" panose="020B0200000000000000" pitchFamily="50" charset="-127"/>
+                <a:ea typeface="Noto Sans KR Light" panose="020B0200000000000000" pitchFamily="50" charset="-127"/>
+              </a:rPr>
               <a:t>' </a:t>
             </a:r>
             <a:r>
-              <a:rPr lang="ko-KR" altLang="en-US" sz="3200" dirty="0"/>
+              <a:rPr lang="ko-KR" altLang="en-US" sz="3200" dirty="0">
+                <a:latin typeface="Noto Sans KR Light" panose="020B0200000000000000" pitchFamily="50" charset="-127"/>
+                <a:ea typeface="Noto Sans KR Light" panose="020B0200000000000000" pitchFamily="50" charset="-127"/>
+              </a:rPr>
               <a:t>현상이 발생하여 불필요하게 반복해서 수정사항을 지시해야 했고</a:t>
             </a:r>
             <a:r>
-              <a:rPr lang="en-US" altLang="ko-KR" sz="3200" dirty="0"/>
+              <a:rPr lang="en-US" altLang="ko-KR" sz="3200" dirty="0">
+                <a:latin typeface="Noto Sans KR Light" panose="020B0200000000000000" pitchFamily="50" charset="-127"/>
+                <a:ea typeface="Noto Sans KR Light" panose="020B0200000000000000" pitchFamily="50" charset="-127"/>
+              </a:rPr>
               <a:t>, </a:t>
             </a:r>
             <a:r>
-              <a:rPr lang="ko-KR" altLang="en-US" sz="3200" dirty="0"/>
+              <a:rPr lang="ko-KR" altLang="en-US" sz="3200" dirty="0">
+                <a:latin typeface="Noto Sans KR Light" panose="020B0200000000000000" pitchFamily="50" charset="-127"/>
+                <a:ea typeface="Noto Sans KR Light" panose="020B0200000000000000" pitchFamily="50" charset="-127"/>
+              </a:rPr>
               <a:t>때때로 대화 기록을 초기화하고 새로운 세션을 시작해야 하는 상황이 빈번하는 등 재입력 비용이 필요했다</a:t>
             </a:r>
             <a:r>
-              <a:rPr lang="en-US" altLang="ko-KR" sz="3200" dirty="0"/>
+              <a:rPr lang="en-US" altLang="ko-KR" sz="3200" dirty="0">
+                <a:latin typeface="Noto Sans KR Light" panose="020B0200000000000000" pitchFamily="50" charset="-127"/>
+                <a:ea typeface="Noto Sans KR Light" panose="020B0200000000000000" pitchFamily="50" charset="-127"/>
+              </a:rPr>
               <a:t>.</a:t>
             </a:r>
           </a:p>
           <a:p>
-            <a:endParaRPr lang="en-US" altLang="ko-KR" sz="3200" dirty="0"/>
-          </a:p>
-          <a:p>
-            <a:r>
-              <a:rPr lang="ko-KR" altLang="en-US" sz="3600" b="1" dirty="0"/>
+            <a:pPr>
+              <a:lnSpc>
+                <a:spcPct val="110000"/>
+              </a:lnSpc>
+            </a:pPr>
+            <a:endParaRPr lang="en-US" altLang="ko-KR" sz="3200" dirty="0">
+              <a:latin typeface="Noto Sans KR Light" panose="020B0200000000000000" pitchFamily="50" charset="-127"/>
+              <a:ea typeface="Noto Sans KR Light" panose="020B0200000000000000" pitchFamily="50" charset="-127"/>
+            </a:endParaRPr>
+          </a:p>
+          <a:p>
+            <a:pPr>
+              <a:lnSpc>
+                <a:spcPct val="110000"/>
+              </a:lnSpc>
+            </a:pPr>
+            <a:r>
+              <a:rPr lang="ko-KR" altLang="en-US" sz="3600" b="1" dirty="0">
+                <a:latin typeface="Noto Sans KR Black" panose="020B0200000000000000" pitchFamily="50" charset="-127"/>
+                <a:ea typeface="Noto Sans KR Black" panose="020B0200000000000000" pitchFamily="50" charset="-127"/>
+              </a:rPr>
               <a:t>결론</a:t>
             </a:r>
-            <a:endParaRPr lang="ko-KR" altLang="en-US" sz="3600" dirty="0"/>
-          </a:p>
-          <a:p>
-            <a:r>
-              <a:rPr lang="ko-KR" altLang="en-US" sz="3200" dirty="0"/>
+            <a:endParaRPr lang="ko-KR" altLang="en-US" sz="3600" dirty="0">
+              <a:latin typeface="Noto Sans KR Black" panose="020B0200000000000000" pitchFamily="50" charset="-127"/>
+              <a:ea typeface="Noto Sans KR Black" panose="020B0200000000000000" pitchFamily="50" charset="-127"/>
+            </a:endParaRPr>
+          </a:p>
+          <a:p>
+            <a:pPr>
+              <a:lnSpc>
+                <a:spcPct val="110000"/>
+              </a:lnSpc>
+            </a:pPr>
+            <a:r>
+              <a:rPr lang="ko-KR" altLang="en-US" sz="3200" dirty="0">
+                <a:latin typeface="Noto Sans KR Light" panose="020B0200000000000000" pitchFamily="50" charset="-127"/>
+                <a:ea typeface="Noto Sans KR Light" panose="020B0200000000000000" pitchFamily="50" charset="-127"/>
+              </a:rPr>
               <a:t>위와 같은 한계점들은 </a:t>
             </a:r>
             <a:r>
-              <a:rPr lang="en-US" altLang="ko-KR" sz="3200" dirty="0"/>
+              <a:rPr lang="en-US" altLang="ko-KR" sz="3200" dirty="0">
+                <a:latin typeface="Noto Sans KR Light" panose="020B0200000000000000" pitchFamily="50" charset="-127"/>
+                <a:ea typeface="Noto Sans KR Light" panose="020B0200000000000000" pitchFamily="50" charset="-127"/>
+              </a:rPr>
               <a:t>LLM </a:t>
             </a:r>
             <a:r>
-              <a:rPr lang="ko-KR" altLang="en-US" sz="3200" dirty="0"/>
+              <a:rPr lang="ko-KR" altLang="en-US" sz="3200" dirty="0">
+                <a:latin typeface="Noto Sans KR Light" panose="020B0200000000000000" pitchFamily="50" charset="-127"/>
+                <a:ea typeface="Noto Sans KR Light" panose="020B0200000000000000" pitchFamily="50" charset="-127"/>
+              </a:rPr>
               <a:t>기반 개발 환경에서 개발자의 역할이 </a:t>
             </a:r>
             <a:r>
-              <a:rPr lang="en-US" altLang="ko-KR" sz="3200" dirty="0"/>
+              <a:rPr lang="en-US" altLang="ko-KR" sz="3200" dirty="0">
+                <a:latin typeface="Noto Sans KR Light" panose="020B0200000000000000" pitchFamily="50" charset="-127"/>
+                <a:ea typeface="Noto Sans KR Light" panose="020B0200000000000000" pitchFamily="50" charset="-127"/>
+              </a:rPr>
               <a:t>'</a:t>
             </a:r>
             <a:r>
-              <a:rPr lang="ko-KR" altLang="en-US" sz="3200" dirty="0"/>
+              <a:rPr lang="ko-KR" altLang="en-US" sz="3200" dirty="0">
+                <a:latin typeface="Noto Sans KR Light" panose="020B0200000000000000" pitchFamily="50" charset="-127"/>
+                <a:ea typeface="Noto Sans KR Light" panose="020B0200000000000000" pitchFamily="50" charset="-127"/>
+              </a:rPr>
               <a:t>작성</a:t>
             </a:r>
             <a:r>
-              <a:rPr lang="en-US" altLang="ko-KR" sz="3200" dirty="0"/>
+              <a:rPr lang="en-US" altLang="ko-KR" sz="3200" dirty="0">
+                <a:latin typeface="Noto Sans KR Light" panose="020B0200000000000000" pitchFamily="50" charset="-127"/>
+                <a:ea typeface="Noto Sans KR Light" panose="020B0200000000000000" pitchFamily="50" charset="-127"/>
+              </a:rPr>
               <a:t>'</a:t>
             </a:r>
             <a:r>
-              <a:rPr lang="ko-KR" altLang="en-US" sz="3200" dirty="0"/>
+              <a:rPr lang="ko-KR" altLang="en-US" sz="3200" dirty="0">
+                <a:latin typeface="Noto Sans KR Light" panose="020B0200000000000000" pitchFamily="50" charset="-127"/>
+                <a:ea typeface="Noto Sans KR Light" panose="020B0200000000000000" pitchFamily="50" charset="-127"/>
+              </a:rPr>
               <a:t>에서 </a:t>
             </a:r>
             <a:r>
-              <a:rPr lang="en-US" altLang="ko-KR" sz="3200" dirty="0"/>
+              <a:rPr lang="en-US" altLang="ko-KR" sz="3200" dirty="0">
+                <a:latin typeface="Noto Sans KR Light" panose="020B0200000000000000" pitchFamily="50" charset="-127"/>
+                <a:ea typeface="Noto Sans KR Light" panose="020B0200000000000000" pitchFamily="50" charset="-127"/>
+              </a:rPr>
               <a:t>'</a:t>
             </a:r>
             <a:r>
-              <a:rPr lang="ko-KR" altLang="en-US" sz="3200" dirty="0"/>
+              <a:rPr lang="ko-KR" altLang="en-US" sz="3200" dirty="0">
+                <a:latin typeface="Noto Sans KR Light" panose="020B0200000000000000" pitchFamily="50" charset="-127"/>
+                <a:ea typeface="Noto Sans KR Light" panose="020B0200000000000000" pitchFamily="50" charset="-127"/>
+              </a:rPr>
               <a:t>검토 및 검증</a:t>
             </a:r>
             <a:r>
-              <a:rPr lang="en-US" altLang="ko-KR" sz="3200" dirty="0"/>
+              <a:rPr lang="en-US" altLang="ko-KR" sz="3200" dirty="0">
+                <a:latin typeface="Noto Sans KR Light" panose="020B0200000000000000" pitchFamily="50" charset="-127"/>
+                <a:ea typeface="Noto Sans KR Light" panose="020B0200000000000000" pitchFamily="50" charset="-127"/>
+              </a:rPr>
               <a:t>'</a:t>
             </a:r>
             <a:r>
-              <a:rPr lang="ko-KR" altLang="en-US" sz="3200" dirty="0"/>
+              <a:rPr lang="ko-KR" altLang="en-US" sz="3200" dirty="0">
+                <a:latin typeface="Noto Sans KR Light" panose="020B0200000000000000" pitchFamily="50" charset="-127"/>
+                <a:ea typeface="Noto Sans KR Light" panose="020B0200000000000000" pitchFamily="50" charset="-127"/>
+              </a:rPr>
               <a:t>으로 변화해야 함을 시사한다</a:t>
             </a:r>
             <a:r>
-              <a:rPr lang="en-US" altLang="ko-KR" sz="3200" dirty="0"/>
+              <a:rPr lang="en-US" altLang="ko-KR" sz="3200" dirty="0">
+                <a:latin typeface="Noto Sans KR Light" panose="020B0200000000000000" pitchFamily="50" charset="-127"/>
+                <a:ea typeface="Noto Sans KR Light" panose="020B0200000000000000" pitchFamily="50" charset="-127"/>
+              </a:rPr>
               <a:t>. </a:t>
             </a:r>
           </a:p>
           <a:p>
-            <a:r>
-              <a:rPr lang="ko-KR" altLang="en-US" sz="3200" dirty="0"/>
+            <a:pPr>
+              <a:lnSpc>
+                <a:spcPct val="110000"/>
+              </a:lnSpc>
+            </a:pPr>
+            <a:r>
+              <a:rPr lang="ko-KR" altLang="en-US" sz="3200" dirty="0">
+                <a:latin typeface="Noto Sans KR Light" panose="020B0200000000000000" pitchFamily="50" charset="-127"/>
+                <a:ea typeface="Noto Sans KR Light" panose="020B0200000000000000" pitchFamily="50" charset="-127"/>
+              </a:rPr>
               <a:t>개발자 개인의 도메인 지식</a:t>
             </a:r>
             <a:r>
-              <a:rPr lang="en-US" altLang="ko-KR" sz="3200" dirty="0"/>
+              <a:rPr lang="en-US" altLang="ko-KR" sz="3200" dirty="0">
+                <a:latin typeface="Noto Sans KR Light" panose="020B0200000000000000" pitchFamily="50" charset="-127"/>
+                <a:ea typeface="Noto Sans KR Light" panose="020B0200000000000000" pitchFamily="50" charset="-127"/>
+              </a:rPr>
               <a:t>(Domain Knowledge)</a:t>
             </a:r>
             <a:r>
-              <a:rPr lang="ko-KR" altLang="en-US" sz="3200" dirty="0"/>
+              <a:rPr lang="ko-KR" altLang="en-US" sz="3200" dirty="0">
+                <a:latin typeface="Noto Sans KR Light" panose="020B0200000000000000" pitchFamily="50" charset="-127"/>
+                <a:ea typeface="Noto Sans KR Light" panose="020B0200000000000000" pitchFamily="50" charset="-127"/>
+              </a:rPr>
               <a:t>이 전제되어야만 진정한 효율성 향상을 기대할 수 있으며</a:t>
             </a:r>
             <a:r>
-              <a:rPr lang="en-US" altLang="ko-KR" sz="3200" dirty="0"/>
+              <a:rPr lang="en-US" altLang="ko-KR" sz="3200" dirty="0">
+                <a:latin typeface="Noto Sans KR Light" panose="020B0200000000000000" pitchFamily="50" charset="-127"/>
+                <a:ea typeface="Noto Sans KR Light" panose="020B0200000000000000" pitchFamily="50" charset="-127"/>
+              </a:rPr>
               <a:t>,</a:t>
             </a:r>
             <a:r>
-              <a:rPr lang="ko-KR" altLang="en-US" sz="3200" dirty="0"/>
+              <a:rPr lang="ko-KR" altLang="en-US" sz="3200" dirty="0">
+                <a:latin typeface="Noto Sans KR Light" panose="020B0200000000000000" pitchFamily="50" charset="-127"/>
+                <a:ea typeface="Noto Sans KR Light" panose="020B0200000000000000" pitchFamily="50" charset="-127"/>
+              </a:rPr>
               <a:t> 아직 </a:t>
             </a:r>
             <a:r>
-              <a:rPr lang="en-US" altLang="ko-KR" sz="3200" dirty="0"/>
+              <a:rPr lang="en-US" altLang="ko-KR" sz="3200" dirty="0">
+                <a:latin typeface="Noto Sans KR Light" panose="020B0200000000000000" pitchFamily="50" charset="-127"/>
+                <a:ea typeface="Noto Sans KR Light" panose="020B0200000000000000" pitchFamily="50" charset="-127"/>
+              </a:rPr>
               <a:t>LLM</a:t>
             </a:r>
             <a:r>
-              <a:rPr lang="ko-KR" altLang="en-US" sz="3200" dirty="0"/>
+              <a:rPr lang="ko-KR" altLang="en-US" sz="3200" dirty="0">
+                <a:latin typeface="Noto Sans KR Light" panose="020B0200000000000000" pitchFamily="50" charset="-127"/>
+                <a:ea typeface="Noto Sans KR Light" panose="020B0200000000000000" pitchFamily="50" charset="-127"/>
+              </a:rPr>
               <a:t>은 개발자를 완전히 대체할 수 없고</a:t>
             </a:r>
             <a:r>
-              <a:rPr lang="en-US" altLang="ko-KR" sz="3200" dirty="0"/>
+              <a:rPr lang="en-US" altLang="ko-KR" sz="3200" dirty="0">
+                <a:latin typeface="Noto Sans KR Light" panose="020B0200000000000000" pitchFamily="50" charset="-127"/>
+                <a:ea typeface="Noto Sans KR Light" panose="020B0200000000000000" pitchFamily="50" charset="-127"/>
+              </a:rPr>
               <a:t>, </a:t>
             </a:r>
             <a:r>
-              <a:rPr lang="ko-KR" altLang="en-US" sz="3200" dirty="0"/>
+              <a:rPr lang="ko-KR" altLang="en-US" sz="3200" dirty="0">
+                <a:latin typeface="Noto Sans KR Light" panose="020B0200000000000000" pitchFamily="50" charset="-127"/>
+                <a:ea typeface="Noto Sans KR Light" panose="020B0200000000000000" pitchFamily="50" charset="-127"/>
+              </a:rPr>
               <a:t>개발자의 역량에 따라 그 활용 가치가 결정되는 고도의 </a:t>
             </a:r>
             <a:r>
-              <a:rPr lang="en-US" altLang="ko-KR" sz="3200" dirty="0"/>
+              <a:rPr lang="en-US" altLang="ko-KR" sz="3200" dirty="0">
+                <a:latin typeface="Noto Sans KR Light" panose="020B0200000000000000" pitchFamily="50" charset="-127"/>
+                <a:ea typeface="Noto Sans KR Light" panose="020B0200000000000000" pitchFamily="50" charset="-127"/>
+              </a:rPr>
               <a:t>'</a:t>
             </a:r>
             <a:r>
-              <a:rPr lang="ko-KR" altLang="en-US" sz="3200" dirty="0"/>
+              <a:rPr lang="ko-KR" altLang="en-US" sz="3200" dirty="0">
+                <a:latin typeface="Noto Sans KR Light" panose="020B0200000000000000" pitchFamily="50" charset="-127"/>
+                <a:ea typeface="Noto Sans KR Light" panose="020B0200000000000000" pitchFamily="50" charset="-127"/>
+              </a:rPr>
               <a:t>지능형 도구</a:t>
             </a:r>
             <a:r>
-              <a:rPr lang="en-US" altLang="ko-KR" sz="3200" dirty="0"/>
+              <a:rPr lang="en-US" altLang="ko-KR" sz="3200" dirty="0">
+                <a:latin typeface="Noto Sans KR Light" panose="020B0200000000000000" pitchFamily="50" charset="-127"/>
+                <a:ea typeface="Noto Sans KR Light" panose="020B0200000000000000" pitchFamily="50" charset="-127"/>
+              </a:rPr>
               <a:t>'</a:t>
             </a:r>
             <a:r>
-              <a:rPr lang="ko-KR" altLang="en-US" sz="3200" dirty="0"/>
+              <a:rPr lang="ko-KR" altLang="en-US" sz="3200" dirty="0">
+                <a:latin typeface="Noto Sans KR Light" panose="020B0200000000000000" pitchFamily="50" charset="-127"/>
+                <a:ea typeface="Noto Sans KR Light" panose="020B0200000000000000" pitchFamily="50" charset="-127"/>
+              </a:rPr>
               <a:t>로서 기능함을 확인하였다</a:t>
             </a:r>
             <a:r>
-              <a:rPr lang="en-US" altLang="ko-KR" sz="3200" dirty="0"/>
+              <a:rPr lang="en-US" altLang="ko-KR" sz="3200" dirty="0">
+                <a:latin typeface="Noto Sans KR Light" panose="020B0200000000000000" pitchFamily="50" charset="-127"/>
+                <a:ea typeface="Noto Sans KR Light" panose="020B0200000000000000" pitchFamily="50" charset="-127"/>
+              </a:rPr>
               <a:t>. </a:t>
             </a:r>
-            <a:endParaRPr lang="ko-KR" altLang="en-US" sz="3200" dirty="0"/>
+            <a:endParaRPr lang="ko-KR" altLang="en-US" sz="3200" dirty="0">
+              <a:latin typeface="Noto Sans KR Light" panose="020B0200000000000000" pitchFamily="50" charset="-127"/>
+              <a:ea typeface="Noto Sans KR Light" panose="020B0200000000000000" pitchFamily="50" charset="-127"/>
+            </a:endParaRPr>
           </a:p>
         </p:txBody>
       </p:sp>
@@ -7025,13 +7931,13 @@
           <p:nvPr>
             <p:extLst>
               <p:ext uri="{D42A27DB-BD31-4B8C-83A1-F6EECF244321}">
-                <p14:modId xmlns:p14="http://schemas.microsoft.com/office/powerpoint/2010/main" val="454962833"/>
+                <p14:modId xmlns:p14="http://schemas.microsoft.com/office/powerpoint/2010/main" val="3707653110"/>
               </p:ext>
             </p:extLst>
           </p:nvPr>
         </p:nvGraphicFramePr>
         <p:xfrm>
-          <a:off x="16618515" y="8033113"/>
+          <a:off x="16618515" y="7130361"/>
           <a:ext cx="15380722" cy="3402010"/>
         </p:xfrm>
         <a:graphic>
@@ -7054,7 +7960,7 @@
         </p:nvSpPr>
         <p:spPr>
           <a:xfrm>
-            <a:off x="16618515" y="12120654"/>
+            <a:off x="16618515" y="10995314"/>
             <a:ext cx="900000" cy="900000"/>
           </a:xfrm>
           <a:prstGeom prst="ellipse">
@@ -7103,7 +8009,7 @@
         </p:nvSpPr>
         <p:spPr>
           <a:xfrm>
-            <a:off x="16667552" y="12216711"/>
+            <a:off x="16667552" y="11091371"/>
             <a:ext cx="801925" cy="707886"/>
           </a:xfrm>
           <a:prstGeom prst="rect">
@@ -7166,7 +8072,7 @@
         </p:nvSpPr>
         <p:spPr>
           <a:xfrm>
-            <a:off x="17761352" y="12216711"/>
+            <a:off x="17761352" y="11091371"/>
             <a:ext cx="12564821" cy="707886"/>
           </a:xfrm>
           <a:prstGeom prst="rect">
@@ -7187,13 +8093,8 @@
                     <a:lumMod val="50000"/>
                   </a:schemeClr>
                 </a:solidFill>
-                <a:effectLst>
-                  <a:outerShdw blurRad="38100" dist="38100" dir="2700000" algn="tl">
-                    <a:srgbClr val="000000">
-                      <a:alpha val="43137"/>
-                    </a:srgbClr>
-                  </a:outerShdw>
-                </a:effectLst>
+                <a:latin typeface="Noto Sans KR Black" panose="020B0200000000000000" pitchFamily="50" charset="-127"/>
+                <a:ea typeface="Noto Sans KR Black" panose="020B0200000000000000" pitchFamily="50" charset="-127"/>
               </a:rPr>
               <a:t>LLM </a:t>
             </a:r>
@@ -7204,13 +8105,8 @@
                     <a:lumMod val="50000"/>
                   </a:schemeClr>
                 </a:solidFill>
-                <a:effectLst>
-                  <a:outerShdw blurRad="38100" dist="38100" dir="2700000" algn="tl">
-                    <a:srgbClr val="000000">
-                      <a:alpha val="43137"/>
-                    </a:srgbClr>
-                  </a:outerShdw>
-                </a:effectLst>
+                <a:latin typeface="Noto Sans KR Black" panose="020B0200000000000000" pitchFamily="50" charset="-127"/>
+                <a:ea typeface="Noto Sans KR Black" panose="020B0200000000000000" pitchFamily="50" charset="-127"/>
               </a:rPr>
               <a:t>멀티모달</a:t>
             </a:r>
@@ -7221,13 +8117,8 @@
                     <a:lumMod val="50000"/>
                   </a:schemeClr>
                 </a:solidFill>
-                <a:effectLst>
-                  <a:outerShdw blurRad="38100" dist="38100" dir="2700000" algn="tl">
-                    <a:srgbClr val="000000">
-                      <a:alpha val="43137"/>
-                    </a:srgbClr>
-                  </a:outerShdw>
-                </a:effectLst>
+                <a:latin typeface="Noto Sans KR Black" panose="020B0200000000000000" pitchFamily="50" charset="-127"/>
+                <a:ea typeface="Noto Sans KR Black" panose="020B0200000000000000" pitchFamily="50" charset="-127"/>
               </a:rPr>
               <a:t> 기능을 활용한 시각적 로직의 코드 변환</a:t>
             </a:r>
@@ -7237,13 +8128,8 @@
                   <a:lumMod val="50000"/>
                 </a:schemeClr>
               </a:solidFill>
-              <a:effectLst>
-                <a:outerShdw blurRad="38100" dist="38100" dir="2700000" algn="tl">
-                  <a:srgbClr val="000000">
-                    <a:alpha val="43137"/>
-                  </a:srgbClr>
-                </a:outerShdw>
-              </a:effectLst>
+              <a:latin typeface="Noto Sans KR Black" panose="020B0200000000000000" pitchFamily="50" charset="-127"/>
+              <a:ea typeface="Noto Sans KR Black" panose="020B0200000000000000" pitchFamily="50" charset="-127"/>
             </a:endParaRPr>
           </a:p>
         </p:txBody>
@@ -7262,8 +8148,8 @@
         </p:nvSpPr>
         <p:spPr>
           <a:xfrm>
-            <a:off x="16618515" y="13475535"/>
-            <a:ext cx="15380722" cy="13634502"/>
+            <a:off x="16618515" y="12350195"/>
+            <a:ext cx="15380722" cy="13867835"/>
           </a:xfrm>
           <a:prstGeom prst="rect">
             <a:avLst/>
@@ -7276,407 +8162,784 @@
           </a:bodyPr>
           <a:lstStyle/>
           <a:p>
-            <a:r>
-              <a:rPr lang="ko-KR" altLang="en-US" sz="3200" dirty="0"/>
+            <a:pPr>
+              <a:lnSpc>
+                <a:spcPct val="110000"/>
+              </a:lnSpc>
+            </a:pPr>
+            <a:r>
+              <a:rPr lang="ko-KR" altLang="en-US" sz="3200" dirty="0">
+                <a:latin typeface="Noto Sans KR Light" panose="020B0200000000000000" pitchFamily="50" charset="-127"/>
+                <a:ea typeface="Noto Sans KR Light" panose="020B0200000000000000" pitchFamily="50" charset="-127"/>
+              </a:rPr>
               <a:t>본 연구에서는 소규모 게임 개발 과정에서 성능 최적화와 개발 속도 사이의 간극을 줄이기 위해</a:t>
             </a:r>
             <a:r>
-              <a:rPr lang="en-US" altLang="ko-KR" sz="3200" dirty="0"/>
+              <a:rPr lang="en-US" altLang="ko-KR" sz="3200" dirty="0">
+                <a:latin typeface="Noto Sans KR Light" panose="020B0200000000000000" pitchFamily="50" charset="-127"/>
+                <a:ea typeface="Noto Sans KR Light" panose="020B0200000000000000" pitchFamily="50" charset="-127"/>
+              </a:rPr>
               <a:t>, LLM</a:t>
             </a:r>
             <a:r>
-              <a:rPr lang="ko-KR" altLang="en-US" sz="3200" dirty="0"/>
+              <a:rPr lang="ko-KR" altLang="en-US" sz="3200" dirty="0">
+                <a:latin typeface="Noto Sans KR Light" panose="020B0200000000000000" pitchFamily="50" charset="-127"/>
+                <a:ea typeface="Noto Sans KR Light" panose="020B0200000000000000" pitchFamily="50" charset="-127"/>
+              </a:rPr>
               <a:t>의 이미지 인식 기능을 활용한 노드 분석 및 </a:t>
             </a:r>
             <a:r>
-              <a:rPr lang="en-US" altLang="ko-KR" sz="3200" dirty="0"/>
+              <a:rPr lang="en-US" altLang="ko-KR" sz="3200" dirty="0">
+                <a:latin typeface="Noto Sans KR Light" panose="020B0200000000000000" pitchFamily="50" charset="-127"/>
+                <a:ea typeface="Noto Sans KR Light" panose="020B0200000000000000" pitchFamily="50" charset="-127"/>
+              </a:rPr>
               <a:t>C++ </a:t>
             </a:r>
             <a:r>
-              <a:rPr lang="ko-KR" altLang="en-US" sz="3200" dirty="0"/>
+              <a:rPr lang="ko-KR" altLang="en-US" sz="3200" dirty="0">
+                <a:latin typeface="Noto Sans KR Light" panose="020B0200000000000000" pitchFamily="50" charset="-127"/>
+                <a:ea typeface="Noto Sans KR Light" panose="020B0200000000000000" pitchFamily="50" charset="-127"/>
+              </a:rPr>
               <a:t>변환 프로세스를 시도하였다</a:t>
             </a:r>
             <a:r>
-              <a:rPr lang="en-US" altLang="ko-KR" sz="3200" dirty="0"/>
+              <a:rPr lang="en-US" altLang="ko-KR" sz="3200" dirty="0">
+                <a:latin typeface="Noto Sans KR Light" panose="020B0200000000000000" pitchFamily="50" charset="-127"/>
+                <a:ea typeface="Noto Sans KR Light" panose="020B0200000000000000" pitchFamily="50" charset="-127"/>
+              </a:rPr>
               <a:t>. </a:t>
             </a:r>
           </a:p>
           <a:p>
-            <a:endParaRPr lang="en-US" altLang="ko-KR" sz="3200" b="1" dirty="0"/>
-          </a:p>
-          <a:p>
-            <a:r>
-              <a:rPr lang="ko-KR" altLang="en-US" sz="3600" b="1" dirty="0"/>
+            <a:pPr>
+              <a:lnSpc>
+                <a:spcPct val="110000"/>
+              </a:lnSpc>
+            </a:pPr>
+            <a:endParaRPr lang="en-US" altLang="ko-KR" sz="3200" b="1" dirty="0">
+              <a:latin typeface="Noto Sans KR Light" panose="020B0200000000000000" pitchFamily="50" charset="-127"/>
+              <a:ea typeface="Noto Sans KR Light" panose="020B0200000000000000" pitchFamily="50" charset="-127"/>
+            </a:endParaRPr>
+          </a:p>
+          <a:p>
+            <a:pPr>
+              <a:lnSpc>
+                <a:spcPct val="110000"/>
+              </a:lnSpc>
+            </a:pPr>
+            <a:r>
+              <a:rPr lang="ko-KR" altLang="en-US" sz="3600" b="1" dirty="0">
+                <a:latin typeface="Noto Sans KR Black" panose="020B0200000000000000" pitchFamily="50" charset="-127"/>
+                <a:ea typeface="Noto Sans KR Black" panose="020B0200000000000000" pitchFamily="50" charset="-127"/>
+              </a:rPr>
               <a:t>시각적 노드 그래프의 논리적 인식 및 구조화</a:t>
             </a:r>
-            <a:endParaRPr lang="ko-KR" altLang="en-US" sz="3600" dirty="0"/>
-          </a:p>
-          <a:p>
-            <a:r>
-              <a:rPr lang="ko-KR" altLang="en-US" sz="3200" dirty="0"/>
+            <a:endParaRPr lang="ko-KR" altLang="en-US" sz="3600" dirty="0">
+              <a:latin typeface="Noto Sans KR Black" panose="020B0200000000000000" pitchFamily="50" charset="-127"/>
+              <a:ea typeface="Noto Sans KR Black" panose="020B0200000000000000" pitchFamily="50" charset="-127"/>
+            </a:endParaRPr>
+          </a:p>
+          <a:p>
+            <a:pPr>
+              <a:lnSpc>
+                <a:spcPct val="110000"/>
+              </a:lnSpc>
+            </a:pPr>
+            <a:r>
+              <a:rPr lang="ko-KR" altLang="en-US" sz="3200" dirty="0">
+                <a:latin typeface="Noto Sans KR Light" panose="020B0200000000000000" pitchFamily="50" charset="-127"/>
+                <a:ea typeface="Noto Sans KR Light" panose="020B0200000000000000" pitchFamily="50" charset="-127"/>
+              </a:rPr>
               <a:t>전통적인 방식에서 </a:t>
             </a:r>
             <a:r>
-              <a:rPr lang="ko-KR" altLang="en-US" sz="3200" dirty="0" err="1"/>
+              <a:rPr lang="ko-KR" altLang="en-US" sz="3200" dirty="0" err="1">
+                <a:latin typeface="Noto Sans KR Light" panose="020B0200000000000000" pitchFamily="50" charset="-127"/>
+                <a:ea typeface="Noto Sans KR Light" panose="020B0200000000000000" pitchFamily="50" charset="-127"/>
+              </a:rPr>
               <a:t>블루프린트</a:t>
             </a:r>
             <a:r>
-              <a:rPr lang="ko-KR" altLang="en-US" sz="3200" dirty="0"/>
+              <a:rPr lang="ko-KR" altLang="en-US" sz="3200" dirty="0">
+                <a:latin typeface="Noto Sans KR Light" panose="020B0200000000000000" pitchFamily="50" charset="-127"/>
+                <a:ea typeface="Noto Sans KR Light" panose="020B0200000000000000" pitchFamily="50" charset="-127"/>
+              </a:rPr>
               <a:t> 로직을 </a:t>
             </a:r>
             <a:r>
-              <a:rPr lang="en-US" altLang="ko-KR" sz="3200" dirty="0"/>
+              <a:rPr lang="en-US" altLang="ko-KR" sz="3200" dirty="0">
+                <a:latin typeface="Noto Sans KR Light" panose="020B0200000000000000" pitchFamily="50" charset="-127"/>
+                <a:ea typeface="Noto Sans KR Light" panose="020B0200000000000000" pitchFamily="50" charset="-127"/>
+              </a:rPr>
               <a:t>C++</a:t>
             </a:r>
             <a:r>
-              <a:rPr lang="ko-KR" altLang="en-US" sz="3200" dirty="0"/>
+              <a:rPr lang="ko-KR" altLang="en-US" sz="3200" dirty="0">
+                <a:latin typeface="Noto Sans KR Light" panose="020B0200000000000000" pitchFamily="50" charset="-127"/>
+                <a:ea typeface="Noto Sans KR Light" panose="020B0200000000000000" pitchFamily="50" charset="-127"/>
+              </a:rPr>
               <a:t>로 이식하기 위해서는 개발자가 직접 노드의 실행 흐름과 데이터 핀의 연결 관계를 역설계해야 했다</a:t>
             </a:r>
             <a:r>
-              <a:rPr lang="en-US" altLang="ko-KR" sz="3200" dirty="0"/>
+              <a:rPr lang="en-US" altLang="ko-KR" sz="3200" dirty="0">
+                <a:latin typeface="Noto Sans KR Light" panose="020B0200000000000000" pitchFamily="50" charset="-127"/>
+                <a:ea typeface="Noto Sans KR Light" panose="020B0200000000000000" pitchFamily="50" charset="-127"/>
+              </a:rPr>
               <a:t>. </a:t>
             </a:r>
             <a:r>
-              <a:rPr lang="ko-KR" altLang="en-US" sz="3200" dirty="0"/>
+              <a:rPr lang="ko-KR" altLang="en-US" sz="3200" dirty="0">
+                <a:latin typeface="Noto Sans KR Light" panose="020B0200000000000000" pitchFamily="50" charset="-127"/>
+                <a:ea typeface="Noto Sans KR Light" panose="020B0200000000000000" pitchFamily="50" charset="-127"/>
+              </a:rPr>
               <a:t>본 연구에서는 </a:t>
             </a:r>
             <a:r>
-              <a:rPr lang="ko-KR" altLang="en-US" sz="3200" dirty="0" err="1"/>
+              <a:rPr lang="ko-KR" altLang="en-US" sz="3200" dirty="0" err="1">
+                <a:latin typeface="Noto Sans KR Light" panose="020B0200000000000000" pitchFamily="50" charset="-127"/>
+                <a:ea typeface="Noto Sans KR Light" panose="020B0200000000000000" pitchFamily="50" charset="-127"/>
+              </a:rPr>
               <a:t>멀티모달</a:t>
             </a:r>
             <a:r>
-              <a:rPr lang="ko-KR" altLang="en-US" sz="3200" dirty="0"/>
+              <a:rPr lang="ko-KR" altLang="en-US" sz="3200" dirty="0">
+                <a:latin typeface="Noto Sans KR Light" panose="020B0200000000000000" pitchFamily="50" charset="-127"/>
+                <a:ea typeface="Noto Sans KR Light" panose="020B0200000000000000" pitchFamily="50" charset="-127"/>
+              </a:rPr>
               <a:t> </a:t>
             </a:r>
             <a:r>
-              <a:rPr lang="en-US" altLang="ko-KR" sz="3200" dirty="0"/>
+              <a:rPr lang="en-US" altLang="ko-KR" sz="3200" dirty="0">
+                <a:latin typeface="Noto Sans KR Light" panose="020B0200000000000000" pitchFamily="50" charset="-127"/>
+                <a:ea typeface="Noto Sans KR Light" panose="020B0200000000000000" pitchFamily="50" charset="-127"/>
+              </a:rPr>
               <a:t>LLM</a:t>
             </a:r>
             <a:r>
-              <a:rPr lang="ko-KR" altLang="en-US" sz="3200" dirty="0"/>
+              <a:rPr lang="ko-KR" altLang="en-US" sz="3200" dirty="0">
+                <a:latin typeface="Noto Sans KR Light" panose="020B0200000000000000" pitchFamily="50" charset="-127"/>
+                <a:ea typeface="Noto Sans KR Light" panose="020B0200000000000000" pitchFamily="50" charset="-127"/>
+              </a:rPr>
               <a:t>에 </a:t>
             </a:r>
             <a:r>
-              <a:rPr lang="ko-KR" altLang="en-US" sz="3200" dirty="0" err="1"/>
+              <a:rPr lang="ko-KR" altLang="en-US" sz="3200" dirty="0" err="1">
+                <a:latin typeface="Noto Sans KR Light" panose="020B0200000000000000" pitchFamily="50" charset="-127"/>
+                <a:ea typeface="Noto Sans KR Light" panose="020B0200000000000000" pitchFamily="50" charset="-127"/>
+              </a:rPr>
               <a:t>블루프린트</a:t>
             </a:r>
             <a:r>
-              <a:rPr lang="ko-KR" altLang="en-US" sz="3200" dirty="0"/>
+              <a:rPr lang="ko-KR" altLang="en-US" sz="3200" dirty="0">
+                <a:latin typeface="Noto Sans KR Light" panose="020B0200000000000000" pitchFamily="50" charset="-127"/>
+                <a:ea typeface="Noto Sans KR Light" panose="020B0200000000000000" pitchFamily="50" charset="-127"/>
+              </a:rPr>
               <a:t> 에디터의 스크린샷을 </a:t>
             </a:r>
             <a:r>
-              <a:rPr lang="ko-KR" altLang="en-US" sz="3200" dirty="0" err="1"/>
+              <a:rPr lang="ko-KR" altLang="en-US" sz="3200" dirty="0" err="1">
+                <a:latin typeface="Noto Sans KR Light" panose="020B0200000000000000" pitchFamily="50" charset="-127"/>
+                <a:ea typeface="Noto Sans KR Light" panose="020B0200000000000000" pitchFamily="50" charset="-127"/>
+              </a:rPr>
               <a:t>입력값으로</a:t>
             </a:r>
             <a:r>
-              <a:rPr lang="ko-KR" altLang="en-US" sz="3200" dirty="0"/>
+              <a:rPr lang="ko-KR" altLang="en-US" sz="3200" dirty="0">
+                <a:latin typeface="Noto Sans KR Light" panose="020B0200000000000000" pitchFamily="50" charset="-127"/>
+                <a:ea typeface="Noto Sans KR Light" panose="020B0200000000000000" pitchFamily="50" charset="-127"/>
+              </a:rPr>
               <a:t> 제공하였다</a:t>
             </a:r>
             <a:r>
-              <a:rPr lang="en-US" altLang="ko-KR" sz="3200" dirty="0"/>
+              <a:rPr lang="en-US" altLang="ko-KR" sz="3200" dirty="0">
+                <a:latin typeface="Noto Sans KR Light" panose="020B0200000000000000" pitchFamily="50" charset="-127"/>
+                <a:ea typeface="Noto Sans KR Light" panose="020B0200000000000000" pitchFamily="50" charset="-127"/>
+              </a:rPr>
               <a:t>.</a:t>
             </a:r>
             <a:r>
-              <a:rPr lang="ko-KR" altLang="en-US" sz="3200" dirty="0"/>
+              <a:rPr lang="ko-KR" altLang="en-US" sz="3200" dirty="0">
+                <a:latin typeface="Noto Sans KR Light" panose="020B0200000000000000" pitchFamily="50" charset="-127"/>
+                <a:ea typeface="Noto Sans KR Light" panose="020B0200000000000000" pitchFamily="50" charset="-127"/>
+              </a:rPr>
               <a:t>  </a:t>
             </a:r>
           </a:p>
           <a:p>
-            <a:endParaRPr lang="en-US" altLang="ko-KR" sz="3600" b="1" dirty="0"/>
-          </a:p>
-          <a:p>
-            <a:r>
-              <a:rPr lang="en-US" altLang="ko-KR" sz="3600" b="1" dirty="0"/>
+            <a:pPr>
+              <a:lnSpc>
+                <a:spcPct val="110000"/>
+              </a:lnSpc>
+            </a:pPr>
+            <a:endParaRPr lang="en-US" altLang="ko-KR" sz="3600" b="1" dirty="0">
+              <a:latin typeface="Noto Sans KR Light" panose="020B0200000000000000" pitchFamily="50" charset="-127"/>
+              <a:ea typeface="Noto Sans KR Light" panose="020B0200000000000000" pitchFamily="50" charset="-127"/>
+            </a:endParaRPr>
+          </a:p>
+          <a:p>
+            <a:pPr>
+              <a:lnSpc>
+                <a:spcPct val="110000"/>
+              </a:lnSpc>
+            </a:pPr>
+            <a:r>
+              <a:rPr lang="en-US" altLang="ko-KR" sz="3600" b="1" dirty="0">
+                <a:latin typeface="Noto Sans KR Black" panose="020B0200000000000000" pitchFamily="50" charset="-127"/>
+                <a:ea typeface="Noto Sans KR Black" panose="020B0200000000000000" pitchFamily="50" charset="-127"/>
+              </a:rPr>
               <a:t>C++ </a:t>
             </a:r>
             <a:r>
-              <a:rPr lang="ko-KR" altLang="en-US" sz="3600" b="1" dirty="0"/>
+              <a:rPr lang="ko-KR" altLang="en-US" sz="3600" b="1" dirty="0">
+                <a:latin typeface="Noto Sans KR Black" panose="020B0200000000000000" pitchFamily="50" charset="-127"/>
+                <a:ea typeface="Noto Sans KR Black" panose="020B0200000000000000" pitchFamily="50" charset="-127"/>
+              </a:rPr>
               <a:t>클래스 변환</a:t>
             </a:r>
-            <a:endParaRPr lang="ko-KR" altLang="en-US" sz="3600" dirty="0"/>
-          </a:p>
-          <a:p>
-            <a:r>
-              <a:rPr lang="ko-KR" altLang="en-US" sz="3200" dirty="0"/>
+            <a:endParaRPr lang="ko-KR" altLang="en-US" sz="3600" dirty="0">
+              <a:latin typeface="Noto Sans KR Black" panose="020B0200000000000000" pitchFamily="50" charset="-127"/>
+              <a:ea typeface="Noto Sans KR Black" panose="020B0200000000000000" pitchFamily="50" charset="-127"/>
+            </a:endParaRPr>
+          </a:p>
+          <a:p>
+            <a:pPr>
+              <a:lnSpc>
+                <a:spcPct val="110000"/>
+              </a:lnSpc>
+            </a:pPr>
+            <a:r>
+              <a:rPr lang="ko-KR" altLang="en-US" sz="3200" dirty="0">
+                <a:latin typeface="Noto Sans KR Light" panose="020B0200000000000000" pitchFamily="50" charset="-127"/>
+                <a:ea typeface="Noto Sans KR Light" panose="020B0200000000000000" pitchFamily="50" charset="-127"/>
+              </a:rPr>
               <a:t>인식된 시각적 논리를 바탕으로</a:t>
             </a:r>
             <a:r>
-              <a:rPr lang="en-US" altLang="ko-KR" sz="3200" dirty="0"/>
+              <a:rPr lang="en-US" altLang="ko-KR" sz="3200" dirty="0">
+                <a:latin typeface="Noto Sans KR Light" panose="020B0200000000000000" pitchFamily="50" charset="-127"/>
+                <a:ea typeface="Noto Sans KR Light" panose="020B0200000000000000" pitchFamily="50" charset="-127"/>
+              </a:rPr>
               <a:t>, LLM</a:t>
             </a:r>
             <a:r>
-              <a:rPr lang="ko-KR" altLang="en-US" sz="3200" dirty="0"/>
+              <a:rPr lang="ko-KR" altLang="en-US" sz="3200" dirty="0">
+                <a:latin typeface="Noto Sans KR Light" panose="020B0200000000000000" pitchFamily="50" charset="-127"/>
+                <a:ea typeface="Noto Sans KR Light" panose="020B0200000000000000" pitchFamily="50" charset="-127"/>
+              </a:rPr>
               <a:t>은 </a:t>
             </a:r>
             <a:r>
-              <a:rPr lang="ko-KR" altLang="en-US" sz="3200" dirty="0" err="1"/>
+              <a:rPr lang="ko-KR" altLang="en-US" sz="3200" dirty="0" err="1">
+                <a:latin typeface="Noto Sans KR Light" panose="020B0200000000000000" pitchFamily="50" charset="-127"/>
+                <a:ea typeface="Noto Sans KR Light" panose="020B0200000000000000" pitchFamily="50" charset="-127"/>
+              </a:rPr>
               <a:t>언리얼</a:t>
             </a:r>
             <a:r>
-              <a:rPr lang="ko-KR" altLang="en-US" sz="3200" dirty="0"/>
+              <a:rPr lang="ko-KR" altLang="en-US" sz="3200" dirty="0">
+                <a:latin typeface="Noto Sans KR Light" panose="020B0200000000000000" pitchFamily="50" charset="-127"/>
+                <a:ea typeface="Noto Sans KR Light" panose="020B0200000000000000" pitchFamily="50" charset="-127"/>
+              </a:rPr>
               <a:t> 엔진의 코딩 표준을 준수하는 </a:t>
             </a:r>
             <a:r>
-              <a:rPr lang="en-US" altLang="ko-KR" sz="3200" dirty="0"/>
+              <a:rPr lang="en-US" altLang="ko-KR" sz="3200" dirty="0">
+                <a:latin typeface="Noto Sans KR Light" panose="020B0200000000000000" pitchFamily="50" charset="-127"/>
+                <a:ea typeface="Noto Sans KR Light" panose="020B0200000000000000" pitchFamily="50" charset="-127"/>
+              </a:rPr>
               <a:t>C++ </a:t>
             </a:r>
             <a:r>
-              <a:rPr lang="ko-KR" altLang="en-US" sz="3200" dirty="0"/>
+              <a:rPr lang="ko-KR" altLang="en-US" sz="3200" dirty="0">
+                <a:latin typeface="Noto Sans KR Light" panose="020B0200000000000000" pitchFamily="50" charset="-127"/>
+                <a:ea typeface="Noto Sans KR Light" panose="020B0200000000000000" pitchFamily="50" charset="-127"/>
+              </a:rPr>
               <a:t>코드를 생성하는데 성공하였다</a:t>
             </a:r>
             <a:r>
-              <a:rPr lang="en-US" altLang="ko-KR" sz="3200" dirty="0"/>
+              <a:rPr lang="en-US" altLang="ko-KR" sz="3200" dirty="0">
+                <a:latin typeface="Noto Sans KR Light" panose="020B0200000000000000" pitchFamily="50" charset="-127"/>
+                <a:ea typeface="Noto Sans KR Light" panose="020B0200000000000000" pitchFamily="50" charset="-127"/>
+              </a:rPr>
               <a:t>.</a:t>
             </a:r>
-            <a:endParaRPr lang="ko-KR" altLang="en-US" sz="3200" dirty="0"/>
-          </a:p>
-          <a:p>
-            <a:r>
-              <a:rPr lang="en-US" altLang="ko-KR" sz="3200" dirty="0"/>
+            <a:endParaRPr lang="ko-KR" altLang="en-US" sz="3200" dirty="0">
+              <a:latin typeface="Noto Sans KR Light" panose="020B0200000000000000" pitchFamily="50" charset="-127"/>
+              <a:ea typeface="Noto Sans KR Light" panose="020B0200000000000000" pitchFamily="50" charset="-127"/>
+            </a:endParaRPr>
+          </a:p>
+          <a:p>
+            <a:pPr>
+              <a:lnSpc>
+                <a:spcPct val="110000"/>
+              </a:lnSpc>
+            </a:pPr>
+            <a:r>
+              <a:rPr lang="en-US" altLang="ko-KR" sz="3200" dirty="0">
+                <a:latin typeface="Noto Sans KR Light" panose="020B0200000000000000" pitchFamily="50" charset="-127"/>
+                <a:ea typeface="Noto Sans KR Light" panose="020B0200000000000000" pitchFamily="50" charset="-127"/>
+              </a:rPr>
               <a:t>LLM</a:t>
             </a:r>
             <a:r>
-              <a:rPr lang="ko-KR" altLang="en-US" sz="3200" dirty="0"/>
+              <a:rPr lang="ko-KR" altLang="en-US" sz="3200" dirty="0">
+                <a:latin typeface="Noto Sans KR Light" panose="020B0200000000000000" pitchFamily="50" charset="-127"/>
+                <a:ea typeface="Noto Sans KR Light" panose="020B0200000000000000" pitchFamily="50" charset="-127"/>
+              </a:rPr>
               <a:t>은 </a:t>
             </a:r>
             <a:r>
-              <a:rPr lang="ko-KR" altLang="en-US" sz="3200" dirty="0" err="1"/>
+              <a:rPr lang="ko-KR" altLang="en-US" sz="3200" dirty="0" err="1">
+                <a:latin typeface="Noto Sans KR Light" panose="020B0200000000000000" pitchFamily="50" charset="-127"/>
+                <a:ea typeface="Noto Sans KR Light" panose="020B0200000000000000" pitchFamily="50" charset="-127"/>
+              </a:rPr>
               <a:t>블루프린트의</a:t>
             </a:r>
             <a:r>
-              <a:rPr lang="ko-KR" altLang="en-US" sz="3200" dirty="0"/>
+              <a:rPr lang="ko-KR" altLang="en-US" sz="3200" dirty="0">
+                <a:latin typeface="Noto Sans KR Light" panose="020B0200000000000000" pitchFamily="50" charset="-127"/>
+                <a:ea typeface="Noto Sans KR Light" panose="020B0200000000000000" pitchFamily="50" charset="-127"/>
+              </a:rPr>
               <a:t> 각 노드에 대응하는 </a:t>
             </a:r>
             <a:r>
-              <a:rPr lang="en-US" altLang="ko-KR" sz="3200" dirty="0"/>
+              <a:rPr lang="en-US" altLang="ko-KR" sz="3200" dirty="0">
+                <a:latin typeface="Noto Sans KR Light" panose="020B0200000000000000" pitchFamily="50" charset="-127"/>
+                <a:ea typeface="Noto Sans KR Light" panose="020B0200000000000000" pitchFamily="50" charset="-127"/>
+              </a:rPr>
               <a:t>UFUNCTION </a:t>
             </a:r>
             <a:r>
-              <a:rPr lang="ko-KR" altLang="en-US" sz="3200" dirty="0"/>
+              <a:rPr lang="ko-KR" altLang="en-US" sz="3200" dirty="0">
+                <a:latin typeface="Noto Sans KR Light" panose="020B0200000000000000" pitchFamily="50" charset="-127"/>
+                <a:ea typeface="Noto Sans KR Light" panose="020B0200000000000000" pitchFamily="50" charset="-127"/>
+              </a:rPr>
               <a:t>및 </a:t>
             </a:r>
             <a:r>
-              <a:rPr lang="en-US" altLang="ko-KR" sz="3200" dirty="0"/>
+              <a:rPr lang="en-US" altLang="ko-KR" sz="3200" dirty="0">
+                <a:latin typeface="Noto Sans KR Light" panose="020B0200000000000000" pitchFamily="50" charset="-127"/>
+                <a:ea typeface="Noto Sans KR Light" panose="020B0200000000000000" pitchFamily="50" charset="-127"/>
+              </a:rPr>
               <a:t>UPROPERTY </a:t>
             </a:r>
             <a:r>
-              <a:rPr lang="ko-KR" altLang="en-US" sz="3200" dirty="0"/>
+              <a:rPr lang="ko-KR" altLang="en-US" sz="3200" dirty="0">
+                <a:latin typeface="Noto Sans KR Light" panose="020B0200000000000000" pitchFamily="50" charset="-127"/>
+                <a:ea typeface="Noto Sans KR Light" panose="020B0200000000000000" pitchFamily="50" charset="-127"/>
+              </a:rPr>
               <a:t>매크로를 포함한 헤더</a:t>
             </a:r>
             <a:r>
-              <a:rPr lang="en-US" altLang="ko-KR" sz="3200" dirty="0"/>
+              <a:rPr lang="en-US" altLang="ko-KR" sz="3200" dirty="0">
+                <a:latin typeface="Noto Sans KR Light" panose="020B0200000000000000" pitchFamily="50" charset="-127"/>
+                <a:ea typeface="Noto Sans KR Light" panose="020B0200000000000000" pitchFamily="50" charset="-127"/>
+              </a:rPr>
               <a:t>(.h)</a:t>
             </a:r>
             <a:r>
-              <a:rPr lang="ko-KR" altLang="en-US" sz="3200" dirty="0"/>
+              <a:rPr lang="ko-KR" altLang="en-US" sz="3200" dirty="0">
+                <a:latin typeface="Noto Sans KR Light" panose="020B0200000000000000" pitchFamily="50" charset="-127"/>
+                <a:ea typeface="Noto Sans KR Light" panose="020B0200000000000000" pitchFamily="50" charset="-127"/>
+              </a:rPr>
               <a:t>와 소스</a:t>
             </a:r>
             <a:r>
-              <a:rPr lang="en-US" altLang="ko-KR" sz="3200" dirty="0"/>
+              <a:rPr lang="en-US" altLang="ko-KR" sz="3200" dirty="0">
+                <a:latin typeface="Noto Sans KR Light" panose="020B0200000000000000" pitchFamily="50" charset="-127"/>
+                <a:ea typeface="Noto Sans KR Light" panose="020B0200000000000000" pitchFamily="50" charset="-127"/>
+              </a:rPr>
               <a:t>(.</a:t>
             </a:r>
             <a:r>
-              <a:rPr lang="en-US" altLang="ko-KR" sz="3200" dirty="0" err="1"/>
+              <a:rPr lang="en-US" altLang="ko-KR" sz="3200" dirty="0" err="1">
+                <a:latin typeface="Noto Sans KR Light" panose="020B0200000000000000" pitchFamily="50" charset="-127"/>
+                <a:ea typeface="Noto Sans KR Light" panose="020B0200000000000000" pitchFamily="50" charset="-127"/>
+              </a:rPr>
               <a:t>cpp</a:t>
             </a:r>
             <a:r>
-              <a:rPr lang="en-US" altLang="ko-KR" sz="3200" dirty="0"/>
+              <a:rPr lang="en-US" altLang="ko-KR" sz="3200" dirty="0">
+                <a:latin typeface="Noto Sans KR Light" panose="020B0200000000000000" pitchFamily="50" charset="-127"/>
+                <a:ea typeface="Noto Sans KR Light" panose="020B0200000000000000" pitchFamily="50" charset="-127"/>
+              </a:rPr>
               <a:t>) </a:t>
             </a:r>
             <a:r>
-              <a:rPr lang="ko-KR" altLang="en-US" sz="3200" dirty="0"/>
+              <a:rPr lang="ko-KR" altLang="en-US" sz="3200" dirty="0">
+                <a:latin typeface="Noto Sans KR Light" panose="020B0200000000000000" pitchFamily="50" charset="-127"/>
+                <a:ea typeface="Noto Sans KR Light" panose="020B0200000000000000" pitchFamily="50" charset="-127"/>
+              </a:rPr>
               <a:t>파일을 구성하였다</a:t>
             </a:r>
             <a:r>
-              <a:rPr lang="en-US" altLang="ko-KR" sz="3200" dirty="0"/>
+              <a:rPr lang="en-US" altLang="ko-KR" sz="3200" dirty="0">
+                <a:latin typeface="Noto Sans KR Light" panose="020B0200000000000000" pitchFamily="50" charset="-127"/>
+                <a:ea typeface="Noto Sans KR Light" panose="020B0200000000000000" pitchFamily="50" charset="-127"/>
+              </a:rPr>
               <a:t>. </a:t>
             </a:r>
             <a:r>
-              <a:rPr lang="ko-KR" altLang="en-US" sz="3200" dirty="0"/>
+              <a:rPr lang="ko-KR" altLang="en-US" sz="3200" dirty="0">
+                <a:latin typeface="Noto Sans KR Light" panose="020B0200000000000000" pitchFamily="50" charset="-127"/>
+                <a:ea typeface="Noto Sans KR Light" panose="020B0200000000000000" pitchFamily="50" charset="-127"/>
+              </a:rPr>
               <a:t>특히 가상 머신 오버헤드가 발생하는 </a:t>
             </a:r>
             <a:r>
-              <a:rPr lang="ko-KR" altLang="en-US" sz="3200" dirty="0" err="1"/>
+              <a:rPr lang="ko-KR" altLang="en-US" sz="3200" dirty="0" err="1">
+                <a:latin typeface="Noto Sans KR Light" panose="020B0200000000000000" pitchFamily="50" charset="-127"/>
+                <a:ea typeface="Noto Sans KR Light" panose="020B0200000000000000" pitchFamily="50" charset="-127"/>
+              </a:rPr>
               <a:t>블루프린트</a:t>
             </a:r>
             <a:r>
-              <a:rPr lang="ko-KR" altLang="en-US" sz="3200" dirty="0"/>
+              <a:rPr lang="ko-KR" altLang="en-US" sz="3200" dirty="0">
+                <a:latin typeface="Noto Sans KR Light" panose="020B0200000000000000" pitchFamily="50" charset="-127"/>
+                <a:ea typeface="Noto Sans KR Light" panose="020B0200000000000000" pitchFamily="50" charset="-127"/>
+              </a:rPr>
               <a:t> 로직을 네이티브 </a:t>
             </a:r>
             <a:r>
-              <a:rPr lang="en-US" altLang="ko-KR" sz="3200" dirty="0"/>
+              <a:rPr lang="en-US" altLang="ko-KR" sz="3200" dirty="0">
+                <a:latin typeface="Noto Sans KR Light" panose="020B0200000000000000" pitchFamily="50" charset="-127"/>
+                <a:ea typeface="Noto Sans KR Light" panose="020B0200000000000000" pitchFamily="50" charset="-127"/>
+              </a:rPr>
               <a:t>C++ </a:t>
             </a:r>
             <a:r>
-              <a:rPr lang="ko-KR" altLang="en-US" sz="3200" dirty="0"/>
+              <a:rPr lang="ko-KR" altLang="en-US" sz="3200" dirty="0">
+                <a:latin typeface="Noto Sans KR Light" panose="020B0200000000000000" pitchFamily="50" charset="-127"/>
+                <a:ea typeface="Noto Sans KR Light" panose="020B0200000000000000" pitchFamily="50" charset="-127"/>
+              </a:rPr>
               <a:t>코드로 치환함으로써 실행 성능을 극대화하였다</a:t>
             </a:r>
             <a:r>
-              <a:rPr lang="en-US" altLang="ko-KR" sz="3200" dirty="0"/>
+              <a:rPr lang="en-US" altLang="ko-KR" sz="3200" dirty="0">
+                <a:latin typeface="Noto Sans KR Light" panose="020B0200000000000000" pitchFamily="50" charset="-127"/>
+                <a:ea typeface="Noto Sans KR Light" panose="020B0200000000000000" pitchFamily="50" charset="-127"/>
+              </a:rPr>
               <a:t>.</a:t>
             </a:r>
           </a:p>
           <a:p>
-            <a:r>
-              <a:rPr lang="ko-KR" altLang="en-US" sz="3200" dirty="0"/>
+            <a:pPr>
+              <a:lnSpc>
+                <a:spcPct val="110000"/>
+              </a:lnSpc>
+            </a:pPr>
+            <a:r>
+              <a:rPr lang="ko-KR" altLang="en-US" sz="3200" dirty="0">
+                <a:latin typeface="Noto Sans KR Light" panose="020B0200000000000000" pitchFamily="50" charset="-127"/>
+                <a:ea typeface="Noto Sans KR Light" panose="020B0200000000000000" pitchFamily="50" charset="-127"/>
+              </a:rPr>
               <a:t>또한</a:t>
             </a:r>
             <a:r>
-              <a:rPr lang="en-US" altLang="ko-KR" sz="3200" dirty="0"/>
+              <a:rPr lang="en-US" altLang="ko-KR" sz="3200" dirty="0">
+                <a:latin typeface="Noto Sans KR Light" panose="020B0200000000000000" pitchFamily="50" charset="-127"/>
+                <a:ea typeface="Noto Sans KR Light" panose="020B0200000000000000" pitchFamily="50" charset="-127"/>
+              </a:rPr>
               <a:t> </a:t>
             </a:r>
             <a:r>
-              <a:rPr lang="ko-KR" altLang="en-US" sz="3200" dirty="0"/>
+              <a:rPr lang="ko-KR" altLang="en-US" sz="3200" dirty="0">
+                <a:latin typeface="Noto Sans KR Light" panose="020B0200000000000000" pitchFamily="50" charset="-127"/>
+                <a:ea typeface="Noto Sans KR Light" panose="020B0200000000000000" pitchFamily="50" charset="-127"/>
+              </a:rPr>
               <a:t>생성된 코드에서 발생할 수 있는 잠재적인 널 포인터 참조나 타입 불일치를 사전에 식별하고 보정하는 검수 과정을 수행하였다</a:t>
             </a:r>
             <a:r>
-              <a:rPr lang="en-US" altLang="ko-KR" sz="3200" dirty="0"/>
+              <a:rPr lang="en-US" altLang="ko-KR" sz="3200" dirty="0">
+                <a:latin typeface="Noto Sans KR Light" panose="020B0200000000000000" pitchFamily="50" charset="-127"/>
+                <a:ea typeface="Noto Sans KR Light" panose="020B0200000000000000" pitchFamily="50" charset="-127"/>
+              </a:rPr>
               <a:t>.</a:t>
             </a:r>
-            <a:endParaRPr lang="ko-KR" altLang="en-US" sz="3200" dirty="0"/>
-          </a:p>
-          <a:p>
+            <a:endParaRPr lang="ko-KR" altLang="en-US" sz="3200" dirty="0">
+              <a:latin typeface="Noto Sans KR Light" panose="020B0200000000000000" pitchFamily="50" charset="-127"/>
+              <a:ea typeface="Noto Sans KR Light" panose="020B0200000000000000" pitchFamily="50" charset="-127"/>
+            </a:endParaRPr>
+          </a:p>
+          <a:p>
+            <a:pPr>
+              <a:lnSpc>
+                <a:spcPct val="110000"/>
+              </a:lnSpc>
+            </a:pPr>
             <a:endParaRPr lang="en-US" altLang="ko-KR" sz="3200" dirty="0">
               <a:effectLst/>
+              <a:latin typeface="Noto Sans KR Light" panose="020B0200000000000000" pitchFamily="50" charset="-127"/>
+              <a:ea typeface="Noto Sans KR Light" panose="020B0200000000000000" pitchFamily="50" charset="-127"/>
             </a:endParaRPr>
           </a:p>
           <a:p>
-            <a:r>
-              <a:rPr lang="en-US" altLang="ko-KR" sz="3600" b="1" dirty="0"/>
+            <a:pPr>
+              <a:lnSpc>
+                <a:spcPct val="110000"/>
+              </a:lnSpc>
+            </a:pPr>
+            <a:r>
+              <a:rPr lang="en-US" altLang="ko-KR" sz="3600" b="1" dirty="0">
+                <a:latin typeface="Noto Sans KR Black" panose="020B0200000000000000" pitchFamily="50" charset="-127"/>
+                <a:ea typeface="Noto Sans KR Black" panose="020B0200000000000000" pitchFamily="50" charset="-127"/>
+              </a:rPr>
               <a:t>'</a:t>
             </a:r>
             <a:r>
-              <a:rPr lang="ko-KR" altLang="en-US" sz="3600" b="1" dirty="0"/>
+              <a:rPr lang="ko-KR" altLang="en-US" sz="3600" b="1" dirty="0">
+                <a:latin typeface="Noto Sans KR Black" panose="020B0200000000000000" pitchFamily="50" charset="-127"/>
+                <a:ea typeface="Noto Sans KR Black" panose="020B0200000000000000" pitchFamily="50" charset="-127"/>
+              </a:rPr>
               <a:t>프로토타이핑</a:t>
             </a:r>
             <a:r>
-              <a:rPr lang="en-US" altLang="ko-KR" sz="3600" b="1" dirty="0"/>
+              <a:rPr lang="en-US" altLang="ko-KR" sz="3600" b="1" dirty="0">
+                <a:latin typeface="Noto Sans KR Black" panose="020B0200000000000000" pitchFamily="50" charset="-127"/>
+                <a:ea typeface="Noto Sans KR Black" panose="020B0200000000000000" pitchFamily="50" charset="-127"/>
+              </a:rPr>
               <a:t>-</a:t>
             </a:r>
             <a:r>
-              <a:rPr lang="ko-KR" altLang="en-US" sz="3600" b="1" dirty="0"/>
+              <a:rPr lang="ko-KR" altLang="en-US" sz="3600" b="1" dirty="0">
+                <a:latin typeface="Noto Sans KR Black" panose="020B0200000000000000" pitchFamily="50" charset="-127"/>
+                <a:ea typeface="Noto Sans KR Black" panose="020B0200000000000000" pitchFamily="50" charset="-127"/>
+              </a:rPr>
               <a:t>최적화</a:t>
             </a:r>
             <a:r>
-              <a:rPr lang="en-US" altLang="ko-KR" sz="3600" b="1" dirty="0"/>
+              <a:rPr lang="en-US" altLang="ko-KR" sz="3600" b="1" dirty="0">
+                <a:latin typeface="Noto Sans KR Black" panose="020B0200000000000000" pitchFamily="50" charset="-127"/>
+                <a:ea typeface="Noto Sans KR Black" panose="020B0200000000000000" pitchFamily="50" charset="-127"/>
+              </a:rPr>
               <a:t>' </a:t>
             </a:r>
             <a:r>
-              <a:rPr lang="ko-KR" altLang="en-US" sz="3600" b="1" dirty="0"/>
+              <a:rPr lang="ko-KR" altLang="en-US" sz="3600" b="1" dirty="0">
+                <a:latin typeface="Noto Sans KR Black" panose="020B0200000000000000" pitchFamily="50" charset="-127"/>
+                <a:ea typeface="Noto Sans KR Black" panose="020B0200000000000000" pitchFamily="50" charset="-127"/>
+              </a:rPr>
               <a:t>워크플로우의 선순환</a:t>
             </a:r>
-            <a:endParaRPr lang="ko-KR" altLang="en-US" sz="3600" dirty="0"/>
-          </a:p>
-          <a:p>
-            <a:r>
-              <a:rPr lang="ko-KR" altLang="en-US" sz="3200" dirty="0" err="1"/>
+            <a:endParaRPr lang="ko-KR" altLang="en-US" sz="3600" dirty="0">
+              <a:latin typeface="Noto Sans KR Black" panose="020B0200000000000000" pitchFamily="50" charset="-127"/>
+              <a:ea typeface="Noto Sans KR Black" panose="020B0200000000000000" pitchFamily="50" charset="-127"/>
+            </a:endParaRPr>
+          </a:p>
+          <a:p>
+            <a:pPr>
+              <a:lnSpc>
+                <a:spcPct val="110000"/>
+              </a:lnSpc>
+            </a:pPr>
+            <a:r>
+              <a:rPr lang="ko-KR" altLang="en-US" sz="3200" dirty="0" err="1">
+                <a:latin typeface="Noto Sans KR Light" panose="020B0200000000000000" pitchFamily="50" charset="-127"/>
+                <a:ea typeface="Noto Sans KR Light" panose="020B0200000000000000" pitchFamily="50" charset="-127"/>
+              </a:rPr>
               <a:t>멀티모달</a:t>
             </a:r>
             <a:r>
-              <a:rPr lang="ko-KR" altLang="en-US" sz="3200" dirty="0"/>
+              <a:rPr lang="ko-KR" altLang="en-US" sz="3200" dirty="0">
+                <a:latin typeface="Noto Sans KR Light" panose="020B0200000000000000" pitchFamily="50" charset="-127"/>
+                <a:ea typeface="Noto Sans KR Light" panose="020B0200000000000000" pitchFamily="50" charset="-127"/>
+              </a:rPr>
               <a:t> 기능을 활용한 변환 프로세스는 단순한 도구의 활용을 넘어</a:t>
             </a:r>
             <a:r>
-              <a:rPr lang="en-US" altLang="ko-KR" sz="3200" dirty="0"/>
+              <a:rPr lang="en-US" altLang="ko-KR" sz="3200" dirty="0">
+                <a:latin typeface="Noto Sans KR Light" panose="020B0200000000000000" pitchFamily="50" charset="-127"/>
+                <a:ea typeface="Noto Sans KR Light" panose="020B0200000000000000" pitchFamily="50" charset="-127"/>
+              </a:rPr>
               <a:t>, </a:t>
             </a:r>
             <a:r>
-              <a:rPr lang="ko-KR" altLang="en-US" sz="3200" dirty="0"/>
+              <a:rPr lang="ko-KR" altLang="en-US" sz="3200" dirty="0">
+                <a:latin typeface="Noto Sans KR Light" panose="020B0200000000000000" pitchFamily="50" charset="-127"/>
+                <a:ea typeface="Noto Sans KR Light" panose="020B0200000000000000" pitchFamily="50" charset="-127"/>
+              </a:rPr>
               <a:t>개발 주기 전체의 효율성을 개선하였다</a:t>
             </a:r>
             <a:r>
-              <a:rPr lang="en-US" altLang="ko-KR" sz="3200" dirty="0"/>
+              <a:rPr lang="en-US" altLang="ko-KR" sz="3200" dirty="0">
+                <a:latin typeface="Noto Sans KR Light" panose="020B0200000000000000" pitchFamily="50" charset="-127"/>
+                <a:ea typeface="Noto Sans KR Light" panose="020B0200000000000000" pitchFamily="50" charset="-127"/>
+              </a:rPr>
               <a:t>.</a:t>
             </a:r>
-            <a:endParaRPr lang="ko-KR" altLang="en-US" sz="3200" dirty="0"/>
-          </a:p>
-          <a:p>
-            <a:r>
-              <a:rPr lang="ko-KR" altLang="en-US" sz="3200" dirty="0"/>
+            <a:endParaRPr lang="ko-KR" altLang="en-US" sz="3200" dirty="0">
+              <a:latin typeface="Noto Sans KR Light" panose="020B0200000000000000" pitchFamily="50" charset="-127"/>
+              <a:ea typeface="Noto Sans KR Light" panose="020B0200000000000000" pitchFamily="50" charset="-127"/>
+            </a:endParaRPr>
+          </a:p>
+          <a:p>
+            <a:pPr>
+              <a:lnSpc>
+                <a:spcPct val="110000"/>
+              </a:lnSpc>
+            </a:pPr>
+            <a:r>
+              <a:rPr lang="ko-KR" altLang="en-US" sz="3200" dirty="0">
+                <a:latin typeface="Noto Sans KR Light" panose="020B0200000000000000" pitchFamily="50" charset="-127"/>
+                <a:ea typeface="Noto Sans KR Light" panose="020B0200000000000000" pitchFamily="50" charset="-127"/>
+              </a:rPr>
               <a:t>시각적 직관성이 높은 </a:t>
             </a:r>
             <a:r>
-              <a:rPr lang="ko-KR" altLang="en-US" sz="3200" dirty="0" err="1"/>
+              <a:rPr lang="ko-KR" altLang="en-US" sz="3200" dirty="0" err="1">
+                <a:latin typeface="Noto Sans KR Light" panose="020B0200000000000000" pitchFamily="50" charset="-127"/>
+                <a:ea typeface="Noto Sans KR Light" panose="020B0200000000000000" pitchFamily="50" charset="-127"/>
+              </a:rPr>
               <a:t>블루프린트로</a:t>
             </a:r>
             <a:r>
-              <a:rPr lang="ko-KR" altLang="en-US" sz="3200" dirty="0"/>
+              <a:rPr lang="ko-KR" altLang="en-US" sz="3200" dirty="0">
+                <a:latin typeface="Noto Sans KR Light" panose="020B0200000000000000" pitchFamily="50" charset="-127"/>
+                <a:ea typeface="Noto Sans KR Light" panose="020B0200000000000000" pitchFamily="50" charset="-127"/>
+              </a:rPr>
               <a:t> 기능을 빠르게 구현</a:t>
             </a:r>
             <a:r>
-              <a:rPr lang="en-US" altLang="ko-KR" sz="3200" dirty="0"/>
+              <a:rPr lang="en-US" altLang="ko-KR" sz="3200" dirty="0">
+                <a:latin typeface="Noto Sans KR Light" panose="020B0200000000000000" pitchFamily="50" charset="-127"/>
+                <a:ea typeface="Noto Sans KR Light" panose="020B0200000000000000" pitchFamily="50" charset="-127"/>
+              </a:rPr>
               <a:t>(Prototyping)</a:t>
             </a:r>
             <a:r>
-              <a:rPr lang="ko-KR" altLang="en-US" sz="3200" dirty="0"/>
+              <a:rPr lang="ko-KR" altLang="en-US" sz="3200" dirty="0">
+                <a:latin typeface="Noto Sans KR Light" panose="020B0200000000000000" pitchFamily="50" charset="-127"/>
+                <a:ea typeface="Noto Sans KR Light" panose="020B0200000000000000" pitchFamily="50" charset="-127"/>
+              </a:rPr>
               <a:t>한 후</a:t>
             </a:r>
             <a:r>
-              <a:rPr lang="en-US" altLang="ko-KR" sz="3200" dirty="0"/>
+              <a:rPr lang="en-US" altLang="ko-KR" sz="3200" dirty="0">
+                <a:latin typeface="Noto Sans KR Light" panose="020B0200000000000000" pitchFamily="50" charset="-127"/>
+                <a:ea typeface="Noto Sans KR Light" panose="020B0200000000000000" pitchFamily="50" charset="-127"/>
+              </a:rPr>
               <a:t>, LLM</a:t>
             </a:r>
             <a:r>
-              <a:rPr lang="ko-KR" altLang="en-US" sz="3200" dirty="0"/>
+              <a:rPr lang="ko-KR" altLang="en-US" sz="3200" dirty="0">
+                <a:latin typeface="Noto Sans KR Light" panose="020B0200000000000000" pitchFamily="50" charset="-127"/>
+                <a:ea typeface="Noto Sans KR Light" panose="020B0200000000000000" pitchFamily="50" charset="-127"/>
+              </a:rPr>
               <a:t>을 통해 즉시 </a:t>
             </a:r>
             <a:r>
-              <a:rPr lang="en-US" altLang="ko-KR" sz="3200" dirty="0"/>
+              <a:rPr lang="en-US" altLang="ko-KR" sz="3200" dirty="0">
+                <a:latin typeface="Noto Sans KR Light" panose="020B0200000000000000" pitchFamily="50" charset="-127"/>
+                <a:ea typeface="Noto Sans KR Light" panose="020B0200000000000000" pitchFamily="50" charset="-127"/>
+              </a:rPr>
               <a:t>C++</a:t>
             </a:r>
             <a:r>
-              <a:rPr lang="ko-KR" altLang="en-US" sz="3200" dirty="0"/>
+              <a:rPr lang="ko-KR" altLang="en-US" sz="3200" dirty="0">
+                <a:latin typeface="Noto Sans KR Light" panose="020B0200000000000000" pitchFamily="50" charset="-127"/>
+                <a:ea typeface="Noto Sans KR Light" panose="020B0200000000000000" pitchFamily="50" charset="-127"/>
+              </a:rPr>
               <a:t>로 안정화</a:t>
             </a:r>
             <a:r>
-              <a:rPr lang="en-US" altLang="ko-KR" sz="3200" dirty="0"/>
+              <a:rPr lang="en-US" altLang="ko-KR" sz="3200" dirty="0">
+                <a:latin typeface="Noto Sans KR Light" panose="020B0200000000000000" pitchFamily="50" charset="-127"/>
+                <a:ea typeface="Noto Sans KR Light" panose="020B0200000000000000" pitchFamily="50" charset="-127"/>
+              </a:rPr>
               <a:t>(Stabilization)</a:t>
             </a:r>
             <a:r>
-              <a:rPr lang="ko-KR" altLang="en-US" sz="3200" dirty="0"/>
+              <a:rPr lang="ko-KR" altLang="en-US" sz="3200" dirty="0">
+                <a:latin typeface="Noto Sans KR Light" panose="020B0200000000000000" pitchFamily="50" charset="-127"/>
+                <a:ea typeface="Noto Sans KR Light" panose="020B0200000000000000" pitchFamily="50" charset="-127"/>
+              </a:rPr>
               <a:t>하는 이분법적 접근이 </a:t>
             </a:r>
             <a:r>
-              <a:rPr lang="ko-KR" altLang="en-US" sz="3200" dirty="0" err="1"/>
+              <a:rPr lang="ko-KR" altLang="en-US" sz="3200" dirty="0" err="1">
+                <a:latin typeface="Noto Sans KR Light" panose="020B0200000000000000" pitchFamily="50" charset="-127"/>
+                <a:ea typeface="Noto Sans KR Light" panose="020B0200000000000000" pitchFamily="50" charset="-127"/>
+              </a:rPr>
               <a:t>가능해졌으며</a:t>
             </a:r>
             <a:r>
-              <a:rPr lang="en-US" altLang="ko-KR" sz="3200" dirty="0"/>
+              <a:rPr lang="en-US" altLang="ko-KR" sz="3200" dirty="0">
+                <a:latin typeface="Noto Sans KR Light" panose="020B0200000000000000" pitchFamily="50" charset="-127"/>
+                <a:ea typeface="Noto Sans KR Light" panose="020B0200000000000000" pitchFamily="50" charset="-127"/>
+              </a:rPr>
               <a:t>, </a:t>
             </a:r>
           </a:p>
           <a:p>
-            <a:r>
-              <a:rPr lang="ko-KR" altLang="en-US" sz="3200" dirty="0"/>
+            <a:pPr>
+              <a:lnSpc>
+                <a:spcPct val="110000"/>
+              </a:lnSpc>
+            </a:pPr>
+            <a:r>
+              <a:rPr lang="ko-KR" altLang="en-US" sz="3200" dirty="0">
+                <a:latin typeface="Noto Sans KR Light" panose="020B0200000000000000" pitchFamily="50" charset="-127"/>
+                <a:ea typeface="Noto Sans KR Light" panose="020B0200000000000000" pitchFamily="50" charset="-127"/>
+              </a:rPr>
               <a:t>복잡한 로직을 텍스트로 설명하거나 문서화할 필요 없이 스크린샷 한 장으로 의도를 전달함으로써</a:t>
             </a:r>
             <a:r>
-              <a:rPr lang="en-US" altLang="ko-KR" sz="3200" dirty="0"/>
+              <a:rPr lang="en-US" altLang="ko-KR" sz="3200" dirty="0">
+                <a:latin typeface="Noto Sans KR Light" panose="020B0200000000000000" pitchFamily="50" charset="-127"/>
+                <a:ea typeface="Noto Sans KR Light" panose="020B0200000000000000" pitchFamily="50" charset="-127"/>
+              </a:rPr>
               <a:t>, </a:t>
             </a:r>
             <a:r>
-              <a:rPr lang="ko-KR" altLang="en-US" sz="3200" dirty="0"/>
+              <a:rPr lang="ko-KR" altLang="en-US" sz="3200" dirty="0">
+                <a:latin typeface="Noto Sans KR Light" panose="020B0200000000000000" pitchFamily="50" charset="-127"/>
+                <a:ea typeface="Noto Sans KR Light" panose="020B0200000000000000" pitchFamily="50" charset="-127"/>
+              </a:rPr>
               <a:t>개발자와 </a:t>
             </a:r>
             <a:r>
-              <a:rPr lang="en-US" altLang="ko-KR" sz="3200" dirty="0"/>
+              <a:rPr lang="en-US" altLang="ko-KR" sz="3200" dirty="0">
+                <a:latin typeface="Noto Sans KR Light" panose="020B0200000000000000" pitchFamily="50" charset="-127"/>
+                <a:ea typeface="Noto Sans KR Light" panose="020B0200000000000000" pitchFamily="50" charset="-127"/>
+              </a:rPr>
               <a:t>AI </a:t>
             </a:r>
             <a:r>
-              <a:rPr lang="ko-KR" altLang="en-US" sz="3200" dirty="0"/>
+              <a:rPr lang="ko-KR" altLang="en-US" sz="3200" dirty="0">
+                <a:latin typeface="Noto Sans KR Light" panose="020B0200000000000000" pitchFamily="50" charset="-127"/>
+                <a:ea typeface="Noto Sans KR Light" panose="020B0200000000000000" pitchFamily="50" charset="-127"/>
+              </a:rPr>
               <a:t>간의 정보 전달 효율을 극대화하고 개발 흐름이 끊기는 </a:t>
             </a:r>
-            <a:endParaRPr lang="en-US" altLang="ko-KR" sz="3200" dirty="0"/>
-          </a:p>
-          <a:p>
-            <a:r>
-              <a:rPr lang="ko-KR" altLang="en-US" sz="3200" dirty="0"/>
+            <a:endParaRPr lang="en-US" altLang="ko-KR" sz="3200" dirty="0">
+              <a:latin typeface="Noto Sans KR Light" panose="020B0200000000000000" pitchFamily="50" charset="-127"/>
+              <a:ea typeface="Noto Sans KR Light" panose="020B0200000000000000" pitchFamily="50" charset="-127"/>
+            </a:endParaRPr>
+          </a:p>
+          <a:p>
+            <a:pPr>
+              <a:lnSpc>
+                <a:spcPct val="110000"/>
+              </a:lnSpc>
+            </a:pPr>
+            <a:r>
+              <a:rPr lang="ko-KR" altLang="en-US" sz="3200" dirty="0">
+                <a:latin typeface="Noto Sans KR Light" panose="020B0200000000000000" pitchFamily="50" charset="-127"/>
+                <a:ea typeface="Noto Sans KR Light" panose="020B0200000000000000" pitchFamily="50" charset="-127"/>
+              </a:rPr>
               <a:t>맥락 전환 비용을 최소화할 수 있었다</a:t>
             </a:r>
             <a:r>
-              <a:rPr lang="en-US" altLang="ko-KR" sz="3200" dirty="0"/>
+              <a:rPr lang="en-US" altLang="ko-KR" sz="3200" dirty="0">
+                <a:latin typeface="Noto Sans KR Light" panose="020B0200000000000000" pitchFamily="50" charset="-127"/>
+                <a:ea typeface="Noto Sans KR Light" panose="020B0200000000000000" pitchFamily="50" charset="-127"/>
+              </a:rPr>
               <a:t>.</a:t>
             </a:r>
-            <a:endParaRPr lang="ko-KR" altLang="en-US" sz="3200" dirty="0"/>
+            <a:endParaRPr lang="ko-KR" altLang="en-US" sz="3200" dirty="0">
+              <a:latin typeface="Noto Sans KR Light" panose="020B0200000000000000" pitchFamily="50" charset="-127"/>
+              <a:ea typeface="Noto Sans KR Light" panose="020B0200000000000000" pitchFamily="50" charset="-127"/>
+            </a:endParaRPr>
           </a:p>
         </p:txBody>
       </p:sp>
